--- a/presentation/FinSecure-Capstone-Presentation.pptx
+++ b/presentation/FinSecure-Capstone-Presentation.pptx
@@ -21,9 +21,10 @@
     <p:sldId id="269" r:id="rId15"/>
     <p:sldId id="270" r:id="rId16"/>
     <p:sldId id="271" r:id="rId17"/>
+    <p:sldId id="272" r:id="rId18"/>
   </p:sldIdLst>
   <p:notesMasterIdLst>
-    <p:notesMasterId r:id="rId18"/>
+    <p:notesMasterId r:id="rId19"/>
   </p:notesMasterIdLst>
   <p:sldSz cx="12192000" cy="6858000"/>
   <p:notesSz cx="6858000" cy="12192000"/>
@@ -605,7 +606,7 @@
           <a:p>
             <a:r>
               <a:rPr lang="en-US" dirty="0"/>
-              <a:t>The key point of this slide: none of SOX, PCI DSS, or GLBA say the words 'Zero Trust' anywhere in their text — but read literally, each one's actual requirement points straight at it. This reframes Zero Trust from 'a trendy architecture we picked' to 'the natural consequence of taking these three regulations seriously at the same time.'</a:t>
+              <a:t>The improvements list on the left isn't decorative — each line is a direct fix for one of the four 'before' weaknesses on the previous slide. Point out specifically that the cardholder database now sits behind an *additional* dedicated firewall inside the Database Zone — that's the fix for the PCI-DSS wording issue in the original report, where the database was incorrectly described as being 'within the DMZ.'</a:t>
             </a:r>
             <a:endParaRPr lang="en-US" dirty="0"/>
           </a:p>
@@ -693,7 +694,7 @@
           <a:p>
             <a:r>
               <a:rPr lang="en-US" dirty="0"/>
-              <a:t>Trace the diagram left to right: every single request — employee, remote VPN session, or the GlobalTech B2B connection — goes through the same four gates. The critical detail is the dashed feedback loop at the bottom: posture and behavior are re-checked continuously, so a device that was fine at login but starts behaving oddly an hour later gets caught, not just trusted until the next login.</a:t>
+              <a:t>The key point of this slide: none of SOX, PCI DSS, or GLBA say the words 'Zero Trust' anywhere in their text — but read literally, each one's actual requirement points straight at it. This reframes Zero Trust from 'a trendy architecture we picked' to 'the natural consequence of taking these three regulations seriously at the same time.'</a:t>
             </a:r>
             <a:endParaRPr lang="en-US" dirty="0"/>
           </a:p>
@@ -781,7 +782,7 @@
           <a:p>
             <a:r>
               <a:rPr lang="en-US" dirty="0"/>
-              <a:t>These are the five risks rated Extreme out of the full eighteen-item register — don't read the table line by line, instead point out the pattern: every single one of these five is directly addressed by a control we already showed in the redesign or the Zero Trust rollout. The risk register isn't a separate compliance exercise bolted on afterward — it's the scoring system that justified the architecture decisions.</a:t>
+              <a:t>Trace the diagram left to right: every single request — employee, remote VPN session, or the GlobalTech B2B connection — goes through the same four gates. The critical detail is the dashed feedback loop at the bottom: posture and behavior are re-checked continuously, so a device that was fine at login but starts behaving oddly an hour later gets caught, not just trusted until the next login.</a:t>
             </a:r>
             <a:endParaRPr lang="en-US" dirty="0"/>
           </a:p>
@@ -869,7 +870,7 @@
           <a:p>
             <a:r>
               <a:rPr lang="en-US" dirty="0"/>
-              <a:t>Two of these five rows — Remote Access &amp; Removable Media, and Third-Party/Vendor Risk Management — were things the original report described in prose elsewhere but never actually wrote down as governing policy sections. Closing that gap matters practically: 'we do this' in a narrative report doesn't survive an audit the way a numbered, versioned policy section does.</a:t>
+              <a:t>These are the five risks rated Extreme out of the full eighteen-item register — don't read the table line by line, instead point out the pattern: every single one of these five is directly addressed by a control we already showed in the redesign or the Zero Trust rollout. The risk register isn't a separate compliance exercise bolted on afterward — it's the scoring system that justified the architecture decisions.</a:t>
             </a:r>
             <a:endParaRPr lang="en-US" dirty="0"/>
           </a:p>
@@ -957,7 +958,7 @@
           <a:p>
             <a:r>
               <a:rPr lang="en-US" dirty="0"/>
-              <a:t>Walk through this as a timeline, not a list — the order matters: contain first to stop ongoing exfiltration, then investigate, and notification happens in parallel with recovery, not after it, because GLBA and client trust both demand speed. The lessons-learned line at the bottom is the bridge back to everything earlier in the deck — this incident is the reason the redesign, Zero Trust rollout, and policy exist.</a:t>
+              <a:t>Two of these five rows — Remote Access &amp; Removable Media, and Third-Party/Vendor Risk Management — were things the original report described in prose elsewhere but never actually wrote down as governing policy sections. Closing that gap matters practically: 'we do this' in a narrative report doesn't survive an audit the way a numbered, versioned policy section does.</a:t>
             </a:r>
             <a:endParaRPr lang="en-US" dirty="0"/>
           </a:p>
@@ -1045,7 +1046,7 @@
           <a:p>
             <a:r>
               <a:rPr lang="en-US" dirty="0"/>
-              <a:t>Left side is where we ended up, right side is where FinSecure needs to keep going — make clear that compliance here is a status achieved through this project, not a permanent state; the right column exists because Zero Trust and regulatory alignment both degrade if nobody keeps maintaining them. The 'close the non-SSO gap' item is a specific, honest loose end we flagged rather than papering over.</a:t>
+              <a:t>Walk through this as a timeline, not a list — the order matters: contain first to stop ongoing exfiltration, then investigate, and notification happens in parallel with recovery, not after it, because GLBA and client trust both demand speed. The lessons-learned line at the bottom is the bridge back to everything earlier in the deck — this incident is the reason the redesign, Zero Trust rollout, and policy exist.</a:t>
             </a:r>
             <a:endParaRPr lang="en-US" dirty="0"/>
           </a:p>
@@ -1133,7 +1134,7 @@
           <a:p>
             <a:r>
               <a:rPr lang="en-US" dirty="0"/>
-              <a:t>Close by reiterating the single sentence that ties the whole deck together: a preventable breach exposed both a technical gap and a compliance gap, and this project closed both at once by rebuilding the network around Zero Trust rather than patching the original flaw in isolation. Open the floor for questions.</a:t>
+              <a:t>Left side is where we ended up, right side is where FinSecure needs to keep going — make clear that compliance here is a status achieved through this project, not a permanent state; the right column exists because Zero Trust and regulatory alignment both degrade if nobody keeps maintaining them. The 'close the non-SSO gap' item is a specific, honest loose end we flagged rather than papering over.</a:t>
             </a:r>
             <a:endParaRPr lang="en-US" dirty="0"/>
           </a:p>
@@ -1157,6 +1158,94 @@
             <a:fld id="{F7021451-1387-4CA6-816F-3879F97B5CBC}" type="slidenum">
               <a:rPr lang="en-US"/>
               <a:t>16</a:t>
+            </a:fld>
+            <a:endParaRPr lang="en-US"/>
+          </a:p>
+        </p:txBody>
+      </p:sp>
+    </p:spTree>
+    <p:extLst>
+      <p:ext uri="{BB962C8B-B14F-4D97-AF65-F5344CB8AC3E}">
+        <p14:creationId xmlns:p14="http://schemas.microsoft.com/office/powerpoint/2010/main" val="1024086991"/>
+      </p:ext>
+    </p:extLst>
+  </p:cSld>
+  <p:clrMapOvr>
+    <a:masterClrMapping/>
+  </p:clrMapOvr>
+</p:notes>
+</file>
+
+<file path=ppt/notesSlides/notesSlide17.xml><?xml version="1.0" encoding="utf-8"?>
+<p:notes xmlns:a="http://schemas.openxmlformats.org/drawingml/2006/main" xmlns:r="http://schemas.openxmlformats.org/officeDocument/2006/relationships" xmlns:p="http://schemas.openxmlformats.org/presentationml/2006/main">
+  <p:cSld>
+    <p:spTree>
+      <p:nvGrpSpPr>
+        <p:cNvPr id="1" name=""/>
+        <p:cNvGrpSpPr/>
+        <p:nvPr/>
+      </p:nvGrpSpPr>
+      <p:grpSpPr>
+        <a:xfrm>
+          <a:off x="0" y="0"/>
+          <a:ext cx="0" cy="0"/>
+          <a:chOff x="0" y="0"/>
+          <a:chExt cx="0" cy="0"/>
+        </a:xfrm>
+      </p:grpSpPr>
+      <p:sp>
+        <p:nvSpPr>
+          <p:cNvPr id="2" name="Slide Image Placeholder 1"/>
+          <p:cNvSpPr>
+            <a:spLocks noGrp="1" noRot="1" noChangeAspect="1"/>
+          </p:cNvSpPr>
+          <p:nvPr>
+            <p:ph type="sldImg"/>
+          </p:nvPr>
+        </p:nvSpPr>
+        <p:spPr/>
+      </p:sp>
+      <p:sp>
+        <p:nvSpPr>
+          <p:cNvPr id="3" name="Notes Placeholder 2"/>
+          <p:cNvSpPr>
+            <a:spLocks noGrp="1"/>
+          </p:cNvSpPr>
+          <p:nvPr>
+            <p:ph type="body" idx="1"/>
+          </p:nvPr>
+        </p:nvSpPr>
+        <p:spPr/>
+        <p:txBody>
+          <a:bodyPr/>
+          <a:lstStyle/>
+          <a:p>
+            <a:r>
+              <a:rPr lang="en-US" dirty="0"/>
+              <a:t>Close by reiterating the single sentence that ties the whole deck together: a preventable breach exposed both a technical gap and a compliance gap, and this project closed both at once by rebuilding the network around Zero Trust rather than patching the original flaw in isolation. Open the floor for questions.</a:t>
+            </a:r>
+            <a:endParaRPr lang="en-US" dirty="0"/>
+          </a:p>
+        </p:txBody>
+      </p:sp>
+      <p:sp>
+        <p:nvSpPr>
+          <p:cNvPr id="4" name="Slide Number Placeholder 3"/>
+          <p:cNvSpPr>
+            <a:spLocks noGrp="1"/>
+          </p:cNvSpPr>
+          <p:nvPr>
+            <p:ph type="sldNum" sz="quarter" idx="10"/>
+          </p:nvPr>
+        </p:nvSpPr>
+        <p:spPr/>
+        <p:txBody>
+          <a:bodyPr/>
+          <a:lstStyle/>
+          <a:p>
+            <a:fld id="{F7021451-1387-4CA6-816F-3879F97B5CBC}" type="slidenum">
+              <a:rPr lang="en-US"/>
+              <a:t>17</a:t>
             </a:fld>
             <a:endParaRPr lang="en-US"/>
           </a:p>
@@ -1661,7 +1750,7 @@
           <a:p>
             <a:r>
               <a:rPr lang="en-US" dirty="0"/>
-              <a:t>Walk left to right across the diagram — this reconstructed path is built directly from SIEM anomalies, WAF log correlation, and Wireshark traffic analysis, not assumption. The three vulnerability tags below map one-to-one onto the four path stages: SQL injection is the entry, XSS is a related web-app weakness found in the same testing pass, and the weak SFTP auth is what turned a single compromised endpoint into full lateral movement.</a:t>
+              <a:t>These are not mockups — this is the group's own Kali Linux workstation scanning the group's own deployed FinSWebApp instance on Azure App Service. Left: Nmap confirms the external attack surface is small (just 80/443) with a valid cert. Right: OWASP ZAP's automated scan is what actually caught the missing security headers and outdated JS library — lower-severity than the SQL injection in the incident narrative, but the same 'hardening skipped under deadline pressure' pattern. This slide exists to show the audience the methodology wasn't just described — it was actually run.</a:t>
             </a:r>
             <a:endParaRPr lang="en-US" dirty="0"/>
           </a:p>
@@ -1749,7 +1838,7 @@
           <a:p>
             <a:r>
               <a:rPr lang="en-US" dirty="0"/>
-              <a:t>This is the 'before' half of the before/after pair — don't over-explain the diagram, just point out there is exactly one firewall between the internet and the cardholder database. That single fact is the through-line to the next slide: everything in the redesign is aimed at replacing this one choke point with multiple independent boundaries.</a:t>
+              <a:t>Walk left to right across the diagram — this reconstructed path is built directly from SIEM anomalies, WAF log correlation, and Wireshark traffic analysis, not assumption. The three vulnerability tags below map one-to-one onto the four path stages: SQL injection is the entry, XSS is a related web-app weakness found in the same testing pass, and the weak SFTP auth is what turned a single compromised endpoint into full lateral movement.</a:t>
             </a:r>
             <a:endParaRPr lang="en-US" dirty="0"/>
           </a:p>
@@ -1837,7 +1926,7 @@
           <a:p>
             <a:r>
               <a:rPr lang="en-US" dirty="0"/>
-              <a:t>The improvements list on the left isn't decorative — each line is a direct fix for one of the four 'before' weaknesses on the previous slide. Point out specifically that the cardholder database now sits behind an *additional* dedicated firewall inside the Database Zone — that's the fix for the PCI-DSS wording issue in the original report, where the database was incorrectly described as being 'within the DMZ.'</a:t>
+              <a:t>This is the 'before' half of the before/after pair — don't over-explain the diagram, just point out there is exactly one firewall between the internet and the cardholder database. That single fact is the through-line to the next slide: everything in the redesign is aimed at replacing this one choke point with multiple independent boundaries.</a:t>
             </a:r>
             <a:endParaRPr lang="en-US" dirty="0"/>
           </a:p>
@@ -2576,13 +2665,13 @@
             <a:r>
               <a:rPr lang="en-US" sz="1200" b="1" spc="200" kern="0" dirty="0">
                 <a:solidFill>
-                  <a:srgbClr val="1E2761"/>
-                </a:solidFill>
-                <a:latin typeface="Calibri" pitchFamily="34" charset="0"/>
-                <a:ea typeface="Calibri" pitchFamily="34" charset="-122"/>
-                <a:cs typeface="Calibri" pitchFamily="34" charset="-120"/>
-              </a:rPr>
-              <a:t>ZERO TRUST ARCHITECTURE</a:t>
+                  <a:srgbClr val="2F9E56"/>
+                </a:solidFill>
+                <a:latin typeface="Calibri" pitchFamily="34" charset="0"/>
+                <a:ea typeface="Calibri" pitchFamily="34" charset="-122"/>
+                <a:cs typeface="Calibri" pitchFamily="34" charset="-120"/>
+              </a:rPr>
+              <a:t>NETWORK REDESIGN</a:t>
             </a:r>
             <a:endParaRPr lang="en-US" sz="1200" dirty="0"/>
           </a:p>
@@ -2621,141 +2710,188 @@
                 <a:ea typeface="Cambria" pitchFamily="34" charset="-122"/>
                 <a:cs typeface="Cambria" pitchFamily="34" charset="-120"/>
               </a:rPr>
-              <a:t>Why Zero Trust, Specifically for FinSecure</a:t>
+              <a:t>After: Defense-in-Depth Segmentation</a:t>
             </a:r>
             <a:endParaRPr lang="en-US" sz="3200" dirty="0"/>
           </a:p>
         </p:txBody>
       </p:sp>
-      <p:sp>
-        <p:nvSpPr>
-          <p:cNvPr id="4" name="Shape 2"/>
+      <p:pic>
+        <p:nvPicPr>
+          <p:cNvPr id="4" name="Image 0" descr="C:\Users\rareb\AppData\Local\Temp\claude\C--Users-rareb-OneDrive-Desktop-University-Of-Winnipeg-Case-Studies-Issues---Capstone-Project-V--Balogun-NSD-Fall-2023\288735ab-ce17-49e2-9255-b3c08ab0bae8\scratchpad\network-after.png">    </p:cNvPr>
+          <p:cNvPicPr>
+            <a:picLocks noChangeAspect="1"/>
+          </p:cNvPicPr>
+          <p:nvPr/>
+        </p:nvPicPr>
+        <p:blipFill>
+          <a:blip r:embed="rId1"/>
+          <a:stretch>
+            <a:fillRect/>
+          </a:stretch>
+        </p:blipFill>
+        <p:spPr>
+          <a:xfrm>
+            <a:off x="3749040" y="1417320"/>
+            <a:ext cx="6172200" cy="5141062"/>
+          </a:xfrm>
+          <a:prstGeom prst="rect">
+            <a:avLst/>
+          </a:prstGeom>
+        </p:spPr>
+      </p:pic>
+      <p:sp>
+        <p:nvSpPr>
+          <p:cNvPr id="5" name="Shape 2"/>
           <p:cNvSpPr/>
           <p:nvPr/>
         </p:nvSpPr>
         <p:spPr>
           <a:xfrm>
-            <a:off x="548640" y="1783080"/>
-            <a:ext cx="11109960" cy="1051560"/>
-          </a:xfrm>
-          <a:prstGeom prst="roundRect">
-            <a:avLst>
-              <a:gd name="adj" fmla="val 6957"/>
-            </a:avLst>
+            <a:off x="548640" y="1600200"/>
+            <a:ext cx="320040" cy="320040"/>
+          </a:xfrm>
+          <a:prstGeom prst="ellipse">
+            <a:avLst/>
           </a:prstGeom>
           <a:solidFill>
-            <a:srgbClr val="FFFFFF"/>
+            <a:srgbClr val="2F9E56"/>
           </a:solidFill>
-          <a:ln w="12700">
-            <a:solidFill>
-              <a:srgbClr val="CADCFC"/>
-            </a:solidFill>
-            <a:prstDash val="solid"/>
-          </a:ln>
-          <a:effectLst>
-            <a:outerShdw sx="100000" sy="100000" kx="0" ky="0" algn="bl" rotWithShape="0" blurRad="63500" dist="25400" dir="5400000">
-              <a:srgbClr val="9AA5C7">
-                <a:alpha val="25000"/>
-              </a:srgbClr>
-            </a:outerShdw>
-          </a:effectLst>
-        </p:spPr>
-      </p:sp>
-      <p:sp>
-        <p:nvSpPr>
-          <p:cNvPr id="5" name="Shape 3"/>
+          <a:ln/>
+        </p:spPr>
+      </p:sp>
+      <p:sp>
+        <p:nvSpPr>
+          <p:cNvPr id="6" name="Text 3"/>
+          <p:cNvSpPr txBox="1"/>
+          <p:nvPr/>
+        </p:nvSpPr>
+        <p:spPr>
+          <a:xfrm>
+            <a:off x="1005840" y="1508760"/>
+            <a:ext cx="1463040" cy="457200"/>
+          </a:xfrm>
+          <a:prstGeom prst="rect">
+            <a:avLst/>
+          </a:prstGeom>
+          <a:noFill/>
+          <a:ln/>
+        </p:spPr>
+        <p:txBody>
+          <a:bodyPr wrap="square" lIns="0" tIns="0" rIns="0" bIns="0" rtlCol="0" anchor="ctr"/>
+          <a:lstStyle/>
+          <a:p>
+            <a:pPr indent="0" marL="0">
+              <a:buNone/>
+            </a:pPr>
+            <a:r>
+              <a:rPr lang="en-US" sz="1250" b="1" dirty="0">
+                <a:solidFill>
+                  <a:srgbClr val="1E2761"/>
+                </a:solidFill>
+                <a:latin typeface="Calibri" pitchFamily="34" charset="0"/>
+                <a:ea typeface="Calibri" pitchFamily="34" charset="-122"/>
+                <a:cs typeface="Calibri" pitchFamily="34" charset="-120"/>
+              </a:rPr>
+              <a:t>NGFW + Dual WAF</a:t>
+            </a:r>
+            <a:endParaRPr lang="en-US" sz="1250" dirty="0"/>
+          </a:p>
+        </p:txBody>
+      </p:sp>
+      <p:sp>
+        <p:nvSpPr>
+          <p:cNvPr id="7" name="Text 4"/>
+          <p:cNvSpPr txBox="1"/>
+          <p:nvPr/>
+        </p:nvSpPr>
+        <p:spPr>
+          <a:xfrm>
+            <a:off x="1005840" y="1847088"/>
+            <a:ext cx="1463040" cy="457200"/>
+          </a:xfrm>
+          <a:prstGeom prst="rect">
+            <a:avLst/>
+          </a:prstGeom>
+          <a:noFill/>
+          <a:ln/>
+        </p:spPr>
+        <p:txBody>
+          <a:bodyPr wrap="square" lIns="0" tIns="0" rIns="0" bIns="0" rtlCol="0" anchor="ctr"/>
+          <a:lstStyle/>
+          <a:p>
+            <a:pPr indent="0" marL="0">
+              <a:buNone/>
+            </a:pPr>
+            <a:r>
+              <a:rPr lang="en-US" sz="1000" dirty="0">
+                <a:solidFill>
+                  <a:srgbClr val="6B7280"/>
+                </a:solidFill>
+                <a:latin typeface="Calibri" pitchFamily="34" charset="0"/>
+                <a:ea typeface="Calibri" pitchFamily="34" charset="-122"/>
+                <a:cs typeface="Calibri" pitchFamily="34" charset="-120"/>
+              </a:rPr>
+              <a:t>IPS, VPN, DLP at the perimeter; active-active WAF pair</a:t>
+            </a:r>
+            <a:endParaRPr lang="en-US" sz="1000" dirty="0"/>
+          </a:p>
+        </p:txBody>
+      </p:sp>
+      <p:sp>
+        <p:nvSpPr>
+          <p:cNvPr id="8" name="Shape 5"/>
           <p:cNvSpPr/>
           <p:nvPr/>
         </p:nvSpPr>
         <p:spPr>
           <a:xfrm>
-            <a:off x="548640" y="1783080"/>
-            <a:ext cx="1737360" cy="1051560"/>
-          </a:xfrm>
-          <a:prstGeom prst="rect">
-            <a:avLst>
-              <a:gd name="adj" fmla="val 6957"/>
-            </a:avLst>
+            <a:off x="548640" y="2377440"/>
+            <a:ext cx="320040" cy="320040"/>
+          </a:xfrm>
+          <a:prstGeom prst="ellipse">
+            <a:avLst/>
           </a:prstGeom>
           <a:solidFill>
-            <a:srgbClr val="1E2761"/>
+            <a:srgbClr val="2F9E56"/>
           </a:solidFill>
           <a:ln/>
         </p:spPr>
       </p:sp>
       <p:sp>
         <p:nvSpPr>
-          <p:cNvPr id="6" name="Text 4"/>
-          <p:cNvSpPr txBox="1"/>
-          <p:nvPr/>
-        </p:nvSpPr>
-        <p:spPr>
-          <a:xfrm>
-            <a:off x="548640" y="1783080"/>
-            <a:ext cx="1737360" cy="1051560"/>
-          </a:xfrm>
-          <a:prstGeom prst="rect">
-            <a:avLst/>
-          </a:prstGeom>
-          <a:noFill/>
-          <a:ln/>
-        </p:spPr>
-        <p:txBody>
-          <a:bodyPr wrap="square" rtlCol="0" anchor="ctr"/>
-          <a:lstStyle/>
-          <a:p>
-            <a:pPr algn="ctr" indent="0" marL="0">
-              <a:buNone/>
-            </a:pPr>
-            <a:r>
-              <a:rPr lang="en-US" sz="1600" b="1" dirty="0">
-                <a:solidFill>
-                  <a:srgbClr val="FFFFFF"/>
-                </a:solidFill>
-                <a:latin typeface="Cambria" pitchFamily="34" charset="0"/>
-                <a:ea typeface="Cambria" pitchFamily="34" charset="-122"/>
-                <a:cs typeface="Cambria" pitchFamily="34" charset="-120"/>
-              </a:rPr>
-              <a:t>PCI DSS</a:t>
-            </a:r>
-            <a:endParaRPr lang="en-US" sz="1600" dirty="0"/>
-          </a:p>
-        </p:txBody>
-      </p:sp>
-      <p:sp>
-        <p:nvSpPr>
-          <p:cNvPr id="7" name="Text 5"/>
-          <p:cNvSpPr txBox="1"/>
-          <p:nvPr/>
-        </p:nvSpPr>
-        <p:spPr>
-          <a:xfrm>
-            <a:off x="2514600" y="1892808"/>
-            <a:ext cx="4297680" cy="822960"/>
-          </a:xfrm>
-          <a:prstGeom prst="rect">
-            <a:avLst/>
-          </a:prstGeom>
-          <a:noFill/>
-          <a:ln/>
-        </p:spPr>
-        <p:txBody>
-          <a:bodyPr wrap="square" rtlCol="0" anchor="ctr"/>
-          <a:lstStyle/>
-          <a:p>
-            <a:pPr indent="0" marL="0">
-              <a:buNone/>
-            </a:pPr>
-            <a:r>
-              <a:rPr lang="en-US" sz="1250" dirty="0">
-                <a:solidFill>
-                  <a:srgbClr val="1A1A1A"/>
-                </a:solidFill>
-                <a:latin typeface="Calibri" pitchFamily="34" charset="0"/>
-                <a:ea typeface="Calibri" pitchFamily="34" charset="-122"/>
-                <a:cs typeface="Calibri" pitchFamily="34" charset="-120"/>
-              </a:rPr>
-              <a:t>Least privilege, MFA, network segmentation</a:t>
+          <p:cNvPr id="9" name="Text 6"/>
+          <p:cNvSpPr txBox="1"/>
+          <p:nvPr/>
+        </p:nvSpPr>
+        <p:spPr>
+          <a:xfrm>
+            <a:off x="1005840" y="2286000"/>
+            <a:ext cx="1463040" cy="457200"/>
+          </a:xfrm>
+          <a:prstGeom prst="rect">
+            <a:avLst/>
+          </a:prstGeom>
+          <a:noFill/>
+          <a:ln/>
+        </p:spPr>
+        <p:txBody>
+          <a:bodyPr wrap="square" lIns="0" tIns="0" rIns="0" bIns="0" rtlCol="0" anchor="ctr"/>
+          <a:lstStyle/>
+          <a:p>
+            <a:pPr indent="0" marL="0">
+              <a:buNone/>
+            </a:pPr>
+            <a:r>
+              <a:rPr lang="en-US" sz="1250" b="1" dirty="0">
+                <a:solidFill>
+                  <a:srgbClr val="1E2761"/>
+                </a:solidFill>
+                <a:latin typeface="Calibri" pitchFamily="34" charset="0"/>
+                <a:ea typeface="Calibri" pitchFamily="34" charset="-122"/>
+                <a:cs typeface="Calibri" pitchFamily="34" charset="-120"/>
+              </a:rPr>
+              <a:t>3-Tier Isolation</a:t>
             </a:r>
             <a:endParaRPr lang="en-US" sz="1250" dirty="0"/>
           </a:p>
@@ -2763,38 +2899,97 @@
       </p:sp>
       <p:sp>
         <p:nvSpPr>
-          <p:cNvPr id="8" name="Text 6"/>
-          <p:cNvSpPr txBox="1"/>
-          <p:nvPr/>
-        </p:nvSpPr>
-        <p:spPr>
-          <a:xfrm>
-            <a:off x="6949440" y="1892808"/>
-            <a:ext cx="4480560" cy="822960"/>
-          </a:xfrm>
-          <a:prstGeom prst="rect">
-            <a:avLst/>
-          </a:prstGeom>
-          <a:noFill/>
-          <a:ln/>
-        </p:spPr>
-        <p:txBody>
-          <a:bodyPr wrap="square" rtlCol="0" anchor="ctr"/>
-          <a:lstStyle/>
-          <a:p>
-            <a:pPr indent="0" marL="0">
-              <a:buNone/>
-            </a:pPr>
-            <a:r>
-              <a:rPr lang="en-US" sz="1250" i="1" dirty="0">
-                <a:solidFill>
-                  <a:srgbClr val="3B4A9E"/>
-                </a:solidFill>
-                <a:latin typeface="Calibri" pitchFamily="34" charset="0"/>
-                <a:ea typeface="Calibri" pitchFamily="34" charset="-122"/>
-                <a:cs typeface="Calibri" pitchFamily="34" charset="-120"/>
-              </a:rPr>
-              <a:t>→  Identity verification + micro-segmentation</a:t>
+          <p:cNvPr id="10" name="Text 7"/>
+          <p:cNvSpPr txBox="1"/>
+          <p:nvPr/>
+        </p:nvSpPr>
+        <p:spPr>
+          <a:xfrm>
+            <a:off x="1005840" y="2624328"/>
+            <a:ext cx="1463040" cy="457200"/>
+          </a:xfrm>
+          <a:prstGeom prst="rect">
+            <a:avLst/>
+          </a:prstGeom>
+          <a:noFill/>
+          <a:ln/>
+        </p:spPr>
+        <p:txBody>
+          <a:bodyPr wrap="square" lIns="0" tIns="0" rIns="0" bIns="0" rtlCol="0" anchor="ctr"/>
+          <a:lstStyle/>
+          <a:p>
+            <a:pPr indent="0" marL="0">
+              <a:buNone/>
+            </a:pPr>
+            <a:r>
+              <a:rPr lang="en-US" sz="1000" dirty="0">
+                <a:solidFill>
+                  <a:srgbClr val="6B7280"/>
+                </a:solidFill>
+                <a:latin typeface="Calibri" pitchFamily="34" charset="0"/>
+                <a:ea typeface="Calibri" pitchFamily="34" charset="-122"/>
+                <a:cs typeface="Calibri" pitchFamily="34" charset="-120"/>
+              </a:rPr>
+              <a:t>DMZ → App Zone → Database Zone, each behind its own firewall</a:t>
+            </a:r>
+            <a:endParaRPr lang="en-US" sz="1000" dirty="0"/>
+          </a:p>
+        </p:txBody>
+      </p:sp>
+      <p:sp>
+        <p:nvSpPr>
+          <p:cNvPr id="11" name="Shape 8"/>
+          <p:cNvSpPr/>
+          <p:nvPr/>
+        </p:nvSpPr>
+        <p:spPr>
+          <a:xfrm>
+            <a:off x="548640" y="3154680"/>
+            <a:ext cx="320040" cy="320040"/>
+          </a:xfrm>
+          <a:prstGeom prst="ellipse">
+            <a:avLst/>
+          </a:prstGeom>
+          <a:solidFill>
+            <a:srgbClr val="2F9E56"/>
+          </a:solidFill>
+          <a:ln/>
+        </p:spPr>
+      </p:sp>
+      <p:sp>
+        <p:nvSpPr>
+          <p:cNvPr id="12" name="Text 9"/>
+          <p:cNvSpPr txBox="1"/>
+          <p:nvPr/>
+        </p:nvSpPr>
+        <p:spPr>
+          <a:xfrm>
+            <a:off x="1005840" y="3063240"/>
+            <a:ext cx="1463040" cy="457200"/>
+          </a:xfrm>
+          <a:prstGeom prst="rect">
+            <a:avLst/>
+          </a:prstGeom>
+          <a:noFill/>
+          <a:ln/>
+        </p:spPr>
+        <p:txBody>
+          <a:bodyPr wrap="square" lIns="0" tIns="0" rIns="0" bIns="0" rtlCol="0" anchor="ctr"/>
+          <a:lstStyle/>
+          <a:p>
+            <a:pPr indent="0" marL="0">
+              <a:buNone/>
+            </a:pPr>
+            <a:r>
+              <a:rPr lang="en-US" sz="1250" b="1" dirty="0">
+                <a:solidFill>
+                  <a:srgbClr val="1E2761"/>
+                </a:solidFill>
+                <a:latin typeface="Calibri" pitchFamily="34" charset="0"/>
+                <a:ea typeface="Calibri" pitchFamily="34" charset="-122"/>
+                <a:cs typeface="Calibri" pitchFamily="34" charset="-120"/>
+              </a:rPr>
+              <a:t>Dedicated CDE Firewall</a:t>
             </a:r>
             <a:endParaRPr lang="en-US" sz="1250" dirty="0"/>
           </a:p>
@@ -2802,133 +2997,97 @@
       </p:sp>
       <p:sp>
         <p:nvSpPr>
-          <p:cNvPr id="9" name="Shape 7"/>
+          <p:cNvPr id="13" name="Text 10"/>
+          <p:cNvSpPr txBox="1"/>
+          <p:nvPr/>
+        </p:nvSpPr>
+        <p:spPr>
+          <a:xfrm>
+            <a:off x="1005840" y="3401568"/>
+            <a:ext cx="1463040" cy="457200"/>
+          </a:xfrm>
+          <a:prstGeom prst="rect">
+            <a:avLst/>
+          </a:prstGeom>
+          <a:noFill/>
+          <a:ln/>
+        </p:spPr>
+        <p:txBody>
+          <a:bodyPr wrap="square" lIns="0" tIns="0" rIns="0" bIns="0" rtlCol="0" anchor="ctr"/>
+          <a:lstStyle/>
+          <a:p>
+            <a:pPr indent="0" marL="0">
+              <a:buNone/>
+            </a:pPr>
+            <a:r>
+              <a:rPr lang="en-US" sz="1000" dirty="0">
+                <a:solidFill>
+                  <a:srgbClr val="6B7280"/>
+                </a:solidFill>
+                <a:latin typeface="Calibri" pitchFamily="34" charset="0"/>
+                <a:ea typeface="Calibri" pitchFamily="34" charset="-122"/>
+                <a:cs typeface="Calibri" pitchFamily="34" charset="-120"/>
+              </a:rPr>
+              <a:t>Cardholder data isolated with an additional boundary</a:t>
+            </a:r>
+            <a:endParaRPr lang="en-US" sz="1000" dirty="0"/>
+          </a:p>
+        </p:txBody>
+      </p:sp>
+      <p:sp>
+        <p:nvSpPr>
+          <p:cNvPr id="14" name="Shape 11"/>
           <p:cNvSpPr/>
           <p:nvPr/>
         </p:nvSpPr>
         <p:spPr>
           <a:xfrm>
-            <a:off x="548640" y="3017520"/>
-            <a:ext cx="11109960" cy="1051560"/>
-          </a:xfrm>
-          <a:prstGeom prst="roundRect">
-            <a:avLst>
-              <a:gd name="adj" fmla="val 6957"/>
-            </a:avLst>
+            <a:off x="548640" y="3931920"/>
+            <a:ext cx="320040" cy="320040"/>
+          </a:xfrm>
+          <a:prstGeom prst="ellipse">
+            <a:avLst/>
           </a:prstGeom>
           <a:solidFill>
-            <a:srgbClr val="FFFFFF"/>
+            <a:srgbClr val="2F9E56"/>
           </a:solidFill>
-          <a:ln w="12700">
-            <a:solidFill>
-              <a:srgbClr val="CADCFC"/>
-            </a:solidFill>
-            <a:prstDash val="solid"/>
-          </a:ln>
-          <a:effectLst>
-            <a:outerShdw sx="100000" sy="100000" kx="0" ky="0" algn="bl" rotWithShape="0" blurRad="63500" dist="25400" dir="5400000">
-              <a:srgbClr val="9AA5C7">
-                <a:alpha val="25000"/>
-              </a:srgbClr>
-            </a:outerShdw>
-          </a:effectLst>
-        </p:spPr>
-      </p:sp>
-      <p:sp>
-        <p:nvSpPr>
-          <p:cNvPr id="10" name="Shape 8"/>
-          <p:cNvSpPr/>
-          <p:nvPr/>
-        </p:nvSpPr>
-        <p:spPr>
-          <a:xfrm>
-            <a:off x="548640" y="3017520"/>
-            <a:ext cx="1737360" cy="1051560"/>
-          </a:xfrm>
-          <a:prstGeom prst="rect">
-            <a:avLst>
-              <a:gd name="adj" fmla="val 6957"/>
-            </a:avLst>
-          </a:prstGeom>
-          <a:solidFill>
-            <a:srgbClr val="1E2761"/>
-          </a:solidFill>
-          <a:ln/>
-        </p:spPr>
-      </p:sp>
-      <p:sp>
-        <p:nvSpPr>
-          <p:cNvPr id="11" name="Text 9"/>
-          <p:cNvSpPr txBox="1"/>
-          <p:nvPr/>
-        </p:nvSpPr>
-        <p:spPr>
-          <a:xfrm>
-            <a:off x="548640" y="3017520"/>
-            <a:ext cx="1737360" cy="1051560"/>
-          </a:xfrm>
-          <a:prstGeom prst="rect">
-            <a:avLst/>
-          </a:prstGeom>
-          <a:noFill/>
-          <a:ln/>
-        </p:spPr>
-        <p:txBody>
-          <a:bodyPr wrap="square" rtlCol="0" anchor="ctr"/>
-          <a:lstStyle/>
-          <a:p>
-            <a:pPr algn="ctr" indent="0" marL="0">
-              <a:buNone/>
-            </a:pPr>
-            <a:r>
-              <a:rPr lang="en-US" sz="1600" b="1" dirty="0">
-                <a:solidFill>
-                  <a:srgbClr val="FFFFFF"/>
-                </a:solidFill>
-                <a:latin typeface="Cambria" pitchFamily="34" charset="0"/>
-                <a:ea typeface="Cambria" pitchFamily="34" charset="-122"/>
-                <a:cs typeface="Cambria" pitchFamily="34" charset="-120"/>
-              </a:rPr>
-              <a:t>SOX</a:t>
-            </a:r>
-            <a:endParaRPr lang="en-US" sz="1600" dirty="0"/>
-          </a:p>
-        </p:txBody>
-      </p:sp>
-      <p:sp>
-        <p:nvSpPr>
-          <p:cNvPr id="12" name="Text 10"/>
-          <p:cNvSpPr txBox="1"/>
-          <p:nvPr/>
-        </p:nvSpPr>
-        <p:spPr>
-          <a:xfrm>
-            <a:off x="2514600" y="3127248"/>
-            <a:ext cx="4297680" cy="822960"/>
-          </a:xfrm>
-          <a:prstGeom prst="rect">
-            <a:avLst/>
-          </a:prstGeom>
-          <a:noFill/>
-          <a:ln/>
-        </p:spPr>
-        <p:txBody>
-          <a:bodyPr wrap="square" rtlCol="0" anchor="ctr"/>
-          <a:lstStyle/>
-          <a:p>
-            <a:pPr indent="0" marL="0">
-              <a:buNone/>
-            </a:pPr>
-            <a:r>
-              <a:rPr lang="en-US" sz="1250" dirty="0">
-                <a:solidFill>
-                  <a:srgbClr val="1A1A1A"/>
-                </a:solidFill>
-                <a:latin typeface="Calibri" pitchFamily="34" charset="0"/>
-                <a:ea typeface="Calibri" pitchFamily="34" charset="-122"/>
-                <a:cs typeface="Calibri" pitchFamily="34" charset="-120"/>
-              </a:rPr>
-              <a:t>Strong internal controls over financial data</a:t>
+          <a:ln/>
+        </p:spPr>
+      </p:sp>
+      <p:sp>
+        <p:nvSpPr>
+          <p:cNvPr id="15" name="Text 12"/>
+          <p:cNvSpPr txBox="1"/>
+          <p:nvPr/>
+        </p:nvSpPr>
+        <p:spPr>
+          <a:xfrm>
+            <a:off x="1005840" y="3840480"/>
+            <a:ext cx="1463040" cy="457200"/>
+          </a:xfrm>
+          <a:prstGeom prst="rect">
+            <a:avLst/>
+          </a:prstGeom>
+          <a:noFill/>
+          <a:ln/>
+        </p:spPr>
+        <p:txBody>
+          <a:bodyPr wrap="square" lIns="0" tIns="0" rIns="0" bIns="0" rtlCol="0" anchor="ctr"/>
+          <a:lstStyle/>
+          <a:p>
+            <a:pPr indent="0" marL="0">
+              <a:buNone/>
+            </a:pPr>
+            <a:r>
+              <a:rPr lang="en-US" sz="1250" b="1" dirty="0">
+                <a:solidFill>
+                  <a:srgbClr val="1E2761"/>
+                </a:solidFill>
+                <a:latin typeface="Calibri" pitchFamily="34" charset="0"/>
+                <a:ea typeface="Calibri" pitchFamily="34" charset="-122"/>
+                <a:cs typeface="Calibri" pitchFamily="34" charset="-120"/>
+              </a:rPr>
+              <a:t>Per-Department VLANs</a:t>
             </a:r>
             <a:endParaRPr lang="en-US" sz="1250" dirty="0"/>
           </a:p>
@@ -2936,219 +3095,46 @@
       </p:sp>
       <p:sp>
         <p:nvSpPr>
-          <p:cNvPr id="13" name="Text 11"/>
-          <p:cNvSpPr txBox="1"/>
-          <p:nvPr/>
-        </p:nvSpPr>
-        <p:spPr>
-          <a:xfrm>
-            <a:off x="6949440" y="3127248"/>
-            <a:ext cx="4480560" cy="822960"/>
-          </a:xfrm>
-          <a:prstGeom prst="rect">
-            <a:avLst/>
-          </a:prstGeom>
-          <a:noFill/>
-          <a:ln/>
-        </p:spPr>
-        <p:txBody>
-          <a:bodyPr wrap="square" rtlCol="0" anchor="ctr"/>
-          <a:lstStyle/>
-          <a:p>
-            <a:pPr indent="0" marL="0">
-              <a:buNone/>
-            </a:pPr>
-            <a:r>
-              <a:rPr lang="en-US" sz="1250" i="1" dirty="0">
-                <a:solidFill>
-                  <a:srgbClr val="3B4A9E"/>
-                </a:solidFill>
-                <a:latin typeface="Calibri" pitchFamily="34" charset="0"/>
-                <a:ea typeface="Calibri" pitchFamily="34" charset="-122"/>
-                <a:cs typeface="Calibri" pitchFamily="34" charset="-120"/>
-              </a:rPr>
-              <a:t>→  Continuous verification, minimized trust boundaries</a:t>
-            </a:r>
-            <a:endParaRPr lang="en-US" sz="1250" dirty="0"/>
-          </a:p>
-        </p:txBody>
-      </p:sp>
-      <p:sp>
-        <p:nvSpPr>
-          <p:cNvPr id="14" name="Shape 12"/>
-          <p:cNvSpPr/>
-          <p:nvPr/>
-        </p:nvSpPr>
-        <p:spPr>
-          <a:xfrm>
-            <a:off x="548640" y="4251960"/>
-            <a:ext cx="11109960" cy="1051560"/>
-          </a:xfrm>
-          <a:prstGeom prst="roundRect">
-            <a:avLst>
-              <a:gd name="adj" fmla="val 6957"/>
-            </a:avLst>
-          </a:prstGeom>
-          <a:solidFill>
-            <a:srgbClr val="FFFFFF"/>
-          </a:solidFill>
-          <a:ln w="12700">
-            <a:solidFill>
-              <a:srgbClr val="CADCFC"/>
-            </a:solidFill>
-            <a:prstDash val="solid"/>
-          </a:ln>
-          <a:effectLst>
-            <a:outerShdw sx="100000" sy="100000" kx="0" ky="0" algn="bl" rotWithShape="0" blurRad="63500" dist="25400" dir="5400000">
-              <a:srgbClr val="9AA5C7">
-                <a:alpha val="25000"/>
-              </a:srgbClr>
-            </a:outerShdw>
-          </a:effectLst>
-        </p:spPr>
-      </p:sp>
-      <p:sp>
-        <p:nvSpPr>
-          <p:cNvPr id="15" name="Shape 13"/>
-          <p:cNvSpPr/>
-          <p:nvPr/>
-        </p:nvSpPr>
-        <p:spPr>
-          <a:xfrm>
-            <a:off x="548640" y="4251960"/>
-            <a:ext cx="1737360" cy="1051560"/>
-          </a:xfrm>
-          <a:prstGeom prst="rect">
-            <a:avLst>
-              <a:gd name="adj" fmla="val 6957"/>
-            </a:avLst>
-          </a:prstGeom>
-          <a:solidFill>
-            <a:srgbClr val="1E2761"/>
-          </a:solidFill>
-          <a:ln/>
-        </p:spPr>
-      </p:sp>
-      <p:sp>
-        <p:nvSpPr>
-          <p:cNvPr id="16" name="Text 14"/>
-          <p:cNvSpPr txBox="1"/>
-          <p:nvPr/>
-        </p:nvSpPr>
-        <p:spPr>
-          <a:xfrm>
-            <a:off x="548640" y="4251960"/>
-            <a:ext cx="1737360" cy="1051560"/>
-          </a:xfrm>
-          <a:prstGeom prst="rect">
-            <a:avLst/>
-          </a:prstGeom>
-          <a:noFill/>
-          <a:ln/>
-        </p:spPr>
-        <p:txBody>
-          <a:bodyPr wrap="square" rtlCol="0" anchor="ctr"/>
-          <a:lstStyle/>
-          <a:p>
-            <a:pPr algn="ctr" indent="0" marL="0">
-              <a:buNone/>
-            </a:pPr>
-            <a:r>
-              <a:rPr lang="en-US" sz="1600" b="1" dirty="0">
-                <a:solidFill>
-                  <a:srgbClr val="FFFFFF"/>
-                </a:solidFill>
-                <a:latin typeface="Cambria" pitchFamily="34" charset="0"/>
-                <a:ea typeface="Cambria" pitchFamily="34" charset="-122"/>
-                <a:cs typeface="Cambria" pitchFamily="34" charset="-120"/>
-              </a:rPr>
-              <a:t>GLBA</a:t>
-            </a:r>
-            <a:endParaRPr lang="en-US" sz="1600" dirty="0"/>
-          </a:p>
-        </p:txBody>
-      </p:sp>
-      <p:sp>
-        <p:nvSpPr>
-          <p:cNvPr id="17" name="Text 15"/>
-          <p:cNvSpPr txBox="1"/>
-          <p:nvPr/>
-        </p:nvSpPr>
-        <p:spPr>
-          <a:xfrm>
-            <a:off x="2514600" y="4361688"/>
-            <a:ext cx="4297680" cy="822960"/>
-          </a:xfrm>
-          <a:prstGeom prst="rect">
-            <a:avLst/>
-          </a:prstGeom>
-          <a:noFill/>
-          <a:ln/>
-        </p:spPr>
-        <p:txBody>
-          <a:bodyPr wrap="square" rtlCol="0" anchor="ctr"/>
-          <a:lstStyle/>
-          <a:p>
-            <a:pPr indent="0" marL="0">
-              <a:buNone/>
-            </a:pPr>
-            <a:r>
-              <a:rPr lang="en-US" sz="1250" dirty="0">
-                <a:solidFill>
-                  <a:srgbClr val="1A1A1A"/>
-                </a:solidFill>
-                <a:latin typeface="Calibri" pitchFamily="34" charset="0"/>
-                <a:ea typeface="Calibri" pitchFamily="34" charset="-122"/>
-                <a:cs typeface="Calibri" pitchFamily="34" charset="-120"/>
-              </a:rPr>
-              <a:t>Strong protection of nonpublic personal information</a:t>
-            </a:r>
-            <a:endParaRPr lang="en-US" sz="1250" dirty="0"/>
-          </a:p>
-        </p:txBody>
-      </p:sp>
-      <p:sp>
-        <p:nvSpPr>
-          <p:cNvPr id="18" name="Text 16"/>
-          <p:cNvSpPr txBox="1"/>
-          <p:nvPr/>
-        </p:nvSpPr>
-        <p:spPr>
-          <a:xfrm>
-            <a:off x="6949440" y="4361688"/>
-            <a:ext cx="4480560" cy="822960"/>
-          </a:xfrm>
-          <a:prstGeom prst="rect">
-            <a:avLst/>
-          </a:prstGeom>
-          <a:noFill/>
-          <a:ln/>
-        </p:spPr>
-        <p:txBody>
-          <a:bodyPr wrap="square" rtlCol="0" anchor="ctr"/>
-          <a:lstStyle/>
-          <a:p>
-            <a:pPr indent="0" marL="0">
-              <a:buNone/>
-            </a:pPr>
-            <a:r>
-              <a:rPr lang="en-US" sz="1250" i="1" dirty="0">
-                <a:solidFill>
-                  <a:srgbClr val="3B4A9E"/>
-                </a:solidFill>
-                <a:latin typeface="Calibri" pitchFamily="34" charset="0"/>
-                <a:ea typeface="Calibri" pitchFamily="34" charset="-122"/>
-                <a:cs typeface="Calibri" pitchFamily="34" charset="-120"/>
-              </a:rPr>
-              <a:t>→  Least-privilege access model</a:t>
-            </a:r>
-            <a:endParaRPr lang="en-US" sz="1250" dirty="0"/>
-          </a:p>
-        </p:txBody>
-      </p:sp>
-      <p:sp>
-        <p:nvSpPr>
-          <p:cNvPr id="19" name="Text 17"/>
+          <p:cNvPr id="16" name="Text 13"/>
+          <p:cNvSpPr txBox="1"/>
+          <p:nvPr/>
+        </p:nvSpPr>
+        <p:spPr>
+          <a:xfrm>
+            <a:off x="1005840" y="4178808"/>
+            <a:ext cx="1463040" cy="457200"/>
+          </a:xfrm>
+          <a:prstGeom prst="rect">
+            <a:avLst/>
+          </a:prstGeom>
+          <a:noFill/>
+          <a:ln/>
+        </p:spPr>
+        <p:txBody>
+          <a:bodyPr wrap="square" lIns="0" tIns="0" rIns="0" bIns="0" rtlCol="0" anchor="ctr"/>
+          <a:lstStyle/>
+          <a:p>
+            <a:pPr indent="0" marL="0">
+              <a:buNone/>
+            </a:pPr>
+            <a:r>
+              <a:rPr lang="en-US" sz="1000" dirty="0">
+                <a:solidFill>
+                  <a:srgbClr val="6B7280"/>
+                </a:solidFill>
+                <a:latin typeface="Calibri" pitchFamily="34" charset="0"/>
+                <a:ea typeface="Calibri" pitchFamily="34" charset="-122"/>
+                <a:cs typeface="Calibri" pitchFamily="34" charset="-120"/>
+              </a:rPr>
+              <a:t>HR, Finance, IT segmented to contain lateral movement</a:t>
+            </a:r>
+            <a:endParaRPr lang="en-US" sz="1000" dirty="0"/>
+          </a:p>
+        </p:txBody>
+      </p:sp>
+      <p:sp>
+        <p:nvSpPr>
+          <p:cNvPr id="17" name="Text 14"/>
           <p:cNvSpPr txBox="1"/>
           <p:nvPr/>
         </p:nvSpPr>
@@ -3187,7 +3173,7 @@
       </p:sp>
       <p:sp>
         <p:nvSpPr>
-          <p:cNvPr id="20" name="Text 18"/>
+          <p:cNvPr id="18" name="Text 15"/>
           <p:cNvSpPr txBox="1"/>
           <p:nvPr/>
         </p:nvSpPr>
@@ -3218,7 +3204,7 @@
                 <a:ea typeface="Calibri" pitchFamily="34" charset="-122"/>
                 <a:cs typeface="Calibri" pitchFamily="34" charset="-120"/>
               </a:rPr>
-              <a:t>10</a:t>
+              <a:t>9</a:t>
             </a:r>
             <a:endParaRPr lang="en-US" sz="900" dirty="0"/>
           </a:p>
@@ -3321,46 +3307,78 @@
                 <a:ea typeface="Cambria" pitchFamily="34" charset="-122"/>
                 <a:cs typeface="Cambria" pitchFamily="34" charset="-120"/>
               </a:rPr>
-              <a:t>How It Works: Never Trust, Always Verify</a:t>
+              <a:t>Why Zero Trust, Specifically for FinSecure</a:t>
             </a:r>
             <a:endParaRPr lang="en-US" sz="3200" dirty="0"/>
           </a:p>
         </p:txBody>
       </p:sp>
-      <p:pic>
-        <p:nvPicPr>
-          <p:cNvPr id="4" name="Image 0" descr="C:\Users\rareb\AppData\Local\Temp\claude\C--Users-rareb-OneDrive-Desktop-University-Of-Winnipeg-Case-Studies-Issues---Capstone-Project-V--Balogun-NSD-Fall-2023\288735ab-ce17-49e2-9255-b3c08ab0bae8\scratchpad\zero-trust-flow.png">    </p:cNvPr>
-          <p:cNvPicPr>
-            <a:picLocks noChangeAspect="1"/>
-          </p:cNvPicPr>
-          <p:nvPr/>
-        </p:nvPicPr>
-        <p:blipFill>
-          <a:blip r:embed="rId1"/>
-          <a:stretch>
-            <a:fillRect/>
-          </a:stretch>
-        </p:blipFill>
-        <p:spPr>
-          <a:xfrm>
-            <a:off x="1965960" y="1554480"/>
-            <a:ext cx="8229600" cy="3785721"/>
-          </a:xfrm>
-          <a:prstGeom prst="rect">
-            <a:avLst/>
-          </a:prstGeom>
-        </p:spPr>
-      </p:pic>
-      <p:sp>
-        <p:nvSpPr>
-          <p:cNvPr id="5" name="Text 2"/>
-          <p:cNvSpPr txBox="1"/>
-          <p:nvPr/>
-        </p:nvSpPr>
-        <p:spPr>
-          <a:xfrm>
-            <a:off x="548640" y="5532120"/>
-            <a:ext cx="11064240" cy="1051560"/>
+      <p:sp>
+        <p:nvSpPr>
+          <p:cNvPr id="4" name="Shape 2"/>
+          <p:cNvSpPr/>
+          <p:nvPr/>
+        </p:nvSpPr>
+        <p:spPr>
+          <a:xfrm>
+            <a:off x="548640" y="1783080"/>
+            <a:ext cx="11109960" cy="1051560"/>
+          </a:xfrm>
+          <a:prstGeom prst="roundRect">
+            <a:avLst>
+              <a:gd name="adj" fmla="val 6957"/>
+            </a:avLst>
+          </a:prstGeom>
+          <a:solidFill>
+            <a:srgbClr val="FFFFFF"/>
+          </a:solidFill>
+          <a:ln w="12700">
+            <a:solidFill>
+              <a:srgbClr val="CADCFC"/>
+            </a:solidFill>
+            <a:prstDash val="solid"/>
+          </a:ln>
+          <a:effectLst>
+            <a:outerShdw sx="100000" sy="100000" kx="0" ky="0" algn="bl" rotWithShape="0" blurRad="63500" dist="25400" dir="5400000">
+              <a:srgbClr val="9AA5C7">
+                <a:alpha val="25000"/>
+              </a:srgbClr>
+            </a:outerShdw>
+          </a:effectLst>
+        </p:spPr>
+      </p:sp>
+      <p:sp>
+        <p:nvSpPr>
+          <p:cNvPr id="5" name="Shape 3"/>
+          <p:cNvSpPr/>
+          <p:nvPr/>
+        </p:nvSpPr>
+        <p:spPr>
+          <a:xfrm>
+            <a:off x="548640" y="1783080"/>
+            <a:ext cx="1737360" cy="1051560"/>
+          </a:xfrm>
+          <a:prstGeom prst="rect">
+            <a:avLst>
+              <a:gd name="adj" fmla="val 6957"/>
+            </a:avLst>
+          </a:prstGeom>
+          <a:solidFill>
+            <a:srgbClr val="1E2761"/>
+          </a:solidFill>
+          <a:ln/>
+        </p:spPr>
+      </p:sp>
+      <p:sp>
+        <p:nvSpPr>
+          <p:cNvPr id="6" name="Text 4"/>
+          <p:cNvSpPr txBox="1"/>
+          <p:nvPr/>
+        </p:nvSpPr>
+        <p:spPr>
+          <a:xfrm>
+            <a:off x="548640" y="1783080"/>
+            <a:ext cx="1737360" cy="1051560"/>
           </a:xfrm>
           <a:prstGeom prst="rect">
             <a:avLst/>
@@ -3372,10 +3390,46 @@
           <a:bodyPr wrap="square" rtlCol="0" anchor="ctr"/>
           <a:lstStyle/>
           <a:p>
-            <a:pPr indent="0" marL="0">
-              <a:spcAft>
-                <a:spcPts val="800"/>
-              </a:spcAft>
+            <a:pPr algn="ctr" indent="0" marL="0">
+              <a:buNone/>
+            </a:pPr>
+            <a:r>
+              <a:rPr lang="en-US" sz="1600" b="1" dirty="0">
+                <a:solidFill>
+                  <a:srgbClr val="FFFFFF"/>
+                </a:solidFill>
+                <a:latin typeface="Cambria" pitchFamily="34" charset="0"/>
+                <a:ea typeface="Cambria" pitchFamily="34" charset="-122"/>
+                <a:cs typeface="Cambria" pitchFamily="34" charset="-120"/>
+              </a:rPr>
+              <a:t>PCI DSS</a:t>
+            </a:r>
+            <a:endParaRPr lang="en-US" sz="1600" dirty="0"/>
+          </a:p>
+        </p:txBody>
+      </p:sp>
+      <p:sp>
+        <p:nvSpPr>
+          <p:cNvPr id="7" name="Text 5"/>
+          <p:cNvSpPr txBox="1"/>
+          <p:nvPr/>
+        </p:nvSpPr>
+        <p:spPr>
+          <a:xfrm>
+            <a:off x="2514600" y="1892808"/>
+            <a:ext cx="4297680" cy="822960"/>
+          </a:xfrm>
+          <a:prstGeom prst="rect">
+            <a:avLst/>
+          </a:prstGeom>
+          <a:noFill/>
+          <a:ln/>
+        </p:spPr>
+        <p:txBody>
+          <a:bodyPr wrap="square" rtlCol="0" anchor="ctr"/>
+          <a:lstStyle/>
+          <a:p>
+            <a:pPr indent="0" marL="0">
               <a:buNone/>
             </a:pPr>
             <a:r>
@@ -3387,15 +3441,168 @@
                 <a:ea typeface="Calibri" pitchFamily="34" charset="-122"/>
                 <a:cs typeface="Calibri" pitchFamily="34" charset="-120"/>
               </a:rPr>
-              <a:t>1. Inventory users, devices, and data flow</a:t>
+              <a:t>Least privilege, MFA, network segmentation</a:t>
             </a:r>
             <a:endParaRPr lang="en-US" sz="1250" dirty="0"/>
           </a:p>
-          <a:p>
-            <a:pPr indent="0" marL="0">
-              <a:spcAft>
-                <a:spcPts val="800"/>
-              </a:spcAft>
+        </p:txBody>
+      </p:sp>
+      <p:sp>
+        <p:nvSpPr>
+          <p:cNvPr id="8" name="Text 6"/>
+          <p:cNvSpPr txBox="1"/>
+          <p:nvPr/>
+        </p:nvSpPr>
+        <p:spPr>
+          <a:xfrm>
+            <a:off x="6949440" y="1892808"/>
+            <a:ext cx="4480560" cy="822960"/>
+          </a:xfrm>
+          <a:prstGeom prst="rect">
+            <a:avLst/>
+          </a:prstGeom>
+          <a:noFill/>
+          <a:ln/>
+        </p:spPr>
+        <p:txBody>
+          <a:bodyPr wrap="square" rtlCol="0" anchor="ctr"/>
+          <a:lstStyle/>
+          <a:p>
+            <a:pPr indent="0" marL="0">
+              <a:buNone/>
+            </a:pPr>
+            <a:r>
+              <a:rPr lang="en-US" sz="1250" i="1" dirty="0">
+                <a:solidFill>
+                  <a:srgbClr val="3B4A9E"/>
+                </a:solidFill>
+                <a:latin typeface="Calibri" pitchFamily="34" charset="0"/>
+                <a:ea typeface="Calibri" pitchFamily="34" charset="-122"/>
+                <a:cs typeface="Calibri" pitchFamily="34" charset="-120"/>
+              </a:rPr>
+              <a:t>→  Identity verification + micro-segmentation</a:t>
+            </a:r>
+            <a:endParaRPr lang="en-US" sz="1250" dirty="0"/>
+          </a:p>
+        </p:txBody>
+      </p:sp>
+      <p:sp>
+        <p:nvSpPr>
+          <p:cNvPr id="9" name="Shape 7"/>
+          <p:cNvSpPr/>
+          <p:nvPr/>
+        </p:nvSpPr>
+        <p:spPr>
+          <a:xfrm>
+            <a:off x="548640" y="3017520"/>
+            <a:ext cx="11109960" cy="1051560"/>
+          </a:xfrm>
+          <a:prstGeom prst="roundRect">
+            <a:avLst>
+              <a:gd name="adj" fmla="val 6957"/>
+            </a:avLst>
+          </a:prstGeom>
+          <a:solidFill>
+            <a:srgbClr val="FFFFFF"/>
+          </a:solidFill>
+          <a:ln w="12700">
+            <a:solidFill>
+              <a:srgbClr val="CADCFC"/>
+            </a:solidFill>
+            <a:prstDash val="solid"/>
+          </a:ln>
+          <a:effectLst>
+            <a:outerShdw sx="100000" sy="100000" kx="0" ky="0" algn="bl" rotWithShape="0" blurRad="63500" dist="25400" dir="5400000">
+              <a:srgbClr val="9AA5C7">
+                <a:alpha val="25000"/>
+              </a:srgbClr>
+            </a:outerShdw>
+          </a:effectLst>
+        </p:spPr>
+      </p:sp>
+      <p:sp>
+        <p:nvSpPr>
+          <p:cNvPr id="10" name="Shape 8"/>
+          <p:cNvSpPr/>
+          <p:nvPr/>
+        </p:nvSpPr>
+        <p:spPr>
+          <a:xfrm>
+            <a:off x="548640" y="3017520"/>
+            <a:ext cx="1737360" cy="1051560"/>
+          </a:xfrm>
+          <a:prstGeom prst="rect">
+            <a:avLst>
+              <a:gd name="adj" fmla="val 6957"/>
+            </a:avLst>
+          </a:prstGeom>
+          <a:solidFill>
+            <a:srgbClr val="1E2761"/>
+          </a:solidFill>
+          <a:ln/>
+        </p:spPr>
+      </p:sp>
+      <p:sp>
+        <p:nvSpPr>
+          <p:cNvPr id="11" name="Text 9"/>
+          <p:cNvSpPr txBox="1"/>
+          <p:nvPr/>
+        </p:nvSpPr>
+        <p:spPr>
+          <a:xfrm>
+            <a:off x="548640" y="3017520"/>
+            <a:ext cx="1737360" cy="1051560"/>
+          </a:xfrm>
+          <a:prstGeom prst="rect">
+            <a:avLst/>
+          </a:prstGeom>
+          <a:noFill/>
+          <a:ln/>
+        </p:spPr>
+        <p:txBody>
+          <a:bodyPr wrap="square" rtlCol="0" anchor="ctr"/>
+          <a:lstStyle/>
+          <a:p>
+            <a:pPr algn="ctr" indent="0" marL="0">
+              <a:buNone/>
+            </a:pPr>
+            <a:r>
+              <a:rPr lang="en-US" sz="1600" b="1" dirty="0">
+                <a:solidFill>
+                  <a:srgbClr val="FFFFFF"/>
+                </a:solidFill>
+                <a:latin typeface="Cambria" pitchFamily="34" charset="0"/>
+                <a:ea typeface="Cambria" pitchFamily="34" charset="-122"/>
+                <a:cs typeface="Cambria" pitchFamily="34" charset="-120"/>
+              </a:rPr>
+              <a:t>SOX</a:t>
+            </a:r>
+            <a:endParaRPr lang="en-US" sz="1600" dirty="0"/>
+          </a:p>
+        </p:txBody>
+      </p:sp>
+      <p:sp>
+        <p:nvSpPr>
+          <p:cNvPr id="12" name="Text 10"/>
+          <p:cNvSpPr txBox="1"/>
+          <p:nvPr/>
+        </p:nvSpPr>
+        <p:spPr>
+          <a:xfrm>
+            <a:off x="2514600" y="3127248"/>
+            <a:ext cx="4297680" cy="822960"/>
+          </a:xfrm>
+          <a:prstGeom prst="rect">
+            <a:avLst/>
+          </a:prstGeom>
+          <a:noFill/>
+          <a:ln/>
+        </p:spPr>
+        <p:txBody>
+          <a:bodyPr wrap="square" rtlCol="0" anchor="ctr"/>
+          <a:lstStyle/>
+          <a:p>
+            <a:pPr indent="0" marL="0">
               <a:buNone/>
             </a:pPr>
             <a:r>
@@ -3407,15 +3614,168 @@
                 <a:ea typeface="Calibri" pitchFamily="34" charset="-122"/>
                 <a:cs typeface="Calibri" pitchFamily="34" charset="-120"/>
               </a:rPr>
-              <a:t>2. Define the protected surface (CDE + core servers)</a:t>
+              <a:t>Strong internal controls over financial data</a:t>
             </a:r>
             <a:endParaRPr lang="en-US" sz="1250" dirty="0"/>
           </a:p>
-          <a:p>
-            <a:pPr indent="0" marL="0">
-              <a:spcAft>
-                <a:spcPts val="800"/>
-              </a:spcAft>
+        </p:txBody>
+      </p:sp>
+      <p:sp>
+        <p:nvSpPr>
+          <p:cNvPr id="13" name="Text 11"/>
+          <p:cNvSpPr txBox="1"/>
+          <p:nvPr/>
+        </p:nvSpPr>
+        <p:spPr>
+          <a:xfrm>
+            <a:off x="6949440" y="3127248"/>
+            <a:ext cx="4480560" cy="822960"/>
+          </a:xfrm>
+          <a:prstGeom prst="rect">
+            <a:avLst/>
+          </a:prstGeom>
+          <a:noFill/>
+          <a:ln/>
+        </p:spPr>
+        <p:txBody>
+          <a:bodyPr wrap="square" rtlCol="0" anchor="ctr"/>
+          <a:lstStyle/>
+          <a:p>
+            <a:pPr indent="0" marL="0">
+              <a:buNone/>
+            </a:pPr>
+            <a:r>
+              <a:rPr lang="en-US" sz="1250" i="1" dirty="0">
+                <a:solidFill>
+                  <a:srgbClr val="3B4A9E"/>
+                </a:solidFill>
+                <a:latin typeface="Calibri" pitchFamily="34" charset="0"/>
+                <a:ea typeface="Calibri" pitchFamily="34" charset="-122"/>
+                <a:cs typeface="Calibri" pitchFamily="34" charset="-120"/>
+              </a:rPr>
+              <a:t>→  Continuous verification, minimized trust boundaries</a:t>
+            </a:r>
+            <a:endParaRPr lang="en-US" sz="1250" dirty="0"/>
+          </a:p>
+        </p:txBody>
+      </p:sp>
+      <p:sp>
+        <p:nvSpPr>
+          <p:cNvPr id="14" name="Shape 12"/>
+          <p:cNvSpPr/>
+          <p:nvPr/>
+        </p:nvSpPr>
+        <p:spPr>
+          <a:xfrm>
+            <a:off x="548640" y="4251960"/>
+            <a:ext cx="11109960" cy="1051560"/>
+          </a:xfrm>
+          <a:prstGeom prst="roundRect">
+            <a:avLst>
+              <a:gd name="adj" fmla="val 6957"/>
+            </a:avLst>
+          </a:prstGeom>
+          <a:solidFill>
+            <a:srgbClr val="FFFFFF"/>
+          </a:solidFill>
+          <a:ln w="12700">
+            <a:solidFill>
+              <a:srgbClr val="CADCFC"/>
+            </a:solidFill>
+            <a:prstDash val="solid"/>
+          </a:ln>
+          <a:effectLst>
+            <a:outerShdw sx="100000" sy="100000" kx="0" ky="0" algn="bl" rotWithShape="0" blurRad="63500" dist="25400" dir="5400000">
+              <a:srgbClr val="9AA5C7">
+                <a:alpha val="25000"/>
+              </a:srgbClr>
+            </a:outerShdw>
+          </a:effectLst>
+        </p:spPr>
+      </p:sp>
+      <p:sp>
+        <p:nvSpPr>
+          <p:cNvPr id="15" name="Shape 13"/>
+          <p:cNvSpPr/>
+          <p:nvPr/>
+        </p:nvSpPr>
+        <p:spPr>
+          <a:xfrm>
+            <a:off x="548640" y="4251960"/>
+            <a:ext cx="1737360" cy="1051560"/>
+          </a:xfrm>
+          <a:prstGeom prst="rect">
+            <a:avLst>
+              <a:gd name="adj" fmla="val 6957"/>
+            </a:avLst>
+          </a:prstGeom>
+          <a:solidFill>
+            <a:srgbClr val="1E2761"/>
+          </a:solidFill>
+          <a:ln/>
+        </p:spPr>
+      </p:sp>
+      <p:sp>
+        <p:nvSpPr>
+          <p:cNvPr id="16" name="Text 14"/>
+          <p:cNvSpPr txBox="1"/>
+          <p:nvPr/>
+        </p:nvSpPr>
+        <p:spPr>
+          <a:xfrm>
+            <a:off x="548640" y="4251960"/>
+            <a:ext cx="1737360" cy="1051560"/>
+          </a:xfrm>
+          <a:prstGeom prst="rect">
+            <a:avLst/>
+          </a:prstGeom>
+          <a:noFill/>
+          <a:ln/>
+        </p:spPr>
+        <p:txBody>
+          <a:bodyPr wrap="square" rtlCol="0" anchor="ctr"/>
+          <a:lstStyle/>
+          <a:p>
+            <a:pPr algn="ctr" indent="0" marL="0">
+              <a:buNone/>
+            </a:pPr>
+            <a:r>
+              <a:rPr lang="en-US" sz="1600" b="1" dirty="0">
+                <a:solidFill>
+                  <a:srgbClr val="FFFFFF"/>
+                </a:solidFill>
+                <a:latin typeface="Cambria" pitchFamily="34" charset="0"/>
+                <a:ea typeface="Cambria" pitchFamily="34" charset="-122"/>
+                <a:cs typeface="Cambria" pitchFamily="34" charset="-120"/>
+              </a:rPr>
+              <a:t>GLBA</a:t>
+            </a:r>
+            <a:endParaRPr lang="en-US" sz="1600" dirty="0"/>
+          </a:p>
+        </p:txBody>
+      </p:sp>
+      <p:sp>
+        <p:nvSpPr>
+          <p:cNvPr id="17" name="Text 15"/>
+          <p:cNvSpPr txBox="1"/>
+          <p:nvPr/>
+        </p:nvSpPr>
+        <p:spPr>
+          <a:xfrm>
+            <a:off x="2514600" y="4361688"/>
+            <a:ext cx="4297680" cy="822960"/>
+          </a:xfrm>
+          <a:prstGeom prst="rect">
+            <a:avLst/>
+          </a:prstGeom>
+          <a:noFill/>
+          <a:ln/>
+        </p:spPr>
+        <p:txBody>
+          <a:bodyPr wrap="square" rtlCol="0" anchor="ctr"/>
+          <a:lstStyle/>
+          <a:p>
+            <a:pPr indent="0" marL="0">
               <a:buNone/>
             </a:pPr>
             <a:r>
@@ -3427,27 +3787,46 @@
                 <a:ea typeface="Calibri" pitchFamily="34" charset="-122"/>
                 <a:cs typeface="Calibri" pitchFamily="34" charset="-120"/>
               </a:rPr>
-              <a:t>3. Deploy AAA + Active Directory: SSO, MFA, least privilege</a:t>
+              <a:t>Strong protection of nonpublic personal information</a:t>
             </a:r>
             <a:endParaRPr lang="en-US" sz="1250" dirty="0"/>
           </a:p>
-          <a:p>
-            <a:pPr indent="0" marL="0">
-              <a:spcAft>
-                <a:spcPts val="800"/>
-              </a:spcAft>
-              <a:buNone/>
-            </a:pPr>
-            <a:r>
-              <a:rPr lang="en-US" sz="1250" dirty="0">
-                <a:solidFill>
-                  <a:srgbClr val="1A1A1A"/>
-                </a:solidFill>
-                <a:latin typeface="Calibri" pitchFamily="34" charset="0"/>
-                <a:ea typeface="Calibri" pitchFamily="34" charset="-122"/>
-                <a:cs typeface="Calibri" pitchFamily="34" charset="-120"/>
-              </a:rPr>
-              <a:t>4. Continuous monitoring + automated NGFW response</a:t>
+        </p:txBody>
+      </p:sp>
+      <p:sp>
+        <p:nvSpPr>
+          <p:cNvPr id="18" name="Text 16"/>
+          <p:cNvSpPr txBox="1"/>
+          <p:nvPr/>
+        </p:nvSpPr>
+        <p:spPr>
+          <a:xfrm>
+            <a:off x="6949440" y="4361688"/>
+            <a:ext cx="4480560" cy="822960"/>
+          </a:xfrm>
+          <a:prstGeom prst="rect">
+            <a:avLst/>
+          </a:prstGeom>
+          <a:noFill/>
+          <a:ln/>
+        </p:spPr>
+        <p:txBody>
+          <a:bodyPr wrap="square" rtlCol="0" anchor="ctr"/>
+          <a:lstStyle/>
+          <a:p>
+            <a:pPr indent="0" marL="0">
+              <a:buNone/>
+            </a:pPr>
+            <a:r>
+              <a:rPr lang="en-US" sz="1250" i="1" dirty="0">
+                <a:solidFill>
+                  <a:srgbClr val="3B4A9E"/>
+                </a:solidFill>
+                <a:latin typeface="Calibri" pitchFamily="34" charset="0"/>
+                <a:ea typeface="Calibri" pitchFamily="34" charset="-122"/>
+                <a:cs typeface="Calibri" pitchFamily="34" charset="-120"/>
+              </a:rPr>
+              <a:t>→  Least-privilege access model</a:t>
             </a:r>
             <a:endParaRPr lang="en-US" sz="1250" dirty="0"/>
           </a:p>
@@ -3455,7 +3834,7 @@
       </p:sp>
       <p:sp>
         <p:nvSpPr>
-          <p:cNvPr id="6" name="Text 3"/>
+          <p:cNvPr id="19" name="Text 17"/>
           <p:cNvSpPr txBox="1"/>
           <p:nvPr/>
         </p:nvSpPr>
@@ -3494,7 +3873,7 @@
       </p:sp>
       <p:sp>
         <p:nvSpPr>
-          <p:cNvPr id="7" name="Text 4"/>
+          <p:cNvPr id="20" name="Text 18"/>
           <p:cNvSpPr txBox="1"/>
           <p:nvPr/>
         </p:nvSpPr>
@@ -3525,7 +3904,7 @@
                 <a:ea typeface="Calibri" pitchFamily="34" charset="-122"/>
                 <a:cs typeface="Calibri" pitchFamily="34" charset="-120"/>
               </a:rPr>
-              <a:t>11</a:t>
+              <a:t>10</a:t>
             </a:r>
             <a:endParaRPr lang="en-US" sz="900" dirty="0"/>
           </a:p>
@@ -3589,7 +3968,7 @@
                 <a:ea typeface="Calibri" pitchFamily="34" charset="-122"/>
                 <a:cs typeface="Calibri" pitchFamily="34" charset="-120"/>
               </a:rPr>
-              <a:t>RISK ASSESSMENT</a:t>
+              <a:t>ZERO TRUST ARCHITECTURE</a:t>
             </a:r>
             <a:endParaRPr lang="en-US" sz="1200" dirty="0"/>
           </a:p>
@@ -3628,6 +4007,313 @@
                 <a:ea typeface="Cambria" pitchFamily="34" charset="-122"/>
                 <a:cs typeface="Cambria" pitchFamily="34" charset="-120"/>
               </a:rPr>
+              <a:t>How It Works: Never Trust, Always Verify</a:t>
+            </a:r>
+            <a:endParaRPr lang="en-US" sz="3200" dirty="0"/>
+          </a:p>
+        </p:txBody>
+      </p:sp>
+      <p:pic>
+        <p:nvPicPr>
+          <p:cNvPr id="4" name="Image 0" descr="C:\Users\rareb\AppData\Local\Temp\claude\C--Users-rareb-OneDrive-Desktop-University-Of-Winnipeg-Case-Studies-Issues---Capstone-Project-V--Balogun-NSD-Fall-2023\288735ab-ce17-49e2-9255-b3c08ab0bae8\scratchpad\zero-trust-flow.png">    </p:cNvPr>
+          <p:cNvPicPr>
+            <a:picLocks noChangeAspect="1"/>
+          </p:cNvPicPr>
+          <p:nvPr/>
+        </p:nvPicPr>
+        <p:blipFill>
+          <a:blip r:embed="rId1"/>
+          <a:stretch>
+            <a:fillRect/>
+          </a:stretch>
+        </p:blipFill>
+        <p:spPr>
+          <a:xfrm>
+            <a:off x="1965960" y="1554480"/>
+            <a:ext cx="8229600" cy="3785721"/>
+          </a:xfrm>
+          <a:prstGeom prst="rect">
+            <a:avLst/>
+          </a:prstGeom>
+        </p:spPr>
+      </p:pic>
+      <p:sp>
+        <p:nvSpPr>
+          <p:cNvPr id="5" name="Text 2"/>
+          <p:cNvSpPr txBox="1"/>
+          <p:nvPr/>
+        </p:nvSpPr>
+        <p:spPr>
+          <a:xfrm>
+            <a:off x="548640" y="5532120"/>
+            <a:ext cx="11064240" cy="1051560"/>
+          </a:xfrm>
+          <a:prstGeom prst="rect">
+            <a:avLst/>
+          </a:prstGeom>
+          <a:noFill/>
+          <a:ln/>
+        </p:spPr>
+        <p:txBody>
+          <a:bodyPr wrap="square" rtlCol="0" anchor="ctr"/>
+          <a:lstStyle/>
+          <a:p>
+            <a:pPr indent="0" marL="0">
+              <a:spcAft>
+                <a:spcPts val="800"/>
+              </a:spcAft>
+              <a:buNone/>
+            </a:pPr>
+            <a:r>
+              <a:rPr lang="en-US" sz="1250" dirty="0">
+                <a:solidFill>
+                  <a:srgbClr val="1A1A1A"/>
+                </a:solidFill>
+                <a:latin typeface="Calibri" pitchFamily="34" charset="0"/>
+                <a:ea typeface="Calibri" pitchFamily="34" charset="-122"/>
+                <a:cs typeface="Calibri" pitchFamily="34" charset="-120"/>
+              </a:rPr>
+              <a:t>1. Inventory users, devices, and data flow</a:t>
+            </a:r>
+            <a:endParaRPr lang="en-US" sz="1250" dirty="0"/>
+          </a:p>
+          <a:p>
+            <a:pPr indent="0" marL="0">
+              <a:spcAft>
+                <a:spcPts val="800"/>
+              </a:spcAft>
+              <a:buNone/>
+            </a:pPr>
+            <a:r>
+              <a:rPr lang="en-US" sz="1250" dirty="0">
+                <a:solidFill>
+                  <a:srgbClr val="1A1A1A"/>
+                </a:solidFill>
+                <a:latin typeface="Calibri" pitchFamily="34" charset="0"/>
+                <a:ea typeface="Calibri" pitchFamily="34" charset="-122"/>
+                <a:cs typeface="Calibri" pitchFamily="34" charset="-120"/>
+              </a:rPr>
+              <a:t>2. Define the protected surface (CDE + core servers)</a:t>
+            </a:r>
+            <a:endParaRPr lang="en-US" sz="1250" dirty="0"/>
+          </a:p>
+          <a:p>
+            <a:pPr indent="0" marL="0">
+              <a:spcAft>
+                <a:spcPts val="800"/>
+              </a:spcAft>
+              <a:buNone/>
+            </a:pPr>
+            <a:r>
+              <a:rPr lang="en-US" sz="1250" dirty="0">
+                <a:solidFill>
+                  <a:srgbClr val="1A1A1A"/>
+                </a:solidFill>
+                <a:latin typeface="Calibri" pitchFamily="34" charset="0"/>
+                <a:ea typeface="Calibri" pitchFamily="34" charset="-122"/>
+                <a:cs typeface="Calibri" pitchFamily="34" charset="-120"/>
+              </a:rPr>
+              <a:t>3. Deploy AAA + Active Directory: SSO, MFA, least privilege</a:t>
+            </a:r>
+            <a:endParaRPr lang="en-US" sz="1250" dirty="0"/>
+          </a:p>
+          <a:p>
+            <a:pPr indent="0" marL="0">
+              <a:spcAft>
+                <a:spcPts val="800"/>
+              </a:spcAft>
+              <a:buNone/>
+            </a:pPr>
+            <a:r>
+              <a:rPr lang="en-US" sz="1250" dirty="0">
+                <a:solidFill>
+                  <a:srgbClr val="1A1A1A"/>
+                </a:solidFill>
+                <a:latin typeface="Calibri" pitchFamily="34" charset="0"/>
+                <a:ea typeface="Calibri" pitchFamily="34" charset="-122"/>
+                <a:cs typeface="Calibri" pitchFamily="34" charset="-120"/>
+              </a:rPr>
+              <a:t>4. Continuous monitoring + automated NGFW response</a:t>
+            </a:r>
+            <a:endParaRPr lang="en-US" sz="1250" dirty="0"/>
+          </a:p>
+        </p:txBody>
+      </p:sp>
+      <p:sp>
+        <p:nvSpPr>
+          <p:cNvPr id="6" name="Text 3"/>
+          <p:cNvSpPr txBox="1"/>
+          <p:nvPr/>
+        </p:nvSpPr>
+        <p:spPr>
+          <a:xfrm>
+            <a:off x="457200" y="6473952"/>
+            <a:ext cx="7315200" cy="274320"/>
+          </a:xfrm>
+          <a:prstGeom prst="rect">
+            <a:avLst/>
+          </a:prstGeom>
+          <a:noFill/>
+          <a:ln/>
+        </p:spPr>
+        <p:txBody>
+          <a:bodyPr wrap="square" rtlCol="0" anchor="ctr"/>
+          <a:lstStyle/>
+          <a:p>
+            <a:pPr indent="0" marL="0">
+              <a:buNone/>
+            </a:pPr>
+            <a:r>
+              <a:rPr lang="en-US" sz="900" dirty="0">
+                <a:solidFill>
+                  <a:srgbClr val="6B7280"/>
+                </a:solidFill>
+                <a:latin typeface="Calibri" pitchFamily="34" charset="0"/>
+                <a:ea typeface="Calibri" pitchFamily="34" charset="-122"/>
+                <a:cs typeface="Calibri" pitchFamily="34" charset="-120"/>
+              </a:rPr>
+              <a:t>FinSecure Technologies Inc. — Network Security Capstone</a:t>
+            </a:r>
+            <a:endParaRPr lang="en-US" sz="900" dirty="0"/>
+          </a:p>
+        </p:txBody>
+      </p:sp>
+      <p:sp>
+        <p:nvSpPr>
+          <p:cNvPr id="7" name="Text 4"/>
+          <p:cNvSpPr txBox="1"/>
+          <p:nvPr/>
+        </p:nvSpPr>
+        <p:spPr>
+          <a:xfrm>
+            <a:off x="11274552" y="6473952"/>
+            <a:ext cx="457200" cy="274320"/>
+          </a:xfrm>
+          <a:prstGeom prst="rect">
+            <a:avLst/>
+          </a:prstGeom>
+          <a:noFill/>
+          <a:ln/>
+        </p:spPr>
+        <p:txBody>
+          <a:bodyPr wrap="square" rtlCol="0" anchor="ctr"/>
+          <a:lstStyle/>
+          <a:p>
+            <a:pPr algn="r" indent="0" marL="0">
+              <a:buNone/>
+            </a:pPr>
+            <a:r>
+              <a:rPr lang="en-US" sz="900" dirty="0">
+                <a:solidFill>
+                  <a:srgbClr val="6B7280"/>
+                </a:solidFill>
+                <a:latin typeface="Calibri" pitchFamily="34" charset="0"/>
+                <a:ea typeface="Calibri" pitchFamily="34" charset="-122"/>
+                <a:cs typeface="Calibri" pitchFamily="34" charset="-120"/>
+              </a:rPr>
+              <a:t>11</a:t>
+            </a:r>
+            <a:endParaRPr lang="en-US" sz="900" dirty="0"/>
+          </a:p>
+        </p:txBody>
+      </p:sp>
+    </p:spTree>
+  </p:cSld>
+  <p:clrMapOvr>
+    <a:masterClrMapping/>
+  </p:clrMapOvr>
+</p:sld>
+</file>
+
+<file path=ppt/slides/slide13.xml><?xml version="1.0" encoding="utf-8"?>
+<p:sld xmlns:a="http://schemas.openxmlformats.org/drawingml/2006/main" xmlns:r="http://schemas.openxmlformats.org/officeDocument/2006/relationships" xmlns:p="http://schemas.openxmlformats.org/presentationml/2006/main">
+  <p:cSld name="Slide 13">
+    <p:spTree>
+      <p:nvGrpSpPr>
+        <p:cNvPr id="1" name=""/>
+        <p:cNvGrpSpPr/>
+        <p:nvPr/>
+      </p:nvGrpSpPr>
+      <p:grpSpPr>
+        <a:xfrm>
+          <a:off x="0" y="0"/>
+          <a:ext cx="0" cy="0"/>
+          <a:chOff x="0" y="0"/>
+          <a:chExt cx="0" cy="0"/>
+        </a:xfrm>
+      </p:grpSpPr>
+      <p:sp>
+        <p:nvSpPr>
+          <p:cNvPr id="2" name="Text 0"/>
+          <p:cNvSpPr txBox="1"/>
+          <p:nvPr/>
+        </p:nvSpPr>
+        <p:spPr>
+          <a:xfrm>
+            <a:off x="548640" y="365760"/>
+            <a:ext cx="7315200" cy="320040"/>
+          </a:xfrm>
+          <a:prstGeom prst="rect">
+            <a:avLst/>
+          </a:prstGeom>
+          <a:noFill/>
+          <a:ln/>
+        </p:spPr>
+        <p:txBody>
+          <a:bodyPr wrap="square" rtlCol="0" anchor="ctr"/>
+          <a:lstStyle/>
+          <a:p>
+            <a:pPr indent="0" marL="0">
+              <a:buNone/>
+            </a:pPr>
+            <a:r>
+              <a:rPr lang="en-US" sz="1200" b="1" spc="200" kern="0" dirty="0">
+                <a:solidFill>
+                  <a:srgbClr val="1E2761"/>
+                </a:solidFill>
+                <a:latin typeface="Calibri" pitchFamily="34" charset="0"/>
+                <a:ea typeface="Calibri" pitchFamily="34" charset="-122"/>
+                <a:cs typeface="Calibri" pitchFamily="34" charset="-120"/>
+              </a:rPr>
+              <a:t>RISK ASSESSMENT</a:t>
+            </a:r>
+            <a:endParaRPr lang="en-US" sz="1200" dirty="0"/>
+          </a:p>
+        </p:txBody>
+      </p:sp>
+      <p:sp>
+        <p:nvSpPr>
+          <p:cNvPr id="3" name="Text 1"/>
+          <p:cNvSpPr txBox="1"/>
+          <p:nvPr/>
+        </p:nvSpPr>
+        <p:spPr>
+          <a:xfrm>
+            <a:off x="548640" y="658368"/>
+            <a:ext cx="11064240" cy="822960"/>
+          </a:xfrm>
+          <a:prstGeom prst="rect">
+            <a:avLst/>
+          </a:prstGeom>
+          <a:noFill/>
+          <a:ln/>
+        </p:spPr>
+        <p:txBody>
+          <a:bodyPr wrap="square" rtlCol="0" anchor="ctr"/>
+          <a:lstStyle/>
+          <a:p>
+            <a:pPr indent="0" marL="0">
+              <a:buNone/>
+            </a:pPr>
+            <a:r>
+              <a:rPr lang="en-US" sz="3200" b="1" dirty="0">
+                <a:solidFill>
+                  <a:srgbClr val="1A1A1A"/>
+                </a:solidFill>
+                <a:latin typeface="Cambria" pitchFamily="34" charset="0"/>
+                <a:ea typeface="Cambria" pitchFamily="34" charset="-122"/>
+                <a:cs typeface="Cambria" pitchFamily="34" charset="-120"/>
+              </a:rPr>
               <a:t>Highest-Priority Risks (Rated Extreme)</a:t>
             </a:r>
             <a:endParaRPr lang="en-US" sz="3200" dirty="0"/>
@@ -3636,7 +4322,7 @@
       </p:sp>
       <p:graphicFrame>
         <p:nvGraphicFramePr>
-          <p:cNvPr id="13" name="Table 0"/>
+          <p:cNvPr id="14" name="Table 0"/>
           <p:cNvGraphicFramePr>
             <a:graphicFrameLocks noGrp="1"/>
           </p:cNvGraphicFramePr>
@@ -5026,677 +5712,6 @@
 </p:sld>
 </file>
 
-<file path=ppt/slides/slide13.xml><?xml version="1.0" encoding="utf-8"?>
-<p:sld xmlns:a="http://schemas.openxmlformats.org/drawingml/2006/main" xmlns:r="http://schemas.openxmlformats.org/officeDocument/2006/relationships" xmlns:p="http://schemas.openxmlformats.org/presentationml/2006/main">
-  <p:cSld name="Slide 13">
-    <p:spTree>
-      <p:nvGrpSpPr>
-        <p:cNvPr id="1" name=""/>
-        <p:cNvGrpSpPr/>
-        <p:nvPr/>
-      </p:nvGrpSpPr>
-      <p:grpSpPr>
-        <a:xfrm>
-          <a:off x="0" y="0"/>
-          <a:ext cx="0" cy="0"/>
-          <a:chOff x="0" y="0"/>
-          <a:chExt cx="0" cy="0"/>
-        </a:xfrm>
-      </p:grpSpPr>
-      <p:sp>
-        <p:nvSpPr>
-          <p:cNvPr id="2" name="Text 0"/>
-          <p:cNvSpPr txBox="1"/>
-          <p:nvPr/>
-        </p:nvSpPr>
-        <p:spPr>
-          <a:xfrm>
-            <a:off x="548640" y="365760"/>
-            <a:ext cx="7315200" cy="320040"/>
-          </a:xfrm>
-          <a:prstGeom prst="rect">
-            <a:avLst/>
-          </a:prstGeom>
-          <a:noFill/>
-          <a:ln/>
-        </p:spPr>
-        <p:txBody>
-          <a:bodyPr wrap="square" rtlCol="0" anchor="ctr"/>
-          <a:lstStyle/>
-          <a:p>
-            <a:pPr indent="0" marL="0">
-              <a:buNone/>
-            </a:pPr>
-            <a:r>
-              <a:rPr lang="en-US" sz="1200" b="1" spc="200" kern="0" dirty="0">
-                <a:solidFill>
-                  <a:srgbClr val="1E2761"/>
-                </a:solidFill>
-                <a:latin typeface="Calibri" pitchFamily="34" charset="0"/>
-                <a:ea typeface="Calibri" pitchFamily="34" charset="-122"/>
-                <a:cs typeface="Calibri" pitchFamily="34" charset="-120"/>
-              </a:rPr>
-              <a:t>NETWORK SECURITY POLICY</a:t>
-            </a:r>
-            <a:endParaRPr lang="en-US" sz="1200" dirty="0"/>
-          </a:p>
-        </p:txBody>
-      </p:sp>
-      <p:sp>
-        <p:nvSpPr>
-          <p:cNvPr id="3" name="Text 1"/>
-          <p:cNvSpPr txBox="1"/>
-          <p:nvPr/>
-        </p:nvSpPr>
-        <p:spPr>
-          <a:xfrm>
-            <a:off x="548640" y="658368"/>
-            <a:ext cx="11064240" cy="822960"/>
-          </a:xfrm>
-          <a:prstGeom prst="rect">
-            <a:avLst/>
-          </a:prstGeom>
-          <a:noFill/>
-          <a:ln/>
-        </p:spPr>
-        <p:txBody>
-          <a:bodyPr wrap="square" rtlCol="0" anchor="ctr"/>
-          <a:lstStyle/>
-          <a:p>
-            <a:pPr indent="0" marL="0">
-              <a:buNone/>
-            </a:pPr>
-            <a:r>
-              <a:rPr lang="en-US" sz="3200" b="1" dirty="0">
-                <a:solidFill>
-                  <a:srgbClr val="1A1A1A"/>
-                </a:solidFill>
-                <a:latin typeface="Cambria" pitchFamily="34" charset="0"/>
-                <a:ea typeface="Cambria" pitchFamily="34" charset="-122"/>
-                <a:cs typeface="Cambria" pitchFamily="34" charset="-120"/>
-              </a:rPr>
-              <a:t>What Now Governs the Network</a:t>
-            </a:r>
-            <a:endParaRPr lang="en-US" sz="3200" dirty="0"/>
-          </a:p>
-        </p:txBody>
-      </p:sp>
-      <p:sp>
-        <p:nvSpPr>
-          <p:cNvPr id="4" name="Shape 2"/>
-          <p:cNvSpPr/>
-          <p:nvPr/>
-        </p:nvSpPr>
-        <p:spPr>
-          <a:xfrm>
-            <a:off x="548640" y="1810512"/>
-            <a:ext cx="73152" cy="640080"/>
-          </a:xfrm>
-          <a:prstGeom prst="rect">
-            <a:avLst/>
-          </a:prstGeom>
-          <a:solidFill>
-            <a:srgbClr val="1E2761"/>
-          </a:solidFill>
-          <a:ln/>
-        </p:spPr>
-      </p:sp>
-      <p:sp>
-        <p:nvSpPr>
-          <p:cNvPr id="5" name="Text 3"/>
-          <p:cNvSpPr txBox="1"/>
-          <p:nvPr/>
-        </p:nvSpPr>
-        <p:spPr>
-          <a:xfrm>
-            <a:off x="868680" y="1737360"/>
-            <a:ext cx="3291840" cy="777240"/>
-          </a:xfrm>
-          <a:prstGeom prst="rect">
-            <a:avLst/>
-          </a:prstGeom>
-          <a:noFill/>
-          <a:ln/>
-        </p:spPr>
-        <p:txBody>
-          <a:bodyPr wrap="square" rtlCol="0" anchor="ctr"/>
-          <a:lstStyle/>
-          <a:p>
-            <a:pPr indent="0" marL="0">
-              <a:buNone/>
-            </a:pPr>
-            <a:r>
-              <a:rPr lang="en-US" sz="1400" b="1" dirty="0">
-                <a:solidFill>
-                  <a:srgbClr val="1E2761"/>
-                </a:solidFill>
-                <a:latin typeface="Calibri" pitchFamily="34" charset="0"/>
-                <a:ea typeface="Calibri" pitchFamily="34" charset="-122"/>
-                <a:cs typeface="Calibri" pitchFamily="34" charset="-120"/>
-              </a:rPr>
-              <a:t>Access Control</a:t>
-            </a:r>
-            <a:endParaRPr lang="en-US" sz="1400" dirty="0"/>
-          </a:p>
-        </p:txBody>
-      </p:sp>
-      <p:sp>
-        <p:nvSpPr>
-          <p:cNvPr id="6" name="Text 4"/>
-          <p:cNvSpPr txBox="1"/>
-          <p:nvPr/>
-        </p:nvSpPr>
-        <p:spPr>
-          <a:xfrm>
-            <a:off x="4297680" y="1737360"/>
-            <a:ext cx="7315200" cy="777240"/>
-          </a:xfrm>
-          <a:prstGeom prst="rect">
-            <a:avLst/>
-          </a:prstGeom>
-          <a:noFill/>
-          <a:ln/>
-        </p:spPr>
-        <p:txBody>
-          <a:bodyPr wrap="square" rtlCol="0" anchor="ctr"/>
-          <a:lstStyle/>
-          <a:p>
-            <a:pPr indent="0" marL="0">
-              <a:buNone/>
-            </a:pPr>
-            <a:r>
-              <a:rPr lang="en-US" sz="1250" dirty="0">
-                <a:solidFill>
-                  <a:srgbClr val="1A1A1A"/>
-                </a:solidFill>
-                <a:latin typeface="Calibri" pitchFamily="34" charset="0"/>
-                <a:ea typeface="Calibri" pitchFamily="34" charset="-122"/>
-                <a:cs typeface="Calibri" pitchFamily="34" charset="-120"/>
-              </a:rPr>
-              <a:t>RBAC, least privilege, 12-char password minimum, AES-256 / TLS 1.2+</a:t>
-            </a:r>
-            <a:endParaRPr lang="en-US" sz="1250" dirty="0"/>
-          </a:p>
-        </p:txBody>
-      </p:sp>
-      <p:sp>
-        <p:nvSpPr>
-          <p:cNvPr id="7" name="Shape 5"/>
-          <p:cNvSpPr/>
-          <p:nvPr/>
-        </p:nvSpPr>
-        <p:spPr>
-          <a:xfrm>
-            <a:off x="548640" y="2651760"/>
-            <a:ext cx="73152" cy="640080"/>
-          </a:xfrm>
-          <a:prstGeom prst="rect">
-            <a:avLst/>
-          </a:prstGeom>
-          <a:solidFill>
-            <a:srgbClr val="1E2761"/>
-          </a:solidFill>
-          <a:ln/>
-        </p:spPr>
-      </p:sp>
-      <p:sp>
-        <p:nvSpPr>
-          <p:cNvPr id="8" name="Text 6"/>
-          <p:cNvSpPr txBox="1"/>
-          <p:nvPr/>
-        </p:nvSpPr>
-        <p:spPr>
-          <a:xfrm>
-            <a:off x="868680" y="2578608"/>
-            <a:ext cx="3291840" cy="777240"/>
-          </a:xfrm>
-          <a:prstGeom prst="rect">
-            <a:avLst/>
-          </a:prstGeom>
-          <a:noFill/>
-          <a:ln/>
-        </p:spPr>
-        <p:txBody>
-          <a:bodyPr wrap="square" rtlCol="0" anchor="ctr"/>
-          <a:lstStyle/>
-          <a:p>
-            <a:pPr indent="0" marL="0">
-              <a:buNone/>
-            </a:pPr>
-            <a:r>
-              <a:rPr lang="en-US" sz="1400" b="1" dirty="0">
-                <a:solidFill>
-                  <a:srgbClr val="1E2761"/>
-                </a:solidFill>
-                <a:latin typeface="Calibri" pitchFamily="34" charset="0"/>
-                <a:ea typeface="Calibri" pitchFamily="34" charset="-122"/>
-                <a:cs typeface="Calibri" pitchFamily="34" charset="-120"/>
-              </a:rPr>
-              <a:t>Monitoring &amp; Logging</a:t>
-            </a:r>
-            <a:endParaRPr lang="en-US" sz="1400" dirty="0"/>
-          </a:p>
-        </p:txBody>
-      </p:sp>
-      <p:sp>
-        <p:nvSpPr>
-          <p:cNvPr id="9" name="Text 7"/>
-          <p:cNvSpPr txBox="1"/>
-          <p:nvPr/>
-        </p:nvSpPr>
-        <p:spPr>
-          <a:xfrm>
-            <a:off x="4297680" y="2578608"/>
-            <a:ext cx="7315200" cy="777240"/>
-          </a:xfrm>
-          <a:prstGeom prst="rect">
-            <a:avLst/>
-          </a:prstGeom>
-          <a:noFill/>
-          <a:ln/>
-        </p:spPr>
-        <p:txBody>
-          <a:bodyPr wrap="square" rtlCol="0" anchor="ctr"/>
-          <a:lstStyle/>
-          <a:p>
-            <a:pPr indent="0" marL="0">
-              <a:buNone/>
-            </a:pPr>
-            <a:r>
-              <a:rPr lang="en-US" sz="1250" dirty="0">
-                <a:solidFill>
-                  <a:srgbClr val="1A1A1A"/>
-                </a:solidFill>
-                <a:latin typeface="Calibri" pitchFamily="34" charset="0"/>
-                <a:ea typeface="Calibri" pitchFamily="34" charset="-122"/>
-                <a:cs typeface="Calibri" pitchFamily="34" charset="-120"/>
-              </a:rPr>
-              <a:t>Real-time SIEM, IDS/IPS, scheduled log audits</a:t>
-            </a:r>
-            <a:endParaRPr lang="en-US" sz="1250" dirty="0"/>
-          </a:p>
-        </p:txBody>
-      </p:sp>
-      <p:sp>
-        <p:nvSpPr>
-          <p:cNvPr id="10" name="Shape 8"/>
-          <p:cNvSpPr/>
-          <p:nvPr/>
-        </p:nvSpPr>
-        <p:spPr>
-          <a:xfrm>
-            <a:off x="548640" y="3493008"/>
-            <a:ext cx="73152" cy="640080"/>
-          </a:xfrm>
-          <a:prstGeom prst="rect">
-            <a:avLst/>
-          </a:prstGeom>
-          <a:solidFill>
-            <a:srgbClr val="1E2761"/>
-          </a:solidFill>
-          <a:ln/>
-        </p:spPr>
-      </p:sp>
-      <p:sp>
-        <p:nvSpPr>
-          <p:cNvPr id="11" name="Text 9"/>
-          <p:cNvSpPr txBox="1"/>
-          <p:nvPr/>
-        </p:nvSpPr>
-        <p:spPr>
-          <a:xfrm>
-            <a:off x="868680" y="3419856"/>
-            <a:ext cx="3291840" cy="777240"/>
-          </a:xfrm>
-          <a:prstGeom prst="rect">
-            <a:avLst/>
-          </a:prstGeom>
-          <a:noFill/>
-          <a:ln/>
-        </p:spPr>
-        <p:txBody>
-          <a:bodyPr wrap="square" rtlCol="0" anchor="ctr"/>
-          <a:lstStyle/>
-          <a:p>
-            <a:pPr indent="0" marL="0">
-              <a:buNone/>
-            </a:pPr>
-            <a:r>
-              <a:rPr lang="en-US" sz="1400" b="1" dirty="0">
-                <a:solidFill>
-                  <a:srgbClr val="1E2761"/>
-                </a:solidFill>
-                <a:latin typeface="Calibri" pitchFamily="34" charset="0"/>
-                <a:ea typeface="Calibri" pitchFamily="34" charset="-122"/>
-                <a:cs typeface="Calibri" pitchFamily="34" charset="-120"/>
-              </a:rPr>
-              <a:t>Remote Access &amp; Removable Media</a:t>
-            </a:r>
-            <a:endParaRPr lang="en-US" sz="1400" dirty="0"/>
-          </a:p>
-        </p:txBody>
-      </p:sp>
-      <p:sp>
-        <p:nvSpPr>
-          <p:cNvPr id="12" name="Text 10"/>
-          <p:cNvSpPr txBox="1"/>
-          <p:nvPr/>
-        </p:nvSpPr>
-        <p:spPr>
-          <a:xfrm>
-            <a:off x="4297680" y="3419856"/>
-            <a:ext cx="7315200" cy="777240"/>
-          </a:xfrm>
-          <a:prstGeom prst="rect">
-            <a:avLst/>
-          </a:prstGeom>
-          <a:noFill/>
-          <a:ln/>
-        </p:spPr>
-        <p:txBody>
-          <a:bodyPr wrap="square" rtlCol="0" anchor="ctr"/>
-          <a:lstStyle/>
-          <a:p>
-            <a:pPr indent="0" marL="0">
-              <a:buNone/>
-            </a:pPr>
-            <a:r>
-              <a:rPr lang="en-US" sz="1250" dirty="0">
-                <a:solidFill>
-                  <a:srgbClr val="1A1A1A"/>
-                </a:solidFill>
-                <a:latin typeface="Calibri" pitchFamily="34" charset="0"/>
-                <a:ea typeface="Calibri" pitchFamily="34" charset="-122"/>
-                <a:cs typeface="Calibri" pitchFamily="34" charset="-120"/>
-              </a:rPr>
-              <a:t>VPN + MFA for every session; USB disabled on regulated-data endpoints</a:t>
-            </a:r>
-            <a:endParaRPr lang="en-US" sz="1250" dirty="0"/>
-          </a:p>
-        </p:txBody>
-      </p:sp>
-      <p:sp>
-        <p:nvSpPr>
-          <p:cNvPr id="13" name="Shape 11"/>
-          <p:cNvSpPr/>
-          <p:nvPr/>
-        </p:nvSpPr>
-        <p:spPr>
-          <a:xfrm>
-            <a:off x="548640" y="4334256"/>
-            <a:ext cx="73152" cy="640080"/>
-          </a:xfrm>
-          <a:prstGeom prst="rect">
-            <a:avLst/>
-          </a:prstGeom>
-          <a:solidFill>
-            <a:srgbClr val="1E2761"/>
-          </a:solidFill>
-          <a:ln/>
-        </p:spPr>
-      </p:sp>
-      <p:sp>
-        <p:nvSpPr>
-          <p:cNvPr id="14" name="Text 12"/>
-          <p:cNvSpPr txBox="1"/>
-          <p:nvPr/>
-        </p:nvSpPr>
-        <p:spPr>
-          <a:xfrm>
-            <a:off x="868680" y="4261104"/>
-            <a:ext cx="3291840" cy="777240"/>
-          </a:xfrm>
-          <a:prstGeom prst="rect">
-            <a:avLst/>
-          </a:prstGeom>
-          <a:noFill/>
-          <a:ln/>
-        </p:spPr>
-        <p:txBody>
-          <a:bodyPr wrap="square" rtlCol="0" anchor="ctr"/>
-          <a:lstStyle/>
-          <a:p>
-            <a:pPr indent="0" marL="0">
-              <a:buNone/>
-            </a:pPr>
-            <a:r>
-              <a:rPr lang="en-US" sz="1400" b="1" dirty="0">
-                <a:solidFill>
-                  <a:srgbClr val="1E2761"/>
-                </a:solidFill>
-                <a:latin typeface="Calibri" pitchFamily="34" charset="0"/>
-                <a:ea typeface="Calibri" pitchFamily="34" charset="-122"/>
-                <a:cs typeface="Calibri" pitchFamily="34" charset="-120"/>
-              </a:rPr>
-              <a:t>Third-Party / Vendor (B2B)</a:t>
-            </a:r>
-            <a:endParaRPr lang="en-US" sz="1400" dirty="0"/>
-          </a:p>
-        </p:txBody>
-      </p:sp>
-      <p:sp>
-        <p:nvSpPr>
-          <p:cNvPr id="15" name="Text 13"/>
-          <p:cNvSpPr txBox="1"/>
-          <p:nvPr/>
-        </p:nvSpPr>
-        <p:spPr>
-          <a:xfrm>
-            <a:off x="4297680" y="4261104"/>
-            <a:ext cx="7315200" cy="777240"/>
-          </a:xfrm>
-          <a:prstGeom prst="rect">
-            <a:avLst/>
-          </a:prstGeom>
-          <a:noFill/>
-          <a:ln/>
-        </p:spPr>
-        <p:txBody>
-          <a:bodyPr wrap="square" rtlCol="0" anchor="ctr"/>
-          <a:lstStyle/>
-          <a:p>
-            <a:pPr indent="0" marL="0">
-              <a:buNone/>
-            </a:pPr>
-            <a:r>
-              <a:rPr lang="en-US" sz="1250" dirty="0">
-                <a:solidFill>
-                  <a:srgbClr val="1A1A1A"/>
-                </a:solidFill>
-                <a:latin typeface="Calibri" pitchFamily="34" charset="0"/>
-                <a:ea typeface="Calibri" pitchFamily="34" charset="-122"/>
-                <a:cs typeface="Calibri" pitchFamily="34" charset="-120"/>
-              </a:rPr>
-              <a:t>GlobalTech and future partners onboarded under the same RBAC &amp; segmentation rules</a:t>
-            </a:r>
-            <a:endParaRPr lang="en-US" sz="1250" dirty="0"/>
-          </a:p>
-        </p:txBody>
-      </p:sp>
-      <p:sp>
-        <p:nvSpPr>
-          <p:cNvPr id="16" name="Shape 14"/>
-          <p:cNvSpPr/>
-          <p:nvPr/>
-        </p:nvSpPr>
-        <p:spPr>
-          <a:xfrm>
-            <a:off x="548640" y="5175504"/>
-            <a:ext cx="73152" cy="640080"/>
-          </a:xfrm>
-          <a:prstGeom prst="rect">
-            <a:avLst/>
-          </a:prstGeom>
-          <a:solidFill>
-            <a:srgbClr val="1E2761"/>
-          </a:solidFill>
-          <a:ln/>
-        </p:spPr>
-      </p:sp>
-      <p:sp>
-        <p:nvSpPr>
-          <p:cNvPr id="17" name="Text 15"/>
-          <p:cNvSpPr txBox="1"/>
-          <p:nvPr/>
-        </p:nvSpPr>
-        <p:spPr>
-          <a:xfrm>
-            <a:off x="868680" y="5102352"/>
-            <a:ext cx="3291840" cy="777240"/>
-          </a:xfrm>
-          <a:prstGeom prst="rect">
-            <a:avLst/>
-          </a:prstGeom>
-          <a:noFill/>
-          <a:ln/>
-        </p:spPr>
-        <p:txBody>
-          <a:bodyPr wrap="square" rtlCol="0" anchor="ctr"/>
-          <a:lstStyle/>
-          <a:p>
-            <a:pPr indent="0" marL="0">
-              <a:buNone/>
-            </a:pPr>
-            <a:r>
-              <a:rPr lang="en-US" sz="1400" b="1" dirty="0">
-                <a:solidFill>
-                  <a:srgbClr val="1E2761"/>
-                </a:solidFill>
-                <a:latin typeface="Calibri" pitchFamily="34" charset="0"/>
-                <a:ea typeface="Calibri" pitchFamily="34" charset="-122"/>
-                <a:cs typeface="Calibri" pitchFamily="34" charset="-120"/>
-              </a:rPr>
-              <a:t>Compliance &amp; Auditing</a:t>
-            </a:r>
-            <a:endParaRPr lang="en-US" sz="1400" dirty="0"/>
-          </a:p>
-        </p:txBody>
-      </p:sp>
-      <p:sp>
-        <p:nvSpPr>
-          <p:cNvPr id="18" name="Text 16"/>
-          <p:cNvSpPr txBox="1"/>
-          <p:nvPr/>
-        </p:nvSpPr>
-        <p:spPr>
-          <a:xfrm>
-            <a:off x="4297680" y="5102352"/>
-            <a:ext cx="7315200" cy="777240"/>
-          </a:xfrm>
-          <a:prstGeom prst="rect">
-            <a:avLst/>
-          </a:prstGeom>
-          <a:noFill/>
-          <a:ln/>
-        </p:spPr>
-        <p:txBody>
-          <a:bodyPr wrap="square" rtlCol="0" anchor="ctr"/>
-          <a:lstStyle/>
-          <a:p>
-            <a:pPr indent="0" marL="0">
-              <a:buNone/>
-            </a:pPr>
-            <a:r>
-              <a:rPr lang="en-US" sz="1250" dirty="0">
-                <a:solidFill>
-                  <a:srgbClr val="1A1A1A"/>
-                </a:solidFill>
-                <a:latin typeface="Calibri" pitchFamily="34" charset="0"/>
-                <a:ea typeface="Calibri" pitchFamily="34" charset="-122"/>
-                <a:cs typeface="Calibri" pitchFamily="34" charset="-120"/>
-              </a:rPr>
-              <a:t>SOX, PCI DSS, and GLBA controls verified on a recurring schedule</a:t>
-            </a:r>
-            <a:endParaRPr lang="en-US" sz="1250" dirty="0"/>
-          </a:p>
-        </p:txBody>
-      </p:sp>
-      <p:sp>
-        <p:nvSpPr>
-          <p:cNvPr id="19" name="Text 17"/>
-          <p:cNvSpPr txBox="1"/>
-          <p:nvPr/>
-        </p:nvSpPr>
-        <p:spPr>
-          <a:xfrm>
-            <a:off x="457200" y="6473952"/>
-            <a:ext cx="7315200" cy="274320"/>
-          </a:xfrm>
-          <a:prstGeom prst="rect">
-            <a:avLst/>
-          </a:prstGeom>
-          <a:noFill/>
-          <a:ln/>
-        </p:spPr>
-        <p:txBody>
-          <a:bodyPr wrap="square" rtlCol="0" anchor="ctr"/>
-          <a:lstStyle/>
-          <a:p>
-            <a:pPr indent="0" marL="0">
-              <a:buNone/>
-            </a:pPr>
-            <a:r>
-              <a:rPr lang="en-US" sz="900" dirty="0">
-                <a:solidFill>
-                  <a:srgbClr val="6B7280"/>
-                </a:solidFill>
-                <a:latin typeface="Calibri" pitchFamily="34" charset="0"/>
-                <a:ea typeface="Calibri" pitchFamily="34" charset="-122"/>
-                <a:cs typeface="Calibri" pitchFamily="34" charset="-120"/>
-              </a:rPr>
-              <a:t>FinSecure Technologies Inc. — Network Security Capstone</a:t>
-            </a:r>
-            <a:endParaRPr lang="en-US" sz="900" dirty="0"/>
-          </a:p>
-        </p:txBody>
-      </p:sp>
-      <p:sp>
-        <p:nvSpPr>
-          <p:cNvPr id="20" name="Text 18"/>
-          <p:cNvSpPr txBox="1"/>
-          <p:nvPr/>
-        </p:nvSpPr>
-        <p:spPr>
-          <a:xfrm>
-            <a:off x="11274552" y="6473952"/>
-            <a:ext cx="457200" cy="274320"/>
-          </a:xfrm>
-          <a:prstGeom prst="rect">
-            <a:avLst/>
-          </a:prstGeom>
-          <a:noFill/>
-          <a:ln/>
-        </p:spPr>
-        <p:txBody>
-          <a:bodyPr wrap="square" rtlCol="0" anchor="ctr"/>
-          <a:lstStyle/>
-          <a:p>
-            <a:pPr algn="r" indent="0" marL="0">
-              <a:buNone/>
-            </a:pPr>
-            <a:r>
-              <a:rPr lang="en-US" sz="900" dirty="0">
-                <a:solidFill>
-                  <a:srgbClr val="6B7280"/>
-                </a:solidFill>
-                <a:latin typeface="Calibri" pitchFamily="34" charset="0"/>
-                <a:ea typeface="Calibri" pitchFamily="34" charset="-122"/>
-                <a:cs typeface="Calibri" pitchFamily="34" charset="-120"/>
-              </a:rPr>
-              <a:t>13</a:t>
-            </a:r>
-            <a:endParaRPr lang="en-US" sz="900" dirty="0"/>
-          </a:p>
-        </p:txBody>
-      </p:sp>
-    </p:spTree>
-  </p:cSld>
-  <p:clrMapOvr>
-    <a:masterClrMapping/>
-  </p:clrMapOvr>
-</p:sld>
-</file>
-
 <file path=ppt/slides/slide14.xml><?xml version="1.0" encoding="utf-8"?>
 <p:sld xmlns:a="http://schemas.openxmlformats.org/drawingml/2006/main" xmlns:r="http://schemas.openxmlformats.org/officeDocument/2006/relationships" xmlns:p="http://schemas.openxmlformats.org/presentationml/2006/main">
   <p:cSld name="Slide 14">
@@ -5747,7 +5762,7 @@
                 <a:ea typeface="Calibri" pitchFamily="34" charset="-122"/>
                 <a:cs typeface="Calibri" pitchFamily="34" charset="-120"/>
               </a:rPr>
-              <a:t>INCIDENT RESPONSE</a:t>
+              <a:t>NETWORK SECURITY POLICY</a:t>
             </a:r>
             <a:endParaRPr lang="en-US" sz="1200" dirty="0"/>
           </a:p>
@@ -5786,7 +5801,7 @@
                 <a:ea typeface="Cambria" pitchFamily="34" charset="-122"/>
                 <a:cs typeface="Cambria" pitchFamily="34" charset="-120"/>
               </a:rPr>
-              <a:t>How We Responded to the Breach</a:t>
+              <a:t>What Now Governs the Network</a:t>
             </a:r>
             <a:endParaRPr lang="en-US" sz="3200" dirty="0"/>
           </a:p>
@@ -5800,37 +5815,10 @@
         </p:nvSpPr>
         <p:spPr>
           <a:xfrm>
-            <a:off x="548640" y="2103120"/>
-            <a:ext cx="2103120" cy="2286000"/>
-          </a:xfrm>
-          <a:prstGeom prst="roundRect">
-            <a:avLst>
-              <a:gd name="adj" fmla="val 4348"/>
-            </a:avLst>
-          </a:prstGeom>
-          <a:solidFill>
-            <a:srgbClr val="FFFFFF"/>
-          </a:solidFill>
-          <a:ln w="19050">
-            <a:solidFill>
-              <a:srgbClr val="1E2761"/>
-            </a:solidFill>
-            <a:prstDash val="solid"/>
-          </a:ln>
-        </p:spPr>
-      </p:sp>
-      <p:sp>
-        <p:nvSpPr>
-          <p:cNvPr id="5" name="Shape 3"/>
-          <p:cNvSpPr/>
-          <p:nvPr/>
-        </p:nvSpPr>
-        <p:spPr>
-          <a:xfrm>
-            <a:off x="1344168" y="2331720"/>
-            <a:ext cx="512064" cy="512064"/>
-          </a:xfrm>
-          <a:prstGeom prst="ellipse">
+            <a:off x="548640" y="1810512"/>
+            <a:ext cx="73152" cy="640080"/>
+          </a:xfrm>
+          <a:prstGeom prst="rect">
             <a:avLst/>
           </a:prstGeom>
           <a:solidFill>
@@ -5841,14 +5829,53 @@
       </p:sp>
       <p:sp>
         <p:nvSpPr>
+          <p:cNvPr id="5" name="Text 3"/>
+          <p:cNvSpPr txBox="1"/>
+          <p:nvPr/>
+        </p:nvSpPr>
+        <p:spPr>
+          <a:xfrm>
+            <a:off x="868680" y="1737360"/>
+            <a:ext cx="3291840" cy="777240"/>
+          </a:xfrm>
+          <a:prstGeom prst="rect">
+            <a:avLst/>
+          </a:prstGeom>
+          <a:noFill/>
+          <a:ln/>
+        </p:spPr>
+        <p:txBody>
+          <a:bodyPr wrap="square" rtlCol="0" anchor="ctr"/>
+          <a:lstStyle/>
+          <a:p>
+            <a:pPr indent="0" marL="0">
+              <a:buNone/>
+            </a:pPr>
+            <a:r>
+              <a:rPr lang="en-US" sz="1400" b="1" dirty="0">
+                <a:solidFill>
+                  <a:srgbClr val="1E2761"/>
+                </a:solidFill>
+                <a:latin typeface="Calibri" pitchFamily="34" charset="0"/>
+                <a:ea typeface="Calibri" pitchFamily="34" charset="-122"/>
+                <a:cs typeface="Calibri" pitchFamily="34" charset="-120"/>
+              </a:rPr>
+              <a:t>Access Control</a:t>
+            </a:r>
+            <a:endParaRPr lang="en-US" sz="1400" dirty="0"/>
+          </a:p>
+        </p:txBody>
+      </p:sp>
+      <p:sp>
+        <p:nvSpPr>
           <p:cNvPr id="6" name="Text 4"/>
           <p:cNvSpPr txBox="1"/>
           <p:nvPr/>
         </p:nvSpPr>
         <p:spPr>
           <a:xfrm>
-            <a:off x="1344168" y="2331720"/>
-            <a:ext cx="512064" cy="512064"/>
+            <a:off x="4297680" y="1737360"/>
+            <a:ext cx="7315200" cy="777240"/>
           </a:xfrm>
           <a:prstGeom prst="rect">
             <a:avLst/>
@@ -5860,46 +5887,66 @@
           <a:bodyPr wrap="square" rtlCol="0" anchor="ctr"/>
           <a:lstStyle/>
           <a:p>
-            <a:pPr algn="ctr" indent="0" marL="0">
-              <a:buNone/>
-            </a:pPr>
-            <a:r>
-              <a:rPr lang="en-US" sz="1500" b="1" dirty="0">
-                <a:solidFill>
-                  <a:srgbClr val="FFFFFF"/>
-                </a:solidFill>
-                <a:latin typeface="Cambria" pitchFamily="34" charset="0"/>
-                <a:ea typeface="Cambria" pitchFamily="34" charset="-122"/>
-                <a:cs typeface="Cambria" pitchFamily="34" charset="-120"/>
-              </a:rPr>
-              <a:t>1</a:t>
-            </a:r>
-            <a:endParaRPr lang="en-US" sz="1500" dirty="0"/>
-          </a:p>
-        </p:txBody>
-      </p:sp>
-      <p:sp>
-        <p:nvSpPr>
-          <p:cNvPr id="7" name="Text 5"/>
-          <p:cNvSpPr txBox="1"/>
-          <p:nvPr/>
-        </p:nvSpPr>
-        <p:spPr>
-          <a:xfrm>
-            <a:off x="685800" y="2971800"/>
-            <a:ext cx="1828800" cy="365760"/>
-          </a:xfrm>
-          <a:prstGeom prst="rect">
-            <a:avLst/>
-          </a:prstGeom>
-          <a:noFill/>
-          <a:ln/>
-        </p:spPr>
-        <p:txBody>
-          <a:bodyPr wrap="square" lIns="0" tIns="0" rIns="0" bIns="0" rtlCol="0" anchor="ctr"/>
-          <a:lstStyle/>
-          <a:p>
-            <a:pPr algn="ctr" indent="0" marL="0">
+            <a:pPr indent="0" marL="0">
+              <a:buNone/>
+            </a:pPr>
+            <a:r>
+              <a:rPr lang="en-US" sz="1250" dirty="0">
+                <a:solidFill>
+                  <a:srgbClr val="1A1A1A"/>
+                </a:solidFill>
+                <a:latin typeface="Calibri" pitchFamily="34" charset="0"/>
+                <a:ea typeface="Calibri" pitchFamily="34" charset="-122"/>
+                <a:cs typeface="Calibri" pitchFamily="34" charset="-120"/>
+              </a:rPr>
+              <a:t>RBAC, least privilege, 12-char password minimum, AES-256 / TLS 1.2+</a:t>
+            </a:r>
+            <a:endParaRPr lang="en-US" sz="1250" dirty="0"/>
+          </a:p>
+        </p:txBody>
+      </p:sp>
+      <p:sp>
+        <p:nvSpPr>
+          <p:cNvPr id="7" name="Shape 5"/>
+          <p:cNvSpPr/>
+          <p:nvPr/>
+        </p:nvSpPr>
+        <p:spPr>
+          <a:xfrm>
+            <a:off x="548640" y="2651760"/>
+            <a:ext cx="73152" cy="640080"/>
+          </a:xfrm>
+          <a:prstGeom prst="rect">
+            <a:avLst/>
+          </a:prstGeom>
+          <a:solidFill>
+            <a:srgbClr val="1E2761"/>
+          </a:solidFill>
+          <a:ln/>
+        </p:spPr>
+      </p:sp>
+      <p:sp>
+        <p:nvSpPr>
+          <p:cNvPr id="8" name="Text 6"/>
+          <p:cNvSpPr txBox="1"/>
+          <p:nvPr/>
+        </p:nvSpPr>
+        <p:spPr>
+          <a:xfrm>
+            <a:off x="868680" y="2578608"/>
+            <a:ext cx="3291840" cy="777240"/>
+          </a:xfrm>
+          <a:prstGeom prst="rect">
+            <a:avLst/>
+          </a:prstGeom>
+          <a:noFill/>
+          <a:ln/>
+        </p:spPr>
+        <p:txBody>
+          <a:bodyPr wrap="square" rtlCol="0" anchor="ctr"/>
+          <a:lstStyle/>
+          <a:p>
+            <a:pPr indent="0" marL="0">
               <a:buNone/>
             </a:pPr>
             <a:r>
@@ -5911,7 +5958,7 @@
                 <a:ea typeface="Calibri" pitchFamily="34" charset="-122"/>
                 <a:cs typeface="Calibri" pitchFamily="34" charset="-120"/>
               </a:rPr>
-              <a:t>Contain</a:t>
+              <a:t>Monitoring &amp; Logging</a:t>
             </a:r>
             <a:endParaRPr lang="en-US" sz="1400" dirty="0"/>
           </a:p>
@@ -5919,30 +5966,30 @@
       </p:sp>
       <p:sp>
         <p:nvSpPr>
-          <p:cNvPr id="8" name="Text 6"/>
-          <p:cNvSpPr txBox="1"/>
-          <p:nvPr/>
-        </p:nvSpPr>
-        <p:spPr>
-          <a:xfrm>
-            <a:off x="685800" y="3364992"/>
-            <a:ext cx="1828800" cy="914400"/>
-          </a:xfrm>
-          <a:prstGeom prst="rect">
-            <a:avLst/>
-          </a:prstGeom>
-          <a:noFill/>
-          <a:ln/>
-        </p:spPr>
-        <p:txBody>
-          <a:bodyPr wrap="square" lIns="0" tIns="0" rIns="0" bIns="0" rtlCol="0" anchor="ctr"/>
-          <a:lstStyle/>
-          <a:p>
-            <a:pPr algn="ctr" indent="0" marL="0">
-              <a:buNone/>
-            </a:pPr>
-            <a:r>
-              <a:rPr lang="en-US" sz="1050" dirty="0">
+          <p:cNvPr id="9" name="Text 7"/>
+          <p:cNvSpPr txBox="1"/>
+          <p:nvPr/>
+        </p:nvSpPr>
+        <p:spPr>
+          <a:xfrm>
+            <a:off x="4297680" y="2578608"/>
+            <a:ext cx="7315200" cy="777240"/>
+          </a:xfrm>
+          <a:prstGeom prst="rect">
+            <a:avLst/>
+          </a:prstGeom>
+          <a:noFill/>
+          <a:ln/>
+        </p:spPr>
+        <p:txBody>
+          <a:bodyPr wrap="square" rtlCol="0" anchor="ctr"/>
+          <a:lstStyle/>
+          <a:p>
+            <a:pPr indent="0" marL="0">
+              <a:buNone/>
+            </a:pPr>
+            <a:r>
+              <a:rPr lang="en-US" sz="1250" dirty="0">
                 <a:solidFill>
                   <a:srgbClr val="1A1A1A"/>
                 </a:solidFill>
@@ -5950,48 +5997,9 @@
                 <a:ea typeface="Calibri" pitchFamily="34" charset="-122"/>
                 <a:cs typeface="Calibri" pitchFamily="34" charset="-120"/>
               </a:rPr>
-              <a:t>Disconnected the compromised server immediately</a:t>
-            </a:r>
-            <a:endParaRPr lang="en-US" sz="1050" dirty="0"/>
-          </a:p>
-        </p:txBody>
-      </p:sp>
-      <p:sp>
-        <p:nvSpPr>
-          <p:cNvPr id="9" name="Text 7"/>
-          <p:cNvSpPr txBox="1"/>
-          <p:nvPr/>
-        </p:nvSpPr>
-        <p:spPr>
-          <a:xfrm>
-            <a:off x="2651760" y="3063240"/>
-            <a:ext cx="182880" cy="365760"/>
-          </a:xfrm>
-          <a:prstGeom prst="rect">
-            <a:avLst/>
-          </a:prstGeom>
-          <a:noFill/>
-          <a:ln/>
-        </p:spPr>
-        <p:txBody>
-          <a:bodyPr wrap="square" lIns="0" tIns="0" rIns="0" bIns="0" rtlCol="0" anchor="ctr"/>
-          <a:lstStyle/>
-          <a:p>
-            <a:pPr algn="ctr" indent="0" marL="0">
-              <a:buNone/>
-            </a:pPr>
-            <a:r>
-              <a:rPr lang="en-US" sz="1600" dirty="0">
-                <a:solidFill>
-                  <a:srgbClr val="6B7280"/>
-                </a:solidFill>
-                <a:latin typeface="Calibri" pitchFamily="34" charset="0"/>
-                <a:ea typeface="Calibri" pitchFamily="34" charset="-122"/>
-                <a:cs typeface="Calibri" pitchFamily="34" charset="-120"/>
-              </a:rPr>
-              <a:t>→</a:t>
-            </a:r>
-            <a:endParaRPr lang="en-US" sz="1600" dirty="0"/>
+              <a:t>Real-time SIEM, IDS/IPS, scheduled log audits</a:t>
+            </a:r>
+            <a:endParaRPr lang="en-US" sz="1250" dirty="0"/>
           </a:p>
         </p:txBody>
       </p:sp>
@@ -6003,55 +6011,126 @@
         </p:nvSpPr>
         <p:spPr>
           <a:xfrm>
-            <a:off x="2788920" y="2103120"/>
-            <a:ext cx="2103120" cy="2286000"/>
-          </a:xfrm>
-          <a:prstGeom prst="roundRect">
-            <a:avLst>
-              <a:gd name="adj" fmla="val 4348"/>
-            </a:avLst>
+            <a:off x="548640" y="3493008"/>
+            <a:ext cx="73152" cy="640080"/>
+          </a:xfrm>
+          <a:prstGeom prst="rect">
+            <a:avLst/>
           </a:prstGeom>
           <a:solidFill>
-            <a:srgbClr val="FFFFFF"/>
+            <a:srgbClr val="1E2761"/>
           </a:solidFill>
-          <a:ln w="19050">
-            <a:solidFill>
-              <a:srgbClr val="3B4A9E"/>
-            </a:solidFill>
-            <a:prstDash val="solid"/>
-          </a:ln>
-        </p:spPr>
-      </p:sp>
-      <p:sp>
-        <p:nvSpPr>
-          <p:cNvPr id="11" name="Shape 9"/>
+          <a:ln/>
+        </p:spPr>
+      </p:sp>
+      <p:sp>
+        <p:nvSpPr>
+          <p:cNvPr id="11" name="Text 9"/>
+          <p:cNvSpPr txBox="1"/>
+          <p:nvPr/>
+        </p:nvSpPr>
+        <p:spPr>
+          <a:xfrm>
+            <a:off x="868680" y="3419856"/>
+            <a:ext cx="3291840" cy="777240"/>
+          </a:xfrm>
+          <a:prstGeom prst="rect">
+            <a:avLst/>
+          </a:prstGeom>
+          <a:noFill/>
+          <a:ln/>
+        </p:spPr>
+        <p:txBody>
+          <a:bodyPr wrap="square" rtlCol="0" anchor="ctr"/>
+          <a:lstStyle/>
+          <a:p>
+            <a:pPr indent="0" marL="0">
+              <a:buNone/>
+            </a:pPr>
+            <a:r>
+              <a:rPr lang="en-US" sz="1400" b="1" dirty="0">
+                <a:solidFill>
+                  <a:srgbClr val="1E2761"/>
+                </a:solidFill>
+                <a:latin typeface="Calibri" pitchFamily="34" charset="0"/>
+                <a:ea typeface="Calibri" pitchFamily="34" charset="-122"/>
+                <a:cs typeface="Calibri" pitchFamily="34" charset="-120"/>
+              </a:rPr>
+              <a:t>Remote Access &amp; Removable Media</a:t>
+            </a:r>
+            <a:endParaRPr lang="en-US" sz="1400" dirty="0"/>
+          </a:p>
+        </p:txBody>
+      </p:sp>
+      <p:sp>
+        <p:nvSpPr>
+          <p:cNvPr id="12" name="Text 10"/>
+          <p:cNvSpPr txBox="1"/>
+          <p:nvPr/>
+        </p:nvSpPr>
+        <p:spPr>
+          <a:xfrm>
+            <a:off x="4297680" y="3419856"/>
+            <a:ext cx="7315200" cy="777240"/>
+          </a:xfrm>
+          <a:prstGeom prst="rect">
+            <a:avLst/>
+          </a:prstGeom>
+          <a:noFill/>
+          <a:ln/>
+        </p:spPr>
+        <p:txBody>
+          <a:bodyPr wrap="square" rtlCol="0" anchor="ctr"/>
+          <a:lstStyle/>
+          <a:p>
+            <a:pPr indent="0" marL="0">
+              <a:buNone/>
+            </a:pPr>
+            <a:r>
+              <a:rPr lang="en-US" sz="1250" dirty="0">
+                <a:solidFill>
+                  <a:srgbClr val="1A1A1A"/>
+                </a:solidFill>
+                <a:latin typeface="Calibri" pitchFamily="34" charset="0"/>
+                <a:ea typeface="Calibri" pitchFamily="34" charset="-122"/>
+                <a:cs typeface="Calibri" pitchFamily="34" charset="-120"/>
+              </a:rPr>
+              <a:t>VPN + MFA for every session; USB disabled on regulated-data endpoints</a:t>
+            </a:r>
+            <a:endParaRPr lang="en-US" sz="1250" dirty="0"/>
+          </a:p>
+        </p:txBody>
+      </p:sp>
+      <p:sp>
+        <p:nvSpPr>
+          <p:cNvPr id="13" name="Shape 11"/>
           <p:cNvSpPr/>
           <p:nvPr/>
         </p:nvSpPr>
         <p:spPr>
           <a:xfrm>
-            <a:off x="3584448" y="2331720"/>
-            <a:ext cx="512064" cy="512064"/>
-          </a:xfrm>
-          <a:prstGeom prst="ellipse">
+            <a:off x="548640" y="4334256"/>
+            <a:ext cx="73152" cy="640080"/>
+          </a:xfrm>
+          <a:prstGeom prst="rect">
             <a:avLst/>
           </a:prstGeom>
           <a:solidFill>
-            <a:srgbClr val="3B4A9E"/>
+            <a:srgbClr val="1E2761"/>
           </a:solidFill>
           <a:ln/>
         </p:spPr>
       </p:sp>
       <p:sp>
         <p:nvSpPr>
-          <p:cNvPr id="12" name="Text 10"/>
-          <p:cNvSpPr txBox="1"/>
-          <p:nvPr/>
-        </p:nvSpPr>
-        <p:spPr>
-          <a:xfrm>
-            <a:off x="3584448" y="2331720"/>
-            <a:ext cx="512064" cy="512064"/>
+          <p:cNvPr id="14" name="Text 12"/>
+          <p:cNvSpPr txBox="1"/>
+          <p:nvPr/>
+        </p:nvSpPr>
+        <p:spPr>
+          <a:xfrm>
+            <a:off x="868680" y="4261104"/>
+            <a:ext cx="3291840" cy="777240"/>
           </a:xfrm>
           <a:prstGeom prst="rect">
             <a:avLst/>
@@ -6063,58 +6142,19 @@
           <a:bodyPr wrap="square" rtlCol="0" anchor="ctr"/>
           <a:lstStyle/>
           <a:p>
-            <a:pPr algn="ctr" indent="0" marL="0">
-              <a:buNone/>
-            </a:pPr>
-            <a:r>
-              <a:rPr lang="en-US" sz="1500" b="1" dirty="0">
-                <a:solidFill>
-                  <a:srgbClr val="FFFFFF"/>
-                </a:solidFill>
-                <a:latin typeface="Cambria" pitchFamily="34" charset="0"/>
-                <a:ea typeface="Cambria" pitchFamily="34" charset="-122"/>
-                <a:cs typeface="Cambria" pitchFamily="34" charset="-120"/>
-              </a:rPr>
-              <a:t>2</a:t>
-            </a:r>
-            <a:endParaRPr lang="en-US" sz="1500" dirty="0"/>
-          </a:p>
-        </p:txBody>
-      </p:sp>
-      <p:sp>
-        <p:nvSpPr>
-          <p:cNvPr id="13" name="Text 11"/>
-          <p:cNvSpPr txBox="1"/>
-          <p:nvPr/>
-        </p:nvSpPr>
-        <p:spPr>
-          <a:xfrm>
-            <a:off x="2926080" y="2971800"/>
-            <a:ext cx="1828800" cy="365760"/>
-          </a:xfrm>
-          <a:prstGeom prst="rect">
-            <a:avLst/>
-          </a:prstGeom>
-          <a:noFill/>
-          <a:ln/>
-        </p:spPr>
-        <p:txBody>
-          <a:bodyPr wrap="square" lIns="0" tIns="0" rIns="0" bIns="0" rtlCol="0" anchor="ctr"/>
-          <a:lstStyle/>
-          <a:p>
-            <a:pPr algn="ctr" indent="0" marL="0">
+            <a:pPr indent="0" marL="0">
               <a:buNone/>
             </a:pPr>
             <a:r>
               <a:rPr lang="en-US" sz="1400" b="1" dirty="0">
                 <a:solidFill>
-                  <a:srgbClr val="3B4A9E"/>
-                </a:solidFill>
-                <a:latin typeface="Calibri" pitchFamily="34" charset="0"/>
-                <a:ea typeface="Calibri" pitchFamily="34" charset="-122"/>
-                <a:cs typeface="Calibri" pitchFamily="34" charset="-120"/>
-              </a:rPr>
-              <a:t>Investigate</a:t>
+                  <a:srgbClr val="1E2761"/>
+                </a:solidFill>
+                <a:latin typeface="Calibri" pitchFamily="34" charset="0"/>
+                <a:ea typeface="Calibri" pitchFamily="34" charset="-122"/>
+                <a:cs typeface="Calibri" pitchFamily="34" charset="-120"/>
+              </a:rPr>
+              <a:t>Third-Party / Vendor (B2B)</a:t>
             </a:r>
             <a:endParaRPr lang="en-US" sz="1400" dirty="0"/>
           </a:p>
@@ -6122,30 +6162,30 @@
       </p:sp>
       <p:sp>
         <p:nvSpPr>
-          <p:cNvPr id="14" name="Text 12"/>
-          <p:cNvSpPr txBox="1"/>
-          <p:nvPr/>
-        </p:nvSpPr>
-        <p:spPr>
-          <a:xfrm>
-            <a:off x="2926080" y="3364992"/>
-            <a:ext cx="1828800" cy="914400"/>
-          </a:xfrm>
-          <a:prstGeom prst="rect">
-            <a:avLst/>
-          </a:prstGeom>
-          <a:noFill/>
-          <a:ln/>
-        </p:spPr>
-        <p:txBody>
-          <a:bodyPr wrap="square" lIns="0" tIns="0" rIns="0" bIns="0" rtlCol="0" anchor="ctr"/>
-          <a:lstStyle/>
-          <a:p>
-            <a:pPr algn="ctr" indent="0" marL="0">
-              <a:buNone/>
-            </a:pPr>
-            <a:r>
-              <a:rPr lang="en-US" sz="1050" dirty="0">
+          <p:cNvPr id="15" name="Text 13"/>
+          <p:cNvSpPr txBox="1"/>
+          <p:nvPr/>
+        </p:nvSpPr>
+        <p:spPr>
+          <a:xfrm>
+            <a:off x="4297680" y="4261104"/>
+            <a:ext cx="7315200" cy="777240"/>
+          </a:xfrm>
+          <a:prstGeom prst="rect">
+            <a:avLst/>
+          </a:prstGeom>
+          <a:noFill/>
+          <a:ln/>
+        </p:spPr>
+        <p:txBody>
+          <a:bodyPr wrap="square" rtlCol="0" anchor="ctr"/>
+          <a:lstStyle/>
+          <a:p>
+            <a:pPr indent="0" marL="0">
+              <a:buNone/>
+            </a:pPr>
+            <a:r>
+              <a:rPr lang="en-US" sz="1250" dirty="0">
                 <a:solidFill>
                   <a:srgbClr val="1A1A1A"/>
                 </a:solidFill>
@@ -6153,48 +6193,9 @@
                 <a:ea typeface="Calibri" pitchFamily="34" charset="-122"/>
                 <a:cs typeface="Calibri" pitchFamily="34" charset="-120"/>
               </a:rPr>
-              <a:t>Cross-functional IR team, forensic investigation</a:t>
-            </a:r>
-            <a:endParaRPr lang="en-US" sz="1050" dirty="0"/>
-          </a:p>
-        </p:txBody>
-      </p:sp>
-      <p:sp>
-        <p:nvSpPr>
-          <p:cNvPr id="15" name="Text 13"/>
-          <p:cNvSpPr txBox="1"/>
-          <p:nvPr/>
-        </p:nvSpPr>
-        <p:spPr>
-          <a:xfrm>
-            <a:off x="4892040" y="3063240"/>
-            <a:ext cx="182880" cy="365760"/>
-          </a:xfrm>
-          <a:prstGeom prst="rect">
-            <a:avLst/>
-          </a:prstGeom>
-          <a:noFill/>
-          <a:ln/>
-        </p:spPr>
-        <p:txBody>
-          <a:bodyPr wrap="square" lIns="0" tIns="0" rIns="0" bIns="0" rtlCol="0" anchor="ctr"/>
-          <a:lstStyle/>
-          <a:p>
-            <a:pPr algn="ctr" indent="0" marL="0">
-              <a:buNone/>
-            </a:pPr>
-            <a:r>
-              <a:rPr lang="en-US" sz="1600" dirty="0">
-                <a:solidFill>
-                  <a:srgbClr val="6B7280"/>
-                </a:solidFill>
-                <a:latin typeface="Calibri" pitchFamily="34" charset="0"/>
-                <a:ea typeface="Calibri" pitchFamily="34" charset="-122"/>
-                <a:cs typeface="Calibri" pitchFamily="34" charset="-120"/>
-              </a:rPr>
-              <a:t>→</a:t>
-            </a:r>
-            <a:endParaRPr lang="en-US" sz="1600" dirty="0"/>
+              <a:t>GlobalTech and future partners onboarded under the same RBAC &amp; segmentation rules</a:t>
+            </a:r>
+            <a:endParaRPr lang="en-US" sz="1250" dirty="0"/>
           </a:p>
         </p:txBody>
       </p:sp>
@@ -6206,44 +6207,56 @@
         </p:nvSpPr>
         <p:spPr>
           <a:xfrm>
-            <a:off x="5029200" y="2103120"/>
-            <a:ext cx="2103120" cy="2286000"/>
-          </a:xfrm>
-          <a:prstGeom prst="roundRect">
-            <a:avLst>
-              <a:gd name="adj" fmla="val 4348"/>
-            </a:avLst>
+            <a:off x="548640" y="5175504"/>
+            <a:ext cx="73152" cy="640080"/>
+          </a:xfrm>
+          <a:prstGeom prst="rect">
+            <a:avLst/>
           </a:prstGeom>
           <a:solidFill>
-            <a:srgbClr val="FFFFFF"/>
+            <a:srgbClr val="1E2761"/>
           </a:solidFill>
-          <a:ln w="19050">
-            <a:solidFill>
-              <a:srgbClr val="C9A227"/>
-            </a:solidFill>
-            <a:prstDash val="solid"/>
-          </a:ln>
-        </p:spPr>
-      </p:sp>
-      <p:sp>
-        <p:nvSpPr>
-          <p:cNvPr id="17" name="Shape 15"/>
-          <p:cNvSpPr/>
-          <p:nvPr/>
-        </p:nvSpPr>
-        <p:spPr>
-          <a:xfrm>
-            <a:off x="5824728" y="2331720"/>
-            <a:ext cx="512064" cy="512064"/>
-          </a:xfrm>
-          <a:prstGeom prst="ellipse">
-            <a:avLst/>
-          </a:prstGeom>
-          <a:solidFill>
-            <a:srgbClr val="C9A227"/>
-          </a:solidFill>
-          <a:ln/>
-        </p:spPr>
+          <a:ln/>
+        </p:spPr>
+      </p:sp>
+      <p:sp>
+        <p:nvSpPr>
+          <p:cNvPr id="17" name="Text 15"/>
+          <p:cNvSpPr txBox="1"/>
+          <p:nvPr/>
+        </p:nvSpPr>
+        <p:spPr>
+          <a:xfrm>
+            <a:off x="868680" y="5102352"/>
+            <a:ext cx="3291840" cy="777240"/>
+          </a:xfrm>
+          <a:prstGeom prst="rect">
+            <a:avLst/>
+          </a:prstGeom>
+          <a:noFill/>
+          <a:ln/>
+        </p:spPr>
+        <p:txBody>
+          <a:bodyPr wrap="square" rtlCol="0" anchor="ctr"/>
+          <a:lstStyle/>
+          <a:p>
+            <a:pPr indent="0" marL="0">
+              <a:buNone/>
+            </a:pPr>
+            <a:r>
+              <a:rPr lang="en-US" sz="1400" b="1" dirty="0">
+                <a:solidFill>
+                  <a:srgbClr val="1E2761"/>
+                </a:solidFill>
+                <a:latin typeface="Calibri" pitchFamily="34" charset="0"/>
+                <a:ea typeface="Calibri" pitchFamily="34" charset="-122"/>
+                <a:cs typeface="Calibri" pitchFamily="34" charset="-120"/>
+              </a:rPr>
+              <a:t>Compliance &amp; Auditing</a:t>
+            </a:r>
+            <a:endParaRPr lang="en-US" sz="1400" dirty="0"/>
+          </a:p>
+        </p:txBody>
       </p:sp>
       <p:sp>
         <p:nvSpPr>
@@ -6253,8 +6266,8 @@
         </p:nvSpPr>
         <p:spPr>
           <a:xfrm>
-            <a:off x="5824728" y="2331720"/>
-            <a:ext cx="512064" cy="512064"/>
+            <a:off x="4297680" y="5102352"/>
+            <a:ext cx="7315200" cy="777240"/>
           </a:xfrm>
           <a:prstGeom prst="rect">
             <a:avLst/>
@@ -6266,550 +6279,27 @@
           <a:bodyPr wrap="square" rtlCol="0" anchor="ctr"/>
           <a:lstStyle/>
           <a:p>
-            <a:pPr algn="ctr" indent="0" marL="0">
-              <a:buNone/>
-            </a:pPr>
-            <a:r>
-              <a:rPr lang="en-US" sz="1500" b="1" dirty="0">
-                <a:solidFill>
-                  <a:srgbClr val="FFFFFF"/>
-                </a:solidFill>
-                <a:latin typeface="Cambria" pitchFamily="34" charset="0"/>
-                <a:ea typeface="Cambria" pitchFamily="34" charset="-122"/>
-                <a:cs typeface="Cambria" pitchFamily="34" charset="-120"/>
-              </a:rPr>
-              <a:t>3</a:t>
-            </a:r>
-            <a:endParaRPr lang="en-US" sz="1500" dirty="0"/>
+            <a:pPr indent="0" marL="0">
+              <a:buNone/>
+            </a:pPr>
+            <a:r>
+              <a:rPr lang="en-US" sz="1250" dirty="0">
+                <a:solidFill>
+                  <a:srgbClr val="1A1A1A"/>
+                </a:solidFill>
+                <a:latin typeface="Calibri" pitchFamily="34" charset="0"/>
+                <a:ea typeface="Calibri" pitchFamily="34" charset="-122"/>
+                <a:cs typeface="Calibri" pitchFamily="34" charset="-120"/>
+              </a:rPr>
+              <a:t>SOX, PCI DSS, and GLBA controls verified on a recurring schedule</a:t>
+            </a:r>
+            <a:endParaRPr lang="en-US" sz="1250" dirty="0"/>
           </a:p>
         </p:txBody>
       </p:sp>
       <p:sp>
         <p:nvSpPr>
           <p:cNvPr id="19" name="Text 17"/>
-          <p:cNvSpPr txBox="1"/>
-          <p:nvPr/>
-        </p:nvSpPr>
-        <p:spPr>
-          <a:xfrm>
-            <a:off x="5166360" y="2971800"/>
-            <a:ext cx="1828800" cy="365760"/>
-          </a:xfrm>
-          <a:prstGeom prst="rect">
-            <a:avLst/>
-          </a:prstGeom>
-          <a:noFill/>
-          <a:ln/>
-        </p:spPr>
-        <p:txBody>
-          <a:bodyPr wrap="square" lIns="0" tIns="0" rIns="0" bIns="0" rtlCol="0" anchor="ctr"/>
-          <a:lstStyle/>
-          <a:p>
-            <a:pPr algn="ctr" indent="0" marL="0">
-              <a:buNone/>
-            </a:pPr>
-            <a:r>
-              <a:rPr lang="en-US" sz="1400" b="1" dirty="0">
-                <a:solidFill>
-                  <a:srgbClr val="C9A227"/>
-                </a:solidFill>
-                <a:latin typeface="Calibri" pitchFamily="34" charset="0"/>
-                <a:ea typeface="Calibri" pitchFamily="34" charset="-122"/>
-                <a:cs typeface="Calibri" pitchFamily="34" charset="-120"/>
-              </a:rPr>
-              <a:t>Notify</a:t>
-            </a:r>
-            <a:endParaRPr lang="en-US" sz="1400" dirty="0"/>
-          </a:p>
-        </p:txBody>
-      </p:sp>
-      <p:sp>
-        <p:nvSpPr>
-          <p:cNvPr id="20" name="Text 18"/>
-          <p:cNvSpPr txBox="1"/>
-          <p:nvPr/>
-        </p:nvSpPr>
-        <p:spPr>
-          <a:xfrm>
-            <a:off x="5166360" y="3364992"/>
-            <a:ext cx="1828800" cy="914400"/>
-          </a:xfrm>
-          <a:prstGeom prst="rect">
-            <a:avLst/>
-          </a:prstGeom>
-          <a:noFill/>
-          <a:ln/>
-        </p:spPr>
-        <p:txBody>
-          <a:bodyPr wrap="square" lIns="0" tIns="0" rIns="0" bIns="0" rtlCol="0" anchor="ctr"/>
-          <a:lstStyle/>
-          <a:p>
-            <a:pPr algn="ctr" indent="0" marL="0">
-              <a:buNone/>
-            </a:pPr>
-            <a:r>
-              <a:rPr lang="en-US" sz="1050" dirty="0">
-                <a:solidFill>
-                  <a:srgbClr val="1A1A1A"/>
-                </a:solidFill>
-                <a:latin typeface="Calibri" pitchFamily="34" charset="0"/>
-                <a:ea typeface="Calibri" pitchFamily="34" charset="-122"/>
-                <a:cs typeface="Calibri" pitchFamily="34" charset="-120"/>
-              </a:rPr>
-              <a:t>Affected clients, including GlobalTech, informed promptly</a:t>
-            </a:r>
-            <a:endParaRPr lang="en-US" sz="1050" dirty="0"/>
-          </a:p>
-        </p:txBody>
-      </p:sp>
-      <p:sp>
-        <p:nvSpPr>
-          <p:cNvPr id="21" name="Text 19"/>
-          <p:cNvSpPr txBox="1"/>
-          <p:nvPr/>
-        </p:nvSpPr>
-        <p:spPr>
-          <a:xfrm>
-            <a:off x="7132320" y="3063240"/>
-            <a:ext cx="182880" cy="365760"/>
-          </a:xfrm>
-          <a:prstGeom prst="rect">
-            <a:avLst/>
-          </a:prstGeom>
-          <a:noFill/>
-          <a:ln/>
-        </p:spPr>
-        <p:txBody>
-          <a:bodyPr wrap="square" lIns="0" tIns="0" rIns="0" bIns="0" rtlCol="0" anchor="ctr"/>
-          <a:lstStyle/>
-          <a:p>
-            <a:pPr algn="ctr" indent="0" marL="0">
-              <a:buNone/>
-            </a:pPr>
-            <a:r>
-              <a:rPr lang="en-US" sz="1600" dirty="0">
-                <a:solidFill>
-                  <a:srgbClr val="6B7280"/>
-                </a:solidFill>
-                <a:latin typeface="Calibri" pitchFamily="34" charset="0"/>
-                <a:ea typeface="Calibri" pitchFamily="34" charset="-122"/>
-                <a:cs typeface="Calibri" pitchFamily="34" charset="-120"/>
-              </a:rPr>
-              <a:t>→</a:t>
-            </a:r>
-            <a:endParaRPr lang="en-US" sz="1600" dirty="0"/>
-          </a:p>
-        </p:txBody>
-      </p:sp>
-      <p:sp>
-        <p:nvSpPr>
-          <p:cNvPr id="22" name="Shape 20"/>
-          <p:cNvSpPr/>
-          <p:nvPr/>
-        </p:nvSpPr>
-        <p:spPr>
-          <a:xfrm>
-            <a:off x="7269480" y="2103120"/>
-            <a:ext cx="2103120" cy="2286000"/>
-          </a:xfrm>
-          <a:prstGeom prst="roundRect">
-            <a:avLst>
-              <a:gd name="adj" fmla="val 4348"/>
-            </a:avLst>
-          </a:prstGeom>
-          <a:solidFill>
-            <a:srgbClr val="FFFFFF"/>
-          </a:solidFill>
-          <a:ln w="19050">
-            <a:solidFill>
-              <a:srgbClr val="2F9E56"/>
-            </a:solidFill>
-            <a:prstDash val="solid"/>
-          </a:ln>
-        </p:spPr>
-      </p:sp>
-      <p:sp>
-        <p:nvSpPr>
-          <p:cNvPr id="23" name="Shape 21"/>
-          <p:cNvSpPr/>
-          <p:nvPr/>
-        </p:nvSpPr>
-        <p:spPr>
-          <a:xfrm>
-            <a:off x="8065008" y="2331720"/>
-            <a:ext cx="512064" cy="512064"/>
-          </a:xfrm>
-          <a:prstGeom prst="ellipse">
-            <a:avLst/>
-          </a:prstGeom>
-          <a:solidFill>
-            <a:srgbClr val="2F9E56"/>
-          </a:solidFill>
-          <a:ln/>
-        </p:spPr>
-      </p:sp>
-      <p:sp>
-        <p:nvSpPr>
-          <p:cNvPr id="24" name="Text 22"/>
-          <p:cNvSpPr txBox="1"/>
-          <p:nvPr/>
-        </p:nvSpPr>
-        <p:spPr>
-          <a:xfrm>
-            <a:off x="8065008" y="2331720"/>
-            <a:ext cx="512064" cy="512064"/>
-          </a:xfrm>
-          <a:prstGeom prst="rect">
-            <a:avLst/>
-          </a:prstGeom>
-          <a:noFill/>
-          <a:ln/>
-        </p:spPr>
-        <p:txBody>
-          <a:bodyPr wrap="square" rtlCol="0" anchor="ctr"/>
-          <a:lstStyle/>
-          <a:p>
-            <a:pPr algn="ctr" indent="0" marL="0">
-              <a:buNone/>
-            </a:pPr>
-            <a:r>
-              <a:rPr lang="en-US" sz="1500" b="1" dirty="0">
-                <a:solidFill>
-                  <a:srgbClr val="FFFFFF"/>
-                </a:solidFill>
-                <a:latin typeface="Cambria" pitchFamily="34" charset="0"/>
-                <a:ea typeface="Cambria" pitchFamily="34" charset="-122"/>
-                <a:cs typeface="Cambria" pitchFamily="34" charset="-120"/>
-              </a:rPr>
-              <a:t>4</a:t>
-            </a:r>
-            <a:endParaRPr lang="en-US" sz="1500" dirty="0"/>
-          </a:p>
-        </p:txBody>
-      </p:sp>
-      <p:sp>
-        <p:nvSpPr>
-          <p:cNvPr id="25" name="Text 23"/>
-          <p:cNvSpPr txBox="1"/>
-          <p:nvPr/>
-        </p:nvSpPr>
-        <p:spPr>
-          <a:xfrm>
-            <a:off x="7406640" y="2971800"/>
-            <a:ext cx="1828800" cy="365760"/>
-          </a:xfrm>
-          <a:prstGeom prst="rect">
-            <a:avLst/>
-          </a:prstGeom>
-          <a:noFill/>
-          <a:ln/>
-        </p:spPr>
-        <p:txBody>
-          <a:bodyPr wrap="square" lIns="0" tIns="0" rIns="0" bIns="0" rtlCol="0" anchor="ctr"/>
-          <a:lstStyle/>
-          <a:p>
-            <a:pPr algn="ctr" indent="0" marL="0">
-              <a:buNone/>
-            </a:pPr>
-            <a:r>
-              <a:rPr lang="en-US" sz="1400" b="1" dirty="0">
-                <a:solidFill>
-                  <a:srgbClr val="2F9E56"/>
-                </a:solidFill>
-                <a:latin typeface="Calibri" pitchFamily="34" charset="0"/>
-                <a:ea typeface="Calibri" pitchFamily="34" charset="-122"/>
-                <a:cs typeface="Calibri" pitchFamily="34" charset="-120"/>
-              </a:rPr>
-              <a:t>Recover</a:t>
-            </a:r>
-            <a:endParaRPr lang="en-US" sz="1400" dirty="0"/>
-          </a:p>
-        </p:txBody>
-      </p:sp>
-      <p:sp>
-        <p:nvSpPr>
-          <p:cNvPr id="26" name="Text 24"/>
-          <p:cNvSpPr txBox="1"/>
-          <p:nvPr/>
-        </p:nvSpPr>
-        <p:spPr>
-          <a:xfrm>
-            <a:off x="7406640" y="3364992"/>
-            <a:ext cx="1828800" cy="914400"/>
-          </a:xfrm>
-          <a:prstGeom prst="rect">
-            <a:avLst/>
-          </a:prstGeom>
-          <a:noFill/>
-          <a:ln/>
-        </p:spPr>
-        <p:txBody>
-          <a:bodyPr wrap="square" lIns="0" tIns="0" rIns="0" bIns="0" rtlCol="0" anchor="ctr"/>
-          <a:lstStyle/>
-          <a:p>
-            <a:pPr algn="ctr" indent="0" marL="0">
-              <a:buNone/>
-            </a:pPr>
-            <a:r>
-              <a:rPr lang="en-US" sz="1050" dirty="0">
-                <a:solidFill>
-                  <a:srgbClr val="1A1A1A"/>
-                </a:solidFill>
-                <a:latin typeface="Calibri" pitchFamily="34" charset="0"/>
-                <a:ea typeface="Calibri" pitchFamily="34" charset="-122"/>
-                <a:cs typeface="Calibri" pitchFamily="34" charset="-120"/>
-              </a:rPr>
-              <a:t>Restored from backup; deployed WAF, dedicated CDE, new AAA+MFA</a:t>
-            </a:r>
-            <a:endParaRPr lang="en-US" sz="1050" dirty="0"/>
-          </a:p>
-        </p:txBody>
-      </p:sp>
-      <p:sp>
-        <p:nvSpPr>
-          <p:cNvPr id="27" name="Text 25"/>
-          <p:cNvSpPr txBox="1"/>
-          <p:nvPr/>
-        </p:nvSpPr>
-        <p:spPr>
-          <a:xfrm>
-            <a:off x="9372600" y="3063240"/>
-            <a:ext cx="182880" cy="365760"/>
-          </a:xfrm>
-          <a:prstGeom prst="rect">
-            <a:avLst/>
-          </a:prstGeom>
-          <a:noFill/>
-          <a:ln/>
-        </p:spPr>
-        <p:txBody>
-          <a:bodyPr wrap="square" lIns="0" tIns="0" rIns="0" bIns="0" rtlCol="0" anchor="ctr"/>
-          <a:lstStyle/>
-          <a:p>
-            <a:pPr algn="ctr" indent="0" marL="0">
-              <a:buNone/>
-            </a:pPr>
-            <a:r>
-              <a:rPr lang="en-US" sz="1600" dirty="0">
-                <a:solidFill>
-                  <a:srgbClr val="6B7280"/>
-                </a:solidFill>
-                <a:latin typeface="Calibri" pitchFamily="34" charset="0"/>
-                <a:ea typeface="Calibri" pitchFamily="34" charset="-122"/>
-                <a:cs typeface="Calibri" pitchFamily="34" charset="-120"/>
-              </a:rPr>
-              <a:t>→</a:t>
-            </a:r>
-            <a:endParaRPr lang="en-US" sz="1600" dirty="0"/>
-          </a:p>
-        </p:txBody>
-      </p:sp>
-      <p:sp>
-        <p:nvSpPr>
-          <p:cNvPr id="28" name="Shape 26"/>
-          <p:cNvSpPr/>
-          <p:nvPr/>
-        </p:nvSpPr>
-        <p:spPr>
-          <a:xfrm>
-            <a:off x="9509760" y="2103120"/>
-            <a:ext cx="2103120" cy="2286000"/>
-          </a:xfrm>
-          <a:prstGeom prst="roundRect">
-            <a:avLst>
-              <a:gd name="adj" fmla="val 4348"/>
-            </a:avLst>
-          </a:prstGeom>
-          <a:solidFill>
-            <a:srgbClr val="FFFFFF"/>
-          </a:solidFill>
-          <a:ln w="19050">
-            <a:solidFill>
-              <a:srgbClr val="C94F4F"/>
-            </a:solidFill>
-            <a:prstDash val="solid"/>
-          </a:ln>
-        </p:spPr>
-      </p:sp>
-      <p:sp>
-        <p:nvSpPr>
-          <p:cNvPr id="29" name="Shape 27"/>
-          <p:cNvSpPr/>
-          <p:nvPr/>
-        </p:nvSpPr>
-        <p:spPr>
-          <a:xfrm>
-            <a:off x="10305288" y="2331720"/>
-            <a:ext cx="512064" cy="512064"/>
-          </a:xfrm>
-          <a:prstGeom prst="ellipse">
-            <a:avLst/>
-          </a:prstGeom>
-          <a:solidFill>
-            <a:srgbClr val="C94F4F"/>
-          </a:solidFill>
-          <a:ln/>
-        </p:spPr>
-      </p:sp>
-      <p:sp>
-        <p:nvSpPr>
-          <p:cNvPr id="30" name="Text 28"/>
-          <p:cNvSpPr txBox="1"/>
-          <p:nvPr/>
-        </p:nvSpPr>
-        <p:spPr>
-          <a:xfrm>
-            <a:off x="10305288" y="2331720"/>
-            <a:ext cx="512064" cy="512064"/>
-          </a:xfrm>
-          <a:prstGeom prst="rect">
-            <a:avLst/>
-          </a:prstGeom>
-          <a:noFill/>
-          <a:ln/>
-        </p:spPr>
-        <p:txBody>
-          <a:bodyPr wrap="square" rtlCol="0" anchor="ctr"/>
-          <a:lstStyle/>
-          <a:p>
-            <a:pPr algn="ctr" indent="0" marL="0">
-              <a:buNone/>
-            </a:pPr>
-            <a:r>
-              <a:rPr lang="en-US" sz="1500" b="1" dirty="0">
-                <a:solidFill>
-                  <a:srgbClr val="FFFFFF"/>
-                </a:solidFill>
-                <a:latin typeface="Cambria" pitchFamily="34" charset="0"/>
-                <a:ea typeface="Cambria" pitchFamily="34" charset="-122"/>
-                <a:cs typeface="Cambria" pitchFamily="34" charset="-120"/>
-              </a:rPr>
-              <a:t>5</a:t>
-            </a:r>
-            <a:endParaRPr lang="en-US" sz="1500" dirty="0"/>
-          </a:p>
-        </p:txBody>
-      </p:sp>
-      <p:sp>
-        <p:nvSpPr>
-          <p:cNvPr id="31" name="Text 29"/>
-          <p:cNvSpPr txBox="1"/>
-          <p:nvPr/>
-        </p:nvSpPr>
-        <p:spPr>
-          <a:xfrm>
-            <a:off x="9646920" y="2971800"/>
-            <a:ext cx="1828800" cy="365760"/>
-          </a:xfrm>
-          <a:prstGeom prst="rect">
-            <a:avLst/>
-          </a:prstGeom>
-          <a:noFill/>
-          <a:ln/>
-        </p:spPr>
-        <p:txBody>
-          <a:bodyPr wrap="square" lIns="0" tIns="0" rIns="0" bIns="0" rtlCol="0" anchor="ctr"/>
-          <a:lstStyle/>
-          <a:p>
-            <a:pPr algn="ctr" indent="0" marL="0">
-              <a:buNone/>
-            </a:pPr>
-            <a:r>
-              <a:rPr lang="en-US" sz="1400" b="1" dirty="0">
-                <a:solidFill>
-                  <a:srgbClr val="C94F4F"/>
-                </a:solidFill>
-                <a:latin typeface="Calibri" pitchFamily="34" charset="0"/>
-                <a:ea typeface="Calibri" pitchFamily="34" charset="-122"/>
-                <a:cs typeface="Calibri" pitchFamily="34" charset="-120"/>
-              </a:rPr>
-              <a:t>Review</a:t>
-            </a:r>
-            <a:endParaRPr lang="en-US" sz="1400" dirty="0"/>
-          </a:p>
-        </p:txBody>
-      </p:sp>
-      <p:sp>
-        <p:nvSpPr>
-          <p:cNvPr id="32" name="Text 30"/>
-          <p:cNvSpPr txBox="1"/>
-          <p:nvPr/>
-        </p:nvSpPr>
-        <p:spPr>
-          <a:xfrm>
-            <a:off x="9646920" y="3364992"/>
-            <a:ext cx="1828800" cy="914400"/>
-          </a:xfrm>
-          <a:prstGeom prst="rect">
-            <a:avLst/>
-          </a:prstGeom>
-          <a:noFill/>
-          <a:ln/>
-        </p:spPr>
-        <p:txBody>
-          <a:bodyPr wrap="square" lIns="0" tIns="0" rIns="0" bIns="0" rtlCol="0" anchor="ctr"/>
-          <a:lstStyle/>
-          <a:p>
-            <a:pPr algn="ctr" indent="0" marL="0">
-              <a:buNone/>
-            </a:pPr>
-            <a:r>
-              <a:rPr lang="en-US" sz="1050" dirty="0">
-                <a:solidFill>
-                  <a:srgbClr val="1A1A1A"/>
-                </a:solidFill>
-                <a:latin typeface="Calibri" pitchFamily="34" charset="0"/>
-                <a:ea typeface="Calibri" pitchFamily="34" charset="-122"/>
-                <a:cs typeface="Calibri" pitchFamily="34" charset="-120"/>
-              </a:rPr>
-              <a:t>Independent third-party compliance audit</a:t>
-            </a:r>
-            <a:endParaRPr lang="en-US" sz="1050" dirty="0"/>
-          </a:p>
-        </p:txBody>
-      </p:sp>
-      <p:sp>
-        <p:nvSpPr>
-          <p:cNvPr id="33" name="Text 31"/>
-          <p:cNvSpPr txBox="1"/>
-          <p:nvPr/>
-        </p:nvSpPr>
-        <p:spPr>
-          <a:xfrm>
-            <a:off x="548640" y="4709160"/>
-            <a:ext cx="11109960" cy="822960"/>
-          </a:xfrm>
-          <a:prstGeom prst="rect">
-            <a:avLst/>
-          </a:prstGeom>
-          <a:noFill/>
-          <a:ln/>
-        </p:spPr>
-        <p:txBody>
-          <a:bodyPr wrap="square" rtlCol="0" anchor="ctr"/>
-          <a:lstStyle/>
-          <a:p>
-            <a:pPr indent="0" marL="0">
-              <a:buNone/>
-            </a:pPr>
-            <a:r>
-              <a:rPr lang="en-US" sz="1250" i="1" dirty="0">
-                <a:solidFill>
-                  <a:srgbClr val="1E2761"/>
-                </a:solidFill>
-                <a:latin typeface="Calibri" pitchFamily="34" charset="0"/>
-                <a:ea typeface="Calibri" pitchFamily="34" charset="-122"/>
-                <a:cs typeface="Calibri" pitchFamily="34" charset="-120"/>
-              </a:rPr>
-              <a:t>Lessons learned: stronger vulnerability management, a documented IR plan, retuned SIEM alerting, and specialized IT training on distinguishing false positives from real incidents.</a:t>
-            </a:r>
-            <a:endParaRPr lang="en-US" sz="1250" dirty="0"/>
-          </a:p>
-        </p:txBody>
-      </p:sp>
-      <p:sp>
-        <p:nvSpPr>
-          <p:cNvPr id="34" name="Text 32"/>
           <p:cNvSpPr txBox="1"/>
           <p:nvPr/>
         </p:nvSpPr>
@@ -6848,7 +6338,7 @@
       </p:sp>
       <p:sp>
         <p:nvSpPr>
-          <p:cNvPr id="35" name="Text 33"/>
+          <p:cNvPr id="20" name="Text 18"/>
           <p:cNvSpPr txBox="1"/>
           <p:nvPr/>
         </p:nvSpPr>
@@ -6879,7 +6369,7 @@
                 <a:ea typeface="Calibri" pitchFamily="34" charset="-122"/>
                 <a:cs typeface="Calibri" pitchFamily="34" charset="-120"/>
               </a:rPr>
-              <a:t>14</a:t>
+              <a:t>13</a:t>
             </a:r>
             <a:endParaRPr lang="en-US" sz="900" dirty="0"/>
           </a:p>
@@ -6943,6 +6433,1202 @@
                 <a:ea typeface="Calibri" pitchFamily="34" charset="-122"/>
                 <a:cs typeface="Calibri" pitchFamily="34" charset="-120"/>
               </a:rPr>
+              <a:t>INCIDENT RESPONSE</a:t>
+            </a:r>
+            <a:endParaRPr lang="en-US" sz="1200" dirty="0"/>
+          </a:p>
+        </p:txBody>
+      </p:sp>
+      <p:sp>
+        <p:nvSpPr>
+          <p:cNvPr id="3" name="Text 1"/>
+          <p:cNvSpPr txBox="1"/>
+          <p:nvPr/>
+        </p:nvSpPr>
+        <p:spPr>
+          <a:xfrm>
+            <a:off x="548640" y="658368"/>
+            <a:ext cx="11064240" cy="822960"/>
+          </a:xfrm>
+          <a:prstGeom prst="rect">
+            <a:avLst/>
+          </a:prstGeom>
+          <a:noFill/>
+          <a:ln/>
+        </p:spPr>
+        <p:txBody>
+          <a:bodyPr wrap="square" rtlCol="0" anchor="ctr"/>
+          <a:lstStyle/>
+          <a:p>
+            <a:pPr indent="0" marL="0">
+              <a:buNone/>
+            </a:pPr>
+            <a:r>
+              <a:rPr lang="en-US" sz="3200" b="1" dirty="0">
+                <a:solidFill>
+                  <a:srgbClr val="1A1A1A"/>
+                </a:solidFill>
+                <a:latin typeface="Cambria" pitchFamily="34" charset="0"/>
+                <a:ea typeface="Cambria" pitchFamily="34" charset="-122"/>
+                <a:cs typeface="Cambria" pitchFamily="34" charset="-120"/>
+              </a:rPr>
+              <a:t>How We Responded to the Breach</a:t>
+            </a:r>
+            <a:endParaRPr lang="en-US" sz="3200" dirty="0"/>
+          </a:p>
+        </p:txBody>
+      </p:sp>
+      <p:sp>
+        <p:nvSpPr>
+          <p:cNvPr id="4" name="Shape 2"/>
+          <p:cNvSpPr/>
+          <p:nvPr/>
+        </p:nvSpPr>
+        <p:spPr>
+          <a:xfrm>
+            <a:off x="548640" y="2103120"/>
+            <a:ext cx="2103120" cy="2286000"/>
+          </a:xfrm>
+          <a:prstGeom prst="roundRect">
+            <a:avLst>
+              <a:gd name="adj" fmla="val 4348"/>
+            </a:avLst>
+          </a:prstGeom>
+          <a:solidFill>
+            <a:srgbClr val="FFFFFF"/>
+          </a:solidFill>
+          <a:ln w="19050">
+            <a:solidFill>
+              <a:srgbClr val="1E2761"/>
+            </a:solidFill>
+            <a:prstDash val="solid"/>
+          </a:ln>
+        </p:spPr>
+      </p:sp>
+      <p:sp>
+        <p:nvSpPr>
+          <p:cNvPr id="5" name="Shape 3"/>
+          <p:cNvSpPr/>
+          <p:nvPr/>
+        </p:nvSpPr>
+        <p:spPr>
+          <a:xfrm>
+            <a:off x="1344168" y="2331720"/>
+            <a:ext cx="512064" cy="512064"/>
+          </a:xfrm>
+          <a:prstGeom prst="ellipse">
+            <a:avLst/>
+          </a:prstGeom>
+          <a:solidFill>
+            <a:srgbClr val="1E2761"/>
+          </a:solidFill>
+          <a:ln/>
+        </p:spPr>
+      </p:sp>
+      <p:sp>
+        <p:nvSpPr>
+          <p:cNvPr id="6" name="Text 4"/>
+          <p:cNvSpPr txBox="1"/>
+          <p:nvPr/>
+        </p:nvSpPr>
+        <p:spPr>
+          <a:xfrm>
+            <a:off x="1344168" y="2331720"/>
+            <a:ext cx="512064" cy="512064"/>
+          </a:xfrm>
+          <a:prstGeom prst="rect">
+            <a:avLst/>
+          </a:prstGeom>
+          <a:noFill/>
+          <a:ln/>
+        </p:spPr>
+        <p:txBody>
+          <a:bodyPr wrap="square" rtlCol="0" anchor="ctr"/>
+          <a:lstStyle/>
+          <a:p>
+            <a:pPr algn="ctr" indent="0" marL="0">
+              <a:buNone/>
+            </a:pPr>
+            <a:r>
+              <a:rPr lang="en-US" sz="1500" b="1" dirty="0">
+                <a:solidFill>
+                  <a:srgbClr val="FFFFFF"/>
+                </a:solidFill>
+                <a:latin typeface="Cambria" pitchFamily="34" charset="0"/>
+                <a:ea typeface="Cambria" pitchFamily="34" charset="-122"/>
+                <a:cs typeface="Cambria" pitchFamily="34" charset="-120"/>
+              </a:rPr>
+              <a:t>1</a:t>
+            </a:r>
+            <a:endParaRPr lang="en-US" sz="1500" dirty="0"/>
+          </a:p>
+        </p:txBody>
+      </p:sp>
+      <p:sp>
+        <p:nvSpPr>
+          <p:cNvPr id="7" name="Text 5"/>
+          <p:cNvSpPr txBox="1"/>
+          <p:nvPr/>
+        </p:nvSpPr>
+        <p:spPr>
+          <a:xfrm>
+            <a:off x="685800" y="2971800"/>
+            <a:ext cx="1828800" cy="365760"/>
+          </a:xfrm>
+          <a:prstGeom prst="rect">
+            <a:avLst/>
+          </a:prstGeom>
+          <a:noFill/>
+          <a:ln/>
+        </p:spPr>
+        <p:txBody>
+          <a:bodyPr wrap="square" lIns="0" tIns="0" rIns="0" bIns="0" rtlCol="0" anchor="ctr"/>
+          <a:lstStyle/>
+          <a:p>
+            <a:pPr algn="ctr" indent="0" marL="0">
+              <a:buNone/>
+            </a:pPr>
+            <a:r>
+              <a:rPr lang="en-US" sz="1400" b="1" dirty="0">
+                <a:solidFill>
+                  <a:srgbClr val="1E2761"/>
+                </a:solidFill>
+                <a:latin typeface="Calibri" pitchFamily="34" charset="0"/>
+                <a:ea typeface="Calibri" pitchFamily="34" charset="-122"/>
+                <a:cs typeface="Calibri" pitchFamily="34" charset="-120"/>
+              </a:rPr>
+              <a:t>Contain</a:t>
+            </a:r>
+            <a:endParaRPr lang="en-US" sz="1400" dirty="0"/>
+          </a:p>
+        </p:txBody>
+      </p:sp>
+      <p:sp>
+        <p:nvSpPr>
+          <p:cNvPr id="8" name="Text 6"/>
+          <p:cNvSpPr txBox="1"/>
+          <p:nvPr/>
+        </p:nvSpPr>
+        <p:spPr>
+          <a:xfrm>
+            <a:off x="685800" y="3364992"/>
+            <a:ext cx="1828800" cy="914400"/>
+          </a:xfrm>
+          <a:prstGeom prst="rect">
+            <a:avLst/>
+          </a:prstGeom>
+          <a:noFill/>
+          <a:ln/>
+        </p:spPr>
+        <p:txBody>
+          <a:bodyPr wrap="square" lIns="0" tIns="0" rIns="0" bIns="0" rtlCol="0" anchor="ctr"/>
+          <a:lstStyle/>
+          <a:p>
+            <a:pPr algn="ctr" indent="0" marL="0">
+              <a:buNone/>
+            </a:pPr>
+            <a:r>
+              <a:rPr lang="en-US" sz="1050" dirty="0">
+                <a:solidFill>
+                  <a:srgbClr val="1A1A1A"/>
+                </a:solidFill>
+                <a:latin typeface="Calibri" pitchFamily="34" charset="0"/>
+                <a:ea typeface="Calibri" pitchFamily="34" charset="-122"/>
+                <a:cs typeface="Calibri" pitchFamily="34" charset="-120"/>
+              </a:rPr>
+              <a:t>Disconnected the compromised server immediately</a:t>
+            </a:r>
+            <a:endParaRPr lang="en-US" sz="1050" dirty="0"/>
+          </a:p>
+        </p:txBody>
+      </p:sp>
+      <p:sp>
+        <p:nvSpPr>
+          <p:cNvPr id="9" name="Text 7"/>
+          <p:cNvSpPr txBox="1"/>
+          <p:nvPr/>
+        </p:nvSpPr>
+        <p:spPr>
+          <a:xfrm>
+            <a:off x="2651760" y="3063240"/>
+            <a:ext cx="182880" cy="365760"/>
+          </a:xfrm>
+          <a:prstGeom prst="rect">
+            <a:avLst/>
+          </a:prstGeom>
+          <a:noFill/>
+          <a:ln/>
+        </p:spPr>
+        <p:txBody>
+          <a:bodyPr wrap="square" lIns="0" tIns="0" rIns="0" bIns="0" rtlCol="0" anchor="ctr"/>
+          <a:lstStyle/>
+          <a:p>
+            <a:pPr algn="ctr" indent="0" marL="0">
+              <a:buNone/>
+            </a:pPr>
+            <a:r>
+              <a:rPr lang="en-US" sz="1600" dirty="0">
+                <a:solidFill>
+                  <a:srgbClr val="6B7280"/>
+                </a:solidFill>
+                <a:latin typeface="Calibri" pitchFamily="34" charset="0"/>
+                <a:ea typeface="Calibri" pitchFamily="34" charset="-122"/>
+                <a:cs typeface="Calibri" pitchFamily="34" charset="-120"/>
+              </a:rPr>
+              <a:t>→</a:t>
+            </a:r>
+            <a:endParaRPr lang="en-US" sz="1600" dirty="0"/>
+          </a:p>
+        </p:txBody>
+      </p:sp>
+      <p:sp>
+        <p:nvSpPr>
+          <p:cNvPr id="10" name="Shape 8"/>
+          <p:cNvSpPr/>
+          <p:nvPr/>
+        </p:nvSpPr>
+        <p:spPr>
+          <a:xfrm>
+            <a:off x="2788920" y="2103120"/>
+            <a:ext cx="2103120" cy="2286000"/>
+          </a:xfrm>
+          <a:prstGeom prst="roundRect">
+            <a:avLst>
+              <a:gd name="adj" fmla="val 4348"/>
+            </a:avLst>
+          </a:prstGeom>
+          <a:solidFill>
+            <a:srgbClr val="FFFFFF"/>
+          </a:solidFill>
+          <a:ln w="19050">
+            <a:solidFill>
+              <a:srgbClr val="3B4A9E"/>
+            </a:solidFill>
+            <a:prstDash val="solid"/>
+          </a:ln>
+        </p:spPr>
+      </p:sp>
+      <p:sp>
+        <p:nvSpPr>
+          <p:cNvPr id="11" name="Shape 9"/>
+          <p:cNvSpPr/>
+          <p:nvPr/>
+        </p:nvSpPr>
+        <p:spPr>
+          <a:xfrm>
+            <a:off x="3584448" y="2331720"/>
+            <a:ext cx="512064" cy="512064"/>
+          </a:xfrm>
+          <a:prstGeom prst="ellipse">
+            <a:avLst/>
+          </a:prstGeom>
+          <a:solidFill>
+            <a:srgbClr val="3B4A9E"/>
+          </a:solidFill>
+          <a:ln/>
+        </p:spPr>
+      </p:sp>
+      <p:sp>
+        <p:nvSpPr>
+          <p:cNvPr id="12" name="Text 10"/>
+          <p:cNvSpPr txBox="1"/>
+          <p:nvPr/>
+        </p:nvSpPr>
+        <p:spPr>
+          <a:xfrm>
+            <a:off x="3584448" y="2331720"/>
+            <a:ext cx="512064" cy="512064"/>
+          </a:xfrm>
+          <a:prstGeom prst="rect">
+            <a:avLst/>
+          </a:prstGeom>
+          <a:noFill/>
+          <a:ln/>
+        </p:spPr>
+        <p:txBody>
+          <a:bodyPr wrap="square" rtlCol="0" anchor="ctr"/>
+          <a:lstStyle/>
+          <a:p>
+            <a:pPr algn="ctr" indent="0" marL="0">
+              <a:buNone/>
+            </a:pPr>
+            <a:r>
+              <a:rPr lang="en-US" sz="1500" b="1" dirty="0">
+                <a:solidFill>
+                  <a:srgbClr val="FFFFFF"/>
+                </a:solidFill>
+                <a:latin typeface="Cambria" pitchFamily="34" charset="0"/>
+                <a:ea typeface="Cambria" pitchFamily="34" charset="-122"/>
+                <a:cs typeface="Cambria" pitchFamily="34" charset="-120"/>
+              </a:rPr>
+              <a:t>2</a:t>
+            </a:r>
+            <a:endParaRPr lang="en-US" sz="1500" dirty="0"/>
+          </a:p>
+        </p:txBody>
+      </p:sp>
+      <p:sp>
+        <p:nvSpPr>
+          <p:cNvPr id="13" name="Text 11"/>
+          <p:cNvSpPr txBox="1"/>
+          <p:nvPr/>
+        </p:nvSpPr>
+        <p:spPr>
+          <a:xfrm>
+            <a:off x="2926080" y="2971800"/>
+            <a:ext cx="1828800" cy="365760"/>
+          </a:xfrm>
+          <a:prstGeom prst="rect">
+            <a:avLst/>
+          </a:prstGeom>
+          <a:noFill/>
+          <a:ln/>
+        </p:spPr>
+        <p:txBody>
+          <a:bodyPr wrap="square" lIns="0" tIns="0" rIns="0" bIns="0" rtlCol="0" anchor="ctr"/>
+          <a:lstStyle/>
+          <a:p>
+            <a:pPr algn="ctr" indent="0" marL="0">
+              <a:buNone/>
+            </a:pPr>
+            <a:r>
+              <a:rPr lang="en-US" sz="1400" b="1" dirty="0">
+                <a:solidFill>
+                  <a:srgbClr val="3B4A9E"/>
+                </a:solidFill>
+                <a:latin typeface="Calibri" pitchFamily="34" charset="0"/>
+                <a:ea typeface="Calibri" pitchFamily="34" charset="-122"/>
+                <a:cs typeface="Calibri" pitchFamily="34" charset="-120"/>
+              </a:rPr>
+              <a:t>Investigate</a:t>
+            </a:r>
+            <a:endParaRPr lang="en-US" sz="1400" dirty="0"/>
+          </a:p>
+        </p:txBody>
+      </p:sp>
+      <p:sp>
+        <p:nvSpPr>
+          <p:cNvPr id="14" name="Text 12"/>
+          <p:cNvSpPr txBox="1"/>
+          <p:nvPr/>
+        </p:nvSpPr>
+        <p:spPr>
+          <a:xfrm>
+            <a:off x="2926080" y="3364992"/>
+            <a:ext cx="1828800" cy="914400"/>
+          </a:xfrm>
+          <a:prstGeom prst="rect">
+            <a:avLst/>
+          </a:prstGeom>
+          <a:noFill/>
+          <a:ln/>
+        </p:spPr>
+        <p:txBody>
+          <a:bodyPr wrap="square" lIns="0" tIns="0" rIns="0" bIns="0" rtlCol="0" anchor="ctr"/>
+          <a:lstStyle/>
+          <a:p>
+            <a:pPr algn="ctr" indent="0" marL="0">
+              <a:buNone/>
+            </a:pPr>
+            <a:r>
+              <a:rPr lang="en-US" sz="1050" dirty="0">
+                <a:solidFill>
+                  <a:srgbClr val="1A1A1A"/>
+                </a:solidFill>
+                <a:latin typeface="Calibri" pitchFamily="34" charset="0"/>
+                <a:ea typeface="Calibri" pitchFamily="34" charset="-122"/>
+                <a:cs typeface="Calibri" pitchFamily="34" charset="-120"/>
+              </a:rPr>
+              <a:t>Cross-functional IR team, forensic investigation</a:t>
+            </a:r>
+            <a:endParaRPr lang="en-US" sz="1050" dirty="0"/>
+          </a:p>
+        </p:txBody>
+      </p:sp>
+      <p:sp>
+        <p:nvSpPr>
+          <p:cNvPr id="15" name="Text 13"/>
+          <p:cNvSpPr txBox="1"/>
+          <p:nvPr/>
+        </p:nvSpPr>
+        <p:spPr>
+          <a:xfrm>
+            <a:off x="4892040" y="3063240"/>
+            <a:ext cx="182880" cy="365760"/>
+          </a:xfrm>
+          <a:prstGeom prst="rect">
+            <a:avLst/>
+          </a:prstGeom>
+          <a:noFill/>
+          <a:ln/>
+        </p:spPr>
+        <p:txBody>
+          <a:bodyPr wrap="square" lIns="0" tIns="0" rIns="0" bIns="0" rtlCol="0" anchor="ctr"/>
+          <a:lstStyle/>
+          <a:p>
+            <a:pPr algn="ctr" indent="0" marL="0">
+              <a:buNone/>
+            </a:pPr>
+            <a:r>
+              <a:rPr lang="en-US" sz="1600" dirty="0">
+                <a:solidFill>
+                  <a:srgbClr val="6B7280"/>
+                </a:solidFill>
+                <a:latin typeface="Calibri" pitchFamily="34" charset="0"/>
+                <a:ea typeface="Calibri" pitchFamily="34" charset="-122"/>
+                <a:cs typeface="Calibri" pitchFamily="34" charset="-120"/>
+              </a:rPr>
+              <a:t>→</a:t>
+            </a:r>
+            <a:endParaRPr lang="en-US" sz="1600" dirty="0"/>
+          </a:p>
+        </p:txBody>
+      </p:sp>
+      <p:sp>
+        <p:nvSpPr>
+          <p:cNvPr id="16" name="Shape 14"/>
+          <p:cNvSpPr/>
+          <p:nvPr/>
+        </p:nvSpPr>
+        <p:spPr>
+          <a:xfrm>
+            <a:off x="5029200" y="2103120"/>
+            <a:ext cx="2103120" cy="2286000"/>
+          </a:xfrm>
+          <a:prstGeom prst="roundRect">
+            <a:avLst>
+              <a:gd name="adj" fmla="val 4348"/>
+            </a:avLst>
+          </a:prstGeom>
+          <a:solidFill>
+            <a:srgbClr val="FFFFFF"/>
+          </a:solidFill>
+          <a:ln w="19050">
+            <a:solidFill>
+              <a:srgbClr val="C9A227"/>
+            </a:solidFill>
+            <a:prstDash val="solid"/>
+          </a:ln>
+        </p:spPr>
+      </p:sp>
+      <p:sp>
+        <p:nvSpPr>
+          <p:cNvPr id="17" name="Shape 15"/>
+          <p:cNvSpPr/>
+          <p:nvPr/>
+        </p:nvSpPr>
+        <p:spPr>
+          <a:xfrm>
+            <a:off x="5824728" y="2331720"/>
+            <a:ext cx="512064" cy="512064"/>
+          </a:xfrm>
+          <a:prstGeom prst="ellipse">
+            <a:avLst/>
+          </a:prstGeom>
+          <a:solidFill>
+            <a:srgbClr val="C9A227"/>
+          </a:solidFill>
+          <a:ln/>
+        </p:spPr>
+      </p:sp>
+      <p:sp>
+        <p:nvSpPr>
+          <p:cNvPr id="18" name="Text 16"/>
+          <p:cNvSpPr txBox="1"/>
+          <p:nvPr/>
+        </p:nvSpPr>
+        <p:spPr>
+          <a:xfrm>
+            <a:off x="5824728" y="2331720"/>
+            <a:ext cx="512064" cy="512064"/>
+          </a:xfrm>
+          <a:prstGeom prst="rect">
+            <a:avLst/>
+          </a:prstGeom>
+          <a:noFill/>
+          <a:ln/>
+        </p:spPr>
+        <p:txBody>
+          <a:bodyPr wrap="square" rtlCol="0" anchor="ctr"/>
+          <a:lstStyle/>
+          <a:p>
+            <a:pPr algn="ctr" indent="0" marL="0">
+              <a:buNone/>
+            </a:pPr>
+            <a:r>
+              <a:rPr lang="en-US" sz="1500" b="1" dirty="0">
+                <a:solidFill>
+                  <a:srgbClr val="FFFFFF"/>
+                </a:solidFill>
+                <a:latin typeface="Cambria" pitchFamily="34" charset="0"/>
+                <a:ea typeface="Cambria" pitchFamily="34" charset="-122"/>
+                <a:cs typeface="Cambria" pitchFamily="34" charset="-120"/>
+              </a:rPr>
+              <a:t>3</a:t>
+            </a:r>
+            <a:endParaRPr lang="en-US" sz="1500" dirty="0"/>
+          </a:p>
+        </p:txBody>
+      </p:sp>
+      <p:sp>
+        <p:nvSpPr>
+          <p:cNvPr id="19" name="Text 17"/>
+          <p:cNvSpPr txBox="1"/>
+          <p:nvPr/>
+        </p:nvSpPr>
+        <p:spPr>
+          <a:xfrm>
+            <a:off x="5166360" y="2971800"/>
+            <a:ext cx="1828800" cy="365760"/>
+          </a:xfrm>
+          <a:prstGeom prst="rect">
+            <a:avLst/>
+          </a:prstGeom>
+          <a:noFill/>
+          <a:ln/>
+        </p:spPr>
+        <p:txBody>
+          <a:bodyPr wrap="square" lIns="0" tIns="0" rIns="0" bIns="0" rtlCol="0" anchor="ctr"/>
+          <a:lstStyle/>
+          <a:p>
+            <a:pPr algn="ctr" indent="0" marL="0">
+              <a:buNone/>
+            </a:pPr>
+            <a:r>
+              <a:rPr lang="en-US" sz="1400" b="1" dirty="0">
+                <a:solidFill>
+                  <a:srgbClr val="C9A227"/>
+                </a:solidFill>
+                <a:latin typeface="Calibri" pitchFamily="34" charset="0"/>
+                <a:ea typeface="Calibri" pitchFamily="34" charset="-122"/>
+                <a:cs typeface="Calibri" pitchFamily="34" charset="-120"/>
+              </a:rPr>
+              <a:t>Notify</a:t>
+            </a:r>
+            <a:endParaRPr lang="en-US" sz="1400" dirty="0"/>
+          </a:p>
+        </p:txBody>
+      </p:sp>
+      <p:sp>
+        <p:nvSpPr>
+          <p:cNvPr id="20" name="Text 18"/>
+          <p:cNvSpPr txBox="1"/>
+          <p:nvPr/>
+        </p:nvSpPr>
+        <p:spPr>
+          <a:xfrm>
+            <a:off x="5166360" y="3364992"/>
+            <a:ext cx="1828800" cy="914400"/>
+          </a:xfrm>
+          <a:prstGeom prst="rect">
+            <a:avLst/>
+          </a:prstGeom>
+          <a:noFill/>
+          <a:ln/>
+        </p:spPr>
+        <p:txBody>
+          <a:bodyPr wrap="square" lIns="0" tIns="0" rIns="0" bIns="0" rtlCol="0" anchor="ctr"/>
+          <a:lstStyle/>
+          <a:p>
+            <a:pPr algn="ctr" indent="0" marL="0">
+              <a:buNone/>
+            </a:pPr>
+            <a:r>
+              <a:rPr lang="en-US" sz="1050" dirty="0">
+                <a:solidFill>
+                  <a:srgbClr val="1A1A1A"/>
+                </a:solidFill>
+                <a:latin typeface="Calibri" pitchFamily="34" charset="0"/>
+                <a:ea typeface="Calibri" pitchFamily="34" charset="-122"/>
+                <a:cs typeface="Calibri" pitchFamily="34" charset="-120"/>
+              </a:rPr>
+              <a:t>Affected clients, including GlobalTech, informed promptly</a:t>
+            </a:r>
+            <a:endParaRPr lang="en-US" sz="1050" dirty="0"/>
+          </a:p>
+        </p:txBody>
+      </p:sp>
+      <p:sp>
+        <p:nvSpPr>
+          <p:cNvPr id="21" name="Text 19"/>
+          <p:cNvSpPr txBox="1"/>
+          <p:nvPr/>
+        </p:nvSpPr>
+        <p:spPr>
+          <a:xfrm>
+            <a:off x="7132320" y="3063240"/>
+            <a:ext cx="182880" cy="365760"/>
+          </a:xfrm>
+          <a:prstGeom prst="rect">
+            <a:avLst/>
+          </a:prstGeom>
+          <a:noFill/>
+          <a:ln/>
+        </p:spPr>
+        <p:txBody>
+          <a:bodyPr wrap="square" lIns="0" tIns="0" rIns="0" bIns="0" rtlCol="0" anchor="ctr"/>
+          <a:lstStyle/>
+          <a:p>
+            <a:pPr algn="ctr" indent="0" marL="0">
+              <a:buNone/>
+            </a:pPr>
+            <a:r>
+              <a:rPr lang="en-US" sz="1600" dirty="0">
+                <a:solidFill>
+                  <a:srgbClr val="6B7280"/>
+                </a:solidFill>
+                <a:latin typeface="Calibri" pitchFamily="34" charset="0"/>
+                <a:ea typeface="Calibri" pitchFamily="34" charset="-122"/>
+                <a:cs typeface="Calibri" pitchFamily="34" charset="-120"/>
+              </a:rPr>
+              <a:t>→</a:t>
+            </a:r>
+            <a:endParaRPr lang="en-US" sz="1600" dirty="0"/>
+          </a:p>
+        </p:txBody>
+      </p:sp>
+      <p:sp>
+        <p:nvSpPr>
+          <p:cNvPr id="22" name="Shape 20"/>
+          <p:cNvSpPr/>
+          <p:nvPr/>
+        </p:nvSpPr>
+        <p:spPr>
+          <a:xfrm>
+            <a:off x="7269480" y="2103120"/>
+            <a:ext cx="2103120" cy="2286000"/>
+          </a:xfrm>
+          <a:prstGeom prst="roundRect">
+            <a:avLst>
+              <a:gd name="adj" fmla="val 4348"/>
+            </a:avLst>
+          </a:prstGeom>
+          <a:solidFill>
+            <a:srgbClr val="FFFFFF"/>
+          </a:solidFill>
+          <a:ln w="19050">
+            <a:solidFill>
+              <a:srgbClr val="2F9E56"/>
+            </a:solidFill>
+            <a:prstDash val="solid"/>
+          </a:ln>
+        </p:spPr>
+      </p:sp>
+      <p:sp>
+        <p:nvSpPr>
+          <p:cNvPr id="23" name="Shape 21"/>
+          <p:cNvSpPr/>
+          <p:nvPr/>
+        </p:nvSpPr>
+        <p:spPr>
+          <a:xfrm>
+            <a:off x="8065008" y="2331720"/>
+            <a:ext cx="512064" cy="512064"/>
+          </a:xfrm>
+          <a:prstGeom prst="ellipse">
+            <a:avLst/>
+          </a:prstGeom>
+          <a:solidFill>
+            <a:srgbClr val="2F9E56"/>
+          </a:solidFill>
+          <a:ln/>
+        </p:spPr>
+      </p:sp>
+      <p:sp>
+        <p:nvSpPr>
+          <p:cNvPr id="24" name="Text 22"/>
+          <p:cNvSpPr txBox="1"/>
+          <p:nvPr/>
+        </p:nvSpPr>
+        <p:spPr>
+          <a:xfrm>
+            <a:off x="8065008" y="2331720"/>
+            <a:ext cx="512064" cy="512064"/>
+          </a:xfrm>
+          <a:prstGeom prst="rect">
+            <a:avLst/>
+          </a:prstGeom>
+          <a:noFill/>
+          <a:ln/>
+        </p:spPr>
+        <p:txBody>
+          <a:bodyPr wrap="square" rtlCol="0" anchor="ctr"/>
+          <a:lstStyle/>
+          <a:p>
+            <a:pPr algn="ctr" indent="0" marL="0">
+              <a:buNone/>
+            </a:pPr>
+            <a:r>
+              <a:rPr lang="en-US" sz="1500" b="1" dirty="0">
+                <a:solidFill>
+                  <a:srgbClr val="FFFFFF"/>
+                </a:solidFill>
+                <a:latin typeface="Cambria" pitchFamily="34" charset="0"/>
+                <a:ea typeface="Cambria" pitchFamily="34" charset="-122"/>
+                <a:cs typeface="Cambria" pitchFamily="34" charset="-120"/>
+              </a:rPr>
+              <a:t>4</a:t>
+            </a:r>
+            <a:endParaRPr lang="en-US" sz="1500" dirty="0"/>
+          </a:p>
+        </p:txBody>
+      </p:sp>
+      <p:sp>
+        <p:nvSpPr>
+          <p:cNvPr id="25" name="Text 23"/>
+          <p:cNvSpPr txBox="1"/>
+          <p:nvPr/>
+        </p:nvSpPr>
+        <p:spPr>
+          <a:xfrm>
+            <a:off x="7406640" y="2971800"/>
+            <a:ext cx="1828800" cy="365760"/>
+          </a:xfrm>
+          <a:prstGeom prst="rect">
+            <a:avLst/>
+          </a:prstGeom>
+          <a:noFill/>
+          <a:ln/>
+        </p:spPr>
+        <p:txBody>
+          <a:bodyPr wrap="square" lIns="0" tIns="0" rIns="0" bIns="0" rtlCol="0" anchor="ctr"/>
+          <a:lstStyle/>
+          <a:p>
+            <a:pPr algn="ctr" indent="0" marL="0">
+              <a:buNone/>
+            </a:pPr>
+            <a:r>
+              <a:rPr lang="en-US" sz="1400" b="1" dirty="0">
+                <a:solidFill>
+                  <a:srgbClr val="2F9E56"/>
+                </a:solidFill>
+                <a:latin typeface="Calibri" pitchFamily="34" charset="0"/>
+                <a:ea typeface="Calibri" pitchFamily="34" charset="-122"/>
+                <a:cs typeface="Calibri" pitchFamily="34" charset="-120"/>
+              </a:rPr>
+              <a:t>Recover</a:t>
+            </a:r>
+            <a:endParaRPr lang="en-US" sz="1400" dirty="0"/>
+          </a:p>
+        </p:txBody>
+      </p:sp>
+      <p:sp>
+        <p:nvSpPr>
+          <p:cNvPr id="26" name="Text 24"/>
+          <p:cNvSpPr txBox="1"/>
+          <p:nvPr/>
+        </p:nvSpPr>
+        <p:spPr>
+          <a:xfrm>
+            <a:off x="7406640" y="3364992"/>
+            <a:ext cx="1828800" cy="914400"/>
+          </a:xfrm>
+          <a:prstGeom prst="rect">
+            <a:avLst/>
+          </a:prstGeom>
+          <a:noFill/>
+          <a:ln/>
+        </p:spPr>
+        <p:txBody>
+          <a:bodyPr wrap="square" lIns="0" tIns="0" rIns="0" bIns="0" rtlCol="0" anchor="ctr"/>
+          <a:lstStyle/>
+          <a:p>
+            <a:pPr algn="ctr" indent="0" marL="0">
+              <a:buNone/>
+            </a:pPr>
+            <a:r>
+              <a:rPr lang="en-US" sz="1050" dirty="0">
+                <a:solidFill>
+                  <a:srgbClr val="1A1A1A"/>
+                </a:solidFill>
+                <a:latin typeface="Calibri" pitchFamily="34" charset="0"/>
+                <a:ea typeface="Calibri" pitchFamily="34" charset="-122"/>
+                <a:cs typeface="Calibri" pitchFamily="34" charset="-120"/>
+              </a:rPr>
+              <a:t>Restored from backup; deployed WAF, dedicated CDE, new AAA+MFA</a:t>
+            </a:r>
+            <a:endParaRPr lang="en-US" sz="1050" dirty="0"/>
+          </a:p>
+        </p:txBody>
+      </p:sp>
+      <p:sp>
+        <p:nvSpPr>
+          <p:cNvPr id="27" name="Text 25"/>
+          <p:cNvSpPr txBox="1"/>
+          <p:nvPr/>
+        </p:nvSpPr>
+        <p:spPr>
+          <a:xfrm>
+            <a:off x="9372600" y="3063240"/>
+            <a:ext cx="182880" cy="365760"/>
+          </a:xfrm>
+          <a:prstGeom prst="rect">
+            <a:avLst/>
+          </a:prstGeom>
+          <a:noFill/>
+          <a:ln/>
+        </p:spPr>
+        <p:txBody>
+          <a:bodyPr wrap="square" lIns="0" tIns="0" rIns="0" bIns="0" rtlCol="0" anchor="ctr"/>
+          <a:lstStyle/>
+          <a:p>
+            <a:pPr algn="ctr" indent="0" marL="0">
+              <a:buNone/>
+            </a:pPr>
+            <a:r>
+              <a:rPr lang="en-US" sz="1600" dirty="0">
+                <a:solidFill>
+                  <a:srgbClr val="6B7280"/>
+                </a:solidFill>
+                <a:latin typeface="Calibri" pitchFamily="34" charset="0"/>
+                <a:ea typeface="Calibri" pitchFamily="34" charset="-122"/>
+                <a:cs typeface="Calibri" pitchFamily="34" charset="-120"/>
+              </a:rPr>
+              <a:t>→</a:t>
+            </a:r>
+            <a:endParaRPr lang="en-US" sz="1600" dirty="0"/>
+          </a:p>
+        </p:txBody>
+      </p:sp>
+      <p:sp>
+        <p:nvSpPr>
+          <p:cNvPr id="28" name="Shape 26"/>
+          <p:cNvSpPr/>
+          <p:nvPr/>
+        </p:nvSpPr>
+        <p:spPr>
+          <a:xfrm>
+            <a:off x="9509760" y="2103120"/>
+            <a:ext cx="2103120" cy="2286000"/>
+          </a:xfrm>
+          <a:prstGeom prst="roundRect">
+            <a:avLst>
+              <a:gd name="adj" fmla="val 4348"/>
+            </a:avLst>
+          </a:prstGeom>
+          <a:solidFill>
+            <a:srgbClr val="FFFFFF"/>
+          </a:solidFill>
+          <a:ln w="19050">
+            <a:solidFill>
+              <a:srgbClr val="C94F4F"/>
+            </a:solidFill>
+            <a:prstDash val="solid"/>
+          </a:ln>
+        </p:spPr>
+      </p:sp>
+      <p:sp>
+        <p:nvSpPr>
+          <p:cNvPr id="29" name="Shape 27"/>
+          <p:cNvSpPr/>
+          <p:nvPr/>
+        </p:nvSpPr>
+        <p:spPr>
+          <a:xfrm>
+            <a:off x="10305288" y="2331720"/>
+            <a:ext cx="512064" cy="512064"/>
+          </a:xfrm>
+          <a:prstGeom prst="ellipse">
+            <a:avLst/>
+          </a:prstGeom>
+          <a:solidFill>
+            <a:srgbClr val="C94F4F"/>
+          </a:solidFill>
+          <a:ln/>
+        </p:spPr>
+      </p:sp>
+      <p:sp>
+        <p:nvSpPr>
+          <p:cNvPr id="30" name="Text 28"/>
+          <p:cNvSpPr txBox="1"/>
+          <p:nvPr/>
+        </p:nvSpPr>
+        <p:spPr>
+          <a:xfrm>
+            <a:off x="10305288" y="2331720"/>
+            <a:ext cx="512064" cy="512064"/>
+          </a:xfrm>
+          <a:prstGeom prst="rect">
+            <a:avLst/>
+          </a:prstGeom>
+          <a:noFill/>
+          <a:ln/>
+        </p:spPr>
+        <p:txBody>
+          <a:bodyPr wrap="square" rtlCol="0" anchor="ctr"/>
+          <a:lstStyle/>
+          <a:p>
+            <a:pPr algn="ctr" indent="0" marL="0">
+              <a:buNone/>
+            </a:pPr>
+            <a:r>
+              <a:rPr lang="en-US" sz="1500" b="1" dirty="0">
+                <a:solidFill>
+                  <a:srgbClr val="FFFFFF"/>
+                </a:solidFill>
+                <a:latin typeface="Cambria" pitchFamily="34" charset="0"/>
+                <a:ea typeface="Cambria" pitchFamily="34" charset="-122"/>
+                <a:cs typeface="Cambria" pitchFamily="34" charset="-120"/>
+              </a:rPr>
+              <a:t>5</a:t>
+            </a:r>
+            <a:endParaRPr lang="en-US" sz="1500" dirty="0"/>
+          </a:p>
+        </p:txBody>
+      </p:sp>
+      <p:sp>
+        <p:nvSpPr>
+          <p:cNvPr id="31" name="Text 29"/>
+          <p:cNvSpPr txBox="1"/>
+          <p:nvPr/>
+        </p:nvSpPr>
+        <p:spPr>
+          <a:xfrm>
+            <a:off x="9646920" y="2971800"/>
+            <a:ext cx="1828800" cy="365760"/>
+          </a:xfrm>
+          <a:prstGeom prst="rect">
+            <a:avLst/>
+          </a:prstGeom>
+          <a:noFill/>
+          <a:ln/>
+        </p:spPr>
+        <p:txBody>
+          <a:bodyPr wrap="square" lIns="0" tIns="0" rIns="0" bIns="0" rtlCol="0" anchor="ctr"/>
+          <a:lstStyle/>
+          <a:p>
+            <a:pPr algn="ctr" indent="0" marL="0">
+              <a:buNone/>
+            </a:pPr>
+            <a:r>
+              <a:rPr lang="en-US" sz="1400" b="1" dirty="0">
+                <a:solidFill>
+                  <a:srgbClr val="C94F4F"/>
+                </a:solidFill>
+                <a:latin typeface="Calibri" pitchFamily="34" charset="0"/>
+                <a:ea typeface="Calibri" pitchFamily="34" charset="-122"/>
+                <a:cs typeface="Calibri" pitchFamily="34" charset="-120"/>
+              </a:rPr>
+              <a:t>Review</a:t>
+            </a:r>
+            <a:endParaRPr lang="en-US" sz="1400" dirty="0"/>
+          </a:p>
+        </p:txBody>
+      </p:sp>
+      <p:sp>
+        <p:nvSpPr>
+          <p:cNvPr id="32" name="Text 30"/>
+          <p:cNvSpPr txBox="1"/>
+          <p:nvPr/>
+        </p:nvSpPr>
+        <p:spPr>
+          <a:xfrm>
+            <a:off x="9646920" y="3364992"/>
+            <a:ext cx="1828800" cy="914400"/>
+          </a:xfrm>
+          <a:prstGeom prst="rect">
+            <a:avLst/>
+          </a:prstGeom>
+          <a:noFill/>
+          <a:ln/>
+        </p:spPr>
+        <p:txBody>
+          <a:bodyPr wrap="square" lIns="0" tIns="0" rIns="0" bIns="0" rtlCol="0" anchor="ctr"/>
+          <a:lstStyle/>
+          <a:p>
+            <a:pPr algn="ctr" indent="0" marL="0">
+              <a:buNone/>
+            </a:pPr>
+            <a:r>
+              <a:rPr lang="en-US" sz="1050" dirty="0">
+                <a:solidFill>
+                  <a:srgbClr val="1A1A1A"/>
+                </a:solidFill>
+                <a:latin typeface="Calibri" pitchFamily="34" charset="0"/>
+                <a:ea typeface="Calibri" pitchFamily="34" charset="-122"/>
+                <a:cs typeface="Calibri" pitchFamily="34" charset="-120"/>
+              </a:rPr>
+              <a:t>Independent third-party compliance audit</a:t>
+            </a:r>
+            <a:endParaRPr lang="en-US" sz="1050" dirty="0"/>
+          </a:p>
+        </p:txBody>
+      </p:sp>
+      <p:sp>
+        <p:nvSpPr>
+          <p:cNvPr id="33" name="Text 31"/>
+          <p:cNvSpPr txBox="1"/>
+          <p:nvPr/>
+        </p:nvSpPr>
+        <p:spPr>
+          <a:xfrm>
+            <a:off x="548640" y="4709160"/>
+            <a:ext cx="11109960" cy="822960"/>
+          </a:xfrm>
+          <a:prstGeom prst="rect">
+            <a:avLst/>
+          </a:prstGeom>
+          <a:noFill/>
+          <a:ln/>
+        </p:spPr>
+        <p:txBody>
+          <a:bodyPr wrap="square" rtlCol="0" anchor="ctr"/>
+          <a:lstStyle/>
+          <a:p>
+            <a:pPr indent="0" marL="0">
+              <a:buNone/>
+            </a:pPr>
+            <a:r>
+              <a:rPr lang="en-US" sz="1250" i="1" dirty="0">
+                <a:solidFill>
+                  <a:srgbClr val="1E2761"/>
+                </a:solidFill>
+                <a:latin typeface="Calibri" pitchFamily="34" charset="0"/>
+                <a:ea typeface="Calibri" pitchFamily="34" charset="-122"/>
+                <a:cs typeface="Calibri" pitchFamily="34" charset="-120"/>
+              </a:rPr>
+              <a:t>Lessons learned: stronger vulnerability management, a documented IR plan, retuned SIEM alerting, and specialized IT training on distinguishing false positives from real incidents.</a:t>
+            </a:r>
+            <a:endParaRPr lang="en-US" sz="1250" dirty="0"/>
+          </a:p>
+        </p:txBody>
+      </p:sp>
+      <p:sp>
+        <p:nvSpPr>
+          <p:cNvPr id="34" name="Text 32"/>
+          <p:cNvSpPr txBox="1"/>
+          <p:nvPr/>
+        </p:nvSpPr>
+        <p:spPr>
+          <a:xfrm>
+            <a:off x="457200" y="6473952"/>
+            <a:ext cx="7315200" cy="274320"/>
+          </a:xfrm>
+          <a:prstGeom prst="rect">
+            <a:avLst/>
+          </a:prstGeom>
+          <a:noFill/>
+          <a:ln/>
+        </p:spPr>
+        <p:txBody>
+          <a:bodyPr wrap="square" rtlCol="0" anchor="ctr"/>
+          <a:lstStyle/>
+          <a:p>
+            <a:pPr indent="0" marL="0">
+              <a:buNone/>
+            </a:pPr>
+            <a:r>
+              <a:rPr lang="en-US" sz="900" dirty="0">
+                <a:solidFill>
+                  <a:srgbClr val="6B7280"/>
+                </a:solidFill>
+                <a:latin typeface="Calibri" pitchFamily="34" charset="0"/>
+                <a:ea typeface="Calibri" pitchFamily="34" charset="-122"/>
+                <a:cs typeface="Calibri" pitchFamily="34" charset="-120"/>
+              </a:rPr>
+              <a:t>FinSecure Technologies Inc. — Network Security Capstone</a:t>
+            </a:r>
+            <a:endParaRPr lang="en-US" sz="900" dirty="0"/>
+          </a:p>
+        </p:txBody>
+      </p:sp>
+      <p:sp>
+        <p:nvSpPr>
+          <p:cNvPr id="35" name="Text 33"/>
+          <p:cNvSpPr txBox="1"/>
+          <p:nvPr/>
+        </p:nvSpPr>
+        <p:spPr>
+          <a:xfrm>
+            <a:off x="11274552" y="6473952"/>
+            <a:ext cx="457200" cy="274320"/>
+          </a:xfrm>
+          <a:prstGeom prst="rect">
+            <a:avLst/>
+          </a:prstGeom>
+          <a:noFill/>
+          <a:ln/>
+        </p:spPr>
+        <p:txBody>
+          <a:bodyPr wrap="square" rtlCol="0" anchor="ctr"/>
+          <a:lstStyle/>
+          <a:p>
+            <a:pPr algn="r" indent="0" marL="0">
+              <a:buNone/>
+            </a:pPr>
+            <a:r>
+              <a:rPr lang="en-US" sz="900" dirty="0">
+                <a:solidFill>
+                  <a:srgbClr val="6B7280"/>
+                </a:solidFill>
+                <a:latin typeface="Calibri" pitchFamily="34" charset="0"/>
+                <a:ea typeface="Calibri" pitchFamily="34" charset="-122"/>
+                <a:cs typeface="Calibri" pitchFamily="34" charset="-120"/>
+              </a:rPr>
+              <a:t>14</a:t>
+            </a:r>
+            <a:endParaRPr lang="en-US" sz="900" dirty="0"/>
+          </a:p>
+        </p:txBody>
+      </p:sp>
+    </p:spTree>
+  </p:cSld>
+  <p:clrMapOvr>
+    <a:masterClrMapping/>
+  </p:clrMapOvr>
+</p:sld>
+</file>
+
+<file path=ppt/slides/slide16.xml><?xml version="1.0" encoding="utf-8"?>
+<p:sld xmlns:a="http://schemas.openxmlformats.org/drawingml/2006/main" xmlns:r="http://schemas.openxmlformats.org/officeDocument/2006/relationships" xmlns:p="http://schemas.openxmlformats.org/presentationml/2006/main">
+  <p:cSld name="Slide 16">
+    <p:spTree>
+      <p:nvGrpSpPr>
+        <p:cNvPr id="1" name=""/>
+        <p:cNvGrpSpPr/>
+        <p:nvPr/>
+      </p:nvGrpSpPr>
+      <p:grpSpPr>
+        <a:xfrm>
+          <a:off x="0" y="0"/>
+          <a:ext cx="0" cy="0"/>
+          <a:chOff x="0" y="0"/>
+          <a:chExt cx="0" cy="0"/>
+        </a:xfrm>
+      </p:grpSpPr>
+      <p:sp>
+        <p:nvSpPr>
+          <p:cNvPr id="2" name="Text 0"/>
+          <p:cNvSpPr txBox="1"/>
+          <p:nvPr/>
+        </p:nvSpPr>
+        <p:spPr>
+          <a:xfrm>
+            <a:off x="548640" y="365760"/>
+            <a:ext cx="7315200" cy="320040"/>
+          </a:xfrm>
+          <a:prstGeom prst="rect">
+            <a:avLst/>
+          </a:prstGeom>
+          <a:noFill/>
+          <a:ln/>
+        </p:spPr>
+        <p:txBody>
+          <a:bodyPr wrap="square" rtlCol="0" anchor="ctr"/>
+          <a:lstStyle/>
+          <a:p>
+            <a:pPr indent="0" marL="0">
+              <a:buNone/>
+            </a:pPr>
+            <a:r>
+              <a:rPr lang="en-US" sz="1200" b="1" spc="200" kern="0" dirty="0">
+                <a:solidFill>
+                  <a:srgbClr val="1E2761"/>
+                </a:solidFill>
+                <a:latin typeface="Calibri" pitchFamily="34" charset="0"/>
+                <a:ea typeface="Calibri" pitchFamily="34" charset="-122"/>
+                <a:cs typeface="Calibri" pitchFamily="34" charset="-120"/>
+              </a:rPr>
               <a:t>RESULTS</a:t>
             </a:r>
             <a:endParaRPr lang="en-US" sz="1200" dirty="0"/>
@@ -7654,9 +8340,9 @@
 </p:sld>
 </file>
 
-<file path=ppt/slides/slide16.xml><?xml version="1.0" encoding="utf-8"?>
+<file path=ppt/slides/slide17.xml><?xml version="1.0" encoding="utf-8"?>
 <p:sld xmlns:a="http://schemas.openxmlformats.org/drawingml/2006/main" xmlns:r="http://schemas.openxmlformats.org/officeDocument/2006/relationships" xmlns:p="http://schemas.openxmlformats.org/presentationml/2006/main">
-  <p:cSld name="Slide 16">
+  <p:cSld name="Slide 17">
     <p:bg>
       <p:bgPr>
         <a:solidFill>
@@ -9185,7 +9871,7 @@
                 <a:ea typeface="Calibri" pitchFamily="34" charset="-122"/>
                 <a:cs typeface="Calibri" pitchFamily="34" charset="-120"/>
               </a:rPr>
-              <a:t>2</a:t>
+              <a:t>1</a:t>
             </a:r>
             <a:endParaRPr lang="en-US" sz="900" dirty="0"/>
           </a:p>
@@ -9918,7 +10604,7 @@
                 <a:ea typeface="Calibri" pitchFamily="34" charset="-122"/>
                 <a:cs typeface="Calibri" pitchFamily="34" charset="-120"/>
               </a:rPr>
-              <a:t>3</a:t>
+              <a:t>2</a:t>
             </a:r>
             <a:endParaRPr lang="en-US" sz="900" dirty="0"/>
           </a:p>
@@ -10353,7 +11039,7 @@
                 <a:ea typeface="Calibri" pitchFamily="34" charset="-122"/>
                 <a:cs typeface="Calibri" pitchFamily="34" charset="-120"/>
               </a:rPr>
-              <a:t>4</a:t>
+              <a:t>3</a:t>
             </a:r>
             <a:endParaRPr lang="en-US" sz="900" dirty="0"/>
           </a:p>
@@ -11230,7 +11916,7 @@
                 <a:ea typeface="Calibri" pitchFamily="34" charset="-122"/>
                 <a:cs typeface="Calibri" pitchFamily="34" charset="-120"/>
               </a:rPr>
-              <a:t>5</a:t>
+              <a:t>4</a:t>
             </a:r>
             <a:endParaRPr lang="en-US" sz="900" dirty="0"/>
           </a:p>
@@ -11482,7 +12168,7 @@
                 <a:ea typeface="Calibri" pitchFamily="34" charset="-122"/>
                 <a:cs typeface="Calibri" pitchFamily="34" charset="-120"/>
               </a:rPr>
-              <a:t>Nmap + Nessus</a:t>
+              <a:t>Nmap + OWASP ZAP</a:t>
             </a:r>
             <a:endParaRPr lang="en-US" sz="1200" dirty="0"/>
           </a:p>
@@ -11984,7 +12670,7 @@
                 <a:ea typeface="Calibri" pitchFamily="34" charset="-122"/>
                 <a:cs typeface="Calibri" pitchFamily="34" charset="-120"/>
               </a:rPr>
-              <a:t>6</a:t>
+              <a:t>5</a:t>
             </a:r>
             <a:endParaRPr lang="en-US" sz="900" dirty="0"/>
           </a:p>
@@ -12048,7 +12734,7 @@
                 <a:ea typeface="Calibri" pitchFamily="34" charset="-122"/>
                 <a:cs typeface="Calibri" pitchFamily="34" charset="-120"/>
               </a:rPr>
-              <a:t>FINDINGS</a:t>
+              <a:t>NETWORK SECURITY ANALYSIS</a:t>
             </a:r>
             <a:endParaRPr lang="en-US" sz="1200" dirty="0"/>
           </a:p>
@@ -12087,7 +12773,7 @@
                 <a:ea typeface="Cambria" pitchFamily="34" charset="-122"/>
                 <a:cs typeface="Cambria" pitchFamily="34" charset="-120"/>
               </a:rPr>
-              <a:t>The Attack Path, Reconstructed</a:t>
+              <a:t>Live Evidence: Scanning FinSWebApp</a:t>
             </a:r>
             <a:endParaRPr lang="en-US" sz="3200" dirty="0"/>
           </a:p>
@@ -12095,7 +12781,7 @@
       </p:sp>
       <p:pic>
         <p:nvPicPr>
-          <p:cNvPr id="4" name="Image 0" descr="C:\Users\rareb\AppData\Local\Temp\claude\C--Users-rareb-OneDrive-Desktop-University-Of-Winnipeg-Case-Studies-Issues---Capstone-Project-V--Balogun-NSD-Fall-2023\288735ab-ce17-49e2-9255-b3c08ab0bae8\scratchpad\attack-path.png">    </p:cNvPr>
+          <p:cNvPr id="4" name="Image 0" descr="C:\Users\rareb\OneDrive\Desktop\University Of Winnipeg\Case Studies Issues &amp; Capstone Project V. Balogun NSD Fall 2023\finsecure-network-security-capstone\evidence\pentest\nmap-scan-production.jpg">    </p:cNvPr>
           <p:cNvPicPr>
             <a:picLocks noChangeAspect="1"/>
           </p:cNvPicPr>
@@ -12109,8 +12795,8 @@
         </p:blipFill>
         <p:spPr>
           <a:xfrm>
-            <a:off x="548640" y="1600200"/>
-            <a:ext cx="11064240" cy="3539424"/>
+            <a:off x="548640" y="2240280"/>
+            <a:ext cx="5440680" cy="2876215"/>
           </a:xfrm>
           <a:prstGeom prst="rect">
             <a:avLst/>
@@ -12125,20 +12811,15 @@
         </p:nvSpPr>
         <p:spPr>
           <a:xfrm>
-            <a:off x="548640" y="5257800"/>
-            <a:ext cx="3520440" cy="1051560"/>
+            <a:off x="548640" y="2240280"/>
+            <a:ext cx="5440680" cy="2876215"/>
           </a:xfrm>
           <a:prstGeom prst="roundRect">
-            <a:avLst>
-              <a:gd name="adj" fmla="val 6957"/>
-            </a:avLst>
-          </a:prstGeom>
-          <a:solidFill>
-            <a:srgbClr val="F4F6FB"/>
-          </a:solidFill>
-          <a:ln w="15875">
+            <a:avLst/>
+          </a:prstGeom>
+          <a:ln w="19050">
             <a:solidFill>
-              <a:srgbClr val="C94F4F"/>
+              <a:srgbClr val="CADCFC"/>
             </a:solidFill>
             <a:prstDash val="solid"/>
           </a:ln>
@@ -12152,63 +12833,24 @@
         </p:nvSpPr>
         <p:spPr>
           <a:xfrm>
-            <a:off x="777240" y="5367528"/>
-            <a:ext cx="3108960" cy="457200"/>
-          </a:xfrm>
-          <a:prstGeom prst="rect">
-            <a:avLst/>
-          </a:prstGeom>
-          <a:noFill/>
-          <a:ln/>
-        </p:spPr>
-        <p:txBody>
-          <a:bodyPr wrap="square" lIns="0" tIns="0" rIns="0" bIns="0" rtlCol="0" anchor="ctr"/>
-          <a:lstStyle/>
-          <a:p>
-            <a:pPr indent="0" marL="0">
-              <a:buNone/>
-            </a:pPr>
-            <a:r>
-              <a:rPr lang="en-US" sz="1400" b="1" dirty="0">
-                <a:solidFill>
-                  <a:srgbClr val="C94F4F"/>
-                </a:solidFill>
-                <a:latin typeface="Calibri" pitchFamily="34" charset="0"/>
-                <a:ea typeface="Calibri" pitchFamily="34" charset="-122"/>
-                <a:cs typeface="Calibri" pitchFamily="34" charset="-120"/>
-              </a:rPr>
-              <a:t>SQL Injection</a:t>
-            </a:r>
-            <a:endParaRPr lang="en-US" sz="1400" dirty="0"/>
-          </a:p>
-        </p:txBody>
-      </p:sp>
-      <p:sp>
-        <p:nvSpPr>
-          <p:cNvPr id="7" name="Text 4"/>
-          <p:cNvSpPr txBox="1"/>
-          <p:nvPr/>
-        </p:nvSpPr>
-        <p:spPr>
-          <a:xfrm>
-            <a:off x="777240" y="5824728"/>
-            <a:ext cx="3108960" cy="411480"/>
-          </a:xfrm>
-          <a:prstGeom prst="rect">
-            <a:avLst/>
-          </a:prstGeom>
-          <a:noFill/>
-          <a:ln/>
-        </p:spPr>
-        <p:txBody>
-          <a:bodyPr wrap="square" lIns="0" tIns="0" rIns="0" bIns="0" rtlCol="0" anchor="ctr"/>
-          <a:lstStyle/>
-          <a:p>
-            <a:pPr indent="0" marL="0">
-              <a:buNone/>
-            </a:pPr>
-            <a:r>
-              <a:rPr lang="en-US" sz="1150" dirty="0">
+            <a:off x="548640" y="5207935"/>
+            <a:ext cx="5440680" cy="502920"/>
+          </a:xfrm>
+          <a:prstGeom prst="rect">
+            <a:avLst/>
+          </a:prstGeom>
+          <a:noFill/>
+          <a:ln/>
+        </p:spPr>
+        <p:txBody>
+          <a:bodyPr wrap="square" rtlCol="0" anchor="ctr"/>
+          <a:lstStyle/>
+          <a:p>
+            <a:pPr indent="0" marL="0">
+              <a:buNone/>
+            </a:pPr>
+            <a:r>
+              <a:rPr lang="en-US" sz="1100" i="1" dirty="0">
                 <a:solidFill>
                   <a:srgbClr val="6B7280"/>
                 </a:solidFill>
@@ -12216,34 +12858,53 @@
                 <a:ea typeface="Calibri" pitchFamily="34" charset="-122"/>
                 <a:cs typeface="Calibri" pitchFamily="34" charset="-120"/>
               </a:rPr>
-              <a:t>Internally-built web app</a:t>
-            </a:r>
-            <a:endParaRPr lang="en-US" sz="1150" dirty="0"/>
-          </a:p>
-        </p:txBody>
-      </p:sp>
-      <p:sp>
-        <p:nvSpPr>
-          <p:cNvPr id="8" name="Shape 5"/>
+              <a:t>Nmap scan of the live, Azure-hosted FinSWebApp — only ports 80/443 exposed, valid TLS cert.</a:t>
+            </a:r>
+            <a:endParaRPr lang="en-US" sz="1100" dirty="0"/>
+          </a:p>
+        </p:txBody>
+      </p:sp>
+      <p:pic>
+        <p:nvPicPr>
+          <p:cNvPr id="7" name="Image 1" descr="C:\Users\rareb\OneDrive\Desktop\University Of Winnipeg\Case Studies Issues &amp; Capstone Project V. Balogun NSD Fall 2023\finsecure-network-security-capstone\evidence\pentest\zap-vulnerability-scan.jpg">    </p:cNvPr>
+          <p:cNvPicPr>
+            <a:picLocks noChangeAspect="1"/>
+          </p:cNvPicPr>
+          <p:nvPr/>
+        </p:nvPicPr>
+        <p:blipFill>
+          <a:blip r:embed="rId2"/>
+          <a:stretch>
+            <a:fillRect/>
+          </a:stretch>
+        </p:blipFill>
+        <p:spPr>
+          <a:xfrm>
+            <a:off x="6217920" y="2240280"/>
+            <a:ext cx="5440680" cy="2870280"/>
+          </a:xfrm>
+          <a:prstGeom prst="rect">
+            <a:avLst/>
+          </a:prstGeom>
+        </p:spPr>
+      </p:pic>
+      <p:sp>
+        <p:nvSpPr>
+          <p:cNvPr id="8" name="Shape 4"/>
           <p:cNvSpPr/>
           <p:nvPr/>
         </p:nvSpPr>
         <p:spPr>
           <a:xfrm>
-            <a:off x="4343400" y="5257800"/>
-            <a:ext cx="3520440" cy="1051560"/>
+            <a:off x="6217920" y="2240280"/>
+            <a:ext cx="5440680" cy="2870280"/>
           </a:xfrm>
           <a:prstGeom prst="roundRect">
-            <a:avLst>
-              <a:gd name="adj" fmla="val 6957"/>
-            </a:avLst>
-          </a:prstGeom>
-          <a:solidFill>
-            <a:srgbClr val="F4F6FB"/>
-          </a:solidFill>
-          <a:ln w="15875">
+            <a:avLst/>
+          </a:prstGeom>
+          <a:ln w="19050">
             <a:solidFill>
-              <a:srgbClr val="C9A227"/>
+              <a:srgbClr val="CADCFC"/>
             </a:solidFill>
             <a:prstDash val="solid"/>
           </a:ln>
@@ -12251,69 +12912,30 @@
       </p:sp>
       <p:sp>
         <p:nvSpPr>
-          <p:cNvPr id="9" name="Text 6"/>
-          <p:cNvSpPr txBox="1"/>
-          <p:nvPr/>
-        </p:nvSpPr>
-        <p:spPr>
-          <a:xfrm>
-            <a:off x="4572000" y="5367528"/>
-            <a:ext cx="3108960" cy="457200"/>
-          </a:xfrm>
-          <a:prstGeom prst="rect">
-            <a:avLst/>
-          </a:prstGeom>
-          <a:noFill/>
-          <a:ln/>
-        </p:spPr>
-        <p:txBody>
-          <a:bodyPr wrap="square" lIns="0" tIns="0" rIns="0" bIns="0" rtlCol="0" anchor="ctr"/>
-          <a:lstStyle/>
-          <a:p>
-            <a:pPr indent="0" marL="0">
-              <a:buNone/>
-            </a:pPr>
-            <a:r>
-              <a:rPr lang="en-US" sz="1400" b="1" dirty="0">
-                <a:solidFill>
-                  <a:srgbClr val="C9A227"/>
-                </a:solidFill>
-                <a:latin typeface="Calibri" pitchFamily="34" charset="0"/>
-                <a:ea typeface="Calibri" pitchFamily="34" charset="-122"/>
-                <a:cs typeface="Calibri" pitchFamily="34" charset="-120"/>
-              </a:rPr>
-              <a:t>Cross-Site Scripting</a:t>
-            </a:r>
-            <a:endParaRPr lang="en-US" sz="1400" dirty="0"/>
-          </a:p>
-        </p:txBody>
-      </p:sp>
-      <p:sp>
-        <p:nvSpPr>
-          <p:cNvPr id="10" name="Text 7"/>
-          <p:cNvSpPr txBox="1"/>
-          <p:nvPr/>
-        </p:nvSpPr>
-        <p:spPr>
-          <a:xfrm>
-            <a:off x="4572000" y="5824728"/>
-            <a:ext cx="3108960" cy="411480"/>
-          </a:xfrm>
-          <a:prstGeom prst="rect">
-            <a:avLst/>
-          </a:prstGeom>
-          <a:noFill/>
-          <a:ln/>
-        </p:spPr>
-        <p:txBody>
-          <a:bodyPr wrap="square" lIns="0" tIns="0" rIns="0" bIns="0" rtlCol="0" anchor="ctr"/>
-          <a:lstStyle/>
-          <a:p>
-            <a:pPr indent="0" marL="0">
-              <a:buNone/>
-            </a:pPr>
-            <a:r>
-              <a:rPr lang="en-US" sz="1150" dirty="0">
+          <p:cNvPr id="9" name="Text 5"/>
+          <p:cNvSpPr txBox="1"/>
+          <p:nvPr/>
+        </p:nvSpPr>
+        <p:spPr>
+          <a:xfrm>
+            <a:off x="6217920" y="5202000"/>
+            <a:ext cx="5440680" cy="502920"/>
+          </a:xfrm>
+          <a:prstGeom prst="rect">
+            <a:avLst/>
+          </a:prstGeom>
+          <a:noFill/>
+          <a:ln/>
+        </p:spPr>
+        <p:txBody>
+          <a:bodyPr wrap="square" rtlCol="0" anchor="ctr"/>
+          <a:lstStyle/>
+          <a:p>
+            <a:pPr indent="0" marL="0">
+              <a:buNone/>
+            </a:pPr>
+            <a:r>
+              <a:rPr lang="en-US" sz="1100" i="1" dirty="0">
                 <a:solidFill>
                   <a:srgbClr val="6B7280"/>
                 </a:solidFill>
@@ -12321,120 +12943,15 @@
                 <a:ea typeface="Calibri" pitchFamily="34" charset="-122"/>
                 <a:cs typeface="Calibri" pitchFamily="34" charset="-120"/>
               </a:rPr>
-              <a:t>Same web application</a:t>
-            </a:r>
-            <a:endParaRPr lang="en-US" sz="1150" dirty="0"/>
-          </a:p>
-        </p:txBody>
-      </p:sp>
-      <p:sp>
-        <p:nvSpPr>
-          <p:cNvPr id="11" name="Shape 8"/>
-          <p:cNvSpPr/>
-          <p:nvPr/>
-        </p:nvSpPr>
-        <p:spPr>
-          <a:xfrm>
-            <a:off x="8138160" y="5257800"/>
-            <a:ext cx="3520440" cy="1051560"/>
-          </a:xfrm>
-          <a:prstGeom prst="roundRect">
-            <a:avLst>
-              <a:gd name="adj" fmla="val 6957"/>
-            </a:avLst>
-          </a:prstGeom>
-          <a:solidFill>
-            <a:srgbClr val="F4F6FB"/>
-          </a:solidFill>
-          <a:ln w="15875">
-            <a:solidFill>
-              <a:srgbClr val="3B4A9E"/>
-            </a:solidFill>
-            <a:prstDash val="solid"/>
-          </a:ln>
-        </p:spPr>
-      </p:sp>
-      <p:sp>
-        <p:nvSpPr>
-          <p:cNvPr id="12" name="Text 9"/>
-          <p:cNvSpPr txBox="1"/>
-          <p:nvPr/>
-        </p:nvSpPr>
-        <p:spPr>
-          <a:xfrm>
-            <a:off x="8366760" y="5367528"/>
-            <a:ext cx="3108960" cy="457200"/>
-          </a:xfrm>
-          <a:prstGeom prst="rect">
-            <a:avLst/>
-          </a:prstGeom>
-          <a:noFill/>
-          <a:ln/>
-        </p:spPr>
-        <p:txBody>
-          <a:bodyPr wrap="square" lIns="0" tIns="0" rIns="0" bIns="0" rtlCol="0" anchor="ctr"/>
-          <a:lstStyle/>
-          <a:p>
-            <a:pPr indent="0" marL="0">
-              <a:buNone/>
-            </a:pPr>
-            <a:r>
-              <a:rPr lang="en-US" sz="1400" b="1" dirty="0">
-                <a:solidFill>
-                  <a:srgbClr val="3B4A9E"/>
-                </a:solidFill>
-                <a:latin typeface="Calibri" pitchFamily="34" charset="0"/>
-                <a:ea typeface="Calibri" pitchFamily="34" charset="-122"/>
-                <a:cs typeface="Calibri" pitchFamily="34" charset="-120"/>
-              </a:rPr>
-              <a:t>Weak Authentication</a:t>
-            </a:r>
-            <a:endParaRPr lang="en-US" sz="1400" dirty="0"/>
-          </a:p>
-        </p:txBody>
-      </p:sp>
-      <p:sp>
-        <p:nvSpPr>
-          <p:cNvPr id="13" name="Text 10"/>
-          <p:cNvSpPr txBox="1"/>
-          <p:nvPr/>
-        </p:nvSpPr>
-        <p:spPr>
-          <a:xfrm>
-            <a:off x="8366760" y="5824728"/>
-            <a:ext cx="3108960" cy="411480"/>
-          </a:xfrm>
-          <a:prstGeom prst="rect">
-            <a:avLst/>
-          </a:prstGeom>
-          <a:noFill/>
-          <a:ln/>
-        </p:spPr>
-        <p:txBody>
-          <a:bodyPr wrap="square" lIns="0" tIns="0" rIns="0" bIns="0" rtlCol="0" anchor="ctr"/>
-          <a:lstStyle/>
-          <a:p>
-            <a:pPr indent="0" marL="0">
-              <a:buNone/>
-            </a:pPr>
-            <a:r>
-              <a:rPr lang="en-US" sz="1150" dirty="0">
-                <a:solidFill>
-                  <a:srgbClr val="6B7280"/>
-                </a:solidFill>
-                <a:latin typeface="Calibri" pitchFamily="34" charset="0"/>
-                <a:ea typeface="Calibri" pitchFamily="34" charset="-122"/>
-                <a:cs typeface="Calibri" pitchFamily="34" charset="-120"/>
-              </a:rPr>
-              <a:t>SFTP default credentials</a:t>
-            </a:r>
-            <a:endParaRPr lang="en-US" sz="1150" dirty="0"/>
-          </a:p>
-        </p:txBody>
-      </p:sp>
-      <p:sp>
-        <p:nvSpPr>
-          <p:cNvPr id="14" name="Text 11"/>
+              <a:t>OWASP ZAP scan of the same target — 12 alerts, including a missing CSP header and a vulnerable JS library.</a:t>
+            </a:r>
+            <a:endParaRPr lang="en-US" sz="1100" dirty="0"/>
+          </a:p>
+        </p:txBody>
+      </p:sp>
+      <p:sp>
+        <p:nvSpPr>
+          <p:cNvPr id="10" name="Text 6"/>
           <p:cNvSpPr txBox="1"/>
           <p:nvPr/>
         </p:nvSpPr>
@@ -12473,7 +12990,7 @@
       </p:sp>
       <p:sp>
         <p:nvSpPr>
-          <p:cNvPr id="15" name="Text 12"/>
+          <p:cNvPr id="11" name="Text 7"/>
           <p:cNvSpPr txBox="1"/>
           <p:nvPr/>
         </p:nvSpPr>
@@ -12504,7 +13021,7 @@
                 <a:ea typeface="Calibri" pitchFamily="34" charset="-122"/>
                 <a:cs typeface="Calibri" pitchFamily="34" charset="-120"/>
               </a:rPr>
-              <a:t>7</a:t>
+              <a:t>6</a:t>
             </a:r>
             <a:endParaRPr lang="en-US" sz="900" dirty="0"/>
           </a:p>
@@ -12562,13 +13079,13 @@
             <a:r>
               <a:rPr lang="en-US" sz="1200" b="1" spc="200" kern="0" dirty="0">
                 <a:solidFill>
-                  <a:srgbClr val="C94F4F"/>
-                </a:solidFill>
-                <a:latin typeface="Calibri" pitchFamily="34" charset="0"/>
-                <a:ea typeface="Calibri" pitchFamily="34" charset="-122"/>
-                <a:cs typeface="Calibri" pitchFamily="34" charset="-120"/>
-              </a:rPr>
-              <a:t>NETWORK REDESIGN</a:t>
+                  <a:srgbClr val="1E2761"/>
+                </a:solidFill>
+                <a:latin typeface="Calibri" pitchFamily="34" charset="0"/>
+                <a:ea typeface="Calibri" pitchFamily="34" charset="-122"/>
+                <a:cs typeface="Calibri" pitchFamily="34" charset="-120"/>
+              </a:rPr>
+              <a:t>FINDINGS</a:t>
             </a:r>
             <a:endParaRPr lang="en-US" sz="1200" dirty="0"/>
           </a:p>
@@ -12607,7 +13124,7 @@
                 <a:ea typeface="Cambria" pitchFamily="34" charset="-122"/>
                 <a:cs typeface="Cambria" pitchFamily="34" charset="-120"/>
               </a:rPr>
-              <a:t>Before: A Flat, Under-Segmented Network</a:t>
+              <a:t>The Attack Path, Reconstructed</a:t>
             </a:r>
             <a:endParaRPr lang="en-US" sz="3200" dirty="0"/>
           </a:p>
@@ -12615,7 +13132,7 @@
       </p:sp>
       <p:pic>
         <p:nvPicPr>
-          <p:cNvPr id="4" name="Image 0" descr="C:\Users\rareb\AppData\Local\Temp\claude\C--Users-rareb-OneDrive-Desktop-University-Of-Winnipeg-Case-Studies-Issues---Capstone-Project-V--Balogun-NSD-Fall-2023\288735ab-ce17-49e2-9255-b3c08ab0bae8\scratchpad\network-before.png">    </p:cNvPr>
+          <p:cNvPr id="4" name="Image 0" descr="C:\Users\rareb\AppData\Local\Temp\claude\C--Users-rareb-OneDrive-Desktop-University-Of-Winnipeg-Case-Studies-Issues---Capstone-Project-V--Balogun-NSD-Fall-2023\288735ab-ce17-49e2-9255-b3c08ab0bae8\scratchpad\attack-path.png">    </p:cNvPr>
           <p:cNvPicPr>
             <a:picLocks noChangeAspect="1"/>
           </p:cNvPicPr>
@@ -12630,7 +13147,7 @@
         <p:spPr>
           <a:xfrm>
             <a:off x="548640" y="1600200"/>
-            <a:ext cx="6949440" cy="4308386"/>
+            <a:ext cx="11064240" cy="3539424"/>
           </a:xfrm>
           <a:prstGeom prst="rect">
             <a:avLst/>
@@ -12639,132 +13156,24 @@
       </p:pic>
       <p:sp>
         <p:nvSpPr>
-          <p:cNvPr id="5" name="Text 2"/>
-          <p:cNvSpPr txBox="1"/>
-          <p:nvPr/>
-        </p:nvSpPr>
-        <p:spPr>
-          <a:xfrm>
-            <a:off x="7726680" y="1920240"/>
-            <a:ext cx="3931920" cy="2926080"/>
-          </a:xfrm>
-          <a:prstGeom prst="rect">
-            <a:avLst/>
-          </a:prstGeom>
-          <a:noFill/>
-          <a:ln/>
-        </p:spPr>
-        <p:txBody>
-          <a:bodyPr wrap="square" rtlCol="0" anchor="ctr"/>
-          <a:lstStyle/>
-          <a:p>
-            <a:pPr marL="342900" indent="-342900">
-              <a:spcAft>
-                <a:spcPts val="1200"/>
-              </a:spcAft>
-              <a:buSzPct val="100000"/>
-              <a:buChar char="•"/>
-            </a:pPr>
-            <a:r>
-              <a:rPr lang="en-US" sz="1300" dirty="0">
-                <a:solidFill>
-                  <a:srgbClr val="1A1A1A"/>
-                </a:solidFill>
-                <a:latin typeface="Calibri" pitchFamily="34" charset="0"/>
-                <a:ea typeface="Calibri" pitchFamily="34" charset="-122"/>
-                <a:cs typeface="Calibri" pitchFamily="34" charset="-120"/>
-              </a:rPr>
-              <a:t>Single WAF in front of one flat DMZ</a:t>
-            </a:r>
-            <a:endParaRPr lang="en-US" sz="1300" dirty="0"/>
-          </a:p>
-          <a:p>
-            <a:pPr marL="342900" indent="-342900">
-              <a:spcAft>
-                <a:spcPts val="1200"/>
-              </a:spcAft>
-              <a:buSzPct val="100000"/>
-              <a:buChar char="•"/>
-            </a:pPr>
-            <a:r>
-              <a:rPr lang="en-US" sz="1300" dirty="0">
-                <a:solidFill>
-                  <a:srgbClr val="1A1A1A"/>
-                </a:solidFill>
-                <a:latin typeface="Calibri" pitchFamily="34" charset="0"/>
-                <a:ea typeface="Calibri" pitchFamily="34" charset="-122"/>
-                <a:cs typeface="Calibri" pitchFamily="34" charset="-120"/>
-              </a:rPr>
-              <a:t>Web servers, SFTP, cache, and the PCI-DSS database all share one zone</a:t>
-            </a:r>
-            <a:endParaRPr lang="en-US" sz="1300" dirty="0"/>
-          </a:p>
-          <a:p>
-            <a:pPr marL="342900" indent="-342900">
-              <a:spcAft>
-                <a:spcPts val="1200"/>
-              </a:spcAft>
-              <a:buSzPct val="100000"/>
-              <a:buChar char="•"/>
-            </a:pPr>
-            <a:r>
-              <a:rPr lang="en-US" sz="1300" dirty="0">
-                <a:solidFill>
-                  <a:srgbClr val="1A1A1A"/>
-                </a:solidFill>
-                <a:latin typeface="Calibri" pitchFamily="34" charset="0"/>
-                <a:ea typeface="Calibri" pitchFamily="34" charset="-122"/>
-                <a:cs typeface="Calibri" pitchFamily="34" charset="-120"/>
-              </a:rPr>
-              <a:t>No barrier between the compromised web tier and the database</a:t>
-            </a:r>
-            <a:endParaRPr lang="en-US" sz="1300" dirty="0"/>
-          </a:p>
-          <a:p>
-            <a:pPr marL="342900" indent="-342900">
-              <a:spcAft>
-                <a:spcPts val="1200"/>
-              </a:spcAft>
-              <a:buSzPct val="100000"/>
-              <a:buChar char="•"/>
-            </a:pPr>
-            <a:r>
-              <a:rPr lang="en-US" sz="1300" dirty="0">
-                <a:solidFill>
-                  <a:srgbClr val="1A1A1A"/>
-                </a:solidFill>
-                <a:latin typeface="Calibri" pitchFamily="34" charset="0"/>
-                <a:ea typeface="Calibri" pitchFamily="34" charset="-122"/>
-                <a:cs typeface="Calibri" pitchFamily="34" charset="-120"/>
-              </a:rPr>
-              <a:t>Internal VLANs not separated by department</a:t>
-            </a:r>
-            <a:endParaRPr lang="en-US" sz="1300" dirty="0"/>
-          </a:p>
-        </p:txBody>
-      </p:sp>
-      <p:sp>
-        <p:nvSpPr>
-          <p:cNvPr id="6" name="Shape 3"/>
+          <p:cNvPr id="5" name="Shape 2"/>
           <p:cNvSpPr/>
           <p:nvPr/>
         </p:nvSpPr>
         <p:spPr>
           <a:xfrm>
-            <a:off x="7726680" y="5074920"/>
-            <a:ext cx="3931920" cy="1234440"/>
+            <a:off x="548640" y="5257800"/>
+            <a:ext cx="3520440" cy="1051560"/>
           </a:xfrm>
           <a:prstGeom prst="roundRect">
             <a:avLst>
-              <a:gd name="adj" fmla="val 5926"/>
+              <a:gd name="adj" fmla="val 6957"/>
             </a:avLst>
           </a:prstGeom>
           <a:solidFill>
-            <a:srgbClr val="C94F4F">
-              <a:alpha val="12000"/>
-            </a:srgbClr>
+            <a:srgbClr val="F4F6FB"/>
           </a:solidFill>
-          <a:ln w="12700">
+          <a:ln w="15875">
             <a:solidFill>
               <a:srgbClr val="C94F4F"/>
             </a:solidFill>
@@ -12774,38 +13183,77 @@
       </p:sp>
       <p:sp>
         <p:nvSpPr>
+          <p:cNvPr id="6" name="Text 3"/>
+          <p:cNvSpPr txBox="1"/>
+          <p:nvPr/>
+        </p:nvSpPr>
+        <p:spPr>
+          <a:xfrm>
+            <a:off x="777240" y="5367528"/>
+            <a:ext cx="3108960" cy="457200"/>
+          </a:xfrm>
+          <a:prstGeom prst="rect">
+            <a:avLst/>
+          </a:prstGeom>
+          <a:noFill/>
+          <a:ln/>
+        </p:spPr>
+        <p:txBody>
+          <a:bodyPr wrap="square" lIns="0" tIns="0" rIns="0" bIns="0" rtlCol="0" anchor="ctr"/>
+          <a:lstStyle/>
+          <a:p>
+            <a:pPr indent="0" marL="0">
+              <a:buNone/>
+            </a:pPr>
+            <a:r>
+              <a:rPr lang="en-US" sz="1400" b="1" dirty="0">
+                <a:solidFill>
+                  <a:srgbClr val="C94F4F"/>
+                </a:solidFill>
+                <a:latin typeface="Calibri" pitchFamily="34" charset="0"/>
+                <a:ea typeface="Calibri" pitchFamily="34" charset="-122"/>
+                <a:cs typeface="Calibri" pitchFamily="34" charset="-120"/>
+              </a:rPr>
+              <a:t>SQL Injection</a:t>
+            </a:r>
+            <a:endParaRPr lang="en-US" sz="1400" dirty="0"/>
+          </a:p>
+        </p:txBody>
+      </p:sp>
+      <p:sp>
+        <p:nvSpPr>
           <p:cNvPr id="7" name="Text 4"/>
           <p:cNvSpPr txBox="1"/>
           <p:nvPr/>
         </p:nvSpPr>
         <p:spPr>
           <a:xfrm>
-            <a:off x="7909560" y="5193792"/>
-            <a:ext cx="3566160" cy="1005840"/>
-          </a:xfrm>
-          <a:prstGeom prst="rect">
-            <a:avLst/>
-          </a:prstGeom>
-          <a:noFill/>
-          <a:ln/>
-        </p:spPr>
-        <p:txBody>
-          <a:bodyPr wrap="square" rtlCol="0" anchor="ctr"/>
-          <a:lstStyle/>
-          <a:p>
-            <a:pPr indent="0" marL="0">
-              <a:buNone/>
-            </a:pPr>
-            <a:r>
-              <a:rPr lang="en-US" sz="1150" i="1" dirty="0">
-                <a:solidFill>
-                  <a:srgbClr val="C94F4F"/>
-                </a:solidFill>
-                <a:latin typeface="Calibri" pitchFamily="34" charset="0"/>
-                <a:ea typeface="Calibri" pitchFamily="34" charset="-122"/>
-                <a:cs typeface="Calibri" pitchFamily="34" charset="-120"/>
-              </a:rPr>
-              <a:t>This is exactly what let a single SQL-injection foothold reach the database and, from there, the entire network.</a:t>
+            <a:off x="777240" y="5824728"/>
+            <a:ext cx="3108960" cy="411480"/>
+          </a:xfrm>
+          <a:prstGeom prst="rect">
+            <a:avLst/>
+          </a:prstGeom>
+          <a:noFill/>
+          <a:ln/>
+        </p:spPr>
+        <p:txBody>
+          <a:bodyPr wrap="square" lIns="0" tIns="0" rIns="0" bIns="0" rtlCol="0" anchor="ctr"/>
+          <a:lstStyle/>
+          <a:p>
+            <a:pPr indent="0" marL="0">
+              <a:buNone/>
+            </a:pPr>
+            <a:r>
+              <a:rPr lang="en-US" sz="1150" dirty="0">
+                <a:solidFill>
+                  <a:srgbClr val="6B7280"/>
+                </a:solidFill>
+                <a:latin typeface="Calibri" pitchFamily="34" charset="0"/>
+                <a:ea typeface="Calibri" pitchFamily="34" charset="-122"/>
+                <a:cs typeface="Calibri" pitchFamily="34" charset="-120"/>
+              </a:rPr>
+              <a:t>Internally-built web app</a:t>
             </a:r>
             <a:endParaRPr lang="en-US" sz="1150" dirty="0"/>
           </a:p>
@@ -12813,7 +13261,217 @@
       </p:sp>
       <p:sp>
         <p:nvSpPr>
-          <p:cNvPr id="8" name="Text 5"/>
+          <p:cNvPr id="8" name="Shape 5"/>
+          <p:cNvSpPr/>
+          <p:nvPr/>
+        </p:nvSpPr>
+        <p:spPr>
+          <a:xfrm>
+            <a:off x="4343400" y="5257800"/>
+            <a:ext cx="3520440" cy="1051560"/>
+          </a:xfrm>
+          <a:prstGeom prst="roundRect">
+            <a:avLst>
+              <a:gd name="adj" fmla="val 6957"/>
+            </a:avLst>
+          </a:prstGeom>
+          <a:solidFill>
+            <a:srgbClr val="F4F6FB"/>
+          </a:solidFill>
+          <a:ln w="15875">
+            <a:solidFill>
+              <a:srgbClr val="C9A227"/>
+            </a:solidFill>
+            <a:prstDash val="solid"/>
+          </a:ln>
+        </p:spPr>
+      </p:sp>
+      <p:sp>
+        <p:nvSpPr>
+          <p:cNvPr id="9" name="Text 6"/>
+          <p:cNvSpPr txBox="1"/>
+          <p:nvPr/>
+        </p:nvSpPr>
+        <p:spPr>
+          <a:xfrm>
+            <a:off x="4572000" y="5367528"/>
+            <a:ext cx="3108960" cy="457200"/>
+          </a:xfrm>
+          <a:prstGeom prst="rect">
+            <a:avLst/>
+          </a:prstGeom>
+          <a:noFill/>
+          <a:ln/>
+        </p:spPr>
+        <p:txBody>
+          <a:bodyPr wrap="square" lIns="0" tIns="0" rIns="0" bIns="0" rtlCol="0" anchor="ctr"/>
+          <a:lstStyle/>
+          <a:p>
+            <a:pPr indent="0" marL="0">
+              <a:buNone/>
+            </a:pPr>
+            <a:r>
+              <a:rPr lang="en-US" sz="1400" b="1" dirty="0">
+                <a:solidFill>
+                  <a:srgbClr val="C9A227"/>
+                </a:solidFill>
+                <a:latin typeface="Calibri" pitchFamily="34" charset="0"/>
+                <a:ea typeface="Calibri" pitchFamily="34" charset="-122"/>
+                <a:cs typeface="Calibri" pitchFamily="34" charset="-120"/>
+              </a:rPr>
+              <a:t>Cross-Site Scripting</a:t>
+            </a:r>
+            <a:endParaRPr lang="en-US" sz="1400" dirty="0"/>
+          </a:p>
+        </p:txBody>
+      </p:sp>
+      <p:sp>
+        <p:nvSpPr>
+          <p:cNvPr id="10" name="Text 7"/>
+          <p:cNvSpPr txBox="1"/>
+          <p:nvPr/>
+        </p:nvSpPr>
+        <p:spPr>
+          <a:xfrm>
+            <a:off x="4572000" y="5824728"/>
+            <a:ext cx="3108960" cy="411480"/>
+          </a:xfrm>
+          <a:prstGeom prst="rect">
+            <a:avLst/>
+          </a:prstGeom>
+          <a:noFill/>
+          <a:ln/>
+        </p:spPr>
+        <p:txBody>
+          <a:bodyPr wrap="square" lIns="0" tIns="0" rIns="0" bIns="0" rtlCol="0" anchor="ctr"/>
+          <a:lstStyle/>
+          <a:p>
+            <a:pPr indent="0" marL="0">
+              <a:buNone/>
+            </a:pPr>
+            <a:r>
+              <a:rPr lang="en-US" sz="1150" dirty="0">
+                <a:solidFill>
+                  <a:srgbClr val="6B7280"/>
+                </a:solidFill>
+                <a:latin typeface="Calibri" pitchFamily="34" charset="0"/>
+                <a:ea typeface="Calibri" pitchFamily="34" charset="-122"/>
+                <a:cs typeface="Calibri" pitchFamily="34" charset="-120"/>
+              </a:rPr>
+              <a:t>Same web application</a:t>
+            </a:r>
+            <a:endParaRPr lang="en-US" sz="1150" dirty="0"/>
+          </a:p>
+        </p:txBody>
+      </p:sp>
+      <p:sp>
+        <p:nvSpPr>
+          <p:cNvPr id="11" name="Shape 8"/>
+          <p:cNvSpPr/>
+          <p:nvPr/>
+        </p:nvSpPr>
+        <p:spPr>
+          <a:xfrm>
+            <a:off x="8138160" y="5257800"/>
+            <a:ext cx="3520440" cy="1051560"/>
+          </a:xfrm>
+          <a:prstGeom prst="roundRect">
+            <a:avLst>
+              <a:gd name="adj" fmla="val 6957"/>
+            </a:avLst>
+          </a:prstGeom>
+          <a:solidFill>
+            <a:srgbClr val="F4F6FB"/>
+          </a:solidFill>
+          <a:ln w="15875">
+            <a:solidFill>
+              <a:srgbClr val="3B4A9E"/>
+            </a:solidFill>
+            <a:prstDash val="solid"/>
+          </a:ln>
+        </p:spPr>
+      </p:sp>
+      <p:sp>
+        <p:nvSpPr>
+          <p:cNvPr id="12" name="Text 9"/>
+          <p:cNvSpPr txBox="1"/>
+          <p:nvPr/>
+        </p:nvSpPr>
+        <p:spPr>
+          <a:xfrm>
+            <a:off x="8366760" y="5367528"/>
+            <a:ext cx="3108960" cy="457200"/>
+          </a:xfrm>
+          <a:prstGeom prst="rect">
+            <a:avLst/>
+          </a:prstGeom>
+          <a:noFill/>
+          <a:ln/>
+        </p:spPr>
+        <p:txBody>
+          <a:bodyPr wrap="square" lIns="0" tIns="0" rIns="0" bIns="0" rtlCol="0" anchor="ctr"/>
+          <a:lstStyle/>
+          <a:p>
+            <a:pPr indent="0" marL="0">
+              <a:buNone/>
+            </a:pPr>
+            <a:r>
+              <a:rPr lang="en-US" sz="1400" b="1" dirty="0">
+                <a:solidFill>
+                  <a:srgbClr val="3B4A9E"/>
+                </a:solidFill>
+                <a:latin typeface="Calibri" pitchFamily="34" charset="0"/>
+                <a:ea typeface="Calibri" pitchFamily="34" charset="-122"/>
+                <a:cs typeface="Calibri" pitchFamily="34" charset="-120"/>
+              </a:rPr>
+              <a:t>Weak Authentication</a:t>
+            </a:r>
+            <a:endParaRPr lang="en-US" sz="1400" dirty="0"/>
+          </a:p>
+        </p:txBody>
+      </p:sp>
+      <p:sp>
+        <p:nvSpPr>
+          <p:cNvPr id="13" name="Text 10"/>
+          <p:cNvSpPr txBox="1"/>
+          <p:nvPr/>
+        </p:nvSpPr>
+        <p:spPr>
+          <a:xfrm>
+            <a:off x="8366760" y="5824728"/>
+            <a:ext cx="3108960" cy="411480"/>
+          </a:xfrm>
+          <a:prstGeom prst="rect">
+            <a:avLst/>
+          </a:prstGeom>
+          <a:noFill/>
+          <a:ln/>
+        </p:spPr>
+        <p:txBody>
+          <a:bodyPr wrap="square" lIns="0" tIns="0" rIns="0" bIns="0" rtlCol="0" anchor="ctr"/>
+          <a:lstStyle/>
+          <a:p>
+            <a:pPr indent="0" marL="0">
+              <a:buNone/>
+            </a:pPr>
+            <a:r>
+              <a:rPr lang="en-US" sz="1150" dirty="0">
+                <a:solidFill>
+                  <a:srgbClr val="6B7280"/>
+                </a:solidFill>
+                <a:latin typeface="Calibri" pitchFamily="34" charset="0"/>
+                <a:ea typeface="Calibri" pitchFamily="34" charset="-122"/>
+                <a:cs typeface="Calibri" pitchFamily="34" charset="-120"/>
+              </a:rPr>
+              <a:t>SFTP default credentials</a:t>
+            </a:r>
+            <a:endParaRPr lang="en-US" sz="1150" dirty="0"/>
+          </a:p>
+        </p:txBody>
+      </p:sp>
+      <p:sp>
+        <p:nvSpPr>
+          <p:cNvPr id="14" name="Text 11"/>
           <p:cNvSpPr txBox="1"/>
           <p:nvPr/>
         </p:nvSpPr>
@@ -12852,7 +13510,7 @@
       </p:sp>
       <p:sp>
         <p:nvSpPr>
-          <p:cNvPr id="9" name="Text 6"/>
+          <p:cNvPr id="15" name="Text 12"/>
           <p:cNvSpPr txBox="1"/>
           <p:nvPr/>
         </p:nvSpPr>
@@ -12883,7 +13541,7 @@
                 <a:ea typeface="Calibri" pitchFamily="34" charset="-122"/>
                 <a:cs typeface="Calibri" pitchFamily="34" charset="-120"/>
               </a:rPr>
-              <a:t>8</a:t>
+              <a:t>7</a:t>
             </a:r>
             <a:endParaRPr lang="en-US" sz="900" dirty="0"/>
           </a:p>
@@ -12941,7 +13599,7 @@
             <a:r>
               <a:rPr lang="en-US" sz="1200" b="1" spc="200" kern="0" dirty="0">
                 <a:solidFill>
-                  <a:srgbClr val="2F9E56"/>
+                  <a:srgbClr val="C94F4F"/>
                 </a:solidFill>
                 <a:latin typeface="Calibri" pitchFamily="34" charset="0"/>
                 <a:ea typeface="Calibri" pitchFamily="34" charset="-122"/>
@@ -12986,7 +13644,7 @@
                 <a:ea typeface="Cambria" pitchFamily="34" charset="-122"/>
                 <a:cs typeface="Cambria" pitchFamily="34" charset="-120"/>
               </a:rPr>
-              <a:t>After: Defense-in-Depth Segmentation</a:t>
+              <a:t>Before: A Flat, Under-Segmented Network</a:t>
             </a:r>
             <a:endParaRPr lang="en-US" sz="3200" dirty="0"/>
           </a:p>
@@ -12994,7 +13652,7 @@
       </p:sp>
       <p:pic>
         <p:nvPicPr>
-          <p:cNvPr id="4" name="Image 0" descr="C:\Users\rareb\AppData\Local\Temp\claude\C--Users-rareb-OneDrive-Desktop-University-Of-Winnipeg-Case-Studies-Issues---Capstone-Project-V--Balogun-NSD-Fall-2023\288735ab-ce17-49e2-9255-b3c08ab0bae8\scratchpad\network-after.png">    </p:cNvPr>
+          <p:cNvPr id="4" name="Image 0" descr="C:\Users\rareb\AppData\Local\Temp\claude\C--Users-rareb-OneDrive-Desktop-University-Of-Winnipeg-Case-Studies-Issues---Capstone-Project-V--Balogun-NSD-Fall-2023\288735ab-ce17-49e2-9255-b3c08ab0bae8\scratchpad\network-before.png">    </p:cNvPr>
           <p:cNvPicPr>
             <a:picLocks noChangeAspect="1"/>
           </p:cNvPicPr>
@@ -13008,8 +13666,8 @@
         </p:blipFill>
         <p:spPr>
           <a:xfrm>
-            <a:off x="3749040" y="1417320"/>
-            <a:ext cx="6172200" cy="5141062"/>
+            <a:off x="548640" y="1600200"/>
+            <a:ext cx="6949440" cy="4308386"/>
           </a:xfrm>
           <a:prstGeom prst="rect">
             <a:avLst/>
@@ -13018,62 +13676,138 @@
       </p:pic>
       <p:sp>
         <p:nvSpPr>
-          <p:cNvPr id="5" name="Shape 2"/>
+          <p:cNvPr id="5" name="Text 2"/>
+          <p:cNvSpPr txBox="1"/>
+          <p:nvPr/>
+        </p:nvSpPr>
+        <p:spPr>
+          <a:xfrm>
+            <a:off x="7726680" y="1920240"/>
+            <a:ext cx="3931920" cy="2926080"/>
+          </a:xfrm>
+          <a:prstGeom prst="rect">
+            <a:avLst/>
+          </a:prstGeom>
+          <a:noFill/>
+          <a:ln/>
+        </p:spPr>
+        <p:txBody>
+          <a:bodyPr wrap="square" rtlCol="0" anchor="ctr"/>
+          <a:lstStyle/>
+          <a:p>
+            <a:pPr marL="342900" indent="-342900">
+              <a:spcAft>
+                <a:spcPts val="1200"/>
+              </a:spcAft>
+              <a:buSzPct val="100000"/>
+              <a:buChar char="•"/>
+            </a:pPr>
+            <a:r>
+              <a:rPr lang="en-US" sz="1300" dirty="0">
+                <a:solidFill>
+                  <a:srgbClr val="1A1A1A"/>
+                </a:solidFill>
+                <a:latin typeface="Calibri" pitchFamily="34" charset="0"/>
+                <a:ea typeface="Calibri" pitchFamily="34" charset="-122"/>
+                <a:cs typeface="Calibri" pitchFamily="34" charset="-120"/>
+              </a:rPr>
+              <a:t>Single WAF in front of one flat DMZ</a:t>
+            </a:r>
+            <a:endParaRPr lang="en-US" sz="1300" dirty="0"/>
+          </a:p>
+          <a:p>
+            <a:pPr marL="342900" indent="-342900">
+              <a:spcAft>
+                <a:spcPts val="1200"/>
+              </a:spcAft>
+              <a:buSzPct val="100000"/>
+              <a:buChar char="•"/>
+            </a:pPr>
+            <a:r>
+              <a:rPr lang="en-US" sz="1300" dirty="0">
+                <a:solidFill>
+                  <a:srgbClr val="1A1A1A"/>
+                </a:solidFill>
+                <a:latin typeface="Calibri" pitchFamily="34" charset="0"/>
+                <a:ea typeface="Calibri" pitchFamily="34" charset="-122"/>
+                <a:cs typeface="Calibri" pitchFamily="34" charset="-120"/>
+              </a:rPr>
+              <a:t>Web servers, SFTP, cache, and the PCI-DSS database all share one zone</a:t>
+            </a:r>
+            <a:endParaRPr lang="en-US" sz="1300" dirty="0"/>
+          </a:p>
+          <a:p>
+            <a:pPr marL="342900" indent="-342900">
+              <a:spcAft>
+                <a:spcPts val="1200"/>
+              </a:spcAft>
+              <a:buSzPct val="100000"/>
+              <a:buChar char="•"/>
+            </a:pPr>
+            <a:r>
+              <a:rPr lang="en-US" sz="1300" dirty="0">
+                <a:solidFill>
+                  <a:srgbClr val="1A1A1A"/>
+                </a:solidFill>
+                <a:latin typeface="Calibri" pitchFamily="34" charset="0"/>
+                <a:ea typeface="Calibri" pitchFamily="34" charset="-122"/>
+                <a:cs typeface="Calibri" pitchFamily="34" charset="-120"/>
+              </a:rPr>
+              <a:t>No barrier between the compromised web tier and the database</a:t>
+            </a:r>
+            <a:endParaRPr lang="en-US" sz="1300" dirty="0"/>
+          </a:p>
+          <a:p>
+            <a:pPr marL="342900" indent="-342900">
+              <a:spcAft>
+                <a:spcPts val="1200"/>
+              </a:spcAft>
+              <a:buSzPct val="100000"/>
+              <a:buChar char="•"/>
+            </a:pPr>
+            <a:r>
+              <a:rPr lang="en-US" sz="1300" dirty="0">
+                <a:solidFill>
+                  <a:srgbClr val="1A1A1A"/>
+                </a:solidFill>
+                <a:latin typeface="Calibri" pitchFamily="34" charset="0"/>
+                <a:ea typeface="Calibri" pitchFamily="34" charset="-122"/>
+                <a:cs typeface="Calibri" pitchFamily="34" charset="-120"/>
+              </a:rPr>
+              <a:t>Internal VLANs not separated by department</a:t>
+            </a:r>
+            <a:endParaRPr lang="en-US" sz="1300" dirty="0"/>
+          </a:p>
+        </p:txBody>
+      </p:sp>
+      <p:sp>
+        <p:nvSpPr>
+          <p:cNvPr id="6" name="Shape 3"/>
           <p:cNvSpPr/>
           <p:nvPr/>
         </p:nvSpPr>
         <p:spPr>
           <a:xfrm>
-            <a:off x="548640" y="1600200"/>
-            <a:ext cx="320040" cy="320040"/>
-          </a:xfrm>
-          <a:prstGeom prst="ellipse">
-            <a:avLst/>
+            <a:off x="7726680" y="5074920"/>
+            <a:ext cx="3931920" cy="1234440"/>
+          </a:xfrm>
+          <a:prstGeom prst="roundRect">
+            <a:avLst>
+              <a:gd name="adj" fmla="val 5926"/>
+            </a:avLst>
           </a:prstGeom>
           <a:solidFill>
-            <a:srgbClr val="2F9E56"/>
+            <a:srgbClr val="C94F4F">
+              <a:alpha val="12000"/>
+            </a:srgbClr>
           </a:solidFill>
-          <a:ln/>
-        </p:spPr>
-      </p:sp>
-      <p:sp>
-        <p:nvSpPr>
-          <p:cNvPr id="6" name="Text 3"/>
-          <p:cNvSpPr txBox="1"/>
-          <p:nvPr/>
-        </p:nvSpPr>
-        <p:spPr>
-          <a:xfrm>
-            <a:off x="1005840" y="1508760"/>
-            <a:ext cx="1463040" cy="457200"/>
-          </a:xfrm>
-          <a:prstGeom prst="rect">
-            <a:avLst/>
-          </a:prstGeom>
-          <a:noFill/>
-          <a:ln/>
-        </p:spPr>
-        <p:txBody>
-          <a:bodyPr wrap="square" lIns="0" tIns="0" rIns="0" bIns="0" rtlCol="0" anchor="ctr"/>
-          <a:lstStyle/>
-          <a:p>
-            <a:pPr indent="0" marL="0">
-              <a:buNone/>
-            </a:pPr>
-            <a:r>
-              <a:rPr lang="en-US" sz="1250" b="1" dirty="0">
-                <a:solidFill>
-                  <a:srgbClr val="1E2761"/>
-                </a:solidFill>
-                <a:latin typeface="Calibri" pitchFamily="34" charset="0"/>
-                <a:ea typeface="Calibri" pitchFamily="34" charset="-122"/>
-                <a:cs typeface="Calibri" pitchFamily="34" charset="-120"/>
-              </a:rPr>
-              <a:t>NGFW + Dual WAF</a:t>
-            </a:r>
-            <a:endParaRPr lang="en-US" sz="1250" dirty="0"/>
-          </a:p>
-        </p:txBody>
+          <a:ln w="12700">
+            <a:solidFill>
+              <a:srgbClr val="C94F4F"/>
+            </a:solidFill>
+            <a:prstDash val="solid"/>
+          </a:ln>
+        </p:spPr>
       </p:sp>
       <p:sp>
         <p:nvSpPr>
@@ -13083,334 +13817,40 @@
         </p:nvSpPr>
         <p:spPr>
           <a:xfrm>
-            <a:off x="1005840" y="1847088"/>
-            <a:ext cx="1463040" cy="457200"/>
-          </a:xfrm>
-          <a:prstGeom prst="rect">
-            <a:avLst/>
-          </a:prstGeom>
-          <a:noFill/>
-          <a:ln/>
-        </p:spPr>
-        <p:txBody>
-          <a:bodyPr wrap="square" lIns="0" tIns="0" rIns="0" bIns="0" rtlCol="0" anchor="ctr"/>
-          <a:lstStyle/>
-          <a:p>
-            <a:pPr indent="0" marL="0">
-              <a:buNone/>
-            </a:pPr>
-            <a:r>
-              <a:rPr lang="en-US" sz="1000" dirty="0">
-                <a:solidFill>
-                  <a:srgbClr val="6B7280"/>
-                </a:solidFill>
-                <a:latin typeface="Calibri" pitchFamily="34" charset="0"/>
-                <a:ea typeface="Calibri" pitchFamily="34" charset="-122"/>
-                <a:cs typeface="Calibri" pitchFamily="34" charset="-120"/>
-              </a:rPr>
-              <a:t>IPS, VPN, DLP at the perimeter; active-active WAF pair</a:t>
-            </a:r>
-            <a:endParaRPr lang="en-US" sz="1000" dirty="0"/>
-          </a:p>
-        </p:txBody>
-      </p:sp>
-      <p:sp>
-        <p:nvSpPr>
-          <p:cNvPr id="8" name="Shape 5"/>
-          <p:cNvSpPr/>
-          <p:nvPr/>
-        </p:nvSpPr>
-        <p:spPr>
-          <a:xfrm>
-            <a:off x="548640" y="2377440"/>
-            <a:ext cx="320040" cy="320040"/>
-          </a:xfrm>
-          <a:prstGeom prst="ellipse">
-            <a:avLst/>
-          </a:prstGeom>
-          <a:solidFill>
-            <a:srgbClr val="2F9E56"/>
-          </a:solidFill>
-          <a:ln/>
-        </p:spPr>
-      </p:sp>
-      <p:sp>
-        <p:nvSpPr>
-          <p:cNvPr id="9" name="Text 6"/>
-          <p:cNvSpPr txBox="1"/>
-          <p:nvPr/>
-        </p:nvSpPr>
-        <p:spPr>
-          <a:xfrm>
-            <a:off x="1005840" y="2286000"/>
-            <a:ext cx="1463040" cy="457200"/>
-          </a:xfrm>
-          <a:prstGeom prst="rect">
-            <a:avLst/>
-          </a:prstGeom>
-          <a:noFill/>
-          <a:ln/>
-        </p:spPr>
-        <p:txBody>
-          <a:bodyPr wrap="square" lIns="0" tIns="0" rIns="0" bIns="0" rtlCol="0" anchor="ctr"/>
-          <a:lstStyle/>
-          <a:p>
-            <a:pPr indent="0" marL="0">
-              <a:buNone/>
-            </a:pPr>
-            <a:r>
-              <a:rPr lang="en-US" sz="1250" b="1" dirty="0">
-                <a:solidFill>
-                  <a:srgbClr val="1E2761"/>
-                </a:solidFill>
-                <a:latin typeface="Calibri" pitchFamily="34" charset="0"/>
-                <a:ea typeface="Calibri" pitchFamily="34" charset="-122"/>
-                <a:cs typeface="Calibri" pitchFamily="34" charset="-120"/>
-              </a:rPr>
-              <a:t>3-Tier Isolation</a:t>
-            </a:r>
-            <a:endParaRPr lang="en-US" sz="1250" dirty="0"/>
-          </a:p>
-        </p:txBody>
-      </p:sp>
-      <p:sp>
-        <p:nvSpPr>
-          <p:cNvPr id="10" name="Text 7"/>
-          <p:cNvSpPr txBox="1"/>
-          <p:nvPr/>
-        </p:nvSpPr>
-        <p:spPr>
-          <a:xfrm>
-            <a:off x="1005840" y="2624328"/>
-            <a:ext cx="1463040" cy="457200"/>
-          </a:xfrm>
-          <a:prstGeom prst="rect">
-            <a:avLst/>
-          </a:prstGeom>
-          <a:noFill/>
-          <a:ln/>
-        </p:spPr>
-        <p:txBody>
-          <a:bodyPr wrap="square" lIns="0" tIns="0" rIns="0" bIns="0" rtlCol="0" anchor="ctr"/>
-          <a:lstStyle/>
-          <a:p>
-            <a:pPr indent="0" marL="0">
-              <a:buNone/>
-            </a:pPr>
-            <a:r>
-              <a:rPr lang="en-US" sz="1000" dirty="0">
-                <a:solidFill>
-                  <a:srgbClr val="6B7280"/>
-                </a:solidFill>
-                <a:latin typeface="Calibri" pitchFamily="34" charset="0"/>
-                <a:ea typeface="Calibri" pitchFamily="34" charset="-122"/>
-                <a:cs typeface="Calibri" pitchFamily="34" charset="-120"/>
-              </a:rPr>
-              <a:t>DMZ → App Zone → Database Zone, each behind its own firewall</a:t>
-            </a:r>
-            <a:endParaRPr lang="en-US" sz="1000" dirty="0"/>
-          </a:p>
-        </p:txBody>
-      </p:sp>
-      <p:sp>
-        <p:nvSpPr>
-          <p:cNvPr id="11" name="Shape 8"/>
-          <p:cNvSpPr/>
-          <p:nvPr/>
-        </p:nvSpPr>
-        <p:spPr>
-          <a:xfrm>
-            <a:off x="548640" y="3154680"/>
-            <a:ext cx="320040" cy="320040"/>
-          </a:xfrm>
-          <a:prstGeom prst="ellipse">
-            <a:avLst/>
-          </a:prstGeom>
-          <a:solidFill>
-            <a:srgbClr val="2F9E56"/>
-          </a:solidFill>
-          <a:ln/>
-        </p:spPr>
-      </p:sp>
-      <p:sp>
-        <p:nvSpPr>
-          <p:cNvPr id="12" name="Text 9"/>
-          <p:cNvSpPr txBox="1"/>
-          <p:nvPr/>
-        </p:nvSpPr>
-        <p:spPr>
-          <a:xfrm>
-            <a:off x="1005840" y="3063240"/>
-            <a:ext cx="1463040" cy="457200"/>
-          </a:xfrm>
-          <a:prstGeom prst="rect">
-            <a:avLst/>
-          </a:prstGeom>
-          <a:noFill/>
-          <a:ln/>
-        </p:spPr>
-        <p:txBody>
-          <a:bodyPr wrap="square" lIns="0" tIns="0" rIns="0" bIns="0" rtlCol="0" anchor="ctr"/>
-          <a:lstStyle/>
-          <a:p>
-            <a:pPr indent="0" marL="0">
-              <a:buNone/>
-            </a:pPr>
-            <a:r>
-              <a:rPr lang="en-US" sz="1250" b="1" dirty="0">
-                <a:solidFill>
-                  <a:srgbClr val="1E2761"/>
-                </a:solidFill>
-                <a:latin typeface="Calibri" pitchFamily="34" charset="0"/>
-                <a:ea typeface="Calibri" pitchFamily="34" charset="-122"/>
-                <a:cs typeface="Calibri" pitchFamily="34" charset="-120"/>
-              </a:rPr>
-              <a:t>Dedicated CDE Firewall</a:t>
-            </a:r>
-            <a:endParaRPr lang="en-US" sz="1250" dirty="0"/>
-          </a:p>
-        </p:txBody>
-      </p:sp>
-      <p:sp>
-        <p:nvSpPr>
-          <p:cNvPr id="13" name="Text 10"/>
-          <p:cNvSpPr txBox="1"/>
-          <p:nvPr/>
-        </p:nvSpPr>
-        <p:spPr>
-          <a:xfrm>
-            <a:off x="1005840" y="3401568"/>
-            <a:ext cx="1463040" cy="457200"/>
-          </a:xfrm>
-          <a:prstGeom prst="rect">
-            <a:avLst/>
-          </a:prstGeom>
-          <a:noFill/>
-          <a:ln/>
-        </p:spPr>
-        <p:txBody>
-          <a:bodyPr wrap="square" lIns="0" tIns="0" rIns="0" bIns="0" rtlCol="0" anchor="ctr"/>
-          <a:lstStyle/>
-          <a:p>
-            <a:pPr indent="0" marL="0">
-              <a:buNone/>
-            </a:pPr>
-            <a:r>
-              <a:rPr lang="en-US" sz="1000" dirty="0">
-                <a:solidFill>
-                  <a:srgbClr val="6B7280"/>
-                </a:solidFill>
-                <a:latin typeface="Calibri" pitchFamily="34" charset="0"/>
-                <a:ea typeface="Calibri" pitchFamily="34" charset="-122"/>
-                <a:cs typeface="Calibri" pitchFamily="34" charset="-120"/>
-              </a:rPr>
-              <a:t>Cardholder data isolated with an additional boundary</a:t>
-            </a:r>
-            <a:endParaRPr lang="en-US" sz="1000" dirty="0"/>
-          </a:p>
-        </p:txBody>
-      </p:sp>
-      <p:sp>
-        <p:nvSpPr>
-          <p:cNvPr id="14" name="Shape 11"/>
-          <p:cNvSpPr/>
-          <p:nvPr/>
-        </p:nvSpPr>
-        <p:spPr>
-          <a:xfrm>
-            <a:off x="548640" y="3931920"/>
-            <a:ext cx="320040" cy="320040"/>
-          </a:xfrm>
-          <a:prstGeom prst="ellipse">
-            <a:avLst/>
-          </a:prstGeom>
-          <a:solidFill>
-            <a:srgbClr val="2F9E56"/>
-          </a:solidFill>
-          <a:ln/>
-        </p:spPr>
-      </p:sp>
-      <p:sp>
-        <p:nvSpPr>
-          <p:cNvPr id="15" name="Text 12"/>
-          <p:cNvSpPr txBox="1"/>
-          <p:nvPr/>
-        </p:nvSpPr>
-        <p:spPr>
-          <a:xfrm>
-            <a:off x="1005840" y="3840480"/>
-            <a:ext cx="1463040" cy="457200"/>
-          </a:xfrm>
-          <a:prstGeom prst="rect">
-            <a:avLst/>
-          </a:prstGeom>
-          <a:noFill/>
-          <a:ln/>
-        </p:spPr>
-        <p:txBody>
-          <a:bodyPr wrap="square" lIns="0" tIns="0" rIns="0" bIns="0" rtlCol="0" anchor="ctr"/>
-          <a:lstStyle/>
-          <a:p>
-            <a:pPr indent="0" marL="0">
-              <a:buNone/>
-            </a:pPr>
-            <a:r>
-              <a:rPr lang="en-US" sz="1250" b="1" dirty="0">
-                <a:solidFill>
-                  <a:srgbClr val="1E2761"/>
-                </a:solidFill>
-                <a:latin typeface="Calibri" pitchFamily="34" charset="0"/>
-                <a:ea typeface="Calibri" pitchFamily="34" charset="-122"/>
-                <a:cs typeface="Calibri" pitchFamily="34" charset="-120"/>
-              </a:rPr>
-              <a:t>Per-Department VLANs</a:t>
-            </a:r>
-            <a:endParaRPr lang="en-US" sz="1250" dirty="0"/>
-          </a:p>
-        </p:txBody>
-      </p:sp>
-      <p:sp>
-        <p:nvSpPr>
-          <p:cNvPr id="16" name="Text 13"/>
-          <p:cNvSpPr txBox="1"/>
-          <p:nvPr/>
-        </p:nvSpPr>
-        <p:spPr>
-          <a:xfrm>
-            <a:off x="1005840" y="4178808"/>
-            <a:ext cx="1463040" cy="457200"/>
-          </a:xfrm>
-          <a:prstGeom prst="rect">
-            <a:avLst/>
-          </a:prstGeom>
-          <a:noFill/>
-          <a:ln/>
-        </p:spPr>
-        <p:txBody>
-          <a:bodyPr wrap="square" lIns="0" tIns="0" rIns="0" bIns="0" rtlCol="0" anchor="ctr"/>
-          <a:lstStyle/>
-          <a:p>
-            <a:pPr indent="0" marL="0">
-              <a:buNone/>
-            </a:pPr>
-            <a:r>
-              <a:rPr lang="en-US" sz="1000" dirty="0">
-                <a:solidFill>
-                  <a:srgbClr val="6B7280"/>
-                </a:solidFill>
-                <a:latin typeface="Calibri" pitchFamily="34" charset="0"/>
-                <a:ea typeface="Calibri" pitchFamily="34" charset="-122"/>
-                <a:cs typeface="Calibri" pitchFamily="34" charset="-120"/>
-              </a:rPr>
-              <a:t>HR, Finance, IT segmented to contain lateral movement</a:t>
-            </a:r>
-            <a:endParaRPr lang="en-US" sz="1000" dirty="0"/>
-          </a:p>
-        </p:txBody>
-      </p:sp>
-      <p:sp>
-        <p:nvSpPr>
-          <p:cNvPr id="17" name="Text 14"/>
+            <a:off x="7909560" y="5193792"/>
+            <a:ext cx="3566160" cy="1005840"/>
+          </a:xfrm>
+          <a:prstGeom prst="rect">
+            <a:avLst/>
+          </a:prstGeom>
+          <a:noFill/>
+          <a:ln/>
+        </p:spPr>
+        <p:txBody>
+          <a:bodyPr wrap="square" rtlCol="0" anchor="ctr"/>
+          <a:lstStyle/>
+          <a:p>
+            <a:pPr indent="0" marL="0">
+              <a:buNone/>
+            </a:pPr>
+            <a:r>
+              <a:rPr lang="en-US" sz="1150" i="1" dirty="0">
+                <a:solidFill>
+                  <a:srgbClr val="C94F4F"/>
+                </a:solidFill>
+                <a:latin typeface="Calibri" pitchFamily="34" charset="0"/>
+                <a:ea typeface="Calibri" pitchFamily="34" charset="-122"/>
+                <a:cs typeface="Calibri" pitchFamily="34" charset="-120"/>
+              </a:rPr>
+              <a:t>This is exactly what let a single SQL-injection foothold reach the database and, from there, the entire network.</a:t>
+            </a:r>
+            <a:endParaRPr lang="en-US" sz="1150" dirty="0"/>
+          </a:p>
+        </p:txBody>
+      </p:sp>
+      <p:sp>
+        <p:nvSpPr>
+          <p:cNvPr id="8" name="Text 5"/>
           <p:cNvSpPr txBox="1"/>
           <p:nvPr/>
         </p:nvSpPr>
@@ -13449,7 +13889,7 @@
       </p:sp>
       <p:sp>
         <p:nvSpPr>
-          <p:cNvPr id="18" name="Text 15"/>
+          <p:cNvPr id="9" name="Text 6"/>
           <p:cNvSpPr txBox="1"/>
           <p:nvPr/>
         </p:nvSpPr>
@@ -13480,7 +13920,7 @@
                 <a:ea typeface="Calibri" pitchFamily="34" charset="-122"/>
                 <a:cs typeface="Calibri" pitchFamily="34" charset="-120"/>
               </a:rPr>
-              <a:t>9</a:t>
+              <a:t>8</a:t>
             </a:r>
             <a:endParaRPr lang="en-US" sz="900" dirty="0"/>
           </a:p>

--- a/presentation/FinSecure-Capstone-Presentation.pptx
+++ b/presentation/FinSecure-Capstone-Presentation.pptx
@@ -22,9 +22,10 @@
     <p:sldId id="270" r:id="rId16"/>
     <p:sldId id="271" r:id="rId17"/>
     <p:sldId id="272" r:id="rId18"/>
+    <p:sldId id="273" r:id="rId19"/>
   </p:sldIdLst>
   <p:notesMasterIdLst>
-    <p:notesMasterId r:id="rId19"/>
+    <p:notesMasterId r:id="rId20"/>
   </p:notesMasterIdLst>
   <p:sldSz cx="12192000" cy="6858000"/>
   <p:notesSz cx="6858000" cy="12192000"/>
@@ -694,7 +695,7 @@
           <a:p>
             <a:r>
               <a:rPr lang="en-US" dirty="0"/>
-              <a:t>The key point of this slide: none of SOX, PCI DSS, or GLBA say the words 'Zero Trust' anywhere in their text — but read literally, each one's actual requirement points straight at it. This reframes Zero Trust from 'a trendy architecture we picked' to 'the natural consequence of taking these three regulations seriously at the same time.'</a:t>
+              <a:t>Same principle as the earlier live-evidence slide: these are screenshots of the group's own Azure subscription, not mockups — the resource names (Fin-SecureVnet, FinSecureVault, finsecure_primary) are the actual deployed resources built for the Cloud Migration module of this project. Point out that each one maps directly onto a control already shown in the on-prem redesign: the VNet is the cloud-side network segmentation, Key Vault and TDE are the encryption/secrets layer, and the WAF policy is the cloud counterpart to the dual on-prem WAFs. This is the bridge between the network diagrams and the actual infrastructure work the group did in Azure.</a:t>
             </a:r>
             <a:endParaRPr lang="en-US" dirty="0"/>
           </a:p>
@@ -782,7 +783,7 @@
           <a:p>
             <a:r>
               <a:rPr lang="en-US" dirty="0"/>
-              <a:t>Trace the diagram left to right: every single request — employee, remote VPN session, or the GlobalTech B2B connection — goes through the same four gates. The critical detail is the dashed feedback loop at the bottom: posture and behavior are re-checked continuously, so a device that was fine at login but starts behaving oddly an hour later gets caught, not just trusted until the next login.</a:t>
+              <a:t>The key point of this slide: none of SOX, PCI DSS, or GLBA say the words 'Zero Trust' anywhere in their text — but read literally, each one's actual requirement points straight at it. This reframes Zero Trust from 'a trendy architecture we picked' to 'the natural consequence of taking these three regulations seriously at the same time.'</a:t>
             </a:r>
             <a:endParaRPr lang="en-US" dirty="0"/>
           </a:p>
@@ -870,7 +871,7 @@
           <a:p>
             <a:r>
               <a:rPr lang="en-US" dirty="0"/>
-              <a:t>These are the five risks rated Extreme out of the full eighteen-item register — don't read the table line by line, instead point out the pattern: every single one of these five is directly addressed by a control we already showed in the redesign or the Zero Trust rollout. The risk register isn't a separate compliance exercise bolted on afterward — it's the scoring system that justified the architecture decisions.</a:t>
+              <a:t>Trace the diagram left to right: every single request — employee, remote VPN session, or the GlobalTech B2B connection — goes through the same four gates. The critical detail is the dashed feedback loop at the bottom: posture and behavior are re-checked continuously, so a device that was fine at login but starts behaving oddly an hour later gets caught, not just trusted until the next login.</a:t>
             </a:r>
             <a:endParaRPr lang="en-US" dirty="0"/>
           </a:p>
@@ -958,7 +959,7 @@
           <a:p>
             <a:r>
               <a:rPr lang="en-US" dirty="0"/>
-              <a:t>Two of these five rows — Remote Access &amp; Removable Media, and Third-Party/Vendor Risk Management — were things the original report described in prose elsewhere but never actually wrote down as governing policy sections. Closing that gap matters practically: 'we do this' in a narrative report doesn't survive an audit the way a numbered, versioned policy section does.</a:t>
+              <a:t>These are the five risks rated Extreme out of the full eighteen-item register — don't read the table line by line, instead point out the pattern: every single one of these five is directly addressed by a control we already showed in the redesign or the Zero Trust rollout. The risk register isn't a separate compliance exercise bolted on afterward — it's the scoring system that justified the architecture decisions.</a:t>
             </a:r>
             <a:endParaRPr lang="en-US" dirty="0"/>
           </a:p>
@@ -1046,7 +1047,7 @@
           <a:p>
             <a:r>
               <a:rPr lang="en-US" dirty="0"/>
-              <a:t>Walk through this as a timeline, not a list — the order matters: contain first to stop ongoing exfiltration, then investigate, and notification happens in parallel with recovery, not after it, because GLBA and client trust both demand speed. The lessons-learned line at the bottom is the bridge back to everything earlier in the deck — this incident is the reason the redesign, Zero Trust rollout, and policy exist.</a:t>
+              <a:t>Two of these five rows — Remote Access &amp; Removable Media, and Third-Party/Vendor Risk Management — were things the original report described in prose elsewhere but never actually wrote down as governing policy sections. Closing that gap matters practically: 'we do this' in a narrative report doesn't survive an audit the way a numbered, versioned policy section does.</a:t>
             </a:r>
             <a:endParaRPr lang="en-US" dirty="0"/>
           </a:p>
@@ -1134,7 +1135,7 @@
           <a:p>
             <a:r>
               <a:rPr lang="en-US" dirty="0"/>
-              <a:t>Left side is where we ended up, right side is where FinSecure needs to keep going — make clear that compliance here is a status achieved through this project, not a permanent state; the right column exists because Zero Trust and regulatory alignment both degrade if nobody keeps maintaining them. The 'close the non-SSO gap' item is a specific, honest loose end we flagged rather than papering over.</a:t>
+              <a:t>Walk through this as a timeline, not a list — the order matters: contain first to stop ongoing exfiltration, then investigate, and notification happens in parallel with recovery, not after it, because GLBA and client trust both demand speed. The lessons-learned line at the bottom is the bridge back to everything earlier in the deck — this incident is the reason the redesign, Zero Trust rollout, and policy exist.</a:t>
             </a:r>
             <a:endParaRPr lang="en-US" dirty="0"/>
           </a:p>
@@ -1222,7 +1223,7 @@
           <a:p>
             <a:r>
               <a:rPr lang="en-US" dirty="0"/>
-              <a:t>Close by reiterating the single sentence that ties the whole deck together: a preventable breach exposed both a technical gap and a compliance gap, and this project closed both at once by rebuilding the network around Zero Trust rather than patching the original flaw in isolation. Open the floor for questions.</a:t>
+              <a:t>Left side is where we ended up, right side is where FinSecure needs to keep going — make clear that compliance here is a status achieved through this project, not a permanent state; the right column exists because Zero Trust and regulatory alignment both degrade if nobody keeps maintaining them. The 'close the non-SSO gap' item is a specific, honest loose end we flagged rather than papering over.</a:t>
             </a:r>
             <a:endParaRPr lang="en-US" dirty="0"/>
           </a:p>
@@ -1246,6 +1247,94 @@
             <a:fld id="{F7021451-1387-4CA6-816F-3879F97B5CBC}" type="slidenum">
               <a:rPr lang="en-US"/>
               <a:t>17</a:t>
+            </a:fld>
+            <a:endParaRPr lang="en-US"/>
+          </a:p>
+        </p:txBody>
+      </p:sp>
+    </p:spTree>
+    <p:extLst>
+      <p:ext uri="{BB962C8B-B14F-4D97-AF65-F5344CB8AC3E}">
+        <p14:creationId xmlns:p14="http://schemas.microsoft.com/office/powerpoint/2010/main" val="1024086991"/>
+      </p:ext>
+    </p:extLst>
+  </p:cSld>
+  <p:clrMapOvr>
+    <a:masterClrMapping/>
+  </p:clrMapOvr>
+</p:notes>
+</file>
+
+<file path=ppt/notesSlides/notesSlide18.xml><?xml version="1.0" encoding="utf-8"?>
+<p:notes xmlns:a="http://schemas.openxmlformats.org/drawingml/2006/main" xmlns:r="http://schemas.openxmlformats.org/officeDocument/2006/relationships" xmlns:p="http://schemas.openxmlformats.org/presentationml/2006/main">
+  <p:cSld>
+    <p:spTree>
+      <p:nvGrpSpPr>
+        <p:cNvPr id="1" name=""/>
+        <p:cNvGrpSpPr/>
+        <p:nvPr/>
+      </p:nvGrpSpPr>
+      <p:grpSpPr>
+        <a:xfrm>
+          <a:off x="0" y="0"/>
+          <a:ext cx="0" cy="0"/>
+          <a:chOff x="0" y="0"/>
+          <a:chExt cx="0" cy="0"/>
+        </a:xfrm>
+      </p:grpSpPr>
+      <p:sp>
+        <p:nvSpPr>
+          <p:cNvPr id="2" name="Slide Image Placeholder 1"/>
+          <p:cNvSpPr>
+            <a:spLocks noGrp="1" noRot="1" noChangeAspect="1"/>
+          </p:cNvSpPr>
+          <p:nvPr>
+            <p:ph type="sldImg"/>
+          </p:nvPr>
+        </p:nvSpPr>
+        <p:spPr/>
+      </p:sp>
+      <p:sp>
+        <p:nvSpPr>
+          <p:cNvPr id="3" name="Notes Placeholder 2"/>
+          <p:cNvSpPr>
+            <a:spLocks noGrp="1"/>
+          </p:cNvSpPr>
+          <p:nvPr>
+            <p:ph type="body" idx="1"/>
+          </p:nvPr>
+        </p:nvSpPr>
+        <p:spPr/>
+        <p:txBody>
+          <a:bodyPr/>
+          <a:lstStyle/>
+          <a:p>
+            <a:r>
+              <a:rPr lang="en-US" dirty="0"/>
+              <a:t>Close by reiterating the single sentence that ties the whole deck together: a preventable breach exposed both a technical gap and a compliance gap, and this project closed both at once by rebuilding the network around Zero Trust rather than patching the original flaw in isolation. Open the floor for questions.</a:t>
+            </a:r>
+            <a:endParaRPr lang="en-US" dirty="0"/>
+          </a:p>
+        </p:txBody>
+      </p:sp>
+      <p:sp>
+        <p:nvSpPr>
+          <p:cNvPr id="4" name="Slide Number Placeholder 3"/>
+          <p:cNvSpPr>
+            <a:spLocks noGrp="1"/>
+          </p:cNvSpPr>
+          <p:nvPr>
+            <p:ph type="sldNum" sz="quarter" idx="10"/>
+          </p:nvPr>
+        </p:nvSpPr>
+        <p:spPr/>
+        <p:txBody>
+          <a:bodyPr/>
+          <a:lstStyle/>
+          <a:p>
+            <a:fld id="{F7021451-1387-4CA6-816F-3879F97B5CBC}" type="slidenum">
+              <a:rPr lang="en-US"/>
+              <a:t>18</a:t>
             </a:fld>
             <a:endParaRPr lang="en-US"/>
           </a:p>
@@ -1750,7 +1839,7 @@
           <a:p>
             <a:r>
               <a:rPr lang="en-US" dirty="0"/>
-              <a:t>These are not mockups — this is the group's own Kali Linux workstation scanning the group's own deployed FinSWebApp instance on Azure App Service. Left: Nmap confirms the external attack surface is small (just 80/443) with a valid cert. Right: OWASP ZAP's automated scan is what actually caught the missing security headers and outdated JS library — lower-severity than the SQL injection in the incident narrative, but the same 'hardening skipped under deadline pressure' pattern. This slide exists to show the audience the methodology wasn't just described — it was actually run.</a:t>
+              <a:t>These are not mockups — this is the group's own Kali Linux workstation scanning the group's own deployed FinSWebApp instance on Azure App Service. Left to right: the actual application under test, then Nmap confirming the external attack surface is small (just 80/443) with a valid cert, then OWASP ZAP's automated scan — which is what actually caught the missing security headers and outdated JS library, lower-severity than the SQL injection in the incident narrative but the same 'hardening skipped under deadline pressure' pattern. This slide exists to show the audience the methodology wasn't just described — it was actually run.</a:t>
             </a:r>
             <a:endParaRPr lang="en-US" dirty="0"/>
           </a:p>
@@ -3262,13 +3351,13 @@
             <a:r>
               <a:rPr lang="en-US" sz="1200" b="1" spc="200" kern="0" dirty="0">
                 <a:solidFill>
-                  <a:srgbClr val="1E2761"/>
-                </a:solidFill>
-                <a:latin typeface="Calibri" pitchFamily="34" charset="0"/>
-                <a:ea typeface="Calibri" pitchFamily="34" charset="-122"/>
-                <a:cs typeface="Calibri" pitchFamily="34" charset="-120"/>
-              </a:rPr>
-              <a:t>ZERO TRUST ARCHITECTURE</a:t>
+                  <a:srgbClr val="2F9E56"/>
+                </a:solidFill>
+                <a:latin typeface="Calibri" pitchFamily="34" charset="0"/>
+                <a:ea typeface="Calibri" pitchFamily="34" charset="-122"/>
+                <a:cs typeface="Calibri" pitchFamily="34" charset="-120"/>
+              </a:rPr>
+              <a:t>NETWORK REDESIGN</a:t>
             </a:r>
             <a:endParaRPr lang="en-US" sz="1200" dirty="0"/>
           </a:p>
@@ -3307,424 +3396,323 @@
                 <a:ea typeface="Cambria" pitchFamily="34" charset="-122"/>
                 <a:cs typeface="Cambria" pitchFamily="34" charset="-120"/>
               </a:rPr>
-              <a:t>Why Zero Trust, Specifically for FinSecure</a:t>
+              <a:t>Cloud Migration Evidence: The Actual Azure Deployment</a:t>
             </a:r>
             <a:endParaRPr lang="en-US" sz="3200" dirty="0"/>
           </a:p>
         </p:txBody>
       </p:sp>
-      <p:sp>
-        <p:nvSpPr>
-          <p:cNvPr id="4" name="Shape 2"/>
+      <p:pic>
+        <p:nvPicPr>
+          <p:cNvPr id="4" name="Image 0" descr="C:\Users\rareb\OneDrive\Desktop\University Of Winnipeg\Case Studies Issues &amp; Capstone Project V. Balogun NSD Fall 2023\finsecure-network-security-capstone\evidence\cloud-migration\vnet-overview.jpg">    </p:cNvPr>
+          <p:cNvPicPr>
+            <a:picLocks noChangeAspect="1"/>
+          </p:cNvPicPr>
+          <p:nvPr/>
+        </p:nvPicPr>
+        <p:blipFill>
+          <a:blip r:embed="rId1"/>
+          <a:stretch>
+            <a:fillRect/>
+          </a:stretch>
+        </p:blipFill>
+        <p:spPr>
+          <a:xfrm>
+            <a:off x="2674620" y="1554480"/>
+            <a:ext cx="3200400" cy="1691442"/>
+          </a:xfrm>
+          <a:prstGeom prst="rect">
+            <a:avLst/>
+          </a:prstGeom>
+        </p:spPr>
+      </p:pic>
+      <p:sp>
+        <p:nvSpPr>
+          <p:cNvPr id="5" name="Shape 2"/>
           <p:cNvSpPr/>
           <p:nvPr/>
         </p:nvSpPr>
         <p:spPr>
           <a:xfrm>
-            <a:off x="548640" y="1783080"/>
-            <a:ext cx="11109960" cy="1051560"/>
+            <a:off x="2674620" y="1554480"/>
+            <a:ext cx="3200400" cy="1691442"/>
           </a:xfrm>
           <a:prstGeom prst="roundRect">
-            <a:avLst>
-              <a:gd name="adj" fmla="val 6957"/>
-            </a:avLst>
-          </a:prstGeom>
-          <a:solidFill>
-            <a:srgbClr val="FFFFFF"/>
-          </a:solidFill>
-          <a:ln w="12700">
+            <a:avLst/>
+          </a:prstGeom>
+          <a:ln w="19050">
             <a:solidFill>
               <a:srgbClr val="CADCFC"/>
             </a:solidFill>
             <a:prstDash val="solid"/>
           </a:ln>
-          <a:effectLst>
-            <a:outerShdw sx="100000" sy="100000" kx="0" ky="0" algn="bl" rotWithShape="0" blurRad="63500" dist="25400" dir="5400000">
-              <a:srgbClr val="9AA5C7">
-                <a:alpha val="25000"/>
-              </a:srgbClr>
-            </a:outerShdw>
-          </a:effectLst>
-        </p:spPr>
-      </p:sp>
-      <p:sp>
-        <p:nvSpPr>
-          <p:cNvPr id="5" name="Shape 3"/>
+        </p:spPr>
+      </p:sp>
+      <p:sp>
+        <p:nvSpPr>
+          <p:cNvPr id="6" name="Text 3"/>
+          <p:cNvSpPr txBox="1"/>
+          <p:nvPr/>
+        </p:nvSpPr>
+        <p:spPr>
+          <a:xfrm>
+            <a:off x="2674620" y="3319074"/>
+            <a:ext cx="3200400" cy="457200"/>
+          </a:xfrm>
+          <a:prstGeom prst="rect">
+            <a:avLst/>
+          </a:prstGeom>
+          <a:noFill/>
+          <a:ln/>
+        </p:spPr>
+        <p:txBody>
+          <a:bodyPr wrap="square" rtlCol="0" anchor="ctr"/>
+          <a:lstStyle/>
+          <a:p>
+            <a:pPr indent="0" marL="0">
+              <a:buNone/>
+            </a:pPr>
+            <a:r>
+              <a:rPr lang="en-US" sz="1050" i="1" dirty="0">
+                <a:solidFill>
+                  <a:srgbClr val="6B7280"/>
+                </a:solidFill>
+                <a:latin typeface="Calibri" pitchFamily="34" charset="0"/>
+                <a:ea typeface="Calibri" pitchFamily="34" charset="-122"/>
+                <a:cs typeface="Calibri" pitchFamily="34" charset="-120"/>
+              </a:rPr>
+              <a:t>Fin-SecureVnet — the deployed virtual network, DDoS/Firewall-ready.</a:t>
+            </a:r>
+            <a:endParaRPr lang="en-US" sz="1050" dirty="0"/>
+          </a:p>
+        </p:txBody>
+      </p:sp>
+      <p:pic>
+        <p:nvPicPr>
+          <p:cNvPr id="7" name="Image 1" descr="C:\Users\rareb\OneDrive\Desktop\University Of Winnipeg\Case Studies Issues &amp; Capstone Project V. Balogun NSD Fall 2023\finsecure-network-security-capstone\evidence\cloud-migration\key-vault-creation.jpg">    </p:cNvPr>
+          <p:cNvPicPr>
+            <a:picLocks noChangeAspect="1"/>
+          </p:cNvPicPr>
+          <p:nvPr/>
+        </p:nvPicPr>
+        <p:blipFill>
+          <a:blip r:embed="rId2"/>
+          <a:stretch>
+            <a:fillRect/>
+          </a:stretch>
+        </p:blipFill>
+        <p:spPr>
+          <a:xfrm>
+            <a:off x="6332220" y="1554480"/>
+            <a:ext cx="3200400" cy="1707894"/>
+          </a:xfrm>
+          <a:prstGeom prst="rect">
+            <a:avLst/>
+          </a:prstGeom>
+        </p:spPr>
+      </p:pic>
+      <p:sp>
+        <p:nvSpPr>
+          <p:cNvPr id="8" name="Shape 4"/>
           <p:cNvSpPr/>
           <p:nvPr/>
         </p:nvSpPr>
         <p:spPr>
           <a:xfrm>
-            <a:off x="548640" y="1783080"/>
-            <a:ext cx="1737360" cy="1051560"/>
-          </a:xfrm>
-          <a:prstGeom prst="rect">
-            <a:avLst>
-              <a:gd name="adj" fmla="val 6957"/>
-            </a:avLst>
-          </a:prstGeom>
-          <a:solidFill>
-            <a:srgbClr val="1E2761"/>
-          </a:solidFill>
-          <a:ln/>
-        </p:spPr>
-      </p:sp>
-      <p:sp>
-        <p:nvSpPr>
-          <p:cNvPr id="6" name="Text 4"/>
-          <p:cNvSpPr txBox="1"/>
-          <p:nvPr/>
-        </p:nvSpPr>
-        <p:spPr>
-          <a:xfrm>
-            <a:off x="548640" y="1783080"/>
-            <a:ext cx="1737360" cy="1051560"/>
-          </a:xfrm>
-          <a:prstGeom prst="rect">
-            <a:avLst/>
-          </a:prstGeom>
-          <a:noFill/>
-          <a:ln/>
-        </p:spPr>
-        <p:txBody>
-          <a:bodyPr wrap="square" rtlCol="0" anchor="ctr"/>
-          <a:lstStyle/>
-          <a:p>
-            <a:pPr algn="ctr" indent="0" marL="0">
-              <a:buNone/>
-            </a:pPr>
-            <a:r>
-              <a:rPr lang="en-US" sz="1600" b="1" dirty="0">
-                <a:solidFill>
-                  <a:srgbClr val="FFFFFF"/>
-                </a:solidFill>
-                <a:latin typeface="Cambria" pitchFamily="34" charset="0"/>
-                <a:ea typeface="Cambria" pitchFamily="34" charset="-122"/>
-                <a:cs typeface="Cambria" pitchFamily="34" charset="-120"/>
-              </a:rPr>
-              <a:t>PCI DSS</a:t>
-            </a:r>
-            <a:endParaRPr lang="en-US" sz="1600" dirty="0"/>
-          </a:p>
-        </p:txBody>
-      </p:sp>
-      <p:sp>
-        <p:nvSpPr>
-          <p:cNvPr id="7" name="Text 5"/>
-          <p:cNvSpPr txBox="1"/>
-          <p:nvPr/>
-        </p:nvSpPr>
-        <p:spPr>
-          <a:xfrm>
-            <a:off x="2514600" y="1892808"/>
-            <a:ext cx="4297680" cy="822960"/>
-          </a:xfrm>
-          <a:prstGeom prst="rect">
-            <a:avLst/>
-          </a:prstGeom>
-          <a:noFill/>
-          <a:ln/>
-        </p:spPr>
-        <p:txBody>
-          <a:bodyPr wrap="square" rtlCol="0" anchor="ctr"/>
-          <a:lstStyle/>
-          <a:p>
-            <a:pPr indent="0" marL="0">
-              <a:buNone/>
-            </a:pPr>
-            <a:r>
-              <a:rPr lang="en-US" sz="1250" dirty="0">
-                <a:solidFill>
-                  <a:srgbClr val="1A1A1A"/>
-                </a:solidFill>
-                <a:latin typeface="Calibri" pitchFamily="34" charset="0"/>
-                <a:ea typeface="Calibri" pitchFamily="34" charset="-122"/>
-                <a:cs typeface="Calibri" pitchFamily="34" charset="-120"/>
-              </a:rPr>
-              <a:t>Least privilege, MFA, network segmentation</a:t>
-            </a:r>
-            <a:endParaRPr lang="en-US" sz="1250" dirty="0"/>
-          </a:p>
-        </p:txBody>
-      </p:sp>
-      <p:sp>
-        <p:nvSpPr>
-          <p:cNvPr id="8" name="Text 6"/>
-          <p:cNvSpPr txBox="1"/>
-          <p:nvPr/>
-        </p:nvSpPr>
-        <p:spPr>
-          <a:xfrm>
-            <a:off x="6949440" y="1892808"/>
-            <a:ext cx="4480560" cy="822960"/>
-          </a:xfrm>
-          <a:prstGeom prst="rect">
-            <a:avLst/>
-          </a:prstGeom>
-          <a:noFill/>
-          <a:ln/>
-        </p:spPr>
-        <p:txBody>
-          <a:bodyPr wrap="square" rtlCol="0" anchor="ctr"/>
-          <a:lstStyle/>
-          <a:p>
-            <a:pPr indent="0" marL="0">
-              <a:buNone/>
-            </a:pPr>
-            <a:r>
-              <a:rPr lang="en-US" sz="1250" i="1" dirty="0">
-                <a:solidFill>
-                  <a:srgbClr val="3B4A9E"/>
-                </a:solidFill>
-                <a:latin typeface="Calibri" pitchFamily="34" charset="0"/>
-                <a:ea typeface="Calibri" pitchFamily="34" charset="-122"/>
-                <a:cs typeface="Calibri" pitchFamily="34" charset="-120"/>
-              </a:rPr>
-              <a:t>→  Identity verification + micro-segmentation</a:t>
-            </a:r>
-            <a:endParaRPr lang="en-US" sz="1250" dirty="0"/>
-          </a:p>
-        </p:txBody>
-      </p:sp>
-      <p:sp>
-        <p:nvSpPr>
-          <p:cNvPr id="9" name="Shape 7"/>
-          <p:cNvSpPr/>
-          <p:nvPr/>
-        </p:nvSpPr>
-        <p:spPr>
-          <a:xfrm>
-            <a:off x="548640" y="3017520"/>
-            <a:ext cx="11109960" cy="1051560"/>
+            <a:off x="6332220" y="1554480"/>
+            <a:ext cx="3200400" cy="1707894"/>
           </a:xfrm>
           <a:prstGeom prst="roundRect">
-            <a:avLst>
-              <a:gd name="adj" fmla="val 6957"/>
-            </a:avLst>
-          </a:prstGeom>
-          <a:solidFill>
-            <a:srgbClr val="FFFFFF"/>
-          </a:solidFill>
-          <a:ln w="12700">
+            <a:avLst/>
+          </a:prstGeom>
+          <a:ln w="19050">
             <a:solidFill>
               <a:srgbClr val="CADCFC"/>
             </a:solidFill>
             <a:prstDash val="solid"/>
           </a:ln>
-          <a:effectLst>
-            <a:outerShdw sx="100000" sy="100000" kx="0" ky="0" algn="bl" rotWithShape="0" blurRad="63500" dist="25400" dir="5400000">
-              <a:srgbClr val="9AA5C7">
-                <a:alpha val="25000"/>
-              </a:srgbClr>
-            </a:outerShdw>
-          </a:effectLst>
-        </p:spPr>
-      </p:sp>
-      <p:sp>
-        <p:nvSpPr>
-          <p:cNvPr id="10" name="Shape 8"/>
+        </p:spPr>
+      </p:sp>
+      <p:sp>
+        <p:nvSpPr>
+          <p:cNvPr id="9" name="Text 5"/>
+          <p:cNvSpPr txBox="1"/>
+          <p:nvPr/>
+        </p:nvSpPr>
+        <p:spPr>
+          <a:xfrm>
+            <a:off x="6332220" y="3335526"/>
+            <a:ext cx="3200400" cy="457200"/>
+          </a:xfrm>
+          <a:prstGeom prst="rect">
+            <a:avLst/>
+          </a:prstGeom>
+          <a:noFill/>
+          <a:ln/>
+        </p:spPr>
+        <p:txBody>
+          <a:bodyPr wrap="square" rtlCol="0" anchor="ctr"/>
+          <a:lstStyle/>
+          <a:p>
+            <a:pPr indent="0" marL="0">
+              <a:buNone/>
+            </a:pPr>
+            <a:r>
+              <a:rPr lang="en-US" sz="1050" i="1" dirty="0">
+                <a:solidFill>
+                  <a:srgbClr val="6B7280"/>
+                </a:solidFill>
+                <a:latin typeface="Calibri" pitchFamily="34" charset="0"/>
+                <a:ea typeface="Calibri" pitchFamily="34" charset="-122"/>
+                <a:cs typeface="Calibri" pitchFamily="34" charset="-120"/>
+              </a:rPr>
+              <a:t>FinSecureVault — centralized secrets and key management.</a:t>
+            </a:r>
+            <a:endParaRPr lang="en-US" sz="1050" dirty="0"/>
+          </a:p>
+        </p:txBody>
+      </p:sp>
+      <p:pic>
+        <p:nvPicPr>
+          <p:cNvPr id="10" name="Image 2" descr="C:\Users\rareb\OneDrive\Desktop\University Of Winnipeg\Case Studies Issues &amp; Capstone Project V. Balogun NSD Fall 2023\finsecure-network-security-capstone\evidence\cloud-migration\postgresql-tde.jpg">    </p:cNvPr>
+          <p:cNvPicPr>
+            <a:picLocks noChangeAspect="1"/>
+          </p:cNvPicPr>
+          <p:nvPr/>
+        </p:nvPicPr>
+        <p:blipFill>
+          <a:blip r:embed="rId3"/>
+          <a:stretch>
+            <a:fillRect/>
+          </a:stretch>
+        </p:blipFill>
+        <p:spPr>
+          <a:xfrm>
+            <a:off x="2674620" y="4022446"/>
+            <a:ext cx="3200400" cy="1658767"/>
+          </a:xfrm>
+          <a:prstGeom prst="rect">
+            <a:avLst/>
+          </a:prstGeom>
+        </p:spPr>
+      </p:pic>
+      <p:sp>
+        <p:nvSpPr>
+          <p:cNvPr id="11" name="Shape 6"/>
           <p:cNvSpPr/>
           <p:nvPr/>
         </p:nvSpPr>
         <p:spPr>
           <a:xfrm>
-            <a:off x="548640" y="3017520"/>
-            <a:ext cx="1737360" cy="1051560"/>
-          </a:xfrm>
-          <a:prstGeom prst="rect">
-            <a:avLst>
-              <a:gd name="adj" fmla="val 6957"/>
-            </a:avLst>
-          </a:prstGeom>
-          <a:solidFill>
-            <a:srgbClr val="1E2761"/>
-          </a:solidFill>
-          <a:ln/>
-        </p:spPr>
-      </p:sp>
-      <p:sp>
-        <p:nvSpPr>
-          <p:cNvPr id="11" name="Text 9"/>
-          <p:cNvSpPr txBox="1"/>
-          <p:nvPr/>
-        </p:nvSpPr>
-        <p:spPr>
-          <a:xfrm>
-            <a:off x="548640" y="3017520"/>
-            <a:ext cx="1737360" cy="1051560"/>
-          </a:xfrm>
-          <a:prstGeom prst="rect">
-            <a:avLst/>
-          </a:prstGeom>
-          <a:noFill/>
-          <a:ln/>
-        </p:spPr>
-        <p:txBody>
-          <a:bodyPr wrap="square" rtlCol="0" anchor="ctr"/>
-          <a:lstStyle/>
-          <a:p>
-            <a:pPr algn="ctr" indent="0" marL="0">
-              <a:buNone/>
-            </a:pPr>
-            <a:r>
-              <a:rPr lang="en-US" sz="1600" b="1" dirty="0">
-                <a:solidFill>
-                  <a:srgbClr val="FFFFFF"/>
-                </a:solidFill>
-                <a:latin typeface="Cambria" pitchFamily="34" charset="0"/>
-                <a:ea typeface="Cambria" pitchFamily="34" charset="-122"/>
-                <a:cs typeface="Cambria" pitchFamily="34" charset="-120"/>
-              </a:rPr>
-              <a:t>SOX</a:t>
-            </a:r>
-            <a:endParaRPr lang="en-US" sz="1600" dirty="0"/>
-          </a:p>
-        </p:txBody>
-      </p:sp>
-      <p:sp>
-        <p:nvSpPr>
-          <p:cNvPr id="12" name="Text 10"/>
-          <p:cNvSpPr txBox="1"/>
-          <p:nvPr/>
-        </p:nvSpPr>
-        <p:spPr>
-          <a:xfrm>
-            <a:off x="2514600" y="3127248"/>
-            <a:ext cx="4297680" cy="822960"/>
-          </a:xfrm>
-          <a:prstGeom prst="rect">
-            <a:avLst/>
-          </a:prstGeom>
-          <a:noFill/>
-          <a:ln/>
-        </p:spPr>
-        <p:txBody>
-          <a:bodyPr wrap="square" rtlCol="0" anchor="ctr"/>
-          <a:lstStyle/>
-          <a:p>
-            <a:pPr indent="0" marL="0">
-              <a:buNone/>
-            </a:pPr>
-            <a:r>
-              <a:rPr lang="en-US" sz="1250" dirty="0">
-                <a:solidFill>
-                  <a:srgbClr val="1A1A1A"/>
-                </a:solidFill>
-                <a:latin typeface="Calibri" pitchFamily="34" charset="0"/>
-                <a:ea typeface="Calibri" pitchFamily="34" charset="-122"/>
-                <a:cs typeface="Calibri" pitchFamily="34" charset="-120"/>
-              </a:rPr>
-              <a:t>Strong internal controls over financial data</a:t>
-            </a:r>
-            <a:endParaRPr lang="en-US" sz="1250" dirty="0"/>
-          </a:p>
-        </p:txBody>
-      </p:sp>
-      <p:sp>
-        <p:nvSpPr>
-          <p:cNvPr id="13" name="Text 11"/>
-          <p:cNvSpPr txBox="1"/>
-          <p:nvPr/>
-        </p:nvSpPr>
-        <p:spPr>
-          <a:xfrm>
-            <a:off x="6949440" y="3127248"/>
-            <a:ext cx="4480560" cy="822960"/>
-          </a:xfrm>
-          <a:prstGeom prst="rect">
-            <a:avLst/>
-          </a:prstGeom>
-          <a:noFill/>
-          <a:ln/>
-        </p:spPr>
-        <p:txBody>
-          <a:bodyPr wrap="square" rtlCol="0" anchor="ctr"/>
-          <a:lstStyle/>
-          <a:p>
-            <a:pPr indent="0" marL="0">
-              <a:buNone/>
-            </a:pPr>
-            <a:r>
-              <a:rPr lang="en-US" sz="1250" i="1" dirty="0">
-                <a:solidFill>
-                  <a:srgbClr val="3B4A9E"/>
-                </a:solidFill>
-                <a:latin typeface="Calibri" pitchFamily="34" charset="0"/>
-                <a:ea typeface="Calibri" pitchFamily="34" charset="-122"/>
-                <a:cs typeface="Calibri" pitchFamily="34" charset="-120"/>
-              </a:rPr>
-              <a:t>→  Continuous verification, minimized trust boundaries</a:t>
-            </a:r>
-            <a:endParaRPr lang="en-US" sz="1250" dirty="0"/>
-          </a:p>
-        </p:txBody>
-      </p:sp>
-      <p:sp>
-        <p:nvSpPr>
-          <p:cNvPr id="14" name="Shape 12"/>
-          <p:cNvSpPr/>
-          <p:nvPr/>
-        </p:nvSpPr>
-        <p:spPr>
-          <a:xfrm>
-            <a:off x="548640" y="4251960"/>
-            <a:ext cx="11109960" cy="1051560"/>
+            <a:off x="2674620" y="4022446"/>
+            <a:ext cx="3200400" cy="1658767"/>
           </a:xfrm>
           <a:prstGeom prst="roundRect">
-            <a:avLst>
-              <a:gd name="adj" fmla="val 6957"/>
-            </a:avLst>
-          </a:prstGeom>
-          <a:solidFill>
-            <a:srgbClr val="FFFFFF"/>
-          </a:solidFill>
-          <a:ln w="12700">
+            <a:avLst/>
+          </a:prstGeom>
+          <a:ln w="19050">
             <a:solidFill>
               <a:srgbClr val="CADCFC"/>
             </a:solidFill>
             <a:prstDash val="solid"/>
           </a:ln>
-          <a:effectLst>
-            <a:outerShdw sx="100000" sy="100000" kx="0" ky="0" algn="bl" rotWithShape="0" blurRad="63500" dist="25400" dir="5400000">
-              <a:srgbClr val="9AA5C7">
-                <a:alpha val="25000"/>
-              </a:srgbClr>
-            </a:outerShdw>
-          </a:effectLst>
-        </p:spPr>
-      </p:sp>
-      <p:sp>
-        <p:nvSpPr>
-          <p:cNvPr id="15" name="Shape 13"/>
+        </p:spPr>
+      </p:sp>
+      <p:sp>
+        <p:nvSpPr>
+          <p:cNvPr id="12" name="Text 7"/>
+          <p:cNvSpPr txBox="1"/>
+          <p:nvPr/>
+        </p:nvSpPr>
+        <p:spPr>
+          <a:xfrm>
+            <a:off x="2674620" y="5754365"/>
+            <a:ext cx="3200400" cy="457200"/>
+          </a:xfrm>
+          <a:prstGeom prst="rect">
+            <a:avLst/>
+          </a:prstGeom>
+          <a:noFill/>
+          <a:ln/>
+        </p:spPr>
+        <p:txBody>
+          <a:bodyPr wrap="square" rtlCol="0" anchor="ctr"/>
+          <a:lstStyle/>
+          <a:p>
+            <a:pPr indent="0" marL="0">
+              <a:buNone/>
+            </a:pPr>
+            <a:r>
+              <a:rPr lang="en-US" sz="1050" i="1" dirty="0">
+                <a:solidFill>
+                  <a:srgbClr val="6B7280"/>
+                </a:solidFill>
+                <a:latin typeface="Calibri" pitchFamily="34" charset="0"/>
+                <a:ea typeface="Calibri" pitchFamily="34" charset="-122"/>
+                <a:cs typeface="Calibri" pitchFamily="34" charset="-120"/>
+              </a:rPr>
+              <a:t>Transparent Data Encryption enabled on the primary SQL database.</a:t>
+            </a:r>
+            <a:endParaRPr lang="en-US" sz="1050" dirty="0"/>
+          </a:p>
+        </p:txBody>
+      </p:sp>
+      <p:pic>
+        <p:nvPicPr>
+          <p:cNvPr id="13" name="Image 3" descr="C:\Users\rareb\OneDrive\Desktop\University Of Winnipeg\Case Studies Issues &amp; Capstone Project V. Balogun NSD Fall 2023\finsecure-network-security-capstone\evidence\cloud-migration\waf-policy-rules.jpg">    </p:cNvPr>
+          <p:cNvPicPr>
+            <a:picLocks noChangeAspect="1"/>
+          </p:cNvPicPr>
+          <p:nvPr/>
+        </p:nvPicPr>
+        <p:blipFill>
+          <a:blip r:embed="rId4"/>
+          <a:stretch>
+            <a:fillRect/>
+          </a:stretch>
+        </p:blipFill>
+        <p:spPr>
+          <a:xfrm>
+            <a:off x="6332220" y="4022446"/>
+            <a:ext cx="3200400" cy="1698916"/>
+          </a:xfrm>
+          <a:prstGeom prst="rect">
+            <a:avLst/>
+          </a:prstGeom>
+        </p:spPr>
+      </p:pic>
+      <p:sp>
+        <p:nvSpPr>
+          <p:cNvPr id="14" name="Shape 8"/>
           <p:cNvSpPr/>
           <p:nvPr/>
         </p:nvSpPr>
         <p:spPr>
           <a:xfrm>
-            <a:off x="548640" y="4251960"/>
-            <a:ext cx="1737360" cy="1051560"/>
-          </a:xfrm>
-          <a:prstGeom prst="rect">
-            <a:avLst>
-              <a:gd name="adj" fmla="val 6957"/>
-            </a:avLst>
-          </a:prstGeom>
-          <a:solidFill>
-            <a:srgbClr val="1E2761"/>
-          </a:solidFill>
-          <a:ln/>
-        </p:spPr>
-      </p:sp>
-      <p:sp>
-        <p:nvSpPr>
-          <p:cNvPr id="16" name="Text 14"/>
-          <p:cNvSpPr txBox="1"/>
-          <p:nvPr/>
-        </p:nvSpPr>
-        <p:spPr>
-          <a:xfrm>
-            <a:off x="548640" y="4251960"/>
-            <a:ext cx="1737360" cy="1051560"/>
+            <a:off x="6332220" y="4022446"/>
+            <a:ext cx="3200400" cy="1698916"/>
+          </a:xfrm>
+          <a:prstGeom prst="roundRect">
+            <a:avLst/>
+          </a:prstGeom>
+          <a:ln w="19050">
+            <a:solidFill>
+              <a:srgbClr val="CADCFC"/>
+            </a:solidFill>
+            <a:prstDash val="solid"/>
+          </a:ln>
+        </p:spPr>
+      </p:sp>
+      <p:sp>
+        <p:nvSpPr>
+          <p:cNvPr id="15" name="Text 9"/>
+          <p:cNvSpPr txBox="1"/>
+          <p:nvPr/>
+        </p:nvSpPr>
+        <p:spPr>
+          <a:xfrm>
+            <a:off x="6332220" y="5794513"/>
+            <a:ext cx="3200400" cy="457200"/>
           </a:xfrm>
           <a:prstGeom prst="rect">
             <a:avLst/>
@@ -3736,105 +3724,27 @@
           <a:bodyPr wrap="square" rtlCol="0" anchor="ctr"/>
           <a:lstStyle/>
           <a:p>
-            <a:pPr algn="ctr" indent="0" marL="0">
-              <a:buNone/>
-            </a:pPr>
-            <a:r>
-              <a:rPr lang="en-US" sz="1600" b="1" dirty="0">
-                <a:solidFill>
-                  <a:srgbClr val="FFFFFF"/>
-                </a:solidFill>
-                <a:latin typeface="Cambria" pitchFamily="34" charset="0"/>
-                <a:ea typeface="Cambria" pitchFamily="34" charset="-122"/>
-                <a:cs typeface="Cambria" pitchFamily="34" charset="-120"/>
-              </a:rPr>
-              <a:t>GLBA</a:t>
-            </a:r>
-            <a:endParaRPr lang="en-US" sz="1600" dirty="0"/>
-          </a:p>
-        </p:txBody>
-      </p:sp>
-      <p:sp>
-        <p:nvSpPr>
-          <p:cNvPr id="17" name="Text 15"/>
-          <p:cNvSpPr txBox="1"/>
-          <p:nvPr/>
-        </p:nvSpPr>
-        <p:spPr>
-          <a:xfrm>
-            <a:off x="2514600" y="4361688"/>
-            <a:ext cx="4297680" cy="822960"/>
-          </a:xfrm>
-          <a:prstGeom prst="rect">
-            <a:avLst/>
-          </a:prstGeom>
-          <a:noFill/>
-          <a:ln/>
-        </p:spPr>
-        <p:txBody>
-          <a:bodyPr wrap="square" rtlCol="0" anchor="ctr"/>
-          <a:lstStyle/>
-          <a:p>
-            <a:pPr indent="0" marL="0">
-              <a:buNone/>
-            </a:pPr>
-            <a:r>
-              <a:rPr lang="en-US" sz="1250" dirty="0">
-                <a:solidFill>
-                  <a:srgbClr val="1A1A1A"/>
-                </a:solidFill>
-                <a:latin typeface="Calibri" pitchFamily="34" charset="0"/>
-                <a:ea typeface="Calibri" pitchFamily="34" charset="-122"/>
-                <a:cs typeface="Calibri" pitchFamily="34" charset="-120"/>
-              </a:rPr>
-              <a:t>Strong protection of nonpublic personal information</a:t>
-            </a:r>
-            <a:endParaRPr lang="en-US" sz="1250" dirty="0"/>
-          </a:p>
-        </p:txBody>
-      </p:sp>
-      <p:sp>
-        <p:nvSpPr>
-          <p:cNvPr id="18" name="Text 16"/>
-          <p:cNvSpPr txBox="1"/>
-          <p:nvPr/>
-        </p:nvSpPr>
-        <p:spPr>
-          <a:xfrm>
-            <a:off x="6949440" y="4361688"/>
-            <a:ext cx="4480560" cy="822960"/>
-          </a:xfrm>
-          <a:prstGeom prst="rect">
-            <a:avLst/>
-          </a:prstGeom>
-          <a:noFill/>
-          <a:ln/>
-        </p:spPr>
-        <p:txBody>
-          <a:bodyPr wrap="square" rtlCol="0" anchor="ctr"/>
-          <a:lstStyle/>
-          <a:p>
-            <a:pPr indent="0" marL="0">
-              <a:buNone/>
-            </a:pPr>
-            <a:r>
-              <a:rPr lang="en-US" sz="1250" i="1" dirty="0">
-                <a:solidFill>
-                  <a:srgbClr val="3B4A9E"/>
-                </a:solidFill>
-                <a:latin typeface="Calibri" pitchFamily="34" charset="0"/>
-                <a:ea typeface="Calibri" pitchFamily="34" charset="-122"/>
-                <a:cs typeface="Calibri" pitchFamily="34" charset="-120"/>
-              </a:rPr>
-              <a:t>→  Least-privilege access model</a:t>
-            </a:r>
-            <a:endParaRPr lang="en-US" sz="1250" dirty="0"/>
-          </a:p>
-        </p:txBody>
-      </p:sp>
-      <p:sp>
-        <p:nvSpPr>
-          <p:cNvPr id="19" name="Text 17"/>
+            <a:pPr indent="0" marL="0">
+              <a:buNone/>
+            </a:pPr>
+            <a:r>
+              <a:rPr lang="en-US" sz="1050" i="1" dirty="0">
+                <a:solidFill>
+                  <a:srgbClr val="6B7280"/>
+                </a:solidFill>
+                <a:latin typeface="Calibri" pitchFamily="34" charset="0"/>
+                <a:ea typeface="Calibri" pitchFamily="34" charset="-122"/>
+                <a:cs typeface="Calibri" pitchFamily="34" charset="-120"/>
+              </a:rPr>
+              <a:t>Azure WAF: 205 managed rules blocking SQLi, path traversal, known CVEs.</a:t>
+            </a:r>
+            <a:endParaRPr lang="en-US" sz="1050" dirty="0"/>
+          </a:p>
+        </p:txBody>
+      </p:sp>
+      <p:sp>
+        <p:nvSpPr>
+          <p:cNvPr id="16" name="Text 10"/>
           <p:cNvSpPr txBox="1"/>
           <p:nvPr/>
         </p:nvSpPr>
@@ -3873,7 +3783,7 @@
       </p:sp>
       <p:sp>
         <p:nvSpPr>
-          <p:cNvPr id="20" name="Text 18"/>
+          <p:cNvPr id="17" name="Text 11"/>
           <p:cNvSpPr txBox="1"/>
           <p:nvPr/>
         </p:nvSpPr>
@@ -4007,46 +3917,78 @@
                 <a:ea typeface="Cambria" pitchFamily="34" charset="-122"/>
                 <a:cs typeface="Cambria" pitchFamily="34" charset="-120"/>
               </a:rPr>
-              <a:t>How It Works: Never Trust, Always Verify</a:t>
+              <a:t>Why Zero Trust, Specifically for FinSecure</a:t>
             </a:r>
             <a:endParaRPr lang="en-US" sz="3200" dirty="0"/>
           </a:p>
         </p:txBody>
       </p:sp>
-      <p:pic>
-        <p:nvPicPr>
-          <p:cNvPr id="4" name="Image 0" descr="C:\Users\rareb\AppData\Local\Temp\claude\C--Users-rareb-OneDrive-Desktop-University-Of-Winnipeg-Case-Studies-Issues---Capstone-Project-V--Balogun-NSD-Fall-2023\288735ab-ce17-49e2-9255-b3c08ab0bae8\scratchpad\zero-trust-flow.png">    </p:cNvPr>
-          <p:cNvPicPr>
-            <a:picLocks noChangeAspect="1"/>
-          </p:cNvPicPr>
-          <p:nvPr/>
-        </p:nvPicPr>
-        <p:blipFill>
-          <a:blip r:embed="rId1"/>
-          <a:stretch>
-            <a:fillRect/>
-          </a:stretch>
-        </p:blipFill>
-        <p:spPr>
-          <a:xfrm>
-            <a:off x="1965960" y="1554480"/>
-            <a:ext cx="8229600" cy="3785721"/>
-          </a:xfrm>
-          <a:prstGeom prst="rect">
-            <a:avLst/>
-          </a:prstGeom>
-        </p:spPr>
-      </p:pic>
-      <p:sp>
-        <p:nvSpPr>
-          <p:cNvPr id="5" name="Text 2"/>
-          <p:cNvSpPr txBox="1"/>
-          <p:nvPr/>
-        </p:nvSpPr>
-        <p:spPr>
-          <a:xfrm>
-            <a:off x="548640" y="5532120"/>
-            <a:ext cx="11064240" cy="1051560"/>
+      <p:sp>
+        <p:nvSpPr>
+          <p:cNvPr id="4" name="Shape 2"/>
+          <p:cNvSpPr/>
+          <p:nvPr/>
+        </p:nvSpPr>
+        <p:spPr>
+          <a:xfrm>
+            <a:off x="548640" y="1783080"/>
+            <a:ext cx="11109960" cy="1051560"/>
+          </a:xfrm>
+          <a:prstGeom prst="roundRect">
+            <a:avLst>
+              <a:gd name="adj" fmla="val 6957"/>
+            </a:avLst>
+          </a:prstGeom>
+          <a:solidFill>
+            <a:srgbClr val="FFFFFF"/>
+          </a:solidFill>
+          <a:ln w="12700">
+            <a:solidFill>
+              <a:srgbClr val="CADCFC"/>
+            </a:solidFill>
+            <a:prstDash val="solid"/>
+          </a:ln>
+          <a:effectLst>
+            <a:outerShdw sx="100000" sy="100000" kx="0" ky="0" algn="bl" rotWithShape="0" blurRad="63500" dist="25400" dir="5400000">
+              <a:srgbClr val="9AA5C7">
+                <a:alpha val="25000"/>
+              </a:srgbClr>
+            </a:outerShdw>
+          </a:effectLst>
+        </p:spPr>
+      </p:sp>
+      <p:sp>
+        <p:nvSpPr>
+          <p:cNvPr id="5" name="Shape 3"/>
+          <p:cNvSpPr/>
+          <p:nvPr/>
+        </p:nvSpPr>
+        <p:spPr>
+          <a:xfrm>
+            <a:off x="548640" y="1783080"/>
+            <a:ext cx="1737360" cy="1051560"/>
+          </a:xfrm>
+          <a:prstGeom prst="rect">
+            <a:avLst>
+              <a:gd name="adj" fmla="val 6957"/>
+            </a:avLst>
+          </a:prstGeom>
+          <a:solidFill>
+            <a:srgbClr val="1E2761"/>
+          </a:solidFill>
+          <a:ln/>
+        </p:spPr>
+      </p:sp>
+      <p:sp>
+        <p:nvSpPr>
+          <p:cNvPr id="6" name="Text 4"/>
+          <p:cNvSpPr txBox="1"/>
+          <p:nvPr/>
+        </p:nvSpPr>
+        <p:spPr>
+          <a:xfrm>
+            <a:off x="548640" y="1783080"/>
+            <a:ext cx="1737360" cy="1051560"/>
           </a:xfrm>
           <a:prstGeom prst="rect">
             <a:avLst/>
@@ -4058,10 +4000,46 @@
           <a:bodyPr wrap="square" rtlCol="0" anchor="ctr"/>
           <a:lstStyle/>
           <a:p>
-            <a:pPr indent="0" marL="0">
-              <a:spcAft>
-                <a:spcPts val="800"/>
-              </a:spcAft>
+            <a:pPr algn="ctr" indent="0" marL="0">
+              <a:buNone/>
+            </a:pPr>
+            <a:r>
+              <a:rPr lang="en-US" sz="1600" b="1" dirty="0">
+                <a:solidFill>
+                  <a:srgbClr val="FFFFFF"/>
+                </a:solidFill>
+                <a:latin typeface="Cambria" pitchFamily="34" charset="0"/>
+                <a:ea typeface="Cambria" pitchFamily="34" charset="-122"/>
+                <a:cs typeface="Cambria" pitchFamily="34" charset="-120"/>
+              </a:rPr>
+              <a:t>PCI DSS</a:t>
+            </a:r>
+            <a:endParaRPr lang="en-US" sz="1600" dirty="0"/>
+          </a:p>
+        </p:txBody>
+      </p:sp>
+      <p:sp>
+        <p:nvSpPr>
+          <p:cNvPr id="7" name="Text 5"/>
+          <p:cNvSpPr txBox="1"/>
+          <p:nvPr/>
+        </p:nvSpPr>
+        <p:spPr>
+          <a:xfrm>
+            <a:off x="2514600" y="1892808"/>
+            <a:ext cx="4297680" cy="822960"/>
+          </a:xfrm>
+          <a:prstGeom prst="rect">
+            <a:avLst/>
+          </a:prstGeom>
+          <a:noFill/>
+          <a:ln/>
+        </p:spPr>
+        <p:txBody>
+          <a:bodyPr wrap="square" rtlCol="0" anchor="ctr"/>
+          <a:lstStyle/>
+          <a:p>
+            <a:pPr indent="0" marL="0">
               <a:buNone/>
             </a:pPr>
             <a:r>
@@ -4073,15 +4051,168 @@
                 <a:ea typeface="Calibri" pitchFamily="34" charset="-122"/>
                 <a:cs typeface="Calibri" pitchFamily="34" charset="-120"/>
               </a:rPr>
-              <a:t>1. Inventory users, devices, and data flow</a:t>
+              <a:t>Least privilege, MFA, network segmentation</a:t>
             </a:r>
             <a:endParaRPr lang="en-US" sz="1250" dirty="0"/>
           </a:p>
-          <a:p>
-            <a:pPr indent="0" marL="0">
-              <a:spcAft>
-                <a:spcPts val="800"/>
-              </a:spcAft>
+        </p:txBody>
+      </p:sp>
+      <p:sp>
+        <p:nvSpPr>
+          <p:cNvPr id="8" name="Text 6"/>
+          <p:cNvSpPr txBox="1"/>
+          <p:nvPr/>
+        </p:nvSpPr>
+        <p:spPr>
+          <a:xfrm>
+            <a:off x="6949440" y="1892808"/>
+            <a:ext cx="4480560" cy="822960"/>
+          </a:xfrm>
+          <a:prstGeom prst="rect">
+            <a:avLst/>
+          </a:prstGeom>
+          <a:noFill/>
+          <a:ln/>
+        </p:spPr>
+        <p:txBody>
+          <a:bodyPr wrap="square" rtlCol="0" anchor="ctr"/>
+          <a:lstStyle/>
+          <a:p>
+            <a:pPr indent="0" marL="0">
+              <a:buNone/>
+            </a:pPr>
+            <a:r>
+              <a:rPr lang="en-US" sz="1250" i="1" dirty="0">
+                <a:solidFill>
+                  <a:srgbClr val="3B4A9E"/>
+                </a:solidFill>
+                <a:latin typeface="Calibri" pitchFamily="34" charset="0"/>
+                <a:ea typeface="Calibri" pitchFamily="34" charset="-122"/>
+                <a:cs typeface="Calibri" pitchFamily="34" charset="-120"/>
+              </a:rPr>
+              <a:t>→  Identity verification + micro-segmentation</a:t>
+            </a:r>
+            <a:endParaRPr lang="en-US" sz="1250" dirty="0"/>
+          </a:p>
+        </p:txBody>
+      </p:sp>
+      <p:sp>
+        <p:nvSpPr>
+          <p:cNvPr id="9" name="Shape 7"/>
+          <p:cNvSpPr/>
+          <p:nvPr/>
+        </p:nvSpPr>
+        <p:spPr>
+          <a:xfrm>
+            <a:off x="548640" y="3017520"/>
+            <a:ext cx="11109960" cy="1051560"/>
+          </a:xfrm>
+          <a:prstGeom prst="roundRect">
+            <a:avLst>
+              <a:gd name="adj" fmla="val 6957"/>
+            </a:avLst>
+          </a:prstGeom>
+          <a:solidFill>
+            <a:srgbClr val="FFFFFF"/>
+          </a:solidFill>
+          <a:ln w="12700">
+            <a:solidFill>
+              <a:srgbClr val="CADCFC"/>
+            </a:solidFill>
+            <a:prstDash val="solid"/>
+          </a:ln>
+          <a:effectLst>
+            <a:outerShdw sx="100000" sy="100000" kx="0" ky="0" algn="bl" rotWithShape="0" blurRad="63500" dist="25400" dir="5400000">
+              <a:srgbClr val="9AA5C7">
+                <a:alpha val="25000"/>
+              </a:srgbClr>
+            </a:outerShdw>
+          </a:effectLst>
+        </p:spPr>
+      </p:sp>
+      <p:sp>
+        <p:nvSpPr>
+          <p:cNvPr id="10" name="Shape 8"/>
+          <p:cNvSpPr/>
+          <p:nvPr/>
+        </p:nvSpPr>
+        <p:spPr>
+          <a:xfrm>
+            <a:off x="548640" y="3017520"/>
+            <a:ext cx="1737360" cy="1051560"/>
+          </a:xfrm>
+          <a:prstGeom prst="rect">
+            <a:avLst>
+              <a:gd name="adj" fmla="val 6957"/>
+            </a:avLst>
+          </a:prstGeom>
+          <a:solidFill>
+            <a:srgbClr val="1E2761"/>
+          </a:solidFill>
+          <a:ln/>
+        </p:spPr>
+      </p:sp>
+      <p:sp>
+        <p:nvSpPr>
+          <p:cNvPr id="11" name="Text 9"/>
+          <p:cNvSpPr txBox="1"/>
+          <p:nvPr/>
+        </p:nvSpPr>
+        <p:spPr>
+          <a:xfrm>
+            <a:off x="548640" y="3017520"/>
+            <a:ext cx="1737360" cy="1051560"/>
+          </a:xfrm>
+          <a:prstGeom prst="rect">
+            <a:avLst/>
+          </a:prstGeom>
+          <a:noFill/>
+          <a:ln/>
+        </p:spPr>
+        <p:txBody>
+          <a:bodyPr wrap="square" rtlCol="0" anchor="ctr"/>
+          <a:lstStyle/>
+          <a:p>
+            <a:pPr algn="ctr" indent="0" marL="0">
+              <a:buNone/>
+            </a:pPr>
+            <a:r>
+              <a:rPr lang="en-US" sz="1600" b="1" dirty="0">
+                <a:solidFill>
+                  <a:srgbClr val="FFFFFF"/>
+                </a:solidFill>
+                <a:latin typeface="Cambria" pitchFamily="34" charset="0"/>
+                <a:ea typeface="Cambria" pitchFamily="34" charset="-122"/>
+                <a:cs typeface="Cambria" pitchFamily="34" charset="-120"/>
+              </a:rPr>
+              <a:t>SOX</a:t>
+            </a:r>
+            <a:endParaRPr lang="en-US" sz="1600" dirty="0"/>
+          </a:p>
+        </p:txBody>
+      </p:sp>
+      <p:sp>
+        <p:nvSpPr>
+          <p:cNvPr id="12" name="Text 10"/>
+          <p:cNvSpPr txBox="1"/>
+          <p:nvPr/>
+        </p:nvSpPr>
+        <p:spPr>
+          <a:xfrm>
+            <a:off x="2514600" y="3127248"/>
+            <a:ext cx="4297680" cy="822960"/>
+          </a:xfrm>
+          <a:prstGeom prst="rect">
+            <a:avLst/>
+          </a:prstGeom>
+          <a:noFill/>
+          <a:ln/>
+        </p:spPr>
+        <p:txBody>
+          <a:bodyPr wrap="square" rtlCol="0" anchor="ctr"/>
+          <a:lstStyle/>
+          <a:p>
+            <a:pPr indent="0" marL="0">
               <a:buNone/>
             </a:pPr>
             <a:r>
@@ -4093,15 +4224,168 @@
                 <a:ea typeface="Calibri" pitchFamily="34" charset="-122"/>
                 <a:cs typeface="Calibri" pitchFamily="34" charset="-120"/>
               </a:rPr>
-              <a:t>2. Define the protected surface (CDE + core servers)</a:t>
+              <a:t>Strong internal controls over financial data</a:t>
             </a:r>
             <a:endParaRPr lang="en-US" sz="1250" dirty="0"/>
           </a:p>
-          <a:p>
-            <a:pPr indent="0" marL="0">
-              <a:spcAft>
-                <a:spcPts val="800"/>
-              </a:spcAft>
+        </p:txBody>
+      </p:sp>
+      <p:sp>
+        <p:nvSpPr>
+          <p:cNvPr id="13" name="Text 11"/>
+          <p:cNvSpPr txBox="1"/>
+          <p:nvPr/>
+        </p:nvSpPr>
+        <p:spPr>
+          <a:xfrm>
+            <a:off x="6949440" y="3127248"/>
+            <a:ext cx="4480560" cy="822960"/>
+          </a:xfrm>
+          <a:prstGeom prst="rect">
+            <a:avLst/>
+          </a:prstGeom>
+          <a:noFill/>
+          <a:ln/>
+        </p:spPr>
+        <p:txBody>
+          <a:bodyPr wrap="square" rtlCol="0" anchor="ctr"/>
+          <a:lstStyle/>
+          <a:p>
+            <a:pPr indent="0" marL="0">
+              <a:buNone/>
+            </a:pPr>
+            <a:r>
+              <a:rPr lang="en-US" sz="1250" i="1" dirty="0">
+                <a:solidFill>
+                  <a:srgbClr val="3B4A9E"/>
+                </a:solidFill>
+                <a:latin typeface="Calibri" pitchFamily="34" charset="0"/>
+                <a:ea typeface="Calibri" pitchFamily="34" charset="-122"/>
+                <a:cs typeface="Calibri" pitchFamily="34" charset="-120"/>
+              </a:rPr>
+              <a:t>→  Continuous verification, minimized trust boundaries</a:t>
+            </a:r>
+            <a:endParaRPr lang="en-US" sz="1250" dirty="0"/>
+          </a:p>
+        </p:txBody>
+      </p:sp>
+      <p:sp>
+        <p:nvSpPr>
+          <p:cNvPr id="14" name="Shape 12"/>
+          <p:cNvSpPr/>
+          <p:nvPr/>
+        </p:nvSpPr>
+        <p:spPr>
+          <a:xfrm>
+            <a:off x="548640" y="4251960"/>
+            <a:ext cx="11109960" cy="1051560"/>
+          </a:xfrm>
+          <a:prstGeom prst="roundRect">
+            <a:avLst>
+              <a:gd name="adj" fmla="val 6957"/>
+            </a:avLst>
+          </a:prstGeom>
+          <a:solidFill>
+            <a:srgbClr val="FFFFFF"/>
+          </a:solidFill>
+          <a:ln w="12700">
+            <a:solidFill>
+              <a:srgbClr val="CADCFC"/>
+            </a:solidFill>
+            <a:prstDash val="solid"/>
+          </a:ln>
+          <a:effectLst>
+            <a:outerShdw sx="100000" sy="100000" kx="0" ky="0" algn="bl" rotWithShape="0" blurRad="63500" dist="25400" dir="5400000">
+              <a:srgbClr val="9AA5C7">
+                <a:alpha val="25000"/>
+              </a:srgbClr>
+            </a:outerShdw>
+          </a:effectLst>
+        </p:spPr>
+      </p:sp>
+      <p:sp>
+        <p:nvSpPr>
+          <p:cNvPr id="15" name="Shape 13"/>
+          <p:cNvSpPr/>
+          <p:nvPr/>
+        </p:nvSpPr>
+        <p:spPr>
+          <a:xfrm>
+            <a:off x="548640" y="4251960"/>
+            <a:ext cx="1737360" cy="1051560"/>
+          </a:xfrm>
+          <a:prstGeom prst="rect">
+            <a:avLst>
+              <a:gd name="adj" fmla="val 6957"/>
+            </a:avLst>
+          </a:prstGeom>
+          <a:solidFill>
+            <a:srgbClr val="1E2761"/>
+          </a:solidFill>
+          <a:ln/>
+        </p:spPr>
+      </p:sp>
+      <p:sp>
+        <p:nvSpPr>
+          <p:cNvPr id="16" name="Text 14"/>
+          <p:cNvSpPr txBox="1"/>
+          <p:nvPr/>
+        </p:nvSpPr>
+        <p:spPr>
+          <a:xfrm>
+            <a:off x="548640" y="4251960"/>
+            <a:ext cx="1737360" cy="1051560"/>
+          </a:xfrm>
+          <a:prstGeom prst="rect">
+            <a:avLst/>
+          </a:prstGeom>
+          <a:noFill/>
+          <a:ln/>
+        </p:spPr>
+        <p:txBody>
+          <a:bodyPr wrap="square" rtlCol="0" anchor="ctr"/>
+          <a:lstStyle/>
+          <a:p>
+            <a:pPr algn="ctr" indent="0" marL="0">
+              <a:buNone/>
+            </a:pPr>
+            <a:r>
+              <a:rPr lang="en-US" sz="1600" b="1" dirty="0">
+                <a:solidFill>
+                  <a:srgbClr val="FFFFFF"/>
+                </a:solidFill>
+                <a:latin typeface="Cambria" pitchFamily="34" charset="0"/>
+                <a:ea typeface="Cambria" pitchFamily="34" charset="-122"/>
+                <a:cs typeface="Cambria" pitchFamily="34" charset="-120"/>
+              </a:rPr>
+              <a:t>GLBA</a:t>
+            </a:r>
+            <a:endParaRPr lang="en-US" sz="1600" dirty="0"/>
+          </a:p>
+        </p:txBody>
+      </p:sp>
+      <p:sp>
+        <p:nvSpPr>
+          <p:cNvPr id="17" name="Text 15"/>
+          <p:cNvSpPr txBox="1"/>
+          <p:nvPr/>
+        </p:nvSpPr>
+        <p:spPr>
+          <a:xfrm>
+            <a:off x="2514600" y="4361688"/>
+            <a:ext cx="4297680" cy="822960"/>
+          </a:xfrm>
+          <a:prstGeom prst="rect">
+            <a:avLst/>
+          </a:prstGeom>
+          <a:noFill/>
+          <a:ln/>
+        </p:spPr>
+        <p:txBody>
+          <a:bodyPr wrap="square" rtlCol="0" anchor="ctr"/>
+          <a:lstStyle/>
+          <a:p>
+            <a:pPr indent="0" marL="0">
               <a:buNone/>
             </a:pPr>
             <a:r>
@@ -4113,27 +4397,46 @@
                 <a:ea typeface="Calibri" pitchFamily="34" charset="-122"/>
                 <a:cs typeface="Calibri" pitchFamily="34" charset="-120"/>
               </a:rPr>
-              <a:t>3. Deploy AAA + Active Directory: SSO, MFA, least privilege</a:t>
+              <a:t>Strong protection of nonpublic personal information</a:t>
             </a:r>
             <a:endParaRPr lang="en-US" sz="1250" dirty="0"/>
           </a:p>
-          <a:p>
-            <a:pPr indent="0" marL="0">
-              <a:spcAft>
-                <a:spcPts val="800"/>
-              </a:spcAft>
-              <a:buNone/>
-            </a:pPr>
-            <a:r>
-              <a:rPr lang="en-US" sz="1250" dirty="0">
-                <a:solidFill>
-                  <a:srgbClr val="1A1A1A"/>
-                </a:solidFill>
-                <a:latin typeface="Calibri" pitchFamily="34" charset="0"/>
-                <a:ea typeface="Calibri" pitchFamily="34" charset="-122"/>
-                <a:cs typeface="Calibri" pitchFamily="34" charset="-120"/>
-              </a:rPr>
-              <a:t>4. Continuous monitoring + automated NGFW response</a:t>
+        </p:txBody>
+      </p:sp>
+      <p:sp>
+        <p:nvSpPr>
+          <p:cNvPr id="18" name="Text 16"/>
+          <p:cNvSpPr txBox="1"/>
+          <p:nvPr/>
+        </p:nvSpPr>
+        <p:spPr>
+          <a:xfrm>
+            <a:off x="6949440" y="4361688"/>
+            <a:ext cx="4480560" cy="822960"/>
+          </a:xfrm>
+          <a:prstGeom prst="rect">
+            <a:avLst/>
+          </a:prstGeom>
+          <a:noFill/>
+          <a:ln/>
+        </p:spPr>
+        <p:txBody>
+          <a:bodyPr wrap="square" rtlCol="0" anchor="ctr"/>
+          <a:lstStyle/>
+          <a:p>
+            <a:pPr indent="0" marL="0">
+              <a:buNone/>
+            </a:pPr>
+            <a:r>
+              <a:rPr lang="en-US" sz="1250" i="1" dirty="0">
+                <a:solidFill>
+                  <a:srgbClr val="3B4A9E"/>
+                </a:solidFill>
+                <a:latin typeface="Calibri" pitchFamily="34" charset="0"/>
+                <a:ea typeface="Calibri" pitchFamily="34" charset="-122"/>
+                <a:cs typeface="Calibri" pitchFamily="34" charset="-120"/>
+              </a:rPr>
+              <a:t>→  Least-privilege access model</a:t>
             </a:r>
             <a:endParaRPr lang="en-US" sz="1250" dirty="0"/>
           </a:p>
@@ -4141,7 +4444,7 @@
       </p:sp>
       <p:sp>
         <p:nvSpPr>
-          <p:cNvPr id="6" name="Text 3"/>
+          <p:cNvPr id="19" name="Text 17"/>
           <p:cNvSpPr txBox="1"/>
           <p:nvPr/>
         </p:nvSpPr>
@@ -4180,7 +4483,7 @@
       </p:sp>
       <p:sp>
         <p:nvSpPr>
-          <p:cNvPr id="7" name="Text 4"/>
+          <p:cNvPr id="20" name="Text 18"/>
           <p:cNvSpPr txBox="1"/>
           <p:nvPr/>
         </p:nvSpPr>
@@ -4275,7 +4578,7 @@
                 <a:ea typeface="Calibri" pitchFamily="34" charset="-122"/>
                 <a:cs typeface="Calibri" pitchFamily="34" charset="-120"/>
               </a:rPr>
-              <a:t>RISK ASSESSMENT</a:t>
+              <a:t>ZERO TRUST ARCHITECTURE</a:t>
             </a:r>
             <a:endParaRPr lang="en-US" sz="1200" dirty="0"/>
           </a:p>
@@ -4314,6 +4617,313 @@
                 <a:ea typeface="Cambria" pitchFamily="34" charset="-122"/>
                 <a:cs typeface="Cambria" pitchFamily="34" charset="-120"/>
               </a:rPr>
+              <a:t>How It Works: Never Trust, Always Verify</a:t>
+            </a:r>
+            <a:endParaRPr lang="en-US" sz="3200" dirty="0"/>
+          </a:p>
+        </p:txBody>
+      </p:sp>
+      <p:pic>
+        <p:nvPicPr>
+          <p:cNvPr id="4" name="Image 0" descr="C:\Users\rareb\AppData\Local\Temp\claude\C--Users-rareb-OneDrive-Desktop-University-Of-Winnipeg-Case-Studies-Issues---Capstone-Project-V--Balogun-NSD-Fall-2023\288735ab-ce17-49e2-9255-b3c08ab0bae8\scratchpad\zero-trust-flow.png">    </p:cNvPr>
+          <p:cNvPicPr>
+            <a:picLocks noChangeAspect="1"/>
+          </p:cNvPicPr>
+          <p:nvPr/>
+        </p:nvPicPr>
+        <p:blipFill>
+          <a:blip r:embed="rId1"/>
+          <a:stretch>
+            <a:fillRect/>
+          </a:stretch>
+        </p:blipFill>
+        <p:spPr>
+          <a:xfrm>
+            <a:off x="1965960" y="1554480"/>
+            <a:ext cx="8229600" cy="3785721"/>
+          </a:xfrm>
+          <a:prstGeom prst="rect">
+            <a:avLst/>
+          </a:prstGeom>
+        </p:spPr>
+      </p:pic>
+      <p:sp>
+        <p:nvSpPr>
+          <p:cNvPr id="5" name="Text 2"/>
+          <p:cNvSpPr txBox="1"/>
+          <p:nvPr/>
+        </p:nvSpPr>
+        <p:spPr>
+          <a:xfrm>
+            <a:off x="548640" y="5532120"/>
+            <a:ext cx="11064240" cy="1051560"/>
+          </a:xfrm>
+          <a:prstGeom prst="rect">
+            <a:avLst/>
+          </a:prstGeom>
+          <a:noFill/>
+          <a:ln/>
+        </p:spPr>
+        <p:txBody>
+          <a:bodyPr wrap="square" rtlCol="0" anchor="ctr"/>
+          <a:lstStyle/>
+          <a:p>
+            <a:pPr indent="0" marL="0">
+              <a:spcAft>
+                <a:spcPts val="800"/>
+              </a:spcAft>
+              <a:buNone/>
+            </a:pPr>
+            <a:r>
+              <a:rPr lang="en-US" sz="1250" dirty="0">
+                <a:solidFill>
+                  <a:srgbClr val="1A1A1A"/>
+                </a:solidFill>
+                <a:latin typeface="Calibri" pitchFamily="34" charset="0"/>
+                <a:ea typeface="Calibri" pitchFamily="34" charset="-122"/>
+                <a:cs typeface="Calibri" pitchFamily="34" charset="-120"/>
+              </a:rPr>
+              <a:t>1. Inventory users, devices, and data flow</a:t>
+            </a:r>
+            <a:endParaRPr lang="en-US" sz="1250" dirty="0"/>
+          </a:p>
+          <a:p>
+            <a:pPr indent="0" marL="0">
+              <a:spcAft>
+                <a:spcPts val="800"/>
+              </a:spcAft>
+              <a:buNone/>
+            </a:pPr>
+            <a:r>
+              <a:rPr lang="en-US" sz="1250" dirty="0">
+                <a:solidFill>
+                  <a:srgbClr val="1A1A1A"/>
+                </a:solidFill>
+                <a:latin typeface="Calibri" pitchFamily="34" charset="0"/>
+                <a:ea typeface="Calibri" pitchFamily="34" charset="-122"/>
+                <a:cs typeface="Calibri" pitchFamily="34" charset="-120"/>
+              </a:rPr>
+              <a:t>2. Define the protected surface (CDE + core servers)</a:t>
+            </a:r>
+            <a:endParaRPr lang="en-US" sz="1250" dirty="0"/>
+          </a:p>
+          <a:p>
+            <a:pPr indent="0" marL="0">
+              <a:spcAft>
+                <a:spcPts val="800"/>
+              </a:spcAft>
+              <a:buNone/>
+            </a:pPr>
+            <a:r>
+              <a:rPr lang="en-US" sz="1250" dirty="0">
+                <a:solidFill>
+                  <a:srgbClr val="1A1A1A"/>
+                </a:solidFill>
+                <a:latin typeface="Calibri" pitchFamily="34" charset="0"/>
+                <a:ea typeface="Calibri" pitchFamily="34" charset="-122"/>
+                <a:cs typeface="Calibri" pitchFamily="34" charset="-120"/>
+              </a:rPr>
+              <a:t>3. Deploy AAA + Active Directory: SSO, MFA, least privilege</a:t>
+            </a:r>
+            <a:endParaRPr lang="en-US" sz="1250" dirty="0"/>
+          </a:p>
+          <a:p>
+            <a:pPr indent="0" marL="0">
+              <a:spcAft>
+                <a:spcPts val="800"/>
+              </a:spcAft>
+              <a:buNone/>
+            </a:pPr>
+            <a:r>
+              <a:rPr lang="en-US" sz="1250" dirty="0">
+                <a:solidFill>
+                  <a:srgbClr val="1A1A1A"/>
+                </a:solidFill>
+                <a:latin typeface="Calibri" pitchFamily="34" charset="0"/>
+                <a:ea typeface="Calibri" pitchFamily="34" charset="-122"/>
+                <a:cs typeface="Calibri" pitchFamily="34" charset="-120"/>
+              </a:rPr>
+              <a:t>4. Continuous monitoring + automated NGFW response</a:t>
+            </a:r>
+            <a:endParaRPr lang="en-US" sz="1250" dirty="0"/>
+          </a:p>
+        </p:txBody>
+      </p:sp>
+      <p:sp>
+        <p:nvSpPr>
+          <p:cNvPr id="6" name="Text 3"/>
+          <p:cNvSpPr txBox="1"/>
+          <p:nvPr/>
+        </p:nvSpPr>
+        <p:spPr>
+          <a:xfrm>
+            <a:off x="457200" y="6473952"/>
+            <a:ext cx="7315200" cy="274320"/>
+          </a:xfrm>
+          <a:prstGeom prst="rect">
+            <a:avLst/>
+          </a:prstGeom>
+          <a:noFill/>
+          <a:ln/>
+        </p:spPr>
+        <p:txBody>
+          <a:bodyPr wrap="square" rtlCol="0" anchor="ctr"/>
+          <a:lstStyle/>
+          <a:p>
+            <a:pPr indent="0" marL="0">
+              <a:buNone/>
+            </a:pPr>
+            <a:r>
+              <a:rPr lang="en-US" sz="900" dirty="0">
+                <a:solidFill>
+                  <a:srgbClr val="6B7280"/>
+                </a:solidFill>
+                <a:latin typeface="Calibri" pitchFamily="34" charset="0"/>
+                <a:ea typeface="Calibri" pitchFamily="34" charset="-122"/>
+                <a:cs typeface="Calibri" pitchFamily="34" charset="-120"/>
+              </a:rPr>
+              <a:t>FinSecure Technologies Inc. — Network Security Capstone</a:t>
+            </a:r>
+            <a:endParaRPr lang="en-US" sz="900" dirty="0"/>
+          </a:p>
+        </p:txBody>
+      </p:sp>
+      <p:sp>
+        <p:nvSpPr>
+          <p:cNvPr id="7" name="Text 4"/>
+          <p:cNvSpPr txBox="1"/>
+          <p:nvPr/>
+        </p:nvSpPr>
+        <p:spPr>
+          <a:xfrm>
+            <a:off x="11274552" y="6473952"/>
+            <a:ext cx="457200" cy="274320"/>
+          </a:xfrm>
+          <a:prstGeom prst="rect">
+            <a:avLst/>
+          </a:prstGeom>
+          <a:noFill/>
+          <a:ln/>
+        </p:spPr>
+        <p:txBody>
+          <a:bodyPr wrap="square" rtlCol="0" anchor="ctr"/>
+          <a:lstStyle/>
+          <a:p>
+            <a:pPr algn="r" indent="0" marL="0">
+              <a:buNone/>
+            </a:pPr>
+            <a:r>
+              <a:rPr lang="en-US" sz="900" dirty="0">
+                <a:solidFill>
+                  <a:srgbClr val="6B7280"/>
+                </a:solidFill>
+                <a:latin typeface="Calibri" pitchFamily="34" charset="0"/>
+                <a:ea typeface="Calibri" pitchFamily="34" charset="-122"/>
+                <a:cs typeface="Calibri" pitchFamily="34" charset="-120"/>
+              </a:rPr>
+              <a:t>12</a:t>
+            </a:r>
+            <a:endParaRPr lang="en-US" sz="900" dirty="0"/>
+          </a:p>
+        </p:txBody>
+      </p:sp>
+    </p:spTree>
+  </p:cSld>
+  <p:clrMapOvr>
+    <a:masterClrMapping/>
+  </p:clrMapOvr>
+</p:sld>
+</file>
+
+<file path=ppt/slides/slide14.xml><?xml version="1.0" encoding="utf-8"?>
+<p:sld xmlns:a="http://schemas.openxmlformats.org/drawingml/2006/main" xmlns:r="http://schemas.openxmlformats.org/officeDocument/2006/relationships" xmlns:p="http://schemas.openxmlformats.org/presentationml/2006/main">
+  <p:cSld name="Slide 14">
+    <p:spTree>
+      <p:nvGrpSpPr>
+        <p:cNvPr id="1" name=""/>
+        <p:cNvGrpSpPr/>
+        <p:nvPr/>
+      </p:nvGrpSpPr>
+      <p:grpSpPr>
+        <a:xfrm>
+          <a:off x="0" y="0"/>
+          <a:ext cx="0" cy="0"/>
+          <a:chOff x="0" y="0"/>
+          <a:chExt cx="0" cy="0"/>
+        </a:xfrm>
+      </p:grpSpPr>
+      <p:sp>
+        <p:nvSpPr>
+          <p:cNvPr id="2" name="Text 0"/>
+          <p:cNvSpPr txBox="1"/>
+          <p:nvPr/>
+        </p:nvSpPr>
+        <p:spPr>
+          <a:xfrm>
+            <a:off x="548640" y="365760"/>
+            <a:ext cx="7315200" cy="320040"/>
+          </a:xfrm>
+          <a:prstGeom prst="rect">
+            <a:avLst/>
+          </a:prstGeom>
+          <a:noFill/>
+          <a:ln/>
+        </p:spPr>
+        <p:txBody>
+          <a:bodyPr wrap="square" rtlCol="0" anchor="ctr"/>
+          <a:lstStyle/>
+          <a:p>
+            <a:pPr indent="0" marL="0">
+              <a:buNone/>
+            </a:pPr>
+            <a:r>
+              <a:rPr lang="en-US" sz="1200" b="1" spc="200" kern="0" dirty="0">
+                <a:solidFill>
+                  <a:srgbClr val="1E2761"/>
+                </a:solidFill>
+                <a:latin typeface="Calibri" pitchFamily="34" charset="0"/>
+                <a:ea typeface="Calibri" pitchFamily="34" charset="-122"/>
+                <a:cs typeface="Calibri" pitchFamily="34" charset="-120"/>
+              </a:rPr>
+              <a:t>RISK ASSESSMENT</a:t>
+            </a:r>
+            <a:endParaRPr lang="en-US" sz="1200" dirty="0"/>
+          </a:p>
+        </p:txBody>
+      </p:sp>
+      <p:sp>
+        <p:nvSpPr>
+          <p:cNvPr id="3" name="Text 1"/>
+          <p:cNvSpPr txBox="1"/>
+          <p:nvPr/>
+        </p:nvSpPr>
+        <p:spPr>
+          <a:xfrm>
+            <a:off x="548640" y="658368"/>
+            <a:ext cx="11064240" cy="822960"/>
+          </a:xfrm>
+          <a:prstGeom prst="rect">
+            <a:avLst/>
+          </a:prstGeom>
+          <a:noFill/>
+          <a:ln/>
+        </p:spPr>
+        <p:txBody>
+          <a:bodyPr wrap="square" rtlCol="0" anchor="ctr"/>
+          <a:lstStyle/>
+          <a:p>
+            <a:pPr indent="0" marL="0">
+              <a:buNone/>
+            </a:pPr>
+            <a:r>
+              <a:rPr lang="en-US" sz="3200" b="1" dirty="0">
+                <a:solidFill>
+                  <a:srgbClr val="1A1A1A"/>
+                </a:solidFill>
+                <a:latin typeface="Cambria" pitchFamily="34" charset="0"/>
+                <a:ea typeface="Cambria" pitchFamily="34" charset="-122"/>
+                <a:cs typeface="Cambria" pitchFamily="34" charset="-120"/>
+              </a:rPr>
               <a:t>Highest-Priority Risks (Rated Extreme)</a:t>
             </a:r>
             <a:endParaRPr lang="en-US" sz="3200" dirty="0"/>
@@ -4322,7 +4932,7 @@
       </p:sp>
       <p:graphicFrame>
         <p:nvGraphicFramePr>
-          <p:cNvPr id="14" name="Table 0"/>
+          <p:cNvPr id="15" name="Table 0"/>
           <p:cNvGraphicFramePr>
             <a:graphicFrameLocks noGrp="1"/>
           </p:cNvGraphicFramePr>
@@ -5698,677 +6308,6 @@
                 <a:ea typeface="Calibri" pitchFamily="34" charset="-122"/>
                 <a:cs typeface="Calibri" pitchFamily="34" charset="-120"/>
               </a:rPr>
-              <a:t>12</a:t>
-            </a:r>
-            <a:endParaRPr lang="en-US" sz="900" dirty="0"/>
-          </a:p>
-        </p:txBody>
-      </p:sp>
-    </p:spTree>
-  </p:cSld>
-  <p:clrMapOvr>
-    <a:masterClrMapping/>
-  </p:clrMapOvr>
-</p:sld>
-</file>
-
-<file path=ppt/slides/slide14.xml><?xml version="1.0" encoding="utf-8"?>
-<p:sld xmlns:a="http://schemas.openxmlformats.org/drawingml/2006/main" xmlns:r="http://schemas.openxmlformats.org/officeDocument/2006/relationships" xmlns:p="http://schemas.openxmlformats.org/presentationml/2006/main">
-  <p:cSld name="Slide 14">
-    <p:spTree>
-      <p:nvGrpSpPr>
-        <p:cNvPr id="1" name=""/>
-        <p:cNvGrpSpPr/>
-        <p:nvPr/>
-      </p:nvGrpSpPr>
-      <p:grpSpPr>
-        <a:xfrm>
-          <a:off x="0" y="0"/>
-          <a:ext cx="0" cy="0"/>
-          <a:chOff x="0" y="0"/>
-          <a:chExt cx="0" cy="0"/>
-        </a:xfrm>
-      </p:grpSpPr>
-      <p:sp>
-        <p:nvSpPr>
-          <p:cNvPr id="2" name="Text 0"/>
-          <p:cNvSpPr txBox="1"/>
-          <p:nvPr/>
-        </p:nvSpPr>
-        <p:spPr>
-          <a:xfrm>
-            <a:off x="548640" y="365760"/>
-            <a:ext cx="7315200" cy="320040"/>
-          </a:xfrm>
-          <a:prstGeom prst="rect">
-            <a:avLst/>
-          </a:prstGeom>
-          <a:noFill/>
-          <a:ln/>
-        </p:spPr>
-        <p:txBody>
-          <a:bodyPr wrap="square" rtlCol="0" anchor="ctr"/>
-          <a:lstStyle/>
-          <a:p>
-            <a:pPr indent="0" marL="0">
-              <a:buNone/>
-            </a:pPr>
-            <a:r>
-              <a:rPr lang="en-US" sz="1200" b="1" spc="200" kern="0" dirty="0">
-                <a:solidFill>
-                  <a:srgbClr val="1E2761"/>
-                </a:solidFill>
-                <a:latin typeface="Calibri" pitchFamily="34" charset="0"/>
-                <a:ea typeface="Calibri" pitchFamily="34" charset="-122"/>
-                <a:cs typeface="Calibri" pitchFamily="34" charset="-120"/>
-              </a:rPr>
-              <a:t>NETWORK SECURITY POLICY</a:t>
-            </a:r>
-            <a:endParaRPr lang="en-US" sz="1200" dirty="0"/>
-          </a:p>
-        </p:txBody>
-      </p:sp>
-      <p:sp>
-        <p:nvSpPr>
-          <p:cNvPr id="3" name="Text 1"/>
-          <p:cNvSpPr txBox="1"/>
-          <p:nvPr/>
-        </p:nvSpPr>
-        <p:spPr>
-          <a:xfrm>
-            <a:off x="548640" y="658368"/>
-            <a:ext cx="11064240" cy="822960"/>
-          </a:xfrm>
-          <a:prstGeom prst="rect">
-            <a:avLst/>
-          </a:prstGeom>
-          <a:noFill/>
-          <a:ln/>
-        </p:spPr>
-        <p:txBody>
-          <a:bodyPr wrap="square" rtlCol="0" anchor="ctr"/>
-          <a:lstStyle/>
-          <a:p>
-            <a:pPr indent="0" marL="0">
-              <a:buNone/>
-            </a:pPr>
-            <a:r>
-              <a:rPr lang="en-US" sz="3200" b="1" dirty="0">
-                <a:solidFill>
-                  <a:srgbClr val="1A1A1A"/>
-                </a:solidFill>
-                <a:latin typeface="Cambria" pitchFamily="34" charset="0"/>
-                <a:ea typeface="Cambria" pitchFamily="34" charset="-122"/>
-                <a:cs typeface="Cambria" pitchFamily="34" charset="-120"/>
-              </a:rPr>
-              <a:t>What Now Governs the Network</a:t>
-            </a:r>
-            <a:endParaRPr lang="en-US" sz="3200" dirty="0"/>
-          </a:p>
-        </p:txBody>
-      </p:sp>
-      <p:sp>
-        <p:nvSpPr>
-          <p:cNvPr id="4" name="Shape 2"/>
-          <p:cNvSpPr/>
-          <p:nvPr/>
-        </p:nvSpPr>
-        <p:spPr>
-          <a:xfrm>
-            <a:off x="548640" y="1810512"/>
-            <a:ext cx="73152" cy="640080"/>
-          </a:xfrm>
-          <a:prstGeom prst="rect">
-            <a:avLst/>
-          </a:prstGeom>
-          <a:solidFill>
-            <a:srgbClr val="1E2761"/>
-          </a:solidFill>
-          <a:ln/>
-        </p:spPr>
-      </p:sp>
-      <p:sp>
-        <p:nvSpPr>
-          <p:cNvPr id="5" name="Text 3"/>
-          <p:cNvSpPr txBox="1"/>
-          <p:nvPr/>
-        </p:nvSpPr>
-        <p:spPr>
-          <a:xfrm>
-            <a:off x="868680" y="1737360"/>
-            <a:ext cx="3291840" cy="777240"/>
-          </a:xfrm>
-          <a:prstGeom prst="rect">
-            <a:avLst/>
-          </a:prstGeom>
-          <a:noFill/>
-          <a:ln/>
-        </p:spPr>
-        <p:txBody>
-          <a:bodyPr wrap="square" rtlCol="0" anchor="ctr"/>
-          <a:lstStyle/>
-          <a:p>
-            <a:pPr indent="0" marL="0">
-              <a:buNone/>
-            </a:pPr>
-            <a:r>
-              <a:rPr lang="en-US" sz="1400" b="1" dirty="0">
-                <a:solidFill>
-                  <a:srgbClr val="1E2761"/>
-                </a:solidFill>
-                <a:latin typeface="Calibri" pitchFamily="34" charset="0"/>
-                <a:ea typeface="Calibri" pitchFamily="34" charset="-122"/>
-                <a:cs typeface="Calibri" pitchFamily="34" charset="-120"/>
-              </a:rPr>
-              <a:t>Access Control</a:t>
-            </a:r>
-            <a:endParaRPr lang="en-US" sz="1400" dirty="0"/>
-          </a:p>
-        </p:txBody>
-      </p:sp>
-      <p:sp>
-        <p:nvSpPr>
-          <p:cNvPr id="6" name="Text 4"/>
-          <p:cNvSpPr txBox="1"/>
-          <p:nvPr/>
-        </p:nvSpPr>
-        <p:spPr>
-          <a:xfrm>
-            <a:off x="4297680" y="1737360"/>
-            <a:ext cx="7315200" cy="777240"/>
-          </a:xfrm>
-          <a:prstGeom prst="rect">
-            <a:avLst/>
-          </a:prstGeom>
-          <a:noFill/>
-          <a:ln/>
-        </p:spPr>
-        <p:txBody>
-          <a:bodyPr wrap="square" rtlCol="0" anchor="ctr"/>
-          <a:lstStyle/>
-          <a:p>
-            <a:pPr indent="0" marL="0">
-              <a:buNone/>
-            </a:pPr>
-            <a:r>
-              <a:rPr lang="en-US" sz="1250" dirty="0">
-                <a:solidFill>
-                  <a:srgbClr val="1A1A1A"/>
-                </a:solidFill>
-                <a:latin typeface="Calibri" pitchFamily="34" charset="0"/>
-                <a:ea typeface="Calibri" pitchFamily="34" charset="-122"/>
-                <a:cs typeface="Calibri" pitchFamily="34" charset="-120"/>
-              </a:rPr>
-              <a:t>RBAC, least privilege, 12-char password minimum, AES-256 / TLS 1.2+</a:t>
-            </a:r>
-            <a:endParaRPr lang="en-US" sz="1250" dirty="0"/>
-          </a:p>
-        </p:txBody>
-      </p:sp>
-      <p:sp>
-        <p:nvSpPr>
-          <p:cNvPr id="7" name="Shape 5"/>
-          <p:cNvSpPr/>
-          <p:nvPr/>
-        </p:nvSpPr>
-        <p:spPr>
-          <a:xfrm>
-            <a:off x="548640" y="2651760"/>
-            <a:ext cx="73152" cy="640080"/>
-          </a:xfrm>
-          <a:prstGeom prst="rect">
-            <a:avLst/>
-          </a:prstGeom>
-          <a:solidFill>
-            <a:srgbClr val="1E2761"/>
-          </a:solidFill>
-          <a:ln/>
-        </p:spPr>
-      </p:sp>
-      <p:sp>
-        <p:nvSpPr>
-          <p:cNvPr id="8" name="Text 6"/>
-          <p:cNvSpPr txBox="1"/>
-          <p:nvPr/>
-        </p:nvSpPr>
-        <p:spPr>
-          <a:xfrm>
-            <a:off x="868680" y="2578608"/>
-            <a:ext cx="3291840" cy="777240"/>
-          </a:xfrm>
-          <a:prstGeom prst="rect">
-            <a:avLst/>
-          </a:prstGeom>
-          <a:noFill/>
-          <a:ln/>
-        </p:spPr>
-        <p:txBody>
-          <a:bodyPr wrap="square" rtlCol="0" anchor="ctr"/>
-          <a:lstStyle/>
-          <a:p>
-            <a:pPr indent="0" marL="0">
-              <a:buNone/>
-            </a:pPr>
-            <a:r>
-              <a:rPr lang="en-US" sz="1400" b="1" dirty="0">
-                <a:solidFill>
-                  <a:srgbClr val="1E2761"/>
-                </a:solidFill>
-                <a:latin typeface="Calibri" pitchFamily="34" charset="0"/>
-                <a:ea typeface="Calibri" pitchFamily="34" charset="-122"/>
-                <a:cs typeface="Calibri" pitchFamily="34" charset="-120"/>
-              </a:rPr>
-              <a:t>Monitoring &amp; Logging</a:t>
-            </a:r>
-            <a:endParaRPr lang="en-US" sz="1400" dirty="0"/>
-          </a:p>
-        </p:txBody>
-      </p:sp>
-      <p:sp>
-        <p:nvSpPr>
-          <p:cNvPr id="9" name="Text 7"/>
-          <p:cNvSpPr txBox="1"/>
-          <p:nvPr/>
-        </p:nvSpPr>
-        <p:spPr>
-          <a:xfrm>
-            <a:off x="4297680" y="2578608"/>
-            <a:ext cx="7315200" cy="777240"/>
-          </a:xfrm>
-          <a:prstGeom prst="rect">
-            <a:avLst/>
-          </a:prstGeom>
-          <a:noFill/>
-          <a:ln/>
-        </p:spPr>
-        <p:txBody>
-          <a:bodyPr wrap="square" rtlCol="0" anchor="ctr"/>
-          <a:lstStyle/>
-          <a:p>
-            <a:pPr indent="0" marL="0">
-              <a:buNone/>
-            </a:pPr>
-            <a:r>
-              <a:rPr lang="en-US" sz="1250" dirty="0">
-                <a:solidFill>
-                  <a:srgbClr val="1A1A1A"/>
-                </a:solidFill>
-                <a:latin typeface="Calibri" pitchFamily="34" charset="0"/>
-                <a:ea typeface="Calibri" pitchFamily="34" charset="-122"/>
-                <a:cs typeface="Calibri" pitchFamily="34" charset="-120"/>
-              </a:rPr>
-              <a:t>Real-time SIEM, IDS/IPS, scheduled log audits</a:t>
-            </a:r>
-            <a:endParaRPr lang="en-US" sz="1250" dirty="0"/>
-          </a:p>
-        </p:txBody>
-      </p:sp>
-      <p:sp>
-        <p:nvSpPr>
-          <p:cNvPr id="10" name="Shape 8"/>
-          <p:cNvSpPr/>
-          <p:nvPr/>
-        </p:nvSpPr>
-        <p:spPr>
-          <a:xfrm>
-            <a:off x="548640" y="3493008"/>
-            <a:ext cx="73152" cy="640080"/>
-          </a:xfrm>
-          <a:prstGeom prst="rect">
-            <a:avLst/>
-          </a:prstGeom>
-          <a:solidFill>
-            <a:srgbClr val="1E2761"/>
-          </a:solidFill>
-          <a:ln/>
-        </p:spPr>
-      </p:sp>
-      <p:sp>
-        <p:nvSpPr>
-          <p:cNvPr id="11" name="Text 9"/>
-          <p:cNvSpPr txBox="1"/>
-          <p:nvPr/>
-        </p:nvSpPr>
-        <p:spPr>
-          <a:xfrm>
-            <a:off x="868680" y="3419856"/>
-            <a:ext cx="3291840" cy="777240"/>
-          </a:xfrm>
-          <a:prstGeom prst="rect">
-            <a:avLst/>
-          </a:prstGeom>
-          <a:noFill/>
-          <a:ln/>
-        </p:spPr>
-        <p:txBody>
-          <a:bodyPr wrap="square" rtlCol="0" anchor="ctr"/>
-          <a:lstStyle/>
-          <a:p>
-            <a:pPr indent="0" marL="0">
-              <a:buNone/>
-            </a:pPr>
-            <a:r>
-              <a:rPr lang="en-US" sz="1400" b="1" dirty="0">
-                <a:solidFill>
-                  <a:srgbClr val="1E2761"/>
-                </a:solidFill>
-                <a:latin typeface="Calibri" pitchFamily="34" charset="0"/>
-                <a:ea typeface="Calibri" pitchFamily="34" charset="-122"/>
-                <a:cs typeface="Calibri" pitchFamily="34" charset="-120"/>
-              </a:rPr>
-              <a:t>Remote Access &amp; Removable Media</a:t>
-            </a:r>
-            <a:endParaRPr lang="en-US" sz="1400" dirty="0"/>
-          </a:p>
-        </p:txBody>
-      </p:sp>
-      <p:sp>
-        <p:nvSpPr>
-          <p:cNvPr id="12" name="Text 10"/>
-          <p:cNvSpPr txBox="1"/>
-          <p:nvPr/>
-        </p:nvSpPr>
-        <p:spPr>
-          <a:xfrm>
-            <a:off x="4297680" y="3419856"/>
-            <a:ext cx="7315200" cy="777240"/>
-          </a:xfrm>
-          <a:prstGeom prst="rect">
-            <a:avLst/>
-          </a:prstGeom>
-          <a:noFill/>
-          <a:ln/>
-        </p:spPr>
-        <p:txBody>
-          <a:bodyPr wrap="square" rtlCol="0" anchor="ctr"/>
-          <a:lstStyle/>
-          <a:p>
-            <a:pPr indent="0" marL="0">
-              <a:buNone/>
-            </a:pPr>
-            <a:r>
-              <a:rPr lang="en-US" sz="1250" dirty="0">
-                <a:solidFill>
-                  <a:srgbClr val="1A1A1A"/>
-                </a:solidFill>
-                <a:latin typeface="Calibri" pitchFamily="34" charset="0"/>
-                <a:ea typeface="Calibri" pitchFamily="34" charset="-122"/>
-                <a:cs typeface="Calibri" pitchFamily="34" charset="-120"/>
-              </a:rPr>
-              <a:t>VPN + MFA for every session; USB disabled on regulated-data endpoints</a:t>
-            </a:r>
-            <a:endParaRPr lang="en-US" sz="1250" dirty="0"/>
-          </a:p>
-        </p:txBody>
-      </p:sp>
-      <p:sp>
-        <p:nvSpPr>
-          <p:cNvPr id="13" name="Shape 11"/>
-          <p:cNvSpPr/>
-          <p:nvPr/>
-        </p:nvSpPr>
-        <p:spPr>
-          <a:xfrm>
-            <a:off x="548640" y="4334256"/>
-            <a:ext cx="73152" cy="640080"/>
-          </a:xfrm>
-          <a:prstGeom prst="rect">
-            <a:avLst/>
-          </a:prstGeom>
-          <a:solidFill>
-            <a:srgbClr val="1E2761"/>
-          </a:solidFill>
-          <a:ln/>
-        </p:spPr>
-      </p:sp>
-      <p:sp>
-        <p:nvSpPr>
-          <p:cNvPr id="14" name="Text 12"/>
-          <p:cNvSpPr txBox="1"/>
-          <p:nvPr/>
-        </p:nvSpPr>
-        <p:spPr>
-          <a:xfrm>
-            <a:off x="868680" y="4261104"/>
-            <a:ext cx="3291840" cy="777240"/>
-          </a:xfrm>
-          <a:prstGeom prst="rect">
-            <a:avLst/>
-          </a:prstGeom>
-          <a:noFill/>
-          <a:ln/>
-        </p:spPr>
-        <p:txBody>
-          <a:bodyPr wrap="square" rtlCol="0" anchor="ctr"/>
-          <a:lstStyle/>
-          <a:p>
-            <a:pPr indent="0" marL="0">
-              <a:buNone/>
-            </a:pPr>
-            <a:r>
-              <a:rPr lang="en-US" sz="1400" b="1" dirty="0">
-                <a:solidFill>
-                  <a:srgbClr val="1E2761"/>
-                </a:solidFill>
-                <a:latin typeface="Calibri" pitchFamily="34" charset="0"/>
-                <a:ea typeface="Calibri" pitchFamily="34" charset="-122"/>
-                <a:cs typeface="Calibri" pitchFamily="34" charset="-120"/>
-              </a:rPr>
-              <a:t>Third-Party / Vendor (B2B)</a:t>
-            </a:r>
-            <a:endParaRPr lang="en-US" sz="1400" dirty="0"/>
-          </a:p>
-        </p:txBody>
-      </p:sp>
-      <p:sp>
-        <p:nvSpPr>
-          <p:cNvPr id="15" name="Text 13"/>
-          <p:cNvSpPr txBox="1"/>
-          <p:nvPr/>
-        </p:nvSpPr>
-        <p:spPr>
-          <a:xfrm>
-            <a:off x="4297680" y="4261104"/>
-            <a:ext cx="7315200" cy="777240"/>
-          </a:xfrm>
-          <a:prstGeom prst="rect">
-            <a:avLst/>
-          </a:prstGeom>
-          <a:noFill/>
-          <a:ln/>
-        </p:spPr>
-        <p:txBody>
-          <a:bodyPr wrap="square" rtlCol="0" anchor="ctr"/>
-          <a:lstStyle/>
-          <a:p>
-            <a:pPr indent="0" marL="0">
-              <a:buNone/>
-            </a:pPr>
-            <a:r>
-              <a:rPr lang="en-US" sz="1250" dirty="0">
-                <a:solidFill>
-                  <a:srgbClr val="1A1A1A"/>
-                </a:solidFill>
-                <a:latin typeface="Calibri" pitchFamily="34" charset="0"/>
-                <a:ea typeface="Calibri" pitchFamily="34" charset="-122"/>
-                <a:cs typeface="Calibri" pitchFamily="34" charset="-120"/>
-              </a:rPr>
-              <a:t>GlobalTech and future partners onboarded under the same RBAC &amp; segmentation rules</a:t>
-            </a:r>
-            <a:endParaRPr lang="en-US" sz="1250" dirty="0"/>
-          </a:p>
-        </p:txBody>
-      </p:sp>
-      <p:sp>
-        <p:nvSpPr>
-          <p:cNvPr id="16" name="Shape 14"/>
-          <p:cNvSpPr/>
-          <p:nvPr/>
-        </p:nvSpPr>
-        <p:spPr>
-          <a:xfrm>
-            <a:off x="548640" y="5175504"/>
-            <a:ext cx="73152" cy="640080"/>
-          </a:xfrm>
-          <a:prstGeom prst="rect">
-            <a:avLst/>
-          </a:prstGeom>
-          <a:solidFill>
-            <a:srgbClr val="1E2761"/>
-          </a:solidFill>
-          <a:ln/>
-        </p:spPr>
-      </p:sp>
-      <p:sp>
-        <p:nvSpPr>
-          <p:cNvPr id="17" name="Text 15"/>
-          <p:cNvSpPr txBox="1"/>
-          <p:nvPr/>
-        </p:nvSpPr>
-        <p:spPr>
-          <a:xfrm>
-            <a:off x="868680" y="5102352"/>
-            <a:ext cx="3291840" cy="777240"/>
-          </a:xfrm>
-          <a:prstGeom prst="rect">
-            <a:avLst/>
-          </a:prstGeom>
-          <a:noFill/>
-          <a:ln/>
-        </p:spPr>
-        <p:txBody>
-          <a:bodyPr wrap="square" rtlCol="0" anchor="ctr"/>
-          <a:lstStyle/>
-          <a:p>
-            <a:pPr indent="0" marL="0">
-              <a:buNone/>
-            </a:pPr>
-            <a:r>
-              <a:rPr lang="en-US" sz="1400" b="1" dirty="0">
-                <a:solidFill>
-                  <a:srgbClr val="1E2761"/>
-                </a:solidFill>
-                <a:latin typeface="Calibri" pitchFamily="34" charset="0"/>
-                <a:ea typeface="Calibri" pitchFamily="34" charset="-122"/>
-                <a:cs typeface="Calibri" pitchFamily="34" charset="-120"/>
-              </a:rPr>
-              <a:t>Compliance &amp; Auditing</a:t>
-            </a:r>
-            <a:endParaRPr lang="en-US" sz="1400" dirty="0"/>
-          </a:p>
-        </p:txBody>
-      </p:sp>
-      <p:sp>
-        <p:nvSpPr>
-          <p:cNvPr id="18" name="Text 16"/>
-          <p:cNvSpPr txBox="1"/>
-          <p:nvPr/>
-        </p:nvSpPr>
-        <p:spPr>
-          <a:xfrm>
-            <a:off x="4297680" y="5102352"/>
-            <a:ext cx="7315200" cy="777240"/>
-          </a:xfrm>
-          <a:prstGeom prst="rect">
-            <a:avLst/>
-          </a:prstGeom>
-          <a:noFill/>
-          <a:ln/>
-        </p:spPr>
-        <p:txBody>
-          <a:bodyPr wrap="square" rtlCol="0" anchor="ctr"/>
-          <a:lstStyle/>
-          <a:p>
-            <a:pPr indent="0" marL="0">
-              <a:buNone/>
-            </a:pPr>
-            <a:r>
-              <a:rPr lang="en-US" sz="1250" dirty="0">
-                <a:solidFill>
-                  <a:srgbClr val="1A1A1A"/>
-                </a:solidFill>
-                <a:latin typeface="Calibri" pitchFamily="34" charset="0"/>
-                <a:ea typeface="Calibri" pitchFamily="34" charset="-122"/>
-                <a:cs typeface="Calibri" pitchFamily="34" charset="-120"/>
-              </a:rPr>
-              <a:t>SOX, PCI DSS, and GLBA controls verified on a recurring schedule</a:t>
-            </a:r>
-            <a:endParaRPr lang="en-US" sz="1250" dirty="0"/>
-          </a:p>
-        </p:txBody>
-      </p:sp>
-      <p:sp>
-        <p:nvSpPr>
-          <p:cNvPr id="19" name="Text 17"/>
-          <p:cNvSpPr txBox="1"/>
-          <p:nvPr/>
-        </p:nvSpPr>
-        <p:spPr>
-          <a:xfrm>
-            <a:off x="457200" y="6473952"/>
-            <a:ext cx="7315200" cy="274320"/>
-          </a:xfrm>
-          <a:prstGeom prst="rect">
-            <a:avLst/>
-          </a:prstGeom>
-          <a:noFill/>
-          <a:ln/>
-        </p:spPr>
-        <p:txBody>
-          <a:bodyPr wrap="square" rtlCol="0" anchor="ctr"/>
-          <a:lstStyle/>
-          <a:p>
-            <a:pPr indent="0" marL="0">
-              <a:buNone/>
-            </a:pPr>
-            <a:r>
-              <a:rPr lang="en-US" sz="900" dirty="0">
-                <a:solidFill>
-                  <a:srgbClr val="6B7280"/>
-                </a:solidFill>
-                <a:latin typeface="Calibri" pitchFamily="34" charset="0"/>
-                <a:ea typeface="Calibri" pitchFamily="34" charset="-122"/>
-                <a:cs typeface="Calibri" pitchFamily="34" charset="-120"/>
-              </a:rPr>
-              <a:t>FinSecure Technologies Inc. — Network Security Capstone</a:t>
-            </a:r>
-            <a:endParaRPr lang="en-US" sz="900" dirty="0"/>
-          </a:p>
-        </p:txBody>
-      </p:sp>
-      <p:sp>
-        <p:nvSpPr>
-          <p:cNvPr id="20" name="Text 18"/>
-          <p:cNvSpPr txBox="1"/>
-          <p:nvPr/>
-        </p:nvSpPr>
-        <p:spPr>
-          <a:xfrm>
-            <a:off x="11274552" y="6473952"/>
-            <a:ext cx="457200" cy="274320"/>
-          </a:xfrm>
-          <a:prstGeom prst="rect">
-            <a:avLst/>
-          </a:prstGeom>
-          <a:noFill/>
-          <a:ln/>
-        </p:spPr>
-        <p:txBody>
-          <a:bodyPr wrap="square" rtlCol="0" anchor="ctr"/>
-          <a:lstStyle/>
-          <a:p>
-            <a:pPr algn="r" indent="0" marL="0">
-              <a:buNone/>
-            </a:pPr>
-            <a:r>
-              <a:rPr lang="en-US" sz="900" dirty="0">
-                <a:solidFill>
-                  <a:srgbClr val="6B7280"/>
-                </a:solidFill>
-                <a:latin typeface="Calibri" pitchFamily="34" charset="0"/>
-                <a:ea typeface="Calibri" pitchFamily="34" charset="-122"/>
-                <a:cs typeface="Calibri" pitchFamily="34" charset="-120"/>
-              </a:rPr>
               <a:t>13</a:t>
             </a:r>
             <a:endParaRPr lang="en-US" sz="900" dirty="0"/>
@@ -6433,7 +6372,7 @@
                 <a:ea typeface="Calibri" pitchFamily="34" charset="-122"/>
                 <a:cs typeface="Calibri" pitchFamily="34" charset="-120"/>
               </a:rPr>
-              <a:t>INCIDENT RESPONSE</a:t>
+              <a:t>NETWORK SECURITY POLICY</a:t>
             </a:r>
             <a:endParaRPr lang="en-US" sz="1200" dirty="0"/>
           </a:p>
@@ -6472,7 +6411,7 @@
                 <a:ea typeface="Cambria" pitchFamily="34" charset="-122"/>
                 <a:cs typeface="Cambria" pitchFamily="34" charset="-120"/>
               </a:rPr>
-              <a:t>How We Responded to the Breach</a:t>
+              <a:t>What Now Governs the Network</a:t>
             </a:r>
             <a:endParaRPr lang="en-US" sz="3200" dirty="0"/>
           </a:p>
@@ -6486,37 +6425,10 @@
         </p:nvSpPr>
         <p:spPr>
           <a:xfrm>
-            <a:off x="548640" y="2103120"/>
-            <a:ext cx="2103120" cy="2286000"/>
-          </a:xfrm>
-          <a:prstGeom prst="roundRect">
-            <a:avLst>
-              <a:gd name="adj" fmla="val 4348"/>
-            </a:avLst>
-          </a:prstGeom>
-          <a:solidFill>
-            <a:srgbClr val="FFFFFF"/>
-          </a:solidFill>
-          <a:ln w="19050">
-            <a:solidFill>
-              <a:srgbClr val="1E2761"/>
-            </a:solidFill>
-            <a:prstDash val="solid"/>
-          </a:ln>
-        </p:spPr>
-      </p:sp>
-      <p:sp>
-        <p:nvSpPr>
-          <p:cNvPr id="5" name="Shape 3"/>
-          <p:cNvSpPr/>
-          <p:nvPr/>
-        </p:nvSpPr>
-        <p:spPr>
-          <a:xfrm>
-            <a:off x="1344168" y="2331720"/>
-            <a:ext cx="512064" cy="512064"/>
-          </a:xfrm>
-          <a:prstGeom prst="ellipse">
+            <a:off x="548640" y="1810512"/>
+            <a:ext cx="73152" cy="640080"/>
+          </a:xfrm>
+          <a:prstGeom prst="rect">
             <a:avLst/>
           </a:prstGeom>
           <a:solidFill>
@@ -6527,14 +6439,53 @@
       </p:sp>
       <p:sp>
         <p:nvSpPr>
+          <p:cNvPr id="5" name="Text 3"/>
+          <p:cNvSpPr txBox="1"/>
+          <p:nvPr/>
+        </p:nvSpPr>
+        <p:spPr>
+          <a:xfrm>
+            <a:off x="868680" y="1737360"/>
+            <a:ext cx="3291840" cy="777240"/>
+          </a:xfrm>
+          <a:prstGeom prst="rect">
+            <a:avLst/>
+          </a:prstGeom>
+          <a:noFill/>
+          <a:ln/>
+        </p:spPr>
+        <p:txBody>
+          <a:bodyPr wrap="square" rtlCol="0" anchor="ctr"/>
+          <a:lstStyle/>
+          <a:p>
+            <a:pPr indent="0" marL="0">
+              <a:buNone/>
+            </a:pPr>
+            <a:r>
+              <a:rPr lang="en-US" sz="1400" b="1" dirty="0">
+                <a:solidFill>
+                  <a:srgbClr val="1E2761"/>
+                </a:solidFill>
+                <a:latin typeface="Calibri" pitchFamily="34" charset="0"/>
+                <a:ea typeface="Calibri" pitchFamily="34" charset="-122"/>
+                <a:cs typeface="Calibri" pitchFamily="34" charset="-120"/>
+              </a:rPr>
+              <a:t>Access Control</a:t>
+            </a:r>
+            <a:endParaRPr lang="en-US" sz="1400" dirty="0"/>
+          </a:p>
+        </p:txBody>
+      </p:sp>
+      <p:sp>
+        <p:nvSpPr>
           <p:cNvPr id="6" name="Text 4"/>
           <p:cNvSpPr txBox="1"/>
           <p:nvPr/>
         </p:nvSpPr>
         <p:spPr>
           <a:xfrm>
-            <a:off x="1344168" y="2331720"/>
-            <a:ext cx="512064" cy="512064"/>
+            <a:off x="4297680" y="1737360"/>
+            <a:ext cx="7315200" cy="777240"/>
           </a:xfrm>
           <a:prstGeom prst="rect">
             <a:avLst/>
@@ -6546,46 +6497,66 @@
           <a:bodyPr wrap="square" rtlCol="0" anchor="ctr"/>
           <a:lstStyle/>
           <a:p>
-            <a:pPr algn="ctr" indent="0" marL="0">
-              <a:buNone/>
-            </a:pPr>
-            <a:r>
-              <a:rPr lang="en-US" sz="1500" b="1" dirty="0">
-                <a:solidFill>
-                  <a:srgbClr val="FFFFFF"/>
-                </a:solidFill>
-                <a:latin typeface="Cambria" pitchFamily="34" charset="0"/>
-                <a:ea typeface="Cambria" pitchFamily="34" charset="-122"/>
-                <a:cs typeface="Cambria" pitchFamily="34" charset="-120"/>
-              </a:rPr>
-              <a:t>1</a:t>
-            </a:r>
-            <a:endParaRPr lang="en-US" sz="1500" dirty="0"/>
-          </a:p>
-        </p:txBody>
-      </p:sp>
-      <p:sp>
-        <p:nvSpPr>
-          <p:cNvPr id="7" name="Text 5"/>
-          <p:cNvSpPr txBox="1"/>
-          <p:nvPr/>
-        </p:nvSpPr>
-        <p:spPr>
-          <a:xfrm>
-            <a:off x="685800" y="2971800"/>
-            <a:ext cx="1828800" cy="365760"/>
-          </a:xfrm>
-          <a:prstGeom prst="rect">
-            <a:avLst/>
-          </a:prstGeom>
-          <a:noFill/>
-          <a:ln/>
-        </p:spPr>
-        <p:txBody>
-          <a:bodyPr wrap="square" lIns="0" tIns="0" rIns="0" bIns="0" rtlCol="0" anchor="ctr"/>
-          <a:lstStyle/>
-          <a:p>
-            <a:pPr algn="ctr" indent="0" marL="0">
+            <a:pPr indent="0" marL="0">
+              <a:buNone/>
+            </a:pPr>
+            <a:r>
+              <a:rPr lang="en-US" sz="1250" dirty="0">
+                <a:solidFill>
+                  <a:srgbClr val="1A1A1A"/>
+                </a:solidFill>
+                <a:latin typeface="Calibri" pitchFamily="34" charset="0"/>
+                <a:ea typeface="Calibri" pitchFamily="34" charset="-122"/>
+                <a:cs typeface="Calibri" pitchFamily="34" charset="-120"/>
+              </a:rPr>
+              <a:t>RBAC, least privilege, 12-char password minimum, AES-256 / TLS 1.2+</a:t>
+            </a:r>
+            <a:endParaRPr lang="en-US" sz="1250" dirty="0"/>
+          </a:p>
+        </p:txBody>
+      </p:sp>
+      <p:sp>
+        <p:nvSpPr>
+          <p:cNvPr id="7" name="Shape 5"/>
+          <p:cNvSpPr/>
+          <p:nvPr/>
+        </p:nvSpPr>
+        <p:spPr>
+          <a:xfrm>
+            <a:off x="548640" y="2651760"/>
+            <a:ext cx="73152" cy="640080"/>
+          </a:xfrm>
+          <a:prstGeom prst="rect">
+            <a:avLst/>
+          </a:prstGeom>
+          <a:solidFill>
+            <a:srgbClr val="1E2761"/>
+          </a:solidFill>
+          <a:ln/>
+        </p:spPr>
+      </p:sp>
+      <p:sp>
+        <p:nvSpPr>
+          <p:cNvPr id="8" name="Text 6"/>
+          <p:cNvSpPr txBox="1"/>
+          <p:nvPr/>
+        </p:nvSpPr>
+        <p:spPr>
+          <a:xfrm>
+            <a:off x="868680" y="2578608"/>
+            <a:ext cx="3291840" cy="777240"/>
+          </a:xfrm>
+          <a:prstGeom prst="rect">
+            <a:avLst/>
+          </a:prstGeom>
+          <a:noFill/>
+          <a:ln/>
+        </p:spPr>
+        <p:txBody>
+          <a:bodyPr wrap="square" rtlCol="0" anchor="ctr"/>
+          <a:lstStyle/>
+          <a:p>
+            <a:pPr indent="0" marL="0">
               <a:buNone/>
             </a:pPr>
             <a:r>
@@ -6597,7 +6568,7 @@
                 <a:ea typeface="Calibri" pitchFamily="34" charset="-122"/>
                 <a:cs typeface="Calibri" pitchFamily="34" charset="-120"/>
               </a:rPr>
-              <a:t>Contain</a:t>
+              <a:t>Monitoring &amp; Logging</a:t>
             </a:r>
             <a:endParaRPr lang="en-US" sz="1400" dirty="0"/>
           </a:p>
@@ -6605,30 +6576,30 @@
       </p:sp>
       <p:sp>
         <p:nvSpPr>
-          <p:cNvPr id="8" name="Text 6"/>
-          <p:cNvSpPr txBox="1"/>
-          <p:nvPr/>
-        </p:nvSpPr>
-        <p:spPr>
-          <a:xfrm>
-            <a:off x="685800" y="3364992"/>
-            <a:ext cx="1828800" cy="914400"/>
-          </a:xfrm>
-          <a:prstGeom prst="rect">
-            <a:avLst/>
-          </a:prstGeom>
-          <a:noFill/>
-          <a:ln/>
-        </p:spPr>
-        <p:txBody>
-          <a:bodyPr wrap="square" lIns="0" tIns="0" rIns="0" bIns="0" rtlCol="0" anchor="ctr"/>
-          <a:lstStyle/>
-          <a:p>
-            <a:pPr algn="ctr" indent="0" marL="0">
-              <a:buNone/>
-            </a:pPr>
-            <a:r>
-              <a:rPr lang="en-US" sz="1050" dirty="0">
+          <p:cNvPr id="9" name="Text 7"/>
+          <p:cNvSpPr txBox="1"/>
+          <p:nvPr/>
+        </p:nvSpPr>
+        <p:spPr>
+          <a:xfrm>
+            <a:off x="4297680" y="2578608"/>
+            <a:ext cx="7315200" cy="777240"/>
+          </a:xfrm>
+          <a:prstGeom prst="rect">
+            <a:avLst/>
+          </a:prstGeom>
+          <a:noFill/>
+          <a:ln/>
+        </p:spPr>
+        <p:txBody>
+          <a:bodyPr wrap="square" rtlCol="0" anchor="ctr"/>
+          <a:lstStyle/>
+          <a:p>
+            <a:pPr indent="0" marL="0">
+              <a:buNone/>
+            </a:pPr>
+            <a:r>
+              <a:rPr lang="en-US" sz="1250" dirty="0">
                 <a:solidFill>
                   <a:srgbClr val="1A1A1A"/>
                 </a:solidFill>
@@ -6636,48 +6607,9 @@
                 <a:ea typeface="Calibri" pitchFamily="34" charset="-122"/>
                 <a:cs typeface="Calibri" pitchFamily="34" charset="-120"/>
               </a:rPr>
-              <a:t>Disconnected the compromised server immediately</a:t>
-            </a:r>
-            <a:endParaRPr lang="en-US" sz="1050" dirty="0"/>
-          </a:p>
-        </p:txBody>
-      </p:sp>
-      <p:sp>
-        <p:nvSpPr>
-          <p:cNvPr id="9" name="Text 7"/>
-          <p:cNvSpPr txBox="1"/>
-          <p:nvPr/>
-        </p:nvSpPr>
-        <p:spPr>
-          <a:xfrm>
-            <a:off x="2651760" y="3063240"/>
-            <a:ext cx="182880" cy="365760"/>
-          </a:xfrm>
-          <a:prstGeom prst="rect">
-            <a:avLst/>
-          </a:prstGeom>
-          <a:noFill/>
-          <a:ln/>
-        </p:spPr>
-        <p:txBody>
-          <a:bodyPr wrap="square" lIns="0" tIns="0" rIns="0" bIns="0" rtlCol="0" anchor="ctr"/>
-          <a:lstStyle/>
-          <a:p>
-            <a:pPr algn="ctr" indent="0" marL="0">
-              <a:buNone/>
-            </a:pPr>
-            <a:r>
-              <a:rPr lang="en-US" sz="1600" dirty="0">
-                <a:solidFill>
-                  <a:srgbClr val="6B7280"/>
-                </a:solidFill>
-                <a:latin typeface="Calibri" pitchFamily="34" charset="0"/>
-                <a:ea typeface="Calibri" pitchFamily="34" charset="-122"/>
-                <a:cs typeface="Calibri" pitchFamily="34" charset="-120"/>
-              </a:rPr>
-              <a:t>→</a:t>
-            </a:r>
-            <a:endParaRPr lang="en-US" sz="1600" dirty="0"/>
+              <a:t>Real-time SIEM, IDS/IPS, scheduled log audits</a:t>
+            </a:r>
+            <a:endParaRPr lang="en-US" sz="1250" dirty="0"/>
           </a:p>
         </p:txBody>
       </p:sp>
@@ -6689,55 +6621,126 @@
         </p:nvSpPr>
         <p:spPr>
           <a:xfrm>
-            <a:off x="2788920" y="2103120"/>
-            <a:ext cx="2103120" cy="2286000"/>
-          </a:xfrm>
-          <a:prstGeom prst="roundRect">
-            <a:avLst>
-              <a:gd name="adj" fmla="val 4348"/>
-            </a:avLst>
+            <a:off x="548640" y="3493008"/>
+            <a:ext cx="73152" cy="640080"/>
+          </a:xfrm>
+          <a:prstGeom prst="rect">
+            <a:avLst/>
           </a:prstGeom>
           <a:solidFill>
-            <a:srgbClr val="FFFFFF"/>
+            <a:srgbClr val="1E2761"/>
           </a:solidFill>
-          <a:ln w="19050">
-            <a:solidFill>
-              <a:srgbClr val="3B4A9E"/>
-            </a:solidFill>
-            <a:prstDash val="solid"/>
-          </a:ln>
-        </p:spPr>
-      </p:sp>
-      <p:sp>
-        <p:nvSpPr>
-          <p:cNvPr id="11" name="Shape 9"/>
+          <a:ln/>
+        </p:spPr>
+      </p:sp>
+      <p:sp>
+        <p:nvSpPr>
+          <p:cNvPr id="11" name="Text 9"/>
+          <p:cNvSpPr txBox="1"/>
+          <p:nvPr/>
+        </p:nvSpPr>
+        <p:spPr>
+          <a:xfrm>
+            <a:off x="868680" y="3419856"/>
+            <a:ext cx="3291840" cy="777240"/>
+          </a:xfrm>
+          <a:prstGeom prst="rect">
+            <a:avLst/>
+          </a:prstGeom>
+          <a:noFill/>
+          <a:ln/>
+        </p:spPr>
+        <p:txBody>
+          <a:bodyPr wrap="square" rtlCol="0" anchor="ctr"/>
+          <a:lstStyle/>
+          <a:p>
+            <a:pPr indent="0" marL="0">
+              <a:buNone/>
+            </a:pPr>
+            <a:r>
+              <a:rPr lang="en-US" sz="1400" b="1" dirty="0">
+                <a:solidFill>
+                  <a:srgbClr val="1E2761"/>
+                </a:solidFill>
+                <a:latin typeface="Calibri" pitchFamily="34" charset="0"/>
+                <a:ea typeface="Calibri" pitchFamily="34" charset="-122"/>
+                <a:cs typeface="Calibri" pitchFamily="34" charset="-120"/>
+              </a:rPr>
+              <a:t>Remote Access &amp; Removable Media</a:t>
+            </a:r>
+            <a:endParaRPr lang="en-US" sz="1400" dirty="0"/>
+          </a:p>
+        </p:txBody>
+      </p:sp>
+      <p:sp>
+        <p:nvSpPr>
+          <p:cNvPr id="12" name="Text 10"/>
+          <p:cNvSpPr txBox="1"/>
+          <p:nvPr/>
+        </p:nvSpPr>
+        <p:spPr>
+          <a:xfrm>
+            <a:off x="4297680" y="3419856"/>
+            <a:ext cx="7315200" cy="777240"/>
+          </a:xfrm>
+          <a:prstGeom prst="rect">
+            <a:avLst/>
+          </a:prstGeom>
+          <a:noFill/>
+          <a:ln/>
+        </p:spPr>
+        <p:txBody>
+          <a:bodyPr wrap="square" rtlCol="0" anchor="ctr"/>
+          <a:lstStyle/>
+          <a:p>
+            <a:pPr indent="0" marL="0">
+              <a:buNone/>
+            </a:pPr>
+            <a:r>
+              <a:rPr lang="en-US" sz="1250" dirty="0">
+                <a:solidFill>
+                  <a:srgbClr val="1A1A1A"/>
+                </a:solidFill>
+                <a:latin typeface="Calibri" pitchFamily="34" charset="0"/>
+                <a:ea typeface="Calibri" pitchFamily="34" charset="-122"/>
+                <a:cs typeface="Calibri" pitchFamily="34" charset="-120"/>
+              </a:rPr>
+              <a:t>VPN + MFA for every session; USB disabled on regulated-data endpoints</a:t>
+            </a:r>
+            <a:endParaRPr lang="en-US" sz="1250" dirty="0"/>
+          </a:p>
+        </p:txBody>
+      </p:sp>
+      <p:sp>
+        <p:nvSpPr>
+          <p:cNvPr id="13" name="Shape 11"/>
           <p:cNvSpPr/>
           <p:nvPr/>
         </p:nvSpPr>
         <p:spPr>
           <a:xfrm>
-            <a:off x="3584448" y="2331720"/>
-            <a:ext cx="512064" cy="512064"/>
-          </a:xfrm>
-          <a:prstGeom prst="ellipse">
+            <a:off x="548640" y="4334256"/>
+            <a:ext cx="73152" cy="640080"/>
+          </a:xfrm>
+          <a:prstGeom prst="rect">
             <a:avLst/>
           </a:prstGeom>
           <a:solidFill>
-            <a:srgbClr val="3B4A9E"/>
+            <a:srgbClr val="1E2761"/>
           </a:solidFill>
           <a:ln/>
         </p:spPr>
       </p:sp>
       <p:sp>
         <p:nvSpPr>
-          <p:cNvPr id="12" name="Text 10"/>
-          <p:cNvSpPr txBox="1"/>
-          <p:nvPr/>
-        </p:nvSpPr>
-        <p:spPr>
-          <a:xfrm>
-            <a:off x="3584448" y="2331720"/>
-            <a:ext cx="512064" cy="512064"/>
+          <p:cNvPr id="14" name="Text 12"/>
+          <p:cNvSpPr txBox="1"/>
+          <p:nvPr/>
+        </p:nvSpPr>
+        <p:spPr>
+          <a:xfrm>
+            <a:off x="868680" y="4261104"/>
+            <a:ext cx="3291840" cy="777240"/>
           </a:xfrm>
           <a:prstGeom prst="rect">
             <a:avLst/>
@@ -6749,58 +6752,19 @@
           <a:bodyPr wrap="square" rtlCol="0" anchor="ctr"/>
           <a:lstStyle/>
           <a:p>
-            <a:pPr algn="ctr" indent="0" marL="0">
-              <a:buNone/>
-            </a:pPr>
-            <a:r>
-              <a:rPr lang="en-US" sz="1500" b="1" dirty="0">
-                <a:solidFill>
-                  <a:srgbClr val="FFFFFF"/>
-                </a:solidFill>
-                <a:latin typeface="Cambria" pitchFamily="34" charset="0"/>
-                <a:ea typeface="Cambria" pitchFamily="34" charset="-122"/>
-                <a:cs typeface="Cambria" pitchFamily="34" charset="-120"/>
-              </a:rPr>
-              <a:t>2</a:t>
-            </a:r>
-            <a:endParaRPr lang="en-US" sz="1500" dirty="0"/>
-          </a:p>
-        </p:txBody>
-      </p:sp>
-      <p:sp>
-        <p:nvSpPr>
-          <p:cNvPr id="13" name="Text 11"/>
-          <p:cNvSpPr txBox="1"/>
-          <p:nvPr/>
-        </p:nvSpPr>
-        <p:spPr>
-          <a:xfrm>
-            <a:off x="2926080" y="2971800"/>
-            <a:ext cx="1828800" cy="365760"/>
-          </a:xfrm>
-          <a:prstGeom prst="rect">
-            <a:avLst/>
-          </a:prstGeom>
-          <a:noFill/>
-          <a:ln/>
-        </p:spPr>
-        <p:txBody>
-          <a:bodyPr wrap="square" lIns="0" tIns="0" rIns="0" bIns="0" rtlCol="0" anchor="ctr"/>
-          <a:lstStyle/>
-          <a:p>
-            <a:pPr algn="ctr" indent="0" marL="0">
+            <a:pPr indent="0" marL="0">
               <a:buNone/>
             </a:pPr>
             <a:r>
               <a:rPr lang="en-US" sz="1400" b="1" dirty="0">
                 <a:solidFill>
-                  <a:srgbClr val="3B4A9E"/>
-                </a:solidFill>
-                <a:latin typeface="Calibri" pitchFamily="34" charset="0"/>
-                <a:ea typeface="Calibri" pitchFamily="34" charset="-122"/>
-                <a:cs typeface="Calibri" pitchFamily="34" charset="-120"/>
-              </a:rPr>
-              <a:t>Investigate</a:t>
+                  <a:srgbClr val="1E2761"/>
+                </a:solidFill>
+                <a:latin typeface="Calibri" pitchFamily="34" charset="0"/>
+                <a:ea typeface="Calibri" pitchFamily="34" charset="-122"/>
+                <a:cs typeface="Calibri" pitchFamily="34" charset="-120"/>
+              </a:rPr>
+              <a:t>Third-Party / Vendor (B2B)</a:t>
             </a:r>
             <a:endParaRPr lang="en-US" sz="1400" dirty="0"/>
           </a:p>
@@ -6808,30 +6772,30 @@
       </p:sp>
       <p:sp>
         <p:nvSpPr>
-          <p:cNvPr id="14" name="Text 12"/>
-          <p:cNvSpPr txBox="1"/>
-          <p:nvPr/>
-        </p:nvSpPr>
-        <p:spPr>
-          <a:xfrm>
-            <a:off x="2926080" y="3364992"/>
-            <a:ext cx="1828800" cy="914400"/>
-          </a:xfrm>
-          <a:prstGeom prst="rect">
-            <a:avLst/>
-          </a:prstGeom>
-          <a:noFill/>
-          <a:ln/>
-        </p:spPr>
-        <p:txBody>
-          <a:bodyPr wrap="square" lIns="0" tIns="0" rIns="0" bIns="0" rtlCol="0" anchor="ctr"/>
-          <a:lstStyle/>
-          <a:p>
-            <a:pPr algn="ctr" indent="0" marL="0">
-              <a:buNone/>
-            </a:pPr>
-            <a:r>
-              <a:rPr lang="en-US" sz="1050" dirty="0">
+          <p:cNvPr id="15" name="Text 13"/>
+          <p:cNvSpPr txBox="1"/>
+          <p:nvPr/>
+        </p:nvSpPr>
+        <p:spPr>
+          <a:xfrm>
+            <a:off x="4297680" y="4261104"/>
+            <a:ext cx="7315200" cy="777240"/>
+          </a:xfrm>
+          <a:prstGeom prst="rect">
+            <a:avLst/>
+          </a:prstGeom>
+          <a:noFill/>
+          <a:ln/>
+        </p:spPr>
+        <p:txBody>
+          <a:bodyPr wrap="square" rtlCol="0" anchor="ctr"/>
+          <a:lstStyle/>
+          <a:p>
+            <a:pPr indent="0" marL="0">
+              <a:buNone/>
+            </a:pPr>
+            <a:r>
+              <a:rPr lang="en-US" sz="1250" dirty="0">
                 <a:solidFill>
                   <a:srgbClr val="1A1A1A"/>
                 </a:solidFill>
@@ -6839,48 +6803,9 @@
                 <a:ea typeface="Calibri" pitchFamily="34" charset="-122"/>
                 <a:cs typeface="Calibri" pitchFamily="34" charset="-120"/>
               </a:rPr>
-              <a:t>Cross-functional IR team, forensic investigation</a:t>
-            </a:r>
-            <a:endParaRPr lang="en-US" sz="1050" dirty="0"/>
-          </a:p>
-        </p:txBody>
-      </p:sp>
-      <p:sp>
-        <p:nvSpPr>
-          <p:cNvPr id="15" name="Text 13"/>
-          <p:cNvSpPr txBox="1"/>
-          <p:nvPr/>
-        </p:nvSpPr>
-        <p:spPr>
-          <a:xfrm>
-            <a:off x="4892040" y="3063240"/>
-            <a:ext cx="182880" cy="365760"/>
-          </a:xfrm>
-          <a:prstGeom prst="rect">
-            <a:avLst/>
-          </a:prstGeom>
-          <a:noFill/>
-          <a:ln/>
-        </p:spPr>
-        <p:txBody>
-          <a:bodyPr wrap="square" lIns="0" tIns="0" rIns="0" bIns="0" rtlCol="0" anchor="ctr"/>
-          <a:lstStyle/>
-          <a:p>
-            <a:pPr algn="ctr" indent="0" marL="0">
-              <a:buNone/>
-            </a:pPr>
-            <a:r>
-              <a:rPr lang="en-US" sz="1600" dirty="0">
-                <a:solidFill>
-                  <a:srgbClr val="6B7280"/>
-                </a:solidFill>
-                <a:latin typeface="Calibri" pitchFamily="34" charset="0"/>
-                <a:ea typeface="Calibri" pitchFamily="34" charset="-122"/>
-                <a:cs typeface="Calibri" pitchFamily="34" charset="-120"/>
-              </a:rPr>
-              <a:t>→</a:t>
-            </a:r>
-            <a:endParaRPr lang="en-US" sz="1600" dirty="0"/>
+              <a:t>GlobalTech and future partners onboarded under the same RBAC &amp; segmentation rules</a:t>
+            </a:r>
+            <a:endParaRPr lang="en-US" sz="1250" dirty="0"/>
           </a:p>
         </p:txBody>
       </p:sp>
@@ -6892,44 +6817,56 @@
         </p:nvSpPr>
         <p:spPr>
           <a:xfrm>
-            <a:off x="5029200" y="2103120"/>
-            <a:ext cx="2103120" cy="2286000"/>
-          </a:xfrm>
-          <a:prstGeom prst="roundRect">
-            <a:avLst>
-              <a:gd name="adj" fmla="val 4348"/>
-            </a:avLst>
+            <a:off x="548640" y="5175504"/>
+            <a:ext cx="73152" cy="640080"/>
+          </a:xfrm>
+          <a:prstGeom prst="rect">
+            <a:avLst/>
           </a:prstGeom>
           <a:solidFill>
-            <a:srgbClr val="FFFFFF"/>
+            <a:srgbClr val="1E2761"/>
           </a:solidFill>
-          <a:ln w="19050">
-            <a:solidFill>
-              <a:srgbClr val="C9A227"/>
-            </a:solidFill>
-            <a:prstDash val="solid"/>
-          </a:ln>
-        </p:spPr>
-      </p:sp>
-      <p:sp>
-        <p:nvSpPr>
-          <p:cNvPr id="17" name="Shape 15"/>
-          <p:cNvSpPr/>
-          <p:nvPr/>
-        </p:nvSpPr>
-        <p:spPr>
-          <a:xfrm>
-            <a:off x="5824728" y="2331720"/>
-            <a:ext cx="512064" cy="512064"/>
-          </a:xfrm>
-          <a:prstGeom prst="ellipse">
-            <a:avLst/>
-          </a:prstGeom>
-          <a:solidFill>
-            <a:srgbClr val="C9A227"/>
-          </a:solidFill>
-          <a:ln/>
-        </p:spPr>
+          <a:ln/>
+        </p:spPr>
+      </p:sp>
+      <p:sp>
+        <p:nvSpPr>
+          <p:cNvPr id="17" name="Text 15"/>
+          <p:cNvSpPr txBox="1"/>
+          <p:nvPr/>
+        </p:nvSpPr>
+        <p:spPr>
+          <a:xfrm>
+            <a:off x="868680" y="5102352"/>
+            <a:ext cx="3291840" cy="777240"/>
+          </a:xfrm>
+          <a:prstGeom prst="rect">
+            <a:avLst/>
+          </a:prstGeom>
+          <a:noFill/>
+          <a:ln/>
+        </p:spPr>
+        <p:txBody>
+          <a:bodyPr wrap="square" rtlCol="0" anchor="ctr"/>
+          <a:lstStyle/>
+          <a:p>
+            <a:pPr indent="0" marL="0">
+              <a:buNone/>
+            </a:pPr>
+            <a:r>
+              <a:rPr lang="en-US" sz="1400" b="1" dirty="0">
+                <a:solidFill>
+                  <a:srgbClr val="1E2761"/>
+                </a:solidFill>
+                <a:latin typeface="Calibri" pitchFamily="34" charset="0"/>
+                <a:ea typeface="Calibri" pitchFamily="34" charset="-122"/>
+                <a:cs typeface="Calibri" pitchFamily="34" charset="-120"/>
+              </a:rPr>
+              <a:t>Compliance &amp; Auditing</a:t>
+            </a:r>
+            <a:endParaRPr lang="en-US" sz="1400" dirty="0"/>
+          </a:p>
+        </p:txBody>
       </p:sp>
       <p:sp>
         <p:nvSpPr>
@@ -6939,8 +6876,8 @@
         </p:nvSpPr>
         <p:spPr>
           <a:xfrm>
-            <a:off x="5824728" y="2331720"/>
-            <a:ext cx="512064" cy="512064"/>
+            <a:off x="4297680" y="5102352"/>
+            <a:ext cx="7315200" cy="777240"/>
           </a:xfrm>
           <a:prstGeom prst="rect">
             <a:avLst/>
@@ -6952,550 +6889,27 @@
           <a:bodyPr wrap="square" rtlCol="0" anchor="ctr"/>
           <a:lstStyle/>
           <a:p>
-            <a:pPr algn="ctr" indent="0" marL="0">
-              <a:buNone/>
-            </a:pPr>
-            <a:r>
-              <a:rPr lang="en-US" sz="1500" b="1" dirty="0">
-                <a:solidFill>
-                  <a:srgbClr val="FFFFFF"/>
-                </a:solidFill>
-                <a:latin typeface="Cambria" pitchFamily="34" charset="0"/>
-                <a:ea typeface="Cambria" pitchFamily="34" charset="-122"/>
-                <a:cs typeface="Cambria" pitchFamily="34" charset="-120"/>
-              </a:rPr>
-              <a:t>3</a:t>
-            </a:r>
-            <a:endParaRPr lang="en-US" sz="1500" dirty="0"/>
+            <a:pPr indent="0" marL="0">
+              <a:buNone/>
+            </a:pPr>
+            <a:r>
+              <a:rPr lang="en-US" sz="1250" dirty="0">
+                <a:solidFill>
+                  <a:srgbClr val="1A1A1A"/>
+                </a:solidFill>
+                <a:latin typeface="Calibri" pitchFamily="34" charset="0"/>
+                <a:ea typeface="Calibri" pitchFamily="34" charset="-122"/>
+                <a:cs typeface="Calibri" pitchFamily="34" charset="-120"/>
+              </a:rPr>
+              <a:t>SOX, PCI DSS, and GLBA controls verified on a recurring schedule</a:t>
+            </a:r>
+            <a:endParaRPr lang="en-US" sz="1250" dirty="0"/>
           </a:p>
         </p:txBody>
       </p:sp>
       <p:sp>
         <p:nvSpPr>
           <p:cNvPr id="19" name="Text 17"/>
-          <p:cNvSpPr txBox="1"/>
-          <p:nvPr/>
-        </p:nvSpPr>
-        <p:spPr>
-          <a:xfrm>
-            <a:off x="5166360" y="2971800"/>
-            <a:ext cx="1828800" cy="365760"/>
-          </a:xfrm>
-          <a:prstGeom prst="rect">
-            <a:avLst/>
-          </a:prstGeom>
-          <a:noFill/>
-          <a:ln/>
-        </p:spPr>
-        <p:txBody>
-          <a:bodyPr wrap="square" lIns="0" tIns="0" rIns="0" bIns="0" rtlCol="0" anchor="ctr"/>
-          <a:lstStyle/>
-          <a:p>
-            <a:pPr algn="ctr" indent="0" marL="0">
-              <a:buNone/>
-            </a:pPr>
-            <a:r>
-              <a:rPr lang="en-US" sz="1400" b="1" dirty="0">
-                <a:solidFill>
-                  <a:srgbClr val="C9A227"/>
-                </a:solidFill>
-                <a:latin typeface="Calibri" pitchFamily="34" charset="0"/>
-                <a:ea typeface="Calibri" pitchFamily="34" charset="-122"/>
-                <a:cs typeface="Calibri" pitchFamily="34" charset="-120"/>
-              </a:rPr>
-              <a:t>Notify</a:t>
-            </a:r>
-            <a:endParaRPr lang="en-US" sz="1400" dirty="0"/>
-          </a:p>
-        </p:txBody>
-      </p:sp>
-      <p:sp>
-        <p:nvSpPr>
-          <p:cNvPr id="20" name="Text 18"/>
-          <p:cNvSpPr txBox="1"/>
-          <p:nvPr/>
-        </p:nvSpPr>
-        <p:spPr>
-          <a:xfrm>
-            <a:off x="5166360" y="3364992"/>
-            <a:ext cx="1828800" cy="914400"/>
-          </a:xfrm>
-          <a:prstGeom prst="rect">
-            <a:avLst/>
-          </a:prstGeom>
-          <a:noFill/>
-          <a:ln/>
-        </p:spPr>
-        <p:txBody>
-          <a:bodyPr wrap="square" lIns="0" tIns="0" rIns="0" bIns="0" rtlCol="0" anchor="ctr"/>
-          <a:lstStyle/>
-          <a:p>
-            <a:pPr algn="ctr" indent="0" marL="0">
-              <a:buNone/>
-            </a:pPr>
-            <a:r>
-              <a:rPr lang="en-US" sz="1050" dirty="0">
-                <a:solidFill>
-                  <a:srgbClr val="1A1A1A"/>
-                </a:solidFill>
-                <a:latin typeface="Calibri" pitchFamily="34" charset="0"/>
-                <a:ea typeface="Calibri" pitchFamily="34" charset="-122"/>
-                <a:cs typeface="Calibri" pitchFamily="34" charset="-120"/>
-              </a:rPr>
-              <a:t>Affected clients, including GlobalTech, informed promptly</a:t>
-            </a:r>
-            <a:endParaRPr lang="en-US" sz="1050" dirty="0"/>
-          </a:p>
-        </p:txBody>
-      </p:sp>
-      <p:sp>
-        <p:nvSpPr>
-          <p:cNvPr id="21" name="Text 19"/>
-          <p:cNvSpPr txBox="1"/>
-          <p:nvPr/>
-        </p:nvSpPr>
-        <p:spPr>
-          <a:xfrm>
-            <a:off x="7132320" y="3063240"/>
-            <a:ext cx="182880" cy="365760"/>
-          </a:xfrm>
-          <a:prstGeom prst="rect">
-            <a:avLst/>
-          </a:prstGeom>
-          <a:noFill/>
-          <a:ln/>
-        </p:spPr>
-        <p:txBody>
-          <a:bodyPr wrap="square" lIns="0" tIns="0" rIns="0" bIns="0" rtlCol="0" anchor="ctr"/>
-          <a:lstStyle/>
-          <a:p>
-            <a:pPr algn="ctr" indent="0" marL="0">
-              <a:buNone/>
-            </a:pPr>
-            <a:r>
-              <a:rPr lang="en-US" sz="1600" dirty="0">
-                <a:solidFill>
-                  <a:srgbClr val="6B7280"/>
-                </a:solidFill>
-                <a:latin typeface="Calibri" pitchFamily="34" charset="0"/>
-                <a:ea typeface="Calibri" pitchFamily="34" charset="-122"/>
-                <a:cs typeface="Calibri" pitchFamily="34" charset="-120"/>
-              </a:rPr>
-              <a:t>→</a:t>
-            </a:r>
-            <a:endParaRPr lang="en-US" sz="1600" dirty="0"/>
-          </a:p>
-        </p:txBody>
-      </p:sp>
-      <p:sp>
-        <p:nvSpPr>
-          <p:cNvPr id="22" name="Shape 20"/>
-          <p:cNvSpPr/>
-          <p:nvPr/>
-        </p:nvSpPr>
-        <p:spPr>
-          <a:xfrm>
-            <a:off x="7269480" y="2103120"/>
-            <a:ext cx="2103120" cy="2286000"/>
-          </a:xfrm>
-          <a:prstGeom prst="roundRect">
-            <a:avLst>
-              <a:gd name="adj" fmla="val 4348"/>
-            </a:avLst>
-          </a:prstGeom>
-          <a:solidFill>
-            <a:srgbClr val="FFFFFF"/>
-          </a:solidFill>
-          <a:ln w="19050">
-            <a:solidFill>
-              <a:srgbClr val="2F9E56"/>
-            </a:solidFill>
-            <a:prstDash val="solid"/>
-          </a:ln>
-        </p:spPr>
-      </p:sp>
-      <p:sp>
-        <p:nvSpPr>
-          <p:cNvPr id="23" name="Shape 21"/>
-          <p:cNvSpPr/>
-          <p:nvPr/>
-        </p:nvSpPr>
-        <p:spPr>
-          <a:xfrm>
-            <a:off x="8065008" y="2331720"/>
-            <a:ext cx="512064" cy="512064"/>
-          </a:xfrm>
-          <a:prstGeom prst="ellipse">
-            <a:avLst/>
-          </a:prstGeom>
-          <a:solidFill>
-            <a:srgbClr val="2F9E56"/>
-          </a:solidFill>
-          <a:ln/>
-        </p:spPr>
-      </p:sp>
-      <p:sp>
-        <p:nvSpPr>
-          <p:cNvPr id="24" name="Text 22"/>
-          <p:cNvSpPr txBox="1"/>
-          <p:nvPr/>
-        </p:nvSpPr>
-        <p:spPr>
-          <a:xfrm>
-            <a:off x="8065008" y="2331720"/>
-            <a:ext cx="512064" cy="512064"/>
-          </a:xfrm>
-          <a:prstGeom prst="rect">
-            <a:avLst/>
-          </a:prstGeom>
-          <a:noFill/>
-          <a:ln/>
-        </p:spPr>
-        <p:txBody>
-          <a:bodyPr wrap="square" rtlCol="0" anchor="ctr"/>
-          <a:lstStyle/>
-          <a:p>
-            <a:pPr algn="ctr" indent="0" marL="0">
-              <a:buNone/>
-            </a:pPr>
-            <a:r>
-              <a:rPr lang="en-US" sz="1500" b="1" dirty="0">
-                <a:solidFill>
-                  <a:srgbClr val="FFFFFF"/>
-                </a:solidFill>
-                <a:latin typeface="Cambria" pitchFamily="34" charset="0"/>
-                <a:ea typeface="Cambria" pitchFamily="34" charset="-122"/>
-                <a:cs typeface="Cambria" pitchFamily="34" charset="-120"/>
-              </a:rPr>
-              <a:t>4</a:t>
-            </a:r>
-            <a:endParaRPr lang="en-US" sz="1500" dirty="0"/>
-          </a:p>
-        </p:txBody>
-      </p:sp>
-      <p:sp>
-        <p:nvSpPr>
-          <p:cNvPr id="25" name="Text 23"/>
-          <p:cNvSpPr txBox="1"/>
-          <p:nvPr/>
-        </p:nvSpPr>
-        <p:spPr>
-          <a:xfrm>
-            <a:off x="7406640" y="2971800"/>
-            <a:ext cx="1828800" cy="365760"/>
-          </a:xfrm>
-          <a:prstGeom prst="rect">
-            <a:avLst/>
-          </a:prstGeom>
-          <a:noFill/>
-          <a:ln/>
-        </p:spPr>
-        <p:txBody>
-          <a:bodyPr wrap="square" lIns="0" tIns="0" rIns="0" bIns="0" rtlCol="0" anchor="ctr"/>
-          <a:lstStyle/>
-          <a:p>
-            <a:pPr algn="ctr" indent="0" marL="0">
-              <a:buNone/>
-            </a:pPr>
-            <a:r>
-              <a:rPr lang="en-US" sz="1400" b="1" dirty="0">
-                <a:solidFill>
-                  <a:srgbClr val="2F9E56"/>
-                </a:solidFill>
-                <a:latin typeface="Calibri" pitchFamily="34" charset="0"/>
-                <a:ea typeface="Calibri" pitchFamily="34" charset="-122"/>
-                <a:cs typeface="Calibri" pitchFamily="34" charset="-120"/>
-              </a:rPr>
-              <a:t>Recover</a:t>
-            </a:r>
-            <a:endParaRPr lang="en-US" sz="1400" dirty="0"/>
-          </a:p>
-        </p:txBody>
-      </p:sp>
-      <p:sp>
-        <p:nvSpPr>
-          <p:cNvPr id="26" name="Text 24"/>
-          <p:cNvSpPr txBox="1"/>
-          <p:nvPr/>
-        </p:nvSpPr>
-        <p:spPr>
-          <a:xfrm>
-            <a:off x="7406640" y="3364992"/>
-            <a:ext cx="1828800" cy="914400"/>
-          </a:xfrm>
-          <a:prstGeom prst="rect">
-            <a:avLst/>
-          </a:prstGeom>
-          <a:noFill/>
-          <a:ln/>
-        </p:spPr>
-        <p:txBody>
-          <a:bodyPr wrap="square" lIns="0" tIns="0" rIns="0" bIns="0" rtlCol="0" anchor="ctr"/>
-          <a:lstStyle/>
-          <a:p>
-            <a:pPr algn="ctr" indent="0" marL="0">
-              <a:buNone/>
-            </a:pPr>
-            <a:r>
-              <a:rPr lang="en-US" sz="1050" dirty="0">
-                <a:solidFill>
-                  <a:srgbClr val="1A1A1A"/>
-                </a:solidFill>
-                <a:latin typeface="Calibri" pitchFamily="34" charset="0"/>
-                <a:ea typeface="Calibri" pitchFamily="34" charset="-122"/>
-                <a:cs typeface="Calibri" pitchFamily="34" charset="-120"/>
-              </a:rPr>
-              <a:t>Restored from backup; deployed WAF, dedicated CDE, new AAA+MFA</a:t>
-            </a:r>
-            <a:endParaRPr lang="en-US" sz="1050" dirty="0"/>
-          </a:p>
-        </p:txBody>
-      </p:sp>
-      <p:sp>
-        <p:nvSpPr>
-          <p:cNvPr id="27" name="Text 25"/>
-          <p:cNvSpPr txBox="1"/>
-          <p:nvPr/>
-        </p:nvSpPr>
-        <p:spPr>
-          <a:xfrm>
-            <a:off x="9372600" y="3063240"/>
-            <a:ext cx="182880" cy="365760"/>
-          </a:xfrm>
-          <a:prstGeom prst="rect">
-            <a:avLst/>
-          </a:prstGeom>
-          <a:noFill/>
-          <a:ln/>
-        </p:spPr>
-        <p:txBody>
-          <a:bodyPr wrap="square" lIns="0" tIns="0" rIns="0" bIns="0" rtlCol="0" anchor="ctr"/>
-          <a:lstStyle/>
-          <a:p>
-            <a:pPr algn="ctr" indent="0" marL="0">
-              <a:buNone/>
-            </a:pPr>
-            <a:r>
-              <a:rPr lang="en-US" sz="1600" dirty="0">
-                <a:solidFill>
-                  <a:srgbClr val="6B7280"/>
-                </a:solidFill>
-                <a:latin typeface="Calibri" pitchFamily="34" charset="0"/>
-                <a:ea typeface="Calibri" pitchFamily="34" charset="-122"/>
-                <a:cs typeface="Calibri" pitchFamily="34" charset="-120"/>
-              </a:rPr>
-              <a:t>→</a:t>
-            </a:r>
-            <a:endParaRPr lang="en-US" sz="1600" dirty="0"/>
-          </a:p>
-        </p:txBody>
-      </p:sp>
-      <p:sp>
-        <p:nvSpPr>
-          <p:cNvPr id="28" name="Shape 26"/>
-          <p:cNvSpPr/>
-          <p:nvPr/>
-        </p:nvSpPr>
-        <p:spPr>
-          <a:xfrm>
-            <a:off x="9509760" y="2103120"/>
-            <a:ext cx="2103120" cy="2286000"/>
-          </a:xfrm>
-          <a:prstGeom prst="roundRect">
-            <a:avLst>
-              <a:gd name="adj" fmla="val 4348"/>
-            </a:avLst>
-          </a:prstGeom>
-          <a:solidFill>
-            <a:srgbClr val="FFFFFF"/>
-          </a:solidFill>
-          <a:ln w="19050">
-            <a:solidFill>
-              <a:srgbClr val="C94F4F"/>
-            </a:solidFill>
-            <a:prstDash val="solid"/>
-          </a:ln>
-        </p:spPr>
-      </p:sp>
-      <p:sp>
-        <p:nvSpPr>
-          <p:cNvPr id="29" name="Shape 27"/>
-          <p:cNvSpPr/>
-          <p:nvPr/>
-        </p:nvSpPr>
-        <p:spPr>
-          <a:xfrm>
-            <a:off x="10305288" y="2331720"/>
-            <a:ext cx="512064" cy="512064"/>
-          </a:xfrm>
-          <a:prstGeom prst="ellipse">
-            <a:avLst/>
-          </a:prstGeom>
-          <a:solidFill>
-            <a:srgbClr val="C94F4F"/>
-          </a:solidFill>
-          <a:ln/>
-        </p:spPr>
-      </p:sp>
-      <p:sp>
-        <p:nvSpPr>
-          <p:cNvPr id="30" name="Text 28"/>
-          <p:cNvSpPr txBox="1"/>
-          <p:nvPr/>
-        </p:nvSpPr>
-        <p:spPr>
-          <a:xfrm>
-            <a:off x="10305288" y="2331720"/>
-            <a:ext cx="512064" cy="512064"/>
-          </a:xfrm>
-          <a:prstGeom prst="rect">
-            <a:avLst/>
-          </a:prstGeom>
-          <a:noFill/>
-          <a:ln/>
-        </p:spPr>
-        <p:txBody>
-          <a:bodyPr wrap="square" rtlCol="0" anchor="ctr"/>
-          <a:lstStyle/>
-          <a:p>
-            <a:pPr algn="ctr" indent="0" marL="0">
-              <a:buNone/>
-            </a:pPr>
-            <a:r>
-              <a:rPr lang="en-US" sz="1500" b="1" dirty="0">
-                <a:solidFill>
-                  <a:srgbClr val="FFFFFF"/>
-                </a:solidFill>
-                <a:latin typeface="Cambria" pitchFamily="34" charset="0"/>
-                <a:ea typeface="Cambria" pitchFamily="34" charset="-122"/>
-                <a:cs typeface="Cambria" pitchFamily="34" charset="-120"/>
-              </a:rPr>
-              <a:t>5</a:t>
-            </a:r>
-            <a:endParaRPr lang="en-US" sz="1500" dirty="0"/>
-          </a:p>
-        </p:txBody>
-      </p:sp>
-      <p:sp>
-        <p:nvSpPr>
-          <p:cNvPr id="31" name="Text 29"/>
-          <p:cNvSpPr txBox="1"/>
-          <p:nvPr/>
-        </p:nvSpPr>
-        <p:spPr>
-          <a:xfrm>
-            <a:off x="9646920" y="2971800"/>
-            <a:ext cx="1828800" cy="365760"/>
-          </a:xfrm>
-          <a:prstGeom prst="rect">
-            <a:avLst/>
-          </a:prstGeom>
-          <a:noFill/>
-          <a:ln/>
-        </p:spPr>
-        <p:txBody>
-          <a:bodyPr wrap="square" lIns="0" tIns="0" rIns="0" bIns="0" rtlCol="0" anchor="ctr"/>
-          <a:lstStyle/>
-          <a:p>
-            <a:pPr algn="ctr" indent="0" marL="0">
-              <a:buNone/>
-            </a:pPr>
-            <a:r>
-              <a:rPr lang="en-US" sz="1400" b="1" dirty="0">
-                <a:solidFill>
-                  <a:srgbClr val="C94F4F"/>
-                </a:solidFill>
-                <a:latin typeface="Calibri" pitchFamily="34" charset="0"/>
-                <a:ea typeface="Calibri" pitchFamily="34" charset="-122"/>
-                <a:cs typeface="Calibri" pitchFamily="34" charset="-120"/>
-              </a:rPr>
-              <a:t>Review</a:t>
-            </a:r>
-            <a:endParaRPr lang="en-US" sz="1400" dirty="0"/>
-          </a:p>
-        </p:txBody>
-      </p:sp>
-      <p:sp>
-        <p:nvSpPr>
-          <p:cNvPr id="32" name="Text 30"/>
-          <p:cNvSpPr txBox="1"/>
-          <p:nvPr/>
-        </p:nvSpPr>
-        <p:spPr>
-          <a:xfrm>
-            <a:off x="9646920" y="3364992"/>
-            <a:ext cx="1828800" cy="914400"/>
-          </a:xfrm>
-          <a:prstGeom prst="rect">
-            <a:avLst/>
-          </a:prstGeom>
-          <a:noFill/>
-          <a:ln/>
-        </p:spPr>
-        <p:txBody>
-          <a:bodyPr wrap="square" lIns="0" tIns="0" rIns="0" bIns="0" rtlCol="0" anchor="ctr"/>
-          <a:lstStyle/>
-          <a:p>
-            <a:pPr algn="ctr" indent="0" marL="0">
-              <a:buNone/>
-            </a:pPr>
-            <a:r>
-              <a:rPr lang="en-US" sz="1050" dirty="0">
-                <a:solidFill>
-                  <a:srgbClr val="1A1A1A"/>
-                </a:solidFill>
-                <a:latin typeface="Calibri" pitchFamily="34" charset="0"/>
-                <a:ea typeface="Calibri" pitchFamily="34" charset="-122"/>
-                <a:cs typeface="Calibri" pitchFamily="34" charset="-120"/>
-              </a:rPr>
-              <a:t>Independent third-party compliance audit</a:t>
-            </a:r>
-            <a:endParaRPr lang="en-US" sz="1050" dirty="0"/>
-          </a:p>
-        </p:txBody>
-      </p:sp>
-      <p:sp>
-        <p:nvSpPr>
-          <p:cNvPr id="33" name="Text 31"/>
-          <p:cNvSpPr txBox="1"/>
-          <p:nvPr/>
-        </p:nvSpPr>
-        <p:spPr>
-          <a:xfrm>
-            <a:off x="548640" y="4709160"/>
-            <a:ext cx="11109960" cy="822960"/>
-          </a:xfrm>
-          <a:prstGeom prst="rect">
-            <a:avLst/>
-          </a:prstGeom>
-          <a:noFill/>
-          <a:ln/>
-        </p:spPr>
-        <p:txBody>
-          <a:bodyPr wrap="square" rtlCol="0" anchor="ctr"/>
-          <a:lstStyle/>
-          <a:p>
-            <a:pPr indent="0" marL="0">
-              <a:buNone/>
-            </a:pPr>
-            <a:r>
-              <a:rPr lang="en-US" sz="1250" i="1" dirty="0">
-                <a:solidFill>
-                  <a:srgbClr val="1E2761"/>
-                </a:solidFill>
-                <a:latin typeface="Calibri" pitchFamily="34" charset="0"/>
-                <a:ea typeface="Calibri" pitchFamily="34" charset="-122"/>
-                <a:cs typeface="Calibri" pitchFamily="34" charset="-120"/>
-              </a:rPr>
-              <a:t>Lessons learned: stronger vulnerability management, a documented IR plan, retuned SIEM alerting, and specialized IT training on distinguishing false positives from real incidents.</a:t>
-            </a:r>
-            <a:endParaRPr lang="en-US" sz="1250" dirty="0"/>
-          </a:p>
-        </p:txBody>
-      </p:sp>
-      <p:sp>
-        <p:nvSpPr>
-          <p:cNvPr id="34" name="Text 32"/>
           <p:cNvSpPr txBox="1"/>
           <p:nvPr/>
         </p:nvSpPr>
@@ -7534,7 +6948,7 @@
       </p:sp>
       <p:sp>
         <p:nvSpPr>
-          <p:cNvPr id="35" name="Text 33"/>
+          <p:cNvPr id="20" name="Text 18"/>
           <p:cNvSpPr txBox="1"/>
           <p:nvPr/>
         </p:nvSpPr>
@@ -7629,6 +7043,1202 @@
                 <a:ea typeface="Calibri" pitchFamily="34" charset="-122"/>
                 <a:cs typeface="Calibri" pitchFamily="34" charset="-120"/>
               </a:rPr>
+              <a:t>INCIDENT RESPONSE</a:t>
+            </a:r>
+            <a:endParaRPr lang="en-US" sz="1200" dirty="0"/>
+          </a:p>
+        </p:txBody>
+      </p:sp>
+      <p:sp>
+        <p:nvSpPr>
+          <p:cNvPr id="3" name="Text 1"/>
+          <p:cNvSpPr txBox="1"/>
+          <p:nvPr/>
+        </p:nvSpPr>
+        <p:spPr>
+          <a:xfrm>
+            <a:off x="548640" y="658368"/>
+            <a:ext cx="11064240" cy="822960"/>
+          </a:xfrm>
+          <a:prstGeom prst="rect">
+            <a:avLst/>
+          </a:prstGeom>
+          <a:noFill/>
+          <a:ln/>
+        </p:spPr>
+        <p:txBody>
+          <a:bodyPr wrap="square" rtlCol="0" anchor="ctr"/>
+          <a:lstStyle/>
+          <a:p>
+            <a:pPr indent="0" marL="0">
+              <a:buNone/>
+            </a:pPr>
+            <a:r>
+              <a:rPr lang="en-US" sz="3200" b="1" dirty="0">
+                <a:solidFill>
+                  <a:srgbClr val="1A1A1A"/>
+                </a:solidFill>
+                <a:latin typeface="Cambria" pitchFamily="34" charset="0"/>
+                <a:ea typeface="Cambria" pitchFamily="34" charset="-122"/>
+                <a:cs typeface="Cambria" pitchFamily="34" charset="-120"/>
+              </a:rPr>
+              <a:t>How We Responded to the Breach</a:t>
+            </a:r>
+            <a:endParaRPr lang="en-US" sz="3200" dirty="0"/>
+          </a:p>
+        </p:txBody>
+      </p:sp>
+      <p:sp>
+        <p:nvSpPr>
+          <p:cNvPr id="4" name="Shape 2"/>
+          <p:cNvSpPr/>
+          <p:nvPr/>
+        </p:nvSpPr>
+        <p:spPr>
+          <a:xfrm>
+            <a:off x="548640" y="2103120"/>
+            <a:ext cx="2103120" cy="2286000"/>
+          </a:xfrm>
+          <a:prstGeom prst="roundRect">
+            <a:avLst>
+              <a:gd name="adj" fmla="val 4348"/>
+            </a:avLst>
+          </a:prstGeom>
+          <a:solidFill>
+            <a:srgbClr val="FFFFFF"/>
+          </a:solidFill>
+          <a:ln w="19050">
+            <a:solidFill>
+              <a:srgbClr val="1E2761"/>
+            </a:solidFill>
+            <a:prstDash val="solid"/>
+          </a:ln>
+        </p:spPr>
+      </p:sp>
+      <p:sp>
+        <p:nvSpPr>
+          <p:cNvPr id="5" name="Shape 3"/>
+          <p:cNvSpPr/>
+          <p:nvPr/>
+        </p:nvSpPr>
+        <p:spPr>
+          <a:xfrm>
+            <a:off x="1344168" y="2331720"/>
+            <a:ext cx="512064" cy="512064"/>
+          </a:xfrm>
+          <a:prstGeom prst="ellipse">
+            <a:avLst/>
+          </a:prstGeom>
+          <a:solidFill>
+            <a:srgbClr val="1E2761"/>
+          </a:solidFill>
+          <a:ln/>
+        </p:spPr>
+      </p:sp>
+      <p:sp>
+        <p:nvSpPr>
+          <p:cNvPr id="6" name="Text 4"/>
+          <p:cNvSpPr txBox="1"/>
+          <p:nvPr/>
+        </p:nvSpPr>
+        <p:spPr>
+          <a:xfrm>
+            <a:off x="1344168" y="2331720"/>
+            <a:ext cx="512064" cy="512064"/>
+          </a:xfrm>
+          <a:prstGeom prst="rect">
+            <a:avLst/>
+          </a:prstGeom>
+          <a:noFill/>
+          <a:ln/>
+        </p:spPr>
+        <p:txBody>
+          <a:bodyPr wrap="square" rtlCol="0" anchor="ctr"/>
+          <a:lstStyle/>
+          <a:p>
+            <a:pPr algn="ctr" indent="0" marL="0">
+              <a:buNone/>
+            </a:pPr>
+            <a:r>
+              <a:rPr lang="en-US" sz="1500" b="1" dirty="0">
+                <a:solidFill>
+                  <a:srgbClr val="FFFFFF"/>
+                </a:solidFill>
+                <a:latin typeface="Cambria" pitchFamily="34" charset="0"/>
+                <a:ea typeface="Cambria" pitchFamily="34" charset="-122"/>
+                <a:cs typeface="Cambria" pitchFamily="34" charset="-120"/>
+              </a:rPr>
+              <a:t>1</a:t>
+            </a:r>
+            <a:endParaRPr lang="en-US" sz="1500" dirty="0"/>
+          </a:p>
+        </p:txBody>
+      </p:sp>
+      <p:sp>
+        <p:nvSpPr>
+          <p:cNvPr id="7" name="Text 5"/>
+          <p:cNvSpPr txBox="1"/>
+          <p:nvPr/>
+        </p:nvSpPr>
+        <p:spPr>
+          <a:xfrm>
+            <a:off x="685800" y="2971800"/>
+            <a:ext cx="1828800" cy="365760"/>
+          </a:xfrm>
+          <a:prstGeom prst="rect">
+            <a:avLst/>
+          </a:prstGeom>
+          <a:noFill/>
+          <a:ln/>
+        </p:spPr>
+        <p:txBody>
+          <a:bodyPr wrap="square" lIns="0" tIns="0" rIns="0" bIns="0" rtlCol="0" anchor="ctr"/>
+          <a:lstStyle/>
+          <a:p>
+            <a:pPr algn="ctr" indent="0" marL="0">
+              <a:buNone/>
+            </a:pPr>
+            <a:r>
+              <a:rPr lang="en-US" sz="1400" b="1" dirty="0">
+                <a:solidFill>
+                  <a:srgbClr val="1E2761"/>
+                </a:solidFill>
+                <a:latin typeface="Calibri" pitchFamily="34" charset="0"/>
+                <a:ea typeface="Calibri" pitchFamily="34" charset="-122"/>
+                <a:cs typeface="Calibri" pitchFamily="34" charset="-120"/>
+              </a:rPr>
+              <a:t>Contain</a:t>
+            </a:r>
+            <a:endParaRPr lang="en-US" sz="1400" dirty="0"/>
+          </a:p>
+        </p:txBody>
+      </p:sp>
+      <p:sp>
+        <p:nvSpPr>
+          <p:cNvPr id="8" name="Text 6"/>
+          <p:cNvSpPr txBox="1"/>
+          <p:nvPr/>
+        </p:nvSpPr>
+        <p:spPr>
+          <a:xfrm>
+            <a:off x="685800" y="3364992"/>
+            <a:ext cx="1828800" cy="914400"/>
+          </a:xfrm>
+          <a:prstGeom prst="rect">
+            <a:avLst/>
+          </a:prstGeom>
+          <a:noFill/>
+          <a:ln/>
+        </p:spPr>
+        <p:txBody>
+          <a:bodyPr wrap="square" lIns="0" tIns="0" rIns="0" bIns="0" rtlCol="0" anchor="ctr"/>
+          <a:lstStyle/>
+          <a:p>
+            <a:pPr algn="ctr" indent="0" marL="0">
+              <a:buNone/>
+            </a:pPr>
+            <a:r>
+              <a:rPr lang="en-US" sz="1050" dirty="0">
+                <a:solidFill>
+                  <a:srgbClr val="1A1A1A"/>
+                </a:solidFill>
+                <a:latin typeface="Calibri" pitchFamily="34" charset="0"/>
+                <a:ea typeface="Calibri" pitchFamily="34" charset="-122"/>
+                <a:cs typeface="Calibri" pitchFamily="34" charset="-120"/>
+              </a:rPr>
+              <a:t>Disconnected the compromised server immediately</a:t>
+            </a:r>
+            <a:endParaRPr lang="en-US" sz="1050" dirty="0"/>
+          </a:p>
+        </p:txBody>
+      </p:sp>
+      <p:sp>
+        <p:nvSpPr>
+          <p:cNvPr id="9" name="Text 7"/>
+          <p:cNvSpPr txBox="1"/>
+          <p:nvPr/>
+        </p:nvSpPr>
+        <p:spPr>
+          <a:xfrm>
+            <a:off x="2651760" y="3063240"/>
+            <a:ext cx="182880" cy="365760"/>
+          </a:xfrm>
+          <a:prstGeom prst="rect">
+            <a:avLst/>
+          </a:prstGeom>
+          <a:noFill/>
+          <a:ln/>
+        </p:spPr>
+        <p:txBody>
+          <a:bodyPr wrap="square" lIns="0" tIns="0" rIns="0" bIns="0" rtlCol="0" anchor="ctr"/>
+          <a:lstStyle/>
+          <a:p>
+            <a:pPr algn="ctr" indent="0" marL="0">
+              <a:buNone/>
+            </a:pPr>
+            <a:r>
+              <a:rPr lang="en-US" sz="1600" dirty="0">
+                <a:solidFill>
+                  <a:srgbClr val="6B7280"/>
+                </a:solidFill>
+                <a:latin typeface="Calibri" pitchFamily="34" charset="0"/>
+                <a:ea typeface="Calibri" pitchFamily="34" charset="-122"/>
+                <a:cs typeface="Calibri" pitchFamily="34" charset="-120"/>
+              </a:rPr>
+              <a:t>→</a:t>
+            </a:r>
+            <a:endParaRPr lang="en-US" sz="1600" dirty="0"/>
+          </a:p>
+        </p:txBody>
+      </p:sp>
+      <p:sp>
+        <p:nvSpPr>
+          <p:cNvPr id="10" name="Shape 8"/>
+          <p:cNvSpPr/>
+          <p:nvPr/>
+        </p:nvSpPr>
+        <p:spPr>
+          <a:xfrm>
+            <a:off x="2788920" y="2103120"/>
+            <a:ext cx="2103120" cy="2286000"/>
+          </a:xfrm>
+          <a:prstGeom prst="roundRect">
+            <a:avLst>
+              <a:gd name="adj" fmla="val 4348"/>
+            </a:avLst>
+          </a:prstGeom>
+          <a:solidFill>
+            <a:srgbClr val="FFFFFF"/>
+          </a:solidFill>
+          <a:ln w="19050">
+            <a:solidFill>
+              <a:srgbClr val="3B4A9E"/>
+            </a:solidFill>
+            <a:prstDash val="solid"/>
+          </a:ln>
+        </p:spPr>
+      </p:sp>
+      <p:sp>
+        <p:nvSpPr>
+          <p:cNvPr id="11" name="Shape 9"/>
+          <p:cNvSpPr/>
+          <p:nvPr/>
+        </p:nvSpPr>
+        <p:spPr>
+          <a:xfrm>
+            <a:off x="3584448" y="2331720"/>
+            <a:ext cx="512064" cy="512064"/>
+          </a:xfrm>
+          <a:prstGeom prst="ellipse">
+            <a:avLst/>
+          </a:prstGeom>
+          <a:solidFill>
+            <a:srgbClr val="3B4A9E"/>
+          </a:solidFill>
+          <a:ln/>
+        </p:spPr>
+      </p:sp>
+      <p:sp>
+        <p:nvSpPr>
+          <p:cNvPr id="12" name="Text 10"/>
+          <p:cNvSpPr txBox="1"/>
+          <p:nvPr/>
+        </p:nvSpPr>
+        <p:spPr>
+          <a:xfrm>
+            <a:off x="3584448" y="2331720"/>
+            <a:ext cx="512064" cy="512064"/>
+          </a:xfrm>
+          <a:prstGeom prst="rect">
+            <a:avLst/>
+          </a:prstGeom>
+          <a:noFill/>
+          <a:ln/>
+        </p:spPr>
+        <p:txBody>
+          <a:bodyPr wrap="square" rtlCol="0" anchor="ctr"/>
+          <a:lstStyle/>
+          <a:p>
+            <a:pPr algn="ctr" indent="0" marL="0">
+              <a:buNone/>
+            </a:pPr>
+            <a:r>
+              <a:rPr lang="en-US" sz="1500" b="1" dirty="0">
+                <a:solidFill>
+                  <a:srgbClr val="FFFFFF"/>
+                </a:solidFill>
+                <a:latin typeface="Cambria" pitchFamily="34" charset="0"/>
+                <a:ea typeface="Cambria" pitchFamily="34" charset="-122"/>
+                <a:cs typeface="Cambria" pitchFamily="34" charset="-120"/>
+              </a:rPr>
+              <a:t>2</a:t>
+            </a:r>
+            <a:endParaRPr lang="en-US" sz="1500" dirty="0"/>
+          </a:p>
+        </p:txBody>
+      </p:sp>
+      <p:sp>
+        <p:nvSpPr>
+          <p:cNvPr id="13" name="Text 11"/>
+          <p:cNvSpPr txBox="1"/>
+          <p:nvPr/>
+        </p:nvSpPr>
+        <p:spPr>
+          <a:xfrm>
+            <a:off x="2926080" y="2971800"/>
+            <a:ext cx="1828800" cy="365760"/>
+          </a:xfrm>
+          <a:prstGeom prst="rect">
+            <a:avLst/>
+          </a:prstGeom>
+          <a:noFill/>
+          <a:ln/>
+        </p:spPr>
+        <p:txBody>
+          <a:bodyPr wrap="square" lIns="0" tIns="0" rIns="0" bIns="0" rtlCol="0" anchor="ctr"/>
+          <a:lstStyle/>
+          <a:p>
+            <a:pPr algn="ctr" indent="0" marL="0">
+              <a:buNone/>
+            </a:pPr>
+            <a:r>
+              <a:rPr lang="en-US" sz="1400" b="1" dirty="0">
+                <a:solidFill>
+                  <a:srgbClr val="3B4A9E"/>
+                </a:solidFill>
+                <a:latin typeface="Calibri" pitchFamily="34" charset="0"/>
+                <a:ea typeface="Calibri" pitchFamily="34" charset="-122"/>
+                <a:cs typeface="Calibri" pitchFamily="34" charset="-120"/>
+              </a:rPr>
+              <a:t>Investigate</a:t>
+            </a:r>
+            <a:endParaRPr lang="en-US" sz="1400" dirty="0"/>
+          </a:p>
+        </p:txBody>
+      </p:sp>
+      <p:sp>
+        <p:nvSpPr>
+          <p:cNvPr id="14" name="Text 12"/>
+          <p:cNvSpPr txBox="1"/>
+          <p:nvPr/>
+        </p:nvSpPr>
+        <p:spPr>
+          <a:xfrm>
+            <a:off x="2926080" y="3364992"/>
+            <a:ext cx="1828800" cy="914400"/>
+          </a:xfrm>
+          <a:prstGeom prst="rect">
+            <a:avLst/>
+          </a:prstGeom>
+          <a:noFill/>
+          <a:ln/>
+        </p:spPr>
+        <p:txBody>
+          <a:bodyPr wrap="square" lIns="0" tIns="0" rIns="0" bIns="0" rtlCol="0" anchor="ctr"/>
+          <a:lstStyle/>
+          <a:p>
+            <a:pPr algn="ctr" indent="0" marL="0">
+              <a:buNone/>
+            </a:pPr>
+            <a:r>
+              <a:rPr lang="en-US" sz="1050" dirty="0">
+                <a:solidFill>
+                  <a:srgbClr val="1A1A1A"/>
+                </a:solidFill>
+                <a:latin typeface="Calibri" pitchFamily="34" charset="0"/>
+                <a:ea typeface="Calibri" pitchFamily="34" charset="-122"/>
+                <a:cs typeface="Calibri" pitchFamily="34" charset="-120"/>
+              </a:rPr>
+              <a:t>Cross-functional IR team, forensic investigation</a:t>
+            </a:r>
+            <a:endParaRPr lang="en-US" sz="1050" dirty="0"/>
+          </a:p>
+        </p:txBody>
+      </p:sp>
+      <p:sp>
+        <p:nvSpPr>
+          <p:cNvPr id="15" name="Text 13"/>
+          <p:cNvSpPr txBox="1"/>
+          <p:nvPr/>
+        </p:nvSpPr>
+        <p:spPr>
+          <a:xfrm>
+            <a:off x="4892040" y="3063240"/>
+            <a:ext cx="182880" cy="365760"/>
+          </a:xfrm>
+          <a:prstGeom prst="rect">
+            <a:avLst/>
+          </a:prstGeom>
+          <a:noFill/>
+          <a:ln/>
+        </p:spPr>
+        <p:txBody>
+          <a:bodyPr wrap="square" lIns="0" tIns="0" rIns="0" bIns="0" rtlCol="0" anchor="ctr"/>
+          <a:lstStyle/>
+          <a:p>
+            <a:pPr algn="ctr" indent="0" marL="0">
+              <a:buNone/>
+            </a:pPr>
+            <a:r>
+              <a:rPr lang="en-US" sz="1600" dirty="0">
+                <a:solidFill>
+                  <a:srgbClr val="6B7280"/>
+                </a:solidFill>
+                <a:latin typeface="Calibri" pitchFamily="34" charset="0"/>
+                <a:ea typeface="Calibri" pitchFamily="34" charset="-122"/>
+                <a:cs typeface="Calibri" pitchFamily="34" charset="-120"/>
+              </a:rPr>
+              <a:t>→</a:t>
+            </a:r>
+            <a:endParaRPr lang="en-US" sz="1600" dirty="0"/>
+          </a:p>
+        </p:txBody>
+      </p:sp>
+      <p:sp>
+        <p:nvSpPr>
+          <p:cNvPr id="16" name="Shape 14"/>
+          <p:cNvSpPr/>
+          <p:nvPr/>
+        </p:nvSpPr>
+        <p:spPr>
+          <a:xfrm>
+            <a:off x="5029200" y="2103120"/>
+            <a:ext cx="2103120" cy="2286000"/>
+          </a:xfrm>
+          <a:prstGeom prst="roundRect">
+            <a:avLst>
+              <a:gd name="adj" fmla="val 4348"/>
+            </a:avLst>
+          </a:prstGeom>
+          <a:solidFill>
+            <a:srgbClr val="FFFFFF"/>
+          </a:solidFill>
+          <a:ln w="19050">
+            <a:solidFill>
+              <a:srgbClr val="C9A227"/>
+            </a:solidFill>
+            <a:prstDash val="solid"/>
+          </a:ln>
+        </p:spPr>
+      </p:sp>
+      <p:sp>
+        <p:nvSpPr>
+          <p:cNvPr id="17" name="Shape 15"/>
+          <p:cNvSpPr/>
+          <p:nvPr/>
+        </p:nvSpPr>
+        <p:spPr>
+          <a:xfrm>
+            <a:off x="5824728" y="2331720"/>
+            <a:ext cx="512064" cy="512064"/>
+          </a:xfrm>
+          <a:prstGeom prst="ellipse">
+            <a:avLst/>
+          </a:prstGeom>
+          <a:solidFill>
+            <a:srgbClr val="C9A227"/>
+          </a:solidFill>
+          <a:ln/>
+        </p:spPr>
+      </p:sp>
+      <p:sp>
+        <p:nvSpPr>
+          <p:cNvPr id="18" name="Text 16"/>
+          <p:cNvSpPr txBox="1"/>
+          <p:nvPr/>
+        </p:nvSpPr>
+        <p:spPr>
+          <a:xfrm>
+            <a:off x="5824728" y="2331720"/>
+            <a:ext cx="512064" cy="512064"/>
+          </a:xfrm>
+          <a:prstGeom prst="rect">
+            <a:avLst/>
+          </a:prstGeom>
+          <a:noFill/>
+          <a:ln/>
+        </p:spPr>
+        <p:txBody>
+          <a:bodyPr wrap="square" rtlCol="0" anchor="ctr"/>
+          <a:lstStyle/>
+          <a:p>
+            <a:pPr algn="ctr" indent="0" marL="0">
+              <a:buNone/>
+            </a:pPr>
+            <a:r>
+              <a:rPr lang="en-US" sz="1500" b="1" dirty="0">
+                <a:solidFill>
+                  <a:srgbClr val="FFFFFF"/>
+                </a:solidFill>
+                <a:latin typeface="Cambria" pitchFamily="34" charset="0"/>
+                <a:ea typeface="Cambria" pitchFamily="34" charset="-122"/>
+                <a:cs typeface="Cambria" pitchFamily="34" charset="-120"/>
+              </a:rPr>
+              <a:t>3</a:t>
+            </a:r>
+            <a:endParaRPr lang="en-US" sz="1500" dirty="0"/>
+          </a:p>
+        </p:txBody>
+      </p:sp>
+      <p:sp>
+        <p:nvSpPr>
+          <p:cNvPr id="19" name="Text 17"/>
+          <p:cNvSpPr txBox="1"/>
+          <p:nvPr/>
+        </p:nvSpPr>
+        <p:spPr>
+          <a:xfrm>
+            <a:off x="5166360" y="2971800"/>
+            <a:ext cx="1828800" cy="365760"/>
+          </a:xfrm>
+          <a:prstGeom prst="rect">
+            <a:avLst/>
+          </a:prstGeom>
+          <a:noFill/>
+          <a:ln/>
+        </p:spPr>
+        <p:txBody>
+          <a:bodyPr wrap="square" lIns="0" tIns="0" rIns="0" bIns="0" rtlCol="0" anchor="ctr"/>
+          <a:lstStyle/>
+          <a:p>
+            <a:pPr algn="ctr" indent="0" marL="0">
+              <a:buNone/>
+            </a:pPr>
+            <a:r>
+              <a:rPr lang="en-US" sz="1400" b="1" dirty="0">
+                <a:solidFill>
+                  <a:srgbClr val="C9A227"/>
+                </a:solidFill>
+                <a:latin typeface="Calibri" pitchFamily="34" charset="0"/>
+                <a:ea typeface="Calibri" pitchFamily="34" charset="-122"/>
+                <a:cs typeface="Calibri" pitchFamily="34" charset="-120"/>
+              </a:rPr>
+              <a:t>Notify</a:t>
+            </a:r>
+            <a:endParaRPr lang="en-US" sz="1400" dirty="0"/>
+          </a:p>
+        </p:txBody>
+      </p:sp>
+      <p:sp>
+        <p:nvSpPr>
+          <p:cNvPr id="20" name="Text 18"/>
+          <p:cNvSpPr txBox="1"/>
+          <p:nvPr/>
+        </p:nvSpPr>
+        <p:spPr>
+          <a:xfrm>
+            <a:off x="5166360" y="3364992"/>
+            <a:ext cx="1828800" cy="914400"/>
+          </a:xfrm>
+          <a:prstGeom prst="rect">
+            <a:avLst/>
+          </a:prstGeom>
+          <a:noFill/>
+          <a:ln/>
+        </p:spPr>
+        <p:txBody>
+          <a:bodyPr wrap="square" lIns="0" tIns="0" rIns="0" bIns="0" rtlCol="0" anchor="ctr"/>
+          <a:lstStyle/>
+          <a:p>
+            <a:pPr algn="ctr" indent="0" marL="0">
+              <a:buNone/>
+            </a:pPr>
+            <a:r>
+              <a:rPr lang="en-US" sz="1050" dirty="0">
+                <a:solidFill>
+                  <a:srgbClr val="1A1A1A"/>
+                </a:solidFill>
+                <a:latin typeface="Calibri" pitchFamily="34" charset="0"/>
+                <a:ea typeface="Calibri" pitchFamily="34" charset="-122"/>
+                <a:cs typeface="Calibri" pitchFamily="34" charset="-120"/>
+              </a:rPr>
+              <a:t>Affected clients, including GlobalTech, informed promptly</a:t>
+            </a:r>
+            <a:endParaRPr lang="en-US" sz="1050" dirty="0"/>
+          </a:p>
+        </p:txBody>
+      </p:sp>
+      <p:sp>
+        <p:nvSpPr>
+          <p:cNvPr id="21" name="Text 19"/>
+          <p:cNvSpPr txBox="1"/>
+          <p:nvPr/>
+        </p:nvSpPr>
+        <p:spPr>
+          <a:xfrm>
+            <a:off x="7132320" y="3063240"/>
+            <a:ext cx="182880" cy="365760"/>
+          </a:xfrm>
+          <a:prstGeom prst="rect">
+            <a:avLst/>
+          </a:prstGeom>
+          <a:noFill/>
+          <a:ln/>
+        </p:spPr>
+        <p:txBody>
+          <a:bodyPr wrap="square" lIns="0" tIns="0" rIns="0" bIns="0" rtlCol="0" anchor="ctr"/>
+          <a:lstStyle/>
+          <a:p>
+            <a:pPr algn="ctr" indent="0" marL="0">
+              <a:buNone/>
+            </a:pPr>
+            <a:r>
+              <a:rPr lang="en-US" sz="1600" dirty="0">
+                <a:solidFill>
+                  <a:srgbClr val="6B7280"/>
+                </a:solidFill>
+                <a:latin typeface="Calibri" pitchFamily="34" charset="0"/>
+                <a:ea typeface="Calibri" pitchFamily="34" charset="-122"/>
+                <a:cs typeface="Calibri" pitchFamily="34" charset="-120"/>
+              </a:rPr>
+              <a:t>→</a:t>
+            </a:r>
+            <a:endParaRPr lang="en-US" sz="1600" dirty="0"/>
+          </a:p>
+        </p:txBody>
+      </p:sp>
+      <p:sp>
+        <p:nvSpPr>
+          <p:cNvPr id="22" name="Shape 20"/>
+          <p:cNvSpPr/>
+          <p:nvPr/>
+        </p:nvSpPr>
+        <p:spPr>
+          <a:xfrm>
+            <a:off x="7269480" y="2103120"/>
+            <a:ext cx="2103120" cy="2286000"/>
+          </a:xfrm>
+          <a:prstGeom prst="roundRect">
+            <a:avLst>
+              <a:gd name="adj" fmla="val 4348"/>
+            </a:avLst>
+          </a:prstGeom>
+          <a:solidFill>
+            <a:srgbClr val="FFFFFF"/>
+          </a:solidFill>
+          <a:ln w="19050">
+            <a:solidFill>
+              <a:srgbClr val="2F9E56"/>
+            </a:solidFill>
+            <a:prstDash val="solid"/>
+          </a:ln>
+        </p:spPr>
+      </p:sp>
+      <p:sp>
+        <p:nvSpPr>
+          <p:cNvPr id="23" name="Shape 21"/>
+          <p:cNvSpPr/>
+          <p:nvPr/>
+        </p:nvSpPr>
+        <p:spPr>
+          <a:xfrm>
+            <a:off x="8065008" y="2331720"/>
+            <a:ext cx="512064" cy="512064"/>
+          </a:xfrm>
+          <a:prstGeom prst="ellipse">
+            <a:avLst/>
+          </a:prstGeom>
+          <a:solidFill>
+            <a:srgbClr val="2F9E56"/>
+          </a:solidFill>
+          <a:ln/>
+        </p:spPr>
+      </p:sp>
+      <p:sp>
+        <p:nvSpPr>
+          <p:cNvPr id="24" name="Text 22"/>
+          <p:cNvSpPr txBox="1"/>
+          <p:nvPr/>
+        </p:nvSpPr>
+        <p:spPr>
+          <a:xfrm>
+            <a:off x="8065008" y="2331720"/>
+            <a:ext cx="512064" cy="512064"/>
+          </a:xfrm>
+          <a:prstGeom prst="rect">
+            <a:avLst/>
+          </a:prstGeom>
+          <a:noFill/>
+          <a:ln/>
+        </p:spPr>
+        <p:txBody>
+          <a:bodyPr wrap="square" rtlCol="0" anchor="ctr"/>
+          <a:lstStyle/>
+          <a:p>
+            <a:pPr algn="ctr" indent="0" marL="0">
+              <a:buNone/>
+            </a:pPr>
+            <a:r>
+              <a:rPr lang="en-US" sz="1500" b="1" dirty="0">
+                <a:solidFill>
+                  <a:srgbClr val="FFFFFF"/>
+                </a:solidFill>
+                <a:latin typeface="Cambria" pitchFamily="34" charset="0"/>
+                <a:ea typeface="Cambria" pitchFamily="34" charset="-122"/>
+                <a:cs typeface="Cambria" pitchFamily="34" charset="-120"/>
+              </a:rPr>
+              <a:t>4</a:t>
+            </a:r>
+            <a:endParaRPr lang="en-US" sz="1500" dirty="0"/>
+          </a:p>
+        </p:txBody>
+      </p:sp>
+      <p:sp>
+        <p:nvSpPr>
+          <p:cNvPr id="25" name="Text 23"/>
+          <p:cNvSpPr txBox="1"/>
+          <p:nvPr/>
+        </p:nvSpPr>
+        <p:spPr>
+          <a:xfrm>
+            <a:off x="7406640" y="2971800"/>
+            <a:ext cx="1828800" cy="365760"/>
+          </a:xfrm>
+          <a:prstGeom prst="rect">
+            <a:avLst/>
+          </a:prstGeom>
+          <a:noFill/>
+          <a:ln/>
+        </p:spPr>
+        <p:txBody>
+          <a:bodyPr wrap="square" lIns="0" tIns="0" rIns="0" bIns="0" rtlCol="0" anchor="ctr"/>
+          <a:lstStyle/>
+          <a:p>
+            <a:pPr algn="ctr" indent="0" marL="0">
+              <a:buNone/>
+            </a:pPr>
+            <a:r>
+              <a:rPr lang="en-US" sz="1400" b="1" dirty="0">
+                <a:solidFill>
+                  <a:srgbClr val="2F9E56"/>
+                </a:solidFill>
+                <a:latin typeface="Calibri" pitchFamily="34" charset="0"/>
+                <a:ea typeface="Calibri" pitchFamily="34" charset="-122"/>
+                <a:cs typeface="Calibri" pitchFamily="34" charset="-120"/>
+              </a:rPr>
+              <a:t>Recover</a:t>
+            </a:r>
+            <a:endParaRPr lang="en-US" sz="1400" dirty="0"/>
+          </a:p>
+        </p:txBody>
+      </p:sp>
+      <p:sp>
+        <p:nvSpPr>
+          <p:cNvPr id="26" name="Text 24"/>
+          <p:cNvSpPr txBox="1"/>
+          <p:nvPr/>
+        </p:nvSpPr>
+        <p:spPr>
+          <a:xfrm>
+            <a:off x="7406640" y="3364992"/>
+            <a:ext cx="1828800" cy="914400"/>
+          </a:xfrm>
+          <a:prstGeom prst="rect">
+            <a:avLst/>
+          </a:prstGeom>
+          <a:noFill/>
+          <a:ln/>
+        </p:spPr>
+        <p:txBody>
+          <a:bodyPr wrap="square" lIns="0" tIns="0" rIns="0" bIns="0" rtlCol="0" anchor="ctr"/>
+          <a:lstStyle/>
+          <a:p>
+            <a:pPr algn="ctr" indent="0" marL="0">
+              <a:buNone/>
+            </a:pPr>
+            <a:r>
+              <a:rPr lang="en-US" sz="1050" dirty="0">
+                <a:solidFill>
+                  <a:srgbClr val="1A1A1A"/>
+                </a:solidFill>
+                <a:latin typeface="Calibri" pitchFamily="34" charset="0"/>
+                <a:ea typeface="Calibri" pitchFamily="34" charset="-122"/>
+                <a:cs typeface="Calibri" pitchFamily="34" charset="-120"/>
+              </a:rPr>
+              <a:t>Restored from backup; deployed WAF, dedicated CDE, new AAA+MFA</a:t>
+            </a:r>
+            <a:endParaRPr lang="en-US" sz="1050" dirty="0"/>
+          </a:p>
+        </p:txBody>
+      </p:sp>
+      <p:sp>
+        <p:nvSpPr>
+          <p:cNvPr id="27" name="Text 25"/>
+          <p:cNvSpPr txBox="1"/>
+          <p:nvPr/>
+        </p:nvSpPr>
+        <p:spPr>
+          <a:xfrm>
+            <a:off x="9372600" y="3063240"/>
+            <a:ext cx="182880" cy="365760"/>
+          </a:xfrm>
+          <a:prstGeom prst="rect">
+            <a:avLst/>
+          </a:prstGeom>
+          <a:noFill/>
+          <a:ln/>
+        </p:spPr>
+        <p:txBody>
+          <a:bodyPr wrap="square" lIns="0" tIns="0" rIns="0" bIns="0" rtlCol="0" anchor="ctr"/>
+          <a:lstStyle/>
+          <a:p>
+            <a:pPr algn="ctr" indent="0" marL="0">
+              <a:buNone/>
+            </a:pPr>
+            <a:r>
+              <a:rPr lang="en-US" sz="1600" dirty="0">
+                <a:solidFill>
+                  <a:srgbClr val="6B7280"/>
+                </a:solidFill>
+                <a:latin typeface="Calibri" pitchFamily="34" charset="0"/>
+                <a:ea typeface="Calibri" pitchFamily="34" charset="-122"/>
+                <a:cs typeface="Calibri" pitchFamily="34" charset="-120"/>
+              </a:rPr>
+              <a:t>→</a:t>
+            </a:r>
+            <a:endParaRPr lang="en-US" sz="1600" dirty="0"/>
+          </a:p>
+        </p:txBody>
+      </p:sp>
+      <p:sp>
+        <p:nvSpPr>
+          <p:cNvPr id="28" name="Shape 26"/>
+          <p:cNvSpPr/>
+          <p:nvPr/>
+        </p:nvSpPr>
+        <p:spPr>
+          <a:xfrm>
+            <a:off x="9509760" y="2103120"/>
+            <a:ext cx="2103120" cy="2286000"/>
+          </a:xfrm>
+          <a:prstGeom prst="roundRect">
+            <a:avLst>
+              <a:gd name="adj" fmla="val 4348"/>
+            </a:avLst>
+          </a:prstGeom>
+          <a:solidFill>
+            <a:srgbClr val="FFFFFF"/>
+          </a:solidFill>
+          <a:ln w="19050">
+            <a:solidFill>
+              <a:srgbClr val="C94F4F"/>
+            </a:solidFill>
+            <a:prstDash val="solid"/>
+          </a:ln>
+        </p:spPr>
+      </p:sp>
+      <p:sp>
+        <p:nvSpPr>
+          <p:cNvPr id="29" name="Shape 27"/>
+          <p:cNvSpPr/>
+          <p:nvPr/>
+        </p:nvSpPr>
+        <p:spPr>
+          <a:xfrm>
+            <a:off x="10305288" y="2331720"/>
+            <a:ext cx="512064" cy="512064"/>
+          </a:xfrm>
+          <a:prstGeom prst="ellipse">
+            <a:avLst/>
+          </a:prstGeom>
+          <a:solidFill>
+            <a:srgbClr val="C94F4F"/>
+          </a:solidFill>
+          <a:ln/>
+        </p:spPr>
+      </p:sp>
+      <p:sp>
+        <p:nvSpPr>
+          <p:cNvPr id="30" name="Text 28"/>
+          <p:cNvSpPr txBox="1"/>
+          <p:nvPr/>
+        </p:nvSpPr>
+        <p:spPr>
+          <a:xfrm>
+            <a:off x="10305288" y="2331720"/>
+            <a:ext cx="512064" cy="512064"/>
+          </a:xfrm>
+          <a:prstGeom prst="rect">
+            <a:avLst/>
+          </a:prstGeom>
+          <a:noFill/>
+          <a:ln/>
+        </p:spPr>
+        <p:txBody>
+          <a:bodyPr wrap="square" rtlCol="0" anchor="ctr"/>
+          <a:lstStyle/>
+          <a:p>
+            <a:pPr algn="ctr" indent="0" marL="0">
+              <a:buNone/>
+            </a:pPr>
+            <a:r>
+              <a:rPr lang="en-US" sz="1500" b="1" dirty="0">
+                <a:solidFill>
+                  <a:srgbClr val="FFFFFF"/>
+                </a:solidFill>
+                <a:latin typeface="Cambria" pitchFamily="34" charset="0"/>
+                <a:ea typeface="Cambria" pitchFamily="34" charset="-122"/>
+                <a:cs typeface="Cambria" pitchFamily="34" charset="-120"/>
+              </a:rPr>
+              <a:t>5</a:t>
+            </a:r>
+            <a:endParaRPr lang="en-US" sz="1500" dirty="0"/>
+          </a:p>
+        </p:txBody>
+      </p:sp>
+      <p:sp>
+        <p:nvSpPr>
+          <p:cNvPr id="31" name="Text 29"/>
+          <p:cNvSpPr txBox="1"/>
+          <p:nvPr/>
+        </p:nvSpPr>
+        <p:spPr>
+          <a:xfrm>
+            <a:off x="9646920" y="2971800"/>
+            <a:ext cx="1828800" cy="365760"/>
+          </a:xfrm>
+          <a:prstGeom prst="rect">
+            <a:avLst/>
+          </a:prstGeom>
+          <a:noFill/>
+          <a:ln/>
+        </p:spPr>
+        <p:txBody>
+          <a:bodyPr wrap="square" lIns="0" tIns="0" rIns="0" bIns="0" rtlCol="0" anchor="ctr"/>
+          <a:lstStyle/>
+          <a:p>
+            <a:pPr algn="ctr" indent="0" marL="0">
+              <a:buNone/>
+            </a:pPr>
+            <a:r>
+              <a:rPr lang="en-US" sz="1400" b="1" dirty="0">
+                <a:solidFill>
+                  <a:srgbClr val="C94F4F"/>
+                </a:solidFill>
+                <a:latin typeface="Calibri" pitchFamily="34" charset="0"/>
+                <a:ea typeface="Calibri" pitchFamily="34" charset="-122"/>
+                <a:cs typeface="Calibri" pitchFamily="34" charset="-120"/>
+              </a:rPr>
+              <a:t>Review</a:t>
+            </a:r>
+            <a:endParaRPr lang="en-US" sz="1400" dirty="0"/>
+          </a:p>
+        </p:txBody>
+      </p:sp>
+      <p:sp>
+        <p:nvSpPr>
+          <p:cNvPr id="32" name="Text 30"/>
+          <p:cNvSpPr txBox="1"/>
+          <p:nvPr/>
+        </p:nvSpPr>
+        <p:spPr>
+          <a:xfrm>
+            <a:off x="9646920" y="3364992"/>
+            <a:ext cx="1828800" cy="914400"/>
+          </a:xfrm>
+          <a:prstGeom prst="rect">
+            <a:avLst/>
+          </a:prstGeom>
+          <a:noFill/>
+          <a:ln/>
+        </p:spPr>
+        <p:txBody>
+          <a:bodyPr wrap="square" lIns="0" tIns="0" rIns="0" bIns="0" rtlCol="0" anchor="ctr"/>
+          <a:lstStyle/>
+          <a:p>
+            <a:pPr algn="ctr" indent="0" marL="0">
+              <a:buNone/>
+            </a:pPr>
+            <a:r>
+              <a:rPr lang="en-US" sz="1050" dirty="0">
+                <a:solidFill>
+                  <a:srgbClr val="1A1A1A"/>
+                </a:solidFill>
+                <a:latin typeface="Calibri" pitchFamily="34" charset="0"/>
+                <a:ea typeface="Calibri" pitchFamily="34" charset="-122"/>
+                <a:cs typeface="Calibri" pitchFamily="34" charset="-120"/>
+              </a:rPr>
+              <a:t>Independent third-party compliance audit</a:t>
+            </a:r>
+            <a:endParaRPr lang="en-US" sz="1050" dirty="0"/>
+          </a:p>
+        </p:txBody>
+      </p:sp>
+      <p:sp>
+        <p:nvSpPr>
+          <p:cNvPr id="33" name="Text 31"/>
+          <p:cNvSpPr txBox="1"/>
+          <p:nvPr/>
+        </p:nvSpPr>
+        <p:spPr>
+          <a:xfrm>
+            <a:off x="548640" y="4709160"/>
+            <a:ext cx="11109960" cy="822960"/>
+          </a:xfrm>
+          <a:prstGeom prst="rect">
+            <a:avLst/>
+          </a:prstGeom>
+          <a:noFill/>
+          <a:ln/>
+        </p:spPr>
+        <p:txBody>
+          <a:bodyPr wrap="square" rtlCol="0" anchor="ctr"/>
+          <a:lstStyle/>
+          <a:p>
+            <a:pPr indent="0" marL="0">
+              <a:buNone/>
+            </a:pPr>
+            <a:r>
+              <a:rPr lang="en-US" sz="1250" i="1" dirty="0">
+                <a:solidFill>
+                  <a:srgbClr val="1E2761"/>
+                </a:solidFill>
+                <a:latin typeface="Calibri" pitchFamily="34" charset="0"/>
+                <a:ea typeface="Calibri" pitchFamily="34" charset="-122"/>
+                <a:cs typeface="Calibri" pitchFamily="34" charset="-120"/>
+              </a:rPr>
+              <a:t>Lessons learned: stronger vulnerability management, a documented IR plan, retuned SIEM alerting, and specialized IT training on distinguishing false positives from real incidents.</a:t>
+            </a:r>
+            <a:endParaRPr lang="en-US" sz="1250" dirty="0"/>
+          </a:p>
+        </p:txBody>
+      </p:sp>
+      <p:sp>
+        <p:nvSpPr>
+          <p:cNvPr id="34" name="Text 32"/>
+          <p:cNvSpPr txBox="1"/>
+          <p:nvPr/>
+        </p:nvSpPr>
+        <p:spPr>
+          <a:xfrm>
+            <a:off x="457200" y="6473952"/>
+            <a:ext cx="7315200" cy="274320"/>
+          </a:xfrm>
+          <a:prstGeom prst="rect">
+            <a:avLst/>
+          </a:prstGeom>
+          <a:noFill/>
+          <a:ln/>
+        </p:spPr>
+        <p:txBody>
+          <a:bodyPr wrap="square" rtlCol="0" anchor="ctr"/>
+          <a:lstStyle/>
+          <a:p>
+            <a:pPr indent="0" marL="0">
+              <a:buNone/>
+            </a:pPr>
+            <a:r>
+              <a:rPr lang="en-US" sz="900" dirty="0">
+                <a:solidFill>
+                  <a:srgbClr val="6B7280"/>
+                </a:solidFill>
+                <a:latin typeface="Calibri" pitchFamily="34" charset="0"/>
+                <a:ea typeface="Calibri" pitchFamily="34" charset="-122"/>
+                <a:cs typeface="Calibri" pitchFamily="34" charset="-120"/>
+              </a:rPr>
+              <a:t>FinSecure Technologies Inc. — Network Security Capstone</a:t>
+            </a:r>
+            <a:endParaRPr lang="en-US" sz="900" dirty="0"/>
+          </a:p>
+        </p:txBody>
+      </p:sp>
+      <p:sp>
+        <p:nvSpPr>
+          <p:cNvPr id="35" name="Text 33"/>
+          <p:cNvSpPr txBox="1"/>
+          <p:nvPr/>
+        </p:nvSpPr>
+        <p:spPr>
+          <a:xfrm>
+            <a:off x="11274552" y="6473952"/>
+            <a:ext cx="457200" cy="274320"/>
+          </a:xfrm>
+          <a:prstGeom prst="rect">
+            <a:avLst/>
+          </a:prstGeom>
+          <a:noFill/>
+          <a:ln/>
+        </p:spPr>
+        <p:txBody>
+          <a:bodyPr wrap="square" rtlCol="0" anchor="ctr"/>
+          <a:lstStyle/>
+          <a:p>
+            <a:pPr algn="r" indent="0" marL="0">
+              <a:buNone/>
+            </a:pPr>
+            <a:r>
+              <a:rPr lang="en-US" sz="900" dirty="0">
+                <a:solidFill>
+                  <a:srgbClr val="6B7280"/>
+                </a:solidFill>
+                <a:latin typeface="Calibri" pitchFamily="34" charset="0"/>
+                <a:ea typeface="Calibri" pitchFamily="34" charset="-122"/>
+                <a:cs typeface="Calibri" pitchFamily="34" charset="-120"/>
+              </a:rPr>
+              <a:t>15</a:t>
+            </a:r>
+            <a:endParaRPr lang="en-US" sz="900" dirty="0"/>
+          </a:p>
+        </p:txBody>
+      </p:sp>
+    </p:spTree>
+  </p:cSld>
+  <p:clrMapOvr>
+    <a:masterClrMapping/>
+  </p:clrMapOvr>
+</p:sld>
+</file>
+
+<file path=ppt/slides/slide17.xml><?xml version="1.0" encoding="utf-8"?>
+<p:sld xmlns:a="http://schemas.openxmlformats.org/drawingml/2006/main" xmlns:r="http://schemas.openxmlformats.org/officeDocument/2006/relationships" xmlns:p="http://schemas.openxmlformats.org/presentationml/2006/main">
+  <p:cSld name="Slide 17">
+    <p:spTree>
+      <p:nvGrpSpPr>
+        <p:cNvPr id="1" name=""/>
+        <p:cNvGrpSpPr/>
+        <p:nvPr/>
+      </p:nvGrpSpPr>
+      <p:grpSpPr>
+        <a:xfrm>
+          <a:off x="0" y="0"/>
+          <a:ext cx="0" cy="0"/>
+          <a:chOff x="0" y="0"/>
+          <a:chExt cx="0" cy="0"/>
+        </a:xfrm>
+      </p:grpSpPr>
+      <p:sp>
+        <p:nvSpPr>
+          <p:cNvPr id="2" name="Text 0"/>
+          <p:cNvSpPr txBox="1"/>
+          <p:nvPr/>
+        </p:nvSpPr>
+        <p:spPr>
+          <a:xfrm>
+            <a:off x="548640" y="365760"/>
+            <a:ext cx="7315200" cy="320040"/>
+          </a:xfrm>
+          <a:prstGeom prst="rect">
+            <a:avLst/>
+          </a:prstGeom>
+          <a:noFill/>
+          <a:ln/>
+        </p:spPr>
+        <p:txBody>
+          <a:bodyPr wrap="square" rtlCol="0" anchor="ctr"/>
+          <a:lstStyle/>
+          <a:p>
+            <a:pPr indent="0" marL="0">
+              <a:buNone/>
+            </a:pPr>
+            <a:r>
+              <a:rPr lang="en-US" sz="1200" b="1" spc="200" kern="0" dirty="0">
+                <a:solidFill>
+                  <a:srgbClr val="1E2761"/>
+                </a:solidFill>
+                <a:latin typeface="Calibri" pitchFamily="34" charset="0"/>
+                <a:ea typeface="Calibri" pitchFamily="34" charset="-122"/>
+                <a:cs typeface="Calibri" pitchFamily="34" charset="-120"/>
+              </a:rPr>
               <a:t>RESULTS</a:t>
             </a:r>
             <a:endParaRPr lang="en-US" sz="1200" dirty="0"/>
@@ -8326,7 +8936,7 @@
                 <a:ea typeface="Calibri" pitchFamily="34" charset="-122"/>
                 <a:cs typeface="Calibri" pitchFamily="34" charset="-120"/>
               </a:rPr>
-              <a:t>15</a:t>
+              <a:t>16</a:t>
             </a:r>
             <a:endParaRPr lang="en-US" sz="900" dirty="0"/>
           </a:p>
@@ -8340,9 +8950,9 @@
 </p:sld>
 </file>
 
-<file path=ppt/slides/slide17.xml><?xml version="1.0" encoding="utf-8"?>
+<file path=ppt/slides/slide18.xml><?xml version="1.0" encoding="utf-8"?>
 <p:sld xmlns:a="http://schemas.openxmlformats.org/drawingml/2006/main" xmlns:r="http://schemas.openxmlformats.org/officeDocument/2006/relationships" xmlns:p="http://schemas.openxmlformats.org/presentationml/2006/main">
-  <p:cSld name="Slide 17">
+  <p:cSld name="Slide 18">
     <p:bg>
       <p:bgPr>
         <a:solidFill>
@@ -12781,7 +13391,7 @@
       </p:sp>
       <p:pic>
         <p:nvPicPr>
-          <p:cNvPr id="4" name="Image 0" descr="C:\Users\rareb\OneDrive\Desktop\University Of Winnipeg\Case Studies Issues &amp; Capstone Project V. Balogun NSD Fall 2023\finsecure-network-security-capstone\evidence\pentest\nmap-scan-production.jpg">    </p:cNvPr>
+          <p:cNvPr id="4" name="Image 0" descr="C:\Users\rareb\OneDrive\Desktop\University Of Winnipeg\Case Studies Issues &amp; Capstone Project V. Balogun NSD Fall 2023\finsecure-network-security-capstone\evidence\pentest\finswebapp-login.jpg">    </p:cNvPr>
           <p:cNvPicPr>
             <a:picLocks noChangeAspect="1"/>
           </p:cNvPicPr>
@@ -12795,8 +13405,8 @@
         </p:blipFill>
         <p:spPr>
           <a:xfrm>
-            <a:off x="548640" y="2240280"/>
-            <a:ext cx="5440680" cy="2876215"/>
+            <a:off x="548640" y="2331720"/>
+            <a:ext cx="3520440" cy="1857240"/>
           </a:xfrm>
           <a:prstGeom prst="rect">
             <a:avLst/>
@@ -12811,8 +13421,8 @@
         </p:nvSpPr>
         <p:spPr>
           <a:xfrm>
-            <a:off x="548640" y="2240280"/>
-            <a:ext cx="5440680" cy="2876215"/>
+            <a:off x="548640" y="2331720"/>
+            <a:ext cx="3520440" cy="1857240"/>
           </a:xfrm>
           <a:prstGeom prst="roundRect">
             <a:avLst/>
@@ -12833,8 +13443,8 @@
         </p:nvSpPr>
         <p:spPr>
           <a:xfrm>
-            <a:off x="548640" y="5207935"/>
-            <a:ext cx="5440680" cy="502920"/>
+            <a:off x="548640" y="4298688"/>
+            <a:ext cx="3520440" cy="685800"/>
           </a:xfrm>
           <a:prstGeom prst="rect">
             <a:avLst/>
@@ -12850,7 +13460,7 @@
               <a:buNone/>
             </a:pPr>
             <a:r>
-              <a:rPr lang="en-US" sz="1100" i="1" dirty="0">
+              <a:rPr lang="en-US" sz="1050" i="1" dirty="0">
                 <a:solidFill>
                   <a:srgbClr val="6B7280"/>
                 </a:solidFill>
@@ -12858,15 +13468,15 @@
                 <a:ea typeface="Calibri" pitchFamily="34" charset="-122"/>
                 <a:cs typeface="Calibri" pitchFamily="34" charset="-120"/>
               </a:rPr>
-              <a:t>Nmap scan of the live, Azure-hosted FinSWebApp — only ports 80/443 exposed, valid TLS cert.</a:t>
-            </a:r>
-            <a:endParaRPr lang="en-US" sz="1100" dirty="0"/>
+              <a:t>The actual FinSWebApp login page — the application under test.</a:t>
+            </a:r>
+            <a:endParaRPr lang="en-US" sz="1050" dirty="0"/>
           </a:p>
         </p:txBody>
       </p:sp>
       <p:pic>
         <p:nvPicPr>
-          <p:cNvPr id="7" name="Image 1" descr="C:\Users\rareb\OneDrive\Desktop\University Of Winnipeg\Case Studies Issues &amp; Capstone Project V. Balogun NSD Fall 2023\finsecure-network-security-capstone\evidence\pentest\zap-vulnerability-scan.jpg">    </p:cNvPr>
+          <p:cNvPr id="7" name="Image 1" descr="C:\Users\rareb\OneDrive\Desktop\University Of Winnipeg\Case Studies Issues &amp; Capstone Project V. Balogun NSD Fall 2023\finsecure-network-security-capstone\evidence\pentest\nmap-scan-production.jpg">    </p:cNvPr>
           <p:cNvPicPr>
             <a:picLocks noChangeAspect="1"/>
           </p:cNvPicPr>
@@ -12880,8 +13490,8 @@
         </p:blipFill>
         <p:spPr>
           <a:xfrm>
-            <a:off x="6217920" y="2240280"/>
-            <a:ext cx="5440680" cy="2870280"/>
+            <a:off x="4297680" y="2331720"/>
+            <a:ext cx="3520440" cy="1861080"/>
           </a:xfrm>
           <a:prstGeom prst="rect">
             <a:avLst/>
@@ -12896,8 +13506,8 @@
         </p:nvSpPr>
         <p:spPr>
           <a:xfrm>
-            <a:off x="6217920" y="2240280"/>
-            <a:ext cx="5440680" cy="2870280"/>
+            <a:off x="4297680" y="2331720"/>
+            <a:ext cx="3520440" cy="1861080"/>
           </a:xfrm>
           <a:prstGeom prst="roundRect">
             <a:avLst/>
@@ -12918,8 +13528,8 @@
         </p:nvSpPr>
         <p:spPr>
           <a:xfrm>
-            <a:off x="6217920" y="5202000"/>
-            <a:ext cx="5440680" cy="502920"/>
+            <a:off x="4297680" y="4302528"/>
+            <a:ext cx="3520440" cy="685800"/>
           </a:xfrm>
           <a:prstGeom prst="rect">
             <a:avLst/>
@@ -12935,7 +13545,7 @@
               <a:buNone/>
             </a:pPr>
             <a:r>
-              <a:rPr lang="en-US" sz="1100" i="1" dirty="0">
+              <a:rPr lang="en-US" sz="1050" i="1" dirty="0">
                 <a:solidFill>
                   <a:srgbClr val="6B7280"/>
                 </a:solidFill>
@@ -12943,15 +13553,100 @@
                 <a:ea typeface="Calibri" pitchFamily="34" charset="-122"/>
                 <a:cs typeface="Calibri" pitchFamily="34" charset="-120"/>
               </a:rPr>
-              <a:t>OWASP ZAP scan of the same target — 12 alerts, including a missing CSP header and a vulnerable JS library.</a:t>
-            </a:r>
-            <a:endParaRPr lang="en-US" sz="1100" dirty="0"/>
-          </a:p>
-        </p:txBody>
-      </p:sp>
-      <p:sp>
-        <p:nvSpPr>
-          <p:cNvPr id="10" name="Text 6"/>
+              <a:t>Nmap: only ports 80/443 exposed externally, with a valid TLS cert.</a:t>
+            </a:r>
+            <a:endParaRPr lang="en-US" sz="1050" dirty="0"/>
+          </a:p>
+        </p:txBody>
+      </p:sp>
+      <p:pic>
+        <p:nvPicPr>
+          <p:cNvPr id="10" name="Image 2" descr="C:\Users\rareb\OneDrive\Desktop\University Of Winnipeg\Case Studies Issues &amp; Capstone Project V. Balogun NSD Fall 2023\finsecure-network-security-capstone\evidence\pentest\zap-vulnerability-scan.jpg">    </p:cNvPr>
+          <p:cNvPicPr>
+            <a:picLocks noChangeAspect="1"/>
+          </p:cNvPicPr>
+          <p:nvPr/>
+        </p:nvPicPr>
+        <p:blipFill>
+          <a:blip r:embed="rId3"/>
+          <a:stretch>
+            <a:fillRect/>
+          </a:stretch>
+        </p:blipFill>
+        <p:spPr>
+          <a:xfrm>
+            <a:off x="8046720" y="2331720"/>
+            <a:ext cx="3520440" cy="1857240"/>
+          </a:xfrm>
+          <a:prstGeom prst="rect">
+            <a:avLst/>
+          </a:prstGeom>
+        </p:spPr>
+      </p:pic>
+      <p:sp>
+        <p:nvSpPr>
+          <p:cNvPr id="11" name="Shape 6"/>
+          <p:cNvSpPr/>
+          <p:nvPr/>
+        </p:nvSpPr>
+        <p:spPr>
+          <a:xfrm>
+            <a:off x="8046720" y="2331720"/>
+            <a:ext cx="3520440" cy="1857240"/>
+          </a:xfrm>
+          <a:prstGeom prst="roundRect">
+            <a:avLst/>
+          </a:prstGeom>
+          <a:ln w="19050">
+            <a:solidFill>
+              <a:srgbClr val="CADCFC"/>
+            </a:solidFill>
+            <a:prstDash val="solid"/>
+          </a:ln>
+        </p:spPr>
+      </p:sp>
+      <p:sp>
+        <p:nvSpPr>
+          <p:cNvPr id="12" name="Text 7"/>
+          <p:cNvSpPr txBox="1"/>
+          <p:nvPr/>
+        </p:nvSpPr>
+        <p:spPr>
+          <a:xfrm>
+            <a:off x="8046720" y="4298688"/>
+            <a:ext cx="3520440" cy="685800"/>
+          </a:xfrm>
+          <a:prstGeom prst="rect">
+            <a:avLst/>
+          </a:prstGeom>
+          <a:noFill/>
+          <a:ln/>
+        </p:spPr>
+        <p:txBody>
+          <a:bodyPr wrap="square" rtlCol="0" anchor="ctr"/>
+          <a:lstStyle/>
+          <a:p>
+            <a:pPr indent="0" marL="0">
+              <a:buNone/>
+            </a:pPr>
+            <a:r>
+              <a:rPr lang="en-US" sz="1050" i="1" dirty="0">
+                <a:solidFill>
+                  <a:srgbClr val="6B7280"/>
+                </a:solidFill>
+                <a:latin typeface="Calibri" pitchFamily="34" charset="0"/>
+                <a:ea typeface="Calibri" pitchFamily="34" charset="-122"/>
+                <a:cs typeface="Calibri" pitchFamily="34" charset="-120"/>
+              </a:rPr>
+              <a:t>OWASP ZAP: 12 alerts, including a missing CSP header.</a:t>
+            </a:r>
+            <a:endParaRPr lang="en-US" sz="1050" dirty="0"/>
+          </a:p>
+        </p:txBody>
+      </p:sp>
+      <p:sp>
+        <p:nvSpPr>
+          <p:cNvPr id="13" name="Text 8"/>
           <p:cNvSpPr txBox="1"/>
           <p:nvPr/>
         </p:nvSpPr>
@@ -12990,7 +13685,7 @@
       </p:sp>
       <p:sp>
         <p:nvSpPr>
-          <p:cNvPr id="11" name="Text 7"/>
+          <p:cNvPr id="14" name="Text 9"/>
           <p:cNvSpPr txBox="1"/>
           <p:nvPr/>
         </p:nvSpPr>
